--- a/Payments-Processing-Presentation.pptx
+++ b/Payments-Processing-Presentation.pptx
@@ -1,28 +1,31 @@
 
 <file path=ppt/presentation.xml><?xml version="1.0" encoding="utf-8"?>
-<p:presentation xmlns:a="http://schemas.openxmlformats.org/drawingml/2006/main" xmlns:r="http://schemas.openxmlformats.org/officeDocument/2006/relationships" xmlns:p="http://schemas.openxmlformats.org/presentationml/2006/main" saveSubsetFonts="1" autoCompressPictures="0">
+<p:presentation xmlns:a="http://schemas.openxmlformats.org/drawingml/2006/main" xmlns:r="http://schemas.openxmlformats.org/officeDocument/2006/relationships" xmlns:p="http://schemas.openxmlformats.org/presentationml/2006/main" autoCompressPictures="0">
   <p:sldMasterIdLst>
     <p:sldMasterId id="2147483648" r:id="rId1"/>
   </p:sldMasterIdLst>
+  <p:notesMasterIdLst>
+    <p:notesMasterId r:id="rId4"/>
+  </p:notesMasterIdLst>
   <p:sldIdLst>
-    <p:sldId id="256" r:id="rId7"/>
-    <p:sldId id="257" r:id="rId8"/>
-    <p:sldId id="258" r:id="rId9"/>
-    <p:sldId id="259" r:id="rId10"/>
-    <p:sldId id="260" r:id="rId11"/>
-    <p:sldId id="261" r:id="rId12"/>
-    <p:sldId id="262" r:id="rId13"/>
-    <p:sldId id="263" r:id="rId14"/>
-    <p:sldId id="264" r:id="rId15"/>
-    <p:sldId id="265" r:id="rId16"/>
-    <p:sldId id="266" r:id="rId17"/>
-    <p:sldId id="267" r:id="rId18"/>
-    <p:sldId id="268" r:id="rId19"/>
-    <p:sldId id="269" r:id="rId20"/>
-    <p:sldId id="270" r:id="rId21"/>
-    <p:sldId id="271" r:id="rId22"/>
+    <p:sldId id="256" r:id="rId3"/>
+    <p:sldId id="257" r:id="rId5"/>
+    <p:sldId id="258" r:id="rId6"/>
+    <p:sldId id="259" r:id="rId7"/>
+    <p:sldId id="260" r:id="rId8"/>
+    <p:sldId id="261" r:id="rId9"/>
+    <p:sldId id="277" r:id="rId10"/>
+    <p:sldId id="262" r:id="rId11"/>
+    <p:sldId id="275" r:id="rId12"/>
+    <p:sldId id="276" r:id="rId13"/>
+    <p:sldId id="278" r:id="rId14"/>
+    <p:sldId id="263" r:id="rId15"/>
+    <p:sldId id="274" r:id="rId16"/>
+    <p:sldId id="268" r:id="rId17"/>
+    <p:sldId id="270" r:id="rId18"/>
+    <p:sldId id="271" r:id="rId19"/>
   </p:sldIdLst>
-  <p:sldSz cx="12191695" cy="6858000" type="screen4x3"/>
+  <p:sldSz cx="12191365" cy="6858000" type="screen4x3"/>
   <p:notesSz cx="6858000" cy="9144000"/>
   <p:defaultTextStyle>
     <a:defPPr>
@@ -119,7 +122,1174 @@
       </a:defRPr>
     </a:lvl9pPr>
   </p:defaultTextStyle>
+  <p:extLst>
+    <p:ext uri="{EFAFB233-063F-42B5-8137-9DF3F51BA10A}">
+      <p15:sldGuideLst xmlns:p15="http://schemas.microsoft.com/office/powerpoint/2012/main">
+        <p15:guide id="1" orient="horz" pos="2160" userDrawn="1">
+          <p15:clr>
+            <a:srgbClr val="A4A3A4"/>
+          </p15:clr>
+        </p15:guide>
+        <p15:guide id="2" pos="2880" userDrawn="1">
+          <p15:clr>
+            <a:srgbClr val="A4A3A4"/>
+          </p15:clr>
+        </p15:guide>
+      </p15:sldGuideLst>
+    </p:ext>
+  </p:extLst>
 </p:presentation>
+</file>
+
+<file path=ppt/notesMasters/notesMaster1.xml><?xml version="1.0" encoding="utf-8"?>
+<p:notesMaster xmlns:a="http://schemas.openxmlformats.org/drawingml/2006/main" xmlns:r="http://schemas.openxmlformats.org/officeDocument/2006/relationships" xmlns:p="http://schemas.openxmlformats.org/presentationml/2006/main">
+  <p:cSld>
+    <p:bg>
+      <p:bgRef idx="1001">
+        <a:schemeClr val="bg1"/>
+      </p:bgRef>
+    </p:bg>
+    <p:spTree>
+      <p:nvGrpSpPr>
+        <p:cNvPr id="1" name=""/>
+        <p:cNvGrpSpPr/>
+        <p:nvPr/>
+      </p:nvGrpSpPr>
+      <p:grpSpPr>
+        <a:xfrm>
+          <a:off x="0" y="0"/>
+          <a:ext cx="0" cy="0"/>
+          <a:chOff x="0" y="0"/>
+          <a:chExt cx="0" cy="0"/>
+        </a:xfrm>
+      </p:grpSpPr>
+      <p:sp>
+        <p:nvSpPr>
+          <p:cNvPr id="2" name="页眉占位符 1"/>
+          <p:cNvSpPr>
+            <a:spLocks noGrp="1"/>
+          </p:cNvSpPr>
+          <p:nvPr>
+            <p:ph type="hdr" sz="quarter"/>
+          </p:nvPr>
+        </p:nvSpPr>
+        <p:spPr>
+          <a:xfrm>
+            <a:off x="0" y="0"/>
+            <a:ext cx="2971800" cy="458788"/>
+          </a:xfrm>
+          <a:prstGeom prst="rect">
+            <a:avLst/>
+          </a:prstGeom>
+        </p:spPr>
+        <p:txBody>
+          <a:bodyPr vert="horz" lIns="91440" tIns="45720" rIns="91440" bIns="45720" rtlCol="0"/>
+          <a:lstStyle>
+            <a:lvl1pPr algn="l">
+              <a:defRPr sz="1200"/>
+            </a:lvl1pPr>
+          </a:lstStyle>
+          <a:p>
+            <a:endParaRPr lang="zh-CN" altLang="en-US"/>
+          </a:p>
+        </p:txBody>
+      </p:sp>
+      <p:sp>
+        <p:nvSpPr>
+          <p:cNvPr id="3" name="日期占位符 2"/>
+          <p:cNvSpPr>
+            <a:spLocks noGrp="1"/>
+          </p:cNvSpPr>
+          <p:nvPr>
+            <p:ph type="dt" idx="1"/>
+          </p:nvPr>
+        </p:nvSpPr>
+        <p:spPr>
+          <a:xfrm>
+            <a:off x="3884613" y="0"/>
+            <a:ext cx="2971800" cy="458788"/>
+          </a:xfrm>
+          <a:prstGeom prst="rect">
+            <a:avLst/>
+          </a:prstGeom>
+        </p:spPr>
+        <p:txBody>
+          <a:bodyPr vert="horz" lIns="91440" tIns="45720" rIns="91440" bIns="45720" rtlCol="0"/>
+          <a:lstStyle>
+            <a:lvl1pPr algn="r">
+              <a:defRPr sz="1200"/>
+            </a:lvl1pPr>
+          </a:lstStyle>
+          <a:p>
+            <a:fld id="{D2A48B96-639E-45A3-A0BA-2464DFDB1FAA}" type="datetimeFigureOut">
+              <a:rPr lang="zh-CN" altLang="en-US" smtClean="0"/>
+            </a:fld>
+            <a:endParaRPr lang="zh-CN" altLang="en-US"/>
+          </a:p>
+        </p:txBody>
+      </p:sp>
+      <p:sp>
+        <p:nvSpPr>
+          <p:cNvPr id="4" name="幻灯片图像占位符 3"/>
+          <p:cNvSpPr>
+            <a:spLocks noGrp="1" noRot="1" noChangeAspect="1"/>
+          </p:cNvSpPr>
+          <p:nvPr>
+            <p:ph type="sldImg" idx="2"/>
+          </p:nvPr>
+        </p:nvSpPr>
+        <p:spPr>
+          <a:xfrm>
+            <a:off x="685943" y="1143000"/>
+            <a:ext cx="5486114" cy="3086100"/>
+          </a:xfrm>
+          <a:prstGeom prst="rect">
+            <a:avLst/>
+          </a:prstGeom>
+          <a:noFill/>
+          <a:ln w="12700">
+            <a:solidFill>
+              <a:prstClr val="black"/>
+            </a:solidFill>
+          </a:ln>
+        </p:spPr>
+        <p:txBody>
+          <a:bodyPr vert="horz" lIns="91440" tIns="45720" rIns="91440" bIns="45720" rtlCol="0" anchor="ctr"/>
+          <a:lstStyle/>
+          <a:p>
+            <a:endParaRPr lang="zh-CN" altLang="en-US"/>
+          </a:p>
+        </p:txBody>
+      </p:sp>
+      <p:sp>
+        <p:nvSpPr>
+          <p:cNvPr id="5" name="备注占位符 4"/>
+          <p:cNvSpPr>
+            <a:spLocks noGrp="1"/>
+          </p:cNvSpPr>
+          <p:nvPr>
+            <p:ph type="body" sz="quarter" idx="3"/>
+          </p:nvPr>
+        </p:nvSpPr>
+        <p:spPr>
+          <a:xfrm>
+            <a:off x="685800" y="4400550"/>
+            <a:ext cx="5486400" cy="3600450"/>
+          </a:xfrm>
+          <a:prstGeom prst="rect">
+            <a:avLst/>
+          </a:prstGeom>
+        </p:spPr>
+        <p:txBody>
+          <a:bodyPr vert="horz" lIns="91440" tIns="45720" rIns="91440" bIns="45720" rtlCol="0"/>
+          <a:lstStyle/>
+          <a:p>
+            <a:pPr lvl="0"/>
+            <a:r>
+              <a:rPr lang="zh-CN" altLang="en-US" smtClean="0"/>
+              <a:t>单击此处编辑母版文本样式</a:t>
+            </a:r>
+            <a:endParaRPr lang="zh-CN" altLang="en-US" smtClean="0"/>
+          </a:p>
+          <a:p>
+            <a:pPr lvl="1"/>
+            <a:r>
+              <a:rPr lang="zh-CN" altLang="en-US" smtClean="0"/>
+              <a:t>第二级</a:t>
+            </a:r>
+            <a:endParaRPr lang="zh-CN" altLang="en-US" smtClean="0"/>
+          </a:p>
+          <a:p>
+            <a:pPr lvl="2"/>
+            <a:r>
+              <a:rPr lang="zh-CN" altLang="en-US" smtClean="0"/>
+              <a:t>第三级</a:t>
+            </a:r>
+            <a:endParaRPr lang="zh-CN" altLang="en-US" smtClean="0"/>
+          </a:p>
+          <a:p>
+            <a:pPr lvl="3"/>
+            <a:r>
+              <a:rPr lang="zh-CN" altLang="en-US" smtClean="0"/>
+              <a:t>第四级</a:t>
+            </a:r>
+            <a:endParaRPr lang="zh-CN" altLang="en-US" smtClean="0"/>
+          </a:p>
+          <a:p>
+            <a:pPr lvl="4"/>
+            <a:r>
+              <a:rPr lang="zh-CN" altLang="en-US" smtClean="0"/>
+              <a:t>第五级</a:t>
+            </a:r>
+            <a:endParaRPr lang="zh-CN" altLang="en-US"/>
+          </a:p>
+        </p:txBody>
+      </p:sp>
+      <p:sp>
+        <p:nvSpPr>
+          <p:cNvPr id="6" name="页脚占位符 5"/>
+          <p:cNvSpPr>
+            <a:spLocks noGrp="1"/>
+          </p:cNvSpPr>
+          <p:nvPr>
+            <p:ph type="ftr" sz="quarter" idx="4"/>
+          </p:nvPr>
+        </p:nvSpPr>
+        <p:spPr>
+          <a:xfrm>
+            <a:off x="0" y="8685213"/>
+            <a:ext cx="2971800" cy="458787"/>
+          </a:xfrm>
+          <a:prstGeom prst="rect">
+            <a:avLst/>
+          </a:prstGeom>
+        </p:spPr>
+        <p:txBody>
+          <a:bodyPr vert="horz" lIns="91440" tIns="45720" rIns="91440" bIns="45720" rtlCol="0" anchor="b"/>
+          <a:lstStyle>
+            <a:lvl1pPr algn="l">
+              <a:defRPr sz="1200"/>
+            </a:lvl1pPr>
+          </a:lstStyle>
+          <a:p>
+            <a:endParaRPr lang="zh-CN" altLang="en-US"/>
+          </a:p>
+        </p:txBody>
+      </p:sp>
+      <p:sp>
+        <p:nvSpPr>
+          <p:cNvPr id="7" name="灯片编号占位符 6"/>
+          <p:cNvSpPr>
+            <a:spLocks noGrp="1"/>
+          </p:cNvSpPr>
+          <p:nvPr>
+            <p:ph type="sldNum" sz="quarter" idx="5"/>
+          </p:nvPr>
+        </p:nvSpPr>
+        <p:spPr>
+          <a:xfrm>
+            <a:off x="3884613" y="8685213"/>
+            <a:ext cx="2971800" cy="458787"/>
+          </a:xfrm>
+          <a:prstGeom prst="rect">
+            <a:avLst/>
+          </a:prstGeom>
+        </p:spPr>
+        <p:txBody>
+          <a:bodyPr vert="horz" lIns="91440" tIns="45720" rIns="91440" bIns="45720" rtlCol="0" anchor="b"/>
+          <a:lstStyle>
+            <a:lvl1pPr algn="r">
+              <a:defRPr sz="1200"/>
+            </a:lvl1pPr>
+          </a:lstStyle>
+          <a:p>
+            <a:fld id="{A6837353-30EB-4A48-80EB-173D804AEFBD}" type="slidenum">
+              <a:rPr lang="zh-CN" altLang="en-US" smtClean="0"/>
+            </a:fld>
+            <a:endParaRPr lang="zh-CN" altLang="en-US"/>
+          </a:p>
+        </p:txBody>
+      </p:sp>
+    </p:spTree>
+  </p:cSld>
+  <p:clrMap bg1="lt1" tx1="dk1" bg2="lt2" tx2="dk2" accent1="accent1" accent2="accent2" accent3="accent3" accent4="accent4" accent5="accent5" accent6="accent6" hlink="hlink" folHlink="folHlink"/>
+  <p:notesStyle>
+    <a:lvl1pPr marL="0" algn="l" defTabSz="914400" rtl="0" eaLnBrk="1" latinLnBrk="0" hangingPunct="1">
+      <a:defRPr sz="1200" kern="1200">
+        <a:solidFill>
+          <a:schemeClr val="tx1"/>
+        </a:solidFill>
+        <a:latin typeface="+mn-lt"/>
+        <a:ea typeface="+mn-ea"/>
+        <a:cs typeface="+mn-cs"/>
+      </a:defRPr>
+    </a:lvl1pPr>
+    <a:lvl2pPr marL="457200" algn="l" defTabSz="914400" rtl="0" eaLnBrk="1" latinLnBrk="0" hangingPunct="1">
+      <a:defRPr sz="1200" kern="1200">
+        <a:solidFill>
+          <a:schemeClr val="tx1"/>
+        </a:solidFill>
+        <a:latin typeface="+mn-lt"/>
+        <a:ea typeface="+mn-ea"/>
+        <a:cs typeface="+mn-cs"/>
+      </a:defRPr>
+    </a:lvl2pPr>
+    <a:lvl3pPr marL="914400" algn="l" defTabSz="914400" rtl="0" eaLnBrk="1" latinLnBrk="0" hangingPunct="1">
+      <a:defRPr sz="1200" kern="1200">
+        <a:solidFill>
+          <a:schemeClr val="tx1"/>
+        </a:solidFill>
+        <a:latin typeface="+mn-lt"/>
+        <a:ea typeface="+mn-ea"/>
+        <a:cs typeface="+mn-cs"/>
+      </a:defRPr>
+    </a:lvl3pPr>
+    <a:lvl4pPr marL="1371600" algn="l" defTabSz="914400" rtl="0" eaLnBrk="1" latinLnBrk="0" hangingPunct="1">
+      <a:defRPr sz="1200" kern="1200">
+        <a:solidFill>
+          <a:schemeClr val="tx1"/>
+        </a:solidFill>
+        <a:latin typeface="+mn-lt"/>
+        <a:ea typeface="+mn-ea"/>
+        <a:cs typeface="+mn-cs"/>
+      </a:defRPr>
+    </a:lvl4pPr>
+    <a:lvl5pPr marL="1828800" algn="l" defTabSz="914400" rtl="0" eaLnBrk="1" latinLnBrk="0" hangingPunct="1">
+      <a:defRPr sz="1200" kern="1200">
+        <a:solidFill>
+          <a:schemeClr val="tx1"/>
+        </a:solidFill>
+        <a:latin typeface="+mn-lt"/>
+        <a:ea typeface="+mn-ea"/>
+        <a:cs typeface="+mn-cs"/>
+      </a:defRPr>
+    </a:lvl5pPr>
+    <a:lvl6pPr marL="2286000" algn="l" defTabSz="914400" rtl="0" eaLnBrk="1" latinLnBrk="0" hangingPunct="1">
+      <a:defRPr sz="1200" kern="1200">
+        <a:solidFill>
+          <a:schemeClr val="tx1"/>
+        </a:solidFill>
+        <a:latin typeface="+mn-lt"/>
+        <a:ea typeface="+mn-ea"/>
+        <a:cs typeface="+mn-cs"/>
+      </a:defRPr>
+    </a:lvl6pPr>
+    <a:lvl7pPr marL="2743200" algn="l" defTabSz="914400" rtl="0" eaLnBrk="1" latinLnBrk="0" hangingPunct="1">
+      <a:defRPr sz="1200" kern="1200">
+        <a:solidFill>
+          <a:schemeClr val="tx1"/>
+        </a:solidFill>
+        <a:latin typeface="+mn-lt"/>
+        <a:ea typeface="+mn-ea"/>
+        <a:cs typeface="+mn-cs"/>
+      </a:defRPr>
+    </a:lvl7pPr>
+    <a:lvl8pPr marL="3200400" algn="l" defTabSz="914400" rtl="0" eaLnBrk="1" latinLnBrk="0" hangingPunct="1">
+      <a:defRPr sz="1200" kern="1200">
+        <a:solidFill>
+          <a:schemeClr val="tx1"/>
+        </a:solidFill>
+        <a:latin typeface="+mn-lt"/>
+        <a:ea typeface="+mn-ea"/>
+        <a:cs typeface="+mn-cs"/>
+      </a:defRPr>
+    </a:lvl8pPr>
+    <a:lvl9pPr marL="3657600" algn="l" defTabSz="914400" rtl="0" eaLnBrk="1" latinLnBrk="0" hangingPunct="1">
+      <a:defRPr sz="1200" kern="1200">
+        <a:solidFill>
+          <a:schemeClr val="tx1"/>
+        </a:solidFill>
+        <a:latin typeface="+mn-lt"/>
+        <a:ea typeface="+mn-ea"/>
+        <a:cs typeface="+mn-cs"/>
+      </a:defRPr>
+    </a:lvl9pPr>
+  </p:notesStyle>
+</p:notesMaster>
+</file>
+
+<file path=ppt/notesSlides/notesSlide1.xml><?xml version="1.0" encoding="utf-8"?>
+<p:notes xmlns:a="http://schemas.openxmlformats.org/drawingml/2006/main" xmlns:r="http://schemas.openxmlformats.org/officeDocument/2006/relationships" xmlns:p="http://schemas.openxmlformats.org/presentationml/2006/main">
+  <p:cSld>
+    <p:spTree>
+      <p:nvGrpSpPr>
+        <p:cNvPr id="1" name=""/>
+        <p:cNvGrpSpPr/>
+        <p:nvPr/>
+      </p:nvGrpSpPr>
+      <p:grpSpPr/>
+      <p:sp>
+        <p:nvSpPr>
+          <p:cNvPr id="2" name="幻灯片图像占位符 1"/>
+          <p:cNvSpPr>
+            <a:spLocks noGrp="1"/>
+          </p:cNvSpPr>
+          <p:nvPr>
+            <p:ph type="sldImg" idx="2"/>
+          </p:nvPr>
+        </p:nvSpPr>
+        <p:spPr/>
+      </p:sp>
+      <p:sp>
+        <p:nvSpPr>
+          <p:cNvPr id="3" name="文本占位符 2"/>
+          <p:cNvSpPr>
+            <a:spLocks noGrp="1"/>
+          </p:cNvSpPr>
+          <p:nvPr>
+            <p:ph type="body" idx="3"/>
+          </p:nvPr>
+        </p:nvSpPr>
+        <p:spPr/>
+        <p:txBody>
+          <a:bodyPr/>
+          <a:p>
+            <a:r>
+              <a:rPr lang="en-US" altLang="zh-CN"/>
+              <a:t>Good morning/afternoon everyone. Welcome to our course project presentation.</a:t>
+            </a:r>
+            <a:endParaRPr lang="en-US" altLang="zh-CN"/>
+          </a:p>
+          <a:p>
+            <a:r>
+              <a:rPr lang="en-US" altLang="zh-CN"/>
+              <a:t>Today we will show you our Payments Processing System – a complete lifecycle management system for financial payments.</a:t>
+            </a:r>
+            <a:endParaRPr lang="en-US" altLang="zh-CN"/>
+          </a:p>
+          <a:p>
+            <a:r>
+              <a:rPr lang="en-US" altLang="zh-CN"/>
+              <a:t>We built it with Spring Boot 3 on the backend, and Vue 3 on the frontend.</a:t>
+            </a:r>
+            <a:endParaRPr lang="en-US" altLang="zh-CN"/>
+          </a:p>
+          <a:p>
+            <a:r>
+              <a:rPr lang="en-US" altLang="zh-CN"/>
+              <a:t>Let’s walk through what we did, how it works, and what I personally contributed.</a:t>
+            </a:r>
+            <a:endParaRPr lang="en-US" altLang="zh-CN"/>
+          </a:p>
+        </p:txBody>
+      </p:sp>
+    </p:spTree>
+  </p:cSld>
+  <p:clrMapOvr>
+    <a:masterClrMapping/>
+  </p:clrMapOvr>
+</p:notes>
+</file>
+
+<file path=ppt/notesSlides/notesSlide2.xml><?xml version="1.0" encoding="utf-8"?>
+<p:notes xmlns:a="http://schemas.openxmlformats.org/drawingml/2006/main" xmlns:r="http://schemas.openxmlformats.org/officeDocument/2006/relationships" xmlns:p="http://schemas.openxmlformats.org/presentationml/2006/main">
+  <p:cSld>
+    <p:spTree>
+      <p:nvGrpSpPr>
+        <p:cNvPr id="1" name=""/>
+        <p:cNvGrpSpPr/>
+        <p:nvPr/>
+      </p:nvGrpSpPr>
+      <p:grpSpPr/>
+      <p:sp>
+        <p:nvSpPr>
+          <p:cNvPr id="2" name="幻灯片图像占位符 1"/>
+          <p:cNvSpPr>
+            <a:spLocks noGrp="1"/>
+          </p:cNvSpPr>
+          <p:nvPr>
+            <p:ph type="sldImg" idx="2"/>
+          </p:nvPr>
+        </p:nvSpPr>
+        <p:spPr/>
+      </p:sp>
+      <p:sp>
+        <p:nvSpPr>
+          <p:cNvPr id="3" name="文本占位符 2"/>
+          <p:cNvSpPr>
+            <a:spLocks noGrp="1"/>
+          </p:cNvSpPr>
+          <p:nvPr>
+            <p:ph type="body" idx="3"/>
+          </p:nvPr>
+        </p:nvSpPr>
+        <p:spPr/>
+        <p:txBody>
+          <a:bodyPr/>
+          <a:p>
+            <a:r>
+              <a:rPr lang="en-US" altLang="zh-CN"/>
+              <a:t>Here is our agenda for today.</a:t>
+            </a:r>
+            <a:endParaRPr lang="en-US" altLang="zh-CN"/>
+          </a:p>
+          <a:p>
+            <a:r>
+              <a:rPr lang="en-US" altLang="zh-CN"/>
+              <a:t>We’ll start with the project background and goals.</a:t>
+            </a:r>
+            <a:endParaRPr lang="en-US" altLang="zh-CN"/>
+          </a:p>
+          <a:p>
+            <a:r>
+              <a:rPr lang="en-US" altLang="zh-CN"/>
+              <a:t>After that, we’ll show the system design and tech stack.</a:t>
+            </a:r>
+            <a:endParaRPr lang="en-US" altLang="zh-CN"/>
+          </a:p>
+          <a:p>
+            <a:r>
+              <a:rPr lang="en-US" altLang="zh-CN"/>
+              <a:t>Then we’ll share our contributions in detail.</a:t>
+            </a:r>
+            <a:endParaRPr lang="en-US" altLang="zh-CN"/>
+          </a:p>
+          <a:p>
+            <a:r>
+              <a:rPr lang="en-US" altLang="zh-CN">
+                <a:sym typeface="+mn-ea"/>
+              </a:rPr>
+              <a:t>We’ll do a live demo of the main features.</a:t>
+            </a:r>
+            <a:endParaRPr lang="en-US" altLang="zh-CN"/>
+          </a:p>
+          <a:p>
+            <a:r>
+              <a:rPr lang="en-US" altLang="zh-CN"/>
+              <a:t>Finally, we’ll cover testing and summary.</a:t>
+            </a:r>
+            <a:endParaRPr lang="en-US" altLang="zh-CN"/>
+          </a:p>
+          <a:p>
+            <a:r>
+              <a:rPr lang="en-US" altLang="zh-CN"/>
+              <a:t>Feel free to ask questions at the end.</a:t>
+            </a:r>
+            <a:endParaRPr lang="en-US" altLang="zh-CN"/>
+          </a:p>
+          <a:p>
+            <a:endParaRPr lang="en-US" altLang="zh-CN"/>
+          </a:p>
+          <a:p>
+            <a:endParaRPr lang="en-US" altLang="zh-CN"/>
+          </a:p>
+        </p:txBody>
+      </p:sp>
+    </p:spTree>
+  </p:cSld>
+  <p:clrMapOvr>
+    <a:masterClrMapping/>
+  </p:clrMapOvr>
+</p:notes>
+</file>
+
+<file path=ppt/notesSlides/notesSlide3.xml><?xml version="1.0" encoding="utf-8"?>
+<p:notes xmlns:a="http://schemas.openxmlformats.org/drawingml/2006/main" xmlns:r="http://schemas.openxmlformats.org/officeDocument/2006/relationships" xmlns:p="http://schemas.openxmlformats.org/presentationml/2006/main">
+  <p:cSld>
+    <p:spTree>
+      <p:nvGrpSpPr>
+        <p:cNvPr id="1" name=""/>
+        <p:cNvGrpSpPr/>
+        <p:nvPr/>
+      </p:nvGrpSpPr>
+      <p:grpSpPr/>
+      <p:sp>
+        <p:nvSpPr>
+          <p:cNvPr id="2" name="幻灯片图像占位符 1"/>
+          <p:cNvSpPr>
+            <a:spLocks noGrp="1"/>
+          </p:cNvSpPr>
+          <p:nvPr>
+            <p:ph type="sldImg" idx="2"/>
+          </p:nvPr>
+        </p:nvSpPr>
+        <p:spPr/>
+      </p:sp>
+      <p:sp>
+        <p:nvSpPr>
+          <p:cNvPr id="3" name="文本占位符 2"/>
+          <p:cNvSpPr>
+            <a:spLocks noGrp="1"/>
+          </p:cNvSpPr>
+          <p:nvPr>
+            <p:ph type="body" idx="3"/>
+          </p:nvPr>
+        </p:nvSpPr>
+        <p:spPr/>
+        <p:txBody>
+          <a:bodyPr/>
+          <a:p>
+            <a:r>
+              <a:rPr lang="en-US" altLang="zh-CN"/>
+              <a:t>This project is a full-stack development training exercise. We are simulating a real-world payment system lifecycle – the kind you would find in a bank or a fintech company. The goal is to give us hands-on experience with REST APIs, database design, and frontend integration, all while following professional teamwork practices."</a:t>
+            </a:r>
+            <a:endParaRPr lang="en-US" altLang="zh-CN"/>
+          </a:p>
+          <a:p>
+            <a:r>
+              <a:rPr lang="en-US" altLang="zh-CN"/>
+              <a:t>Our primary goal is to build a complete payment lifecycle management system. This means we handle a payment from the moment it is created, through validation, then sending, and finally either completion or failure. In other words, we cover the entire journey of a financial transaction."</a:t>
+            </a:r>
+            <a:endParaRPr lang="en-US" altLang="zh-CN"/>
+          </a:p>
+        </p:txBody>
+      </p:sp>
+    </p:spTree>
+  </p:cSld>
+  <p:clrMapOvr>
+    <a:masterClrMapping/>
+  </p:clrMapOvr>
+</p:notes>
+</file>
+
+<file path=ppt/notesSlides/notesSlide4.xml><?xml version="1.0" encoding="utf-8"?>
+<p:notes xmlns:a="http://schemas.openxmlformats.org/drawingml/2006/main" xmlns:r="http://schemas.openxmlformats.org/officeDocument/2006/relationships" xmlns:p="http://schemas.openxmlformats.org/presentationml/2006/main">
+  <p:cSld>
+    <p:spTree>
+      <p:nvGrpSpPr>
+        <p:cNvPr id="1" name=""/>
+        <p:cNvGrpSpPr/>
+        <p:nvPr/>
+      </p:nvGrpSpPr>
+      <p:grpSpPr/>
+      <p:sp>
+        <p:nvSpPr>
+          <p:cNvPr id="2" name="幻灯片图像占位符 1"/>
+          <p:cNvSpPr>
+            <a:spLocks noGrp="1"/>
+          </p:cNvSpPr>
+          <p:nvPr>
+            <p:ph type="sldImg" idx="2"/>
+          </p:nvPr>
+        </p:nvSpPr>
+        <p:spPr/>
+      </p:sp>
+      <p:sp>
+        <p:nvSpPr>
+          <p:cNvPr id="3" name="文本占位符 2"/>
+          <p:cNvSpPr>
+            <a:spLocks noGrp="1"/>
+          </p:cNvSpPr>
+          <p:nvPr>
+            <p:ph type="body" idx="3"/>
+          </p:nvPr>
+        </p:nvSpPr>
+        <p:spPr/>
+        <p:txBody>
+          <a:bodyPr/>
+          <a:p>
+            <a:r>
+              <a:rPr lang="en-US" altLang="zh-CN"/>
+              <a:t>We defined five states for a payment:</a:t>
+            </a:r>
+            <a:endParaRPr lang="en-US" altLang="zh-CN"/>
+          </a:p>
+          <a:p>
+            <a:r>
+              <a:rPr lang="en-US" altLang="zh-CN"/>
+              <a:t>CREATED → VALIDATED → SENT → COMPLETED – this is the happy path.</a:t>
+            </a:r>
+            <a:endParaRPr lang="en-US" altLang="zh-CN"/>
+          </a:p>
+          <a:p>
+            <a:r>
+              <a:rPr lang="en-US" altLang="zh-CN"/>
+              <a:t>But at any point, the payment can also go to FAILED – which is a final state.</a:t>
+            </a:r>
+            <a:endParaRPr lang="en-US" altLang="zh-CN"/>
+          </a:p>
+          <a:p>
+            <a:r>
+              <a:rPr lang="en-US" altLang="zh-CN"/>
+              <a:t>We manage all legal transitions with a central PaymentStateMachine class. This prevents skipping states or going backwards.</a:t>
+            </a:r>
+            <a:endParaRPr lang="en-US" altLang="zh-CN"/>
+          </a:p>
+          <a:p>
+            <a:r>
+              <a:rPr lang="en-US" altLang="zh-CN"/>
+              <a:t>For example, from CREATED to VALIDATED, we run three checks: amount, currency, and account validity – plus a balance check.</a:t>
+            </a:r>
+            <a:endParaRPr lang="en-US" altLang="zh-CN"/>
+          </a:p>
+          <a:p>
+            <a:r>
+              <a:rPr lang="en-US" altLang="zh-CN"/>
+              <a:t>From VALIDATED to SENT, and SENT to COMPLETED, we just move forward.</a:t>
+            </a:r>
+            <a:endParaRPr lang="en-US" altLang="zh-CN"/>
+          </a:p>
+          <a:p>
+            <a:r>
+              <a:rPr lang="en-US" altLang="zh-CN"/>
+              <a:t>And any transition to FAILED must include an error code and an error message.</a:t>
+            </a:r>
+            <a:endParaRPr lang="en-US" altLang="zh-CN"/>
+          </a:p>
+        </p:txBody>
+      </p:sp>
+    </p:spTree>
+  </p:cSld>
+  <p:clrMapOvr>
+    <a:masterClrMapping/>
+  </p:clrMapOvr>
+</p:notes>
+</file>
+
+<file path=ppt/notesSlides/notesSlide5.xml><?xml version="1.0" encoding="utf-8"?>
+<p:notes xmlns:a="http://schemas.openxmlformats.org/drawingml/2006/main" xmlns:r="http://schemas.openxmlformats.org/officeDocument/2006/relationships" xmlns:p="http://schemas.openxmlformats.org/presentationml/2006/main">
+  <p:cSld>
+    <p:spTree>
+      <p:nvGrpSpPr>
+        <p:cNvPr id="1" name=""/>
+        <p:cNvGrpSpPr/>
+        <p:nvPr/>
+      </p:nvGrpSpPr>
+      <p:grpSpPr/>
+      <p:sp>
+        <p:nvSpPr>
+          <p:cNvPr id="2" name="幻灯片图像占位符 1"/>
+          <p:cNvSpPr>
+            <a:spLocks noGrp="1"/>
+          </p:cNvSpPr>
+          <p:nvPr>
+            <p:ph type="sldImg" idx="2"/>
+          </p:nvPr>
+        </p:nvSpPr>
+        <p:spPr/>
+      </p:sp>
+      <p:sp>
+        <p:nvSpPr>
+          <p:cNvPr id="3" name="文本占位符 2"/>
+          <p:cNvSpPr>
+            <a:spLocks noGrp="1"/>
+          </p:cNvSpPr>
+          <p:nvPr>
+            <p:ph type="body" idx="3"/>
+          </p:nvPr>
+        </p:nvSpPr>
+        <p:spPr/>
+        <p:txBody>
+          <a:bodyPr/>
+          <a:p>
+            <a:r>
+              <a:rPr lang="en-US" altLang="zh-CN"/>
+              <a:t>On the frontend, we use Vue 3 with Element Plus for UI components, vue-router for navigation, and vue-i18n for three languages: English, Chinese, and German.</a:t>
+            </a:r>
+            <a:endParaRPr lang="en-US" altLang="zh-CN"/>
+          </a:p>
+          <a:p>
+            <a:r>
+              <a:rPr lang="en-US" altLang="zh-CN"/>
+              <a:t>On the backend, it’s Spring Boot 3, MyBatis-Plus for database access, and MySQL. We follow a clear layered architecture: Controller, Service, Validator, and State Machine.</a:t>
+            </a:r>
+            <a:endParaRPr lang="en-US" altLang="zh-CN"/>
+          </a:p>
+          <a:p>
+            <a:r>
+              <a:rPr lang="en-US" altLang="zh-CN"/>
+              <a:t>All API responses follow a uniform format: { success, data, errorCode, message }.</a:t>
+            </a:r>
+            <a:endParaRPr lang="en-US" altLang="zh-CN"/>
+          </a:p>
+          <a:p>
+            <a:r>
+              <a:rPr lang="en-US" altLang="zh-CN"/>
+              <a:t>We have global exception handling using @RestControllerAdvice to convert errors into that same format.</a:t>
+            </a:r>
+            <a:endParaRPr lang="en-US" altLang="zh-CN"/>
+          </a:p>
+          <a:p>
+            <a:r>
+              <a:rPr lang="en-US" altLang="zh-CN"/>
+              <a:t>We also provide Swagger/OpenAPI documentation for all endpoints.</a:t>
+            </a:r>
+            <a:endParaRPr lang="en-US" altLang="zh-CN"/>
+          </a:p>
+          <a:p>
+            <a:r>
+              <a:rPr lang="en-US" altLang="zh-CN"/>
+              <a:t>And we have a scheduled task that simulates network delay – it automatically advances payments asynchronously.</a:t>
+            </a:r>
+            <a:endParaRPr lang="en-US" altLang="zh-CN"/>
+          </a:p>
+        </p:txBody>
+      </p:sp>
+    </p:spTree>
+  </p:cSld>
+  <p:clrMapOvr>
+    <a:masterClrMapping/>
+  </p:clrMapOvr>
+</p:notes>
+</file>
+
+<file path=ppt/notesSlides/notesSlide6.xml><?xml version="1.0" encoding="utf-8"?>
+<p:notes xmlns:a="http://schemas.openxmlformats.org/drawingml/2006/main" xmlns:r="http://schemas.openxmlformats.org/officeDocument/2006/relationships" xmlns:p="http://schemas.openxmlformats.org/presentationml/2006/main">
+  <p:cSld>
+    <p:spTree>
+      <p:nvGrpSpPr>
+        <p:cNvPr id="1" name=""/>
+        <p:cNvGrpSpPr/>
+        <p:nvPr/>
+      </p:nvGrpSpPr>
+      <p:grpSpPr/>
+      <p:sp>
+        <p:nvSpPr>
+          <p:cNvPr id="2" name="幻灯片图像占位符 1"/>
+          <p:cNvSpPr>
+            <a:spLocks noGrp="1"/>
+          </p:cNvSpPr>
+          <p:nvPr>
+            <p:ph type="sldImg" idx="2"/>
+          </p:nvPr>
+        </p:nvSpPr>
+        <p:spPr/>
+      </p:sp>
+      <p:sp>
+        <p:nvSpPr>
+          <p:cNvPr id="3" name="文本占位符 2"/>
+          <p:cNvSpPr>
+            <a:spLocks noGrp="1"/>
+          </p:cNvSpPr>
+          <p:nvPr>
+            <p:ph type="body" idx="3"/>
+          </p:nvPr>
+        </p:nvSpPr>
+        <p:spPr/>
+        <p:txBody>
+          <a:bodyPr/>
+          <a:p>
+            <a:r>
+              <a:rPr lang="en-US" altLang="zh-CN"/>
+              <a:t>Let me quickly list the main features we built:</a:t>
+            </a:r>
+            <a:endParaRPr lang="en-US" altLang="zh-CN"/>
+          </a:p>
+          <a:p>
+            <a:r>
+              <a:rPr lang="en-US" altLang="zh-CN"/>
+              <a:t>Create a payment with an idempotency key to prevent duplicate submissions.</a:t>
+            </a:r>
+            <a:endParaRPr lang="en-US" altLang="zh-CN"/>
+          </a:p>
+          <a:p>
+            <a:r>
+              <a:rPr lang="en-US" altLang="zh-CN"/>
+              <a:t>View payment details, including failure error details.</a:t>
+            </a:r>
+            <a:endParaRPr lang="en-US" altLang="zh-CN"/>
+          </a:p>
+          <a:p>
+            <a:r>
+              <a:rPr lang="en-US" altLang="zh-CN"/>
+              <a:t>See the full audit trail – the history timeline of state changes.</a:t>
+            </a:r>
+            <a:endParaRPr lang="en-US" altLang="zh-CN"/>
+          </a:p>
+          <a:p>
+            <a:r>
+              <a:rPr lang="en-US" altLang="zh-CN"/>
+              <a:t>List all payments with filtering by status and pagination.</a:t>
+            </a:r>
+            <a:endParaRPr lang="en-US" altLang="zh-CN"/>
+          </a:p>
+          <a:p>
+            <a:r>
+              <a:rPr lang="en-US" altLang="zh-CN"/>
+              <a:t>A recycle bin – for soft delete, restore, and permanent delete – with a 30‑day retention rule.</a:t>
+            </a:r>
+            <a:endParaRPr lang="en-US" altLang="zh-CN"/>
+          </a:p>
+          <a:p>
+            <a:r>
+              <a:rPr lang="en-US" altLang="zh-CN"/>
+              <a:t>And manual state transition endpoints – these are useful for demos and testing.</a:t>
+            </a:r>
+            <a:endParaRPr lang="en-US" altLang="zh-CN"/>
+          </a:p>
+        </p:txBody>
+      </p:sp>
+    </p:spTree>
+  </p:cSld>
+  <p:clrMapOvr>
+    <a:masterClrMapping/>
+  </p:clrMapOvr>
+</p:notes>
+</file>
+
+<file path=ppt/notesSlides/notesSlide7.xml><?xml version="1.0" encoding="utf-8"?>
+<p:notes xmlns:a="http://schemas.openxmlformats.org/drawingml/2006/main" xmlns:r="http://schemas.openxmlformats.org/officeDocument/2006/relationships" xmlns:p="http://schemas.openxmlformats.org/presentationml/2006/main">
+  <p:cSld>
+    <p:spTree>
+      <p:nvGrpSpPr>
+        <p:cNvPr id="1" name=""/>
+        <p:cNvGrpSpPr/>
+        <p:nvPr/>
+      </p:nvGrpSpPr>
+      <p:grpSpPr/>
+      <p:sp>
+        <p:nvSpPr>
+          <p:cNvPr id="2" name="幻灯片图像占位符 1"/>
+          <p:cNvSpPr>
+            <a:spLocks noGrp="1"/>
+          </p:cNvSpPr>
+          <p:nvPr>
+            <p:ph type="sldImg" idx="2"/>
+          </p:nvPr>
+        </p:nvSpPr>
+        <p:spPr/>
+      </p:sp>
+      <p:sp>
+        <p:nvSpPr>
+          <p:cNvPr id="3" name="文本占位符 2"/>
+          <p:cNvSpPr>
+            <a:spLocks noGrp="1"/>
+          </p:cNvSpPr>
+          <p:nvPr>
+            <p:ph type="body" idx="3"/>
+          </p:nvPr>
+        </p:nvSpPr>
+        <p:spPr/>
+        <p:txBody>
+          <a:bodyPr/>
+          <a:p>
+            <a:endParaRPr lang="zh-CN" altLang="en-US"/>
+          </a:p>
+        </p:txBody>
+      </p:sp>
+    </p:spTree>
+  </p:cSld>
+  <p:clrMapOvr>
+    <a:masterClrMapping/>
+  </p:clrMapOvr>
+</p:notes>
+</file>
+
+<file path=ppt/notesSlides/notesSlide8.xml><?xml version="1.0" encoding="utf-8"?>
+<p:notes xmlns:a="http://schemas.openxmlformats.org/drawingml/2006/main" xmlns:r="http://schemas.openxmlformats.org/officeDocument/2006/relationships" xmlns:p="http://schemas.openxmlformats.org/presentationml/2006/main">
+  <p:cSld>
+    <p:spTree>
+      <p:nvGrpSpPr>
+        <p:cNvPr id="1" name=""/>
+        <p:cNvGrpSpPr/>
+        <p:nvPr/>
+      </p:nvGrpSpPr>
+      <p:grpSpPr/>
+      <p:sp>
+        <p:nvSpPr>
+          <p:cNvPr id="2" name="幻灯片图像占位符 1"/>
+          <p:cNvSpPr>
+            <a:spLocks noGrp="1"/>
+          </p:cNvSpPr>
+          <p:nvPr>
+            <p:ph type="sldImg" idx="2"/>
+          </p:nvPr>
+        </p:nvSpPr>
+        <p:spPr/>
+      </p:sp>
+      <p:sp>
+        <p:nvSpPr>
+          <p:cNvPr id="3" name="文本占位符 2"/>
+          <p:cNvSpPr>
+            <a:spLocks noGrp="1"/>
+          </p:cNvSpPr>
+          <p:nvPr>
+            <p:ph type="body" idx="3"/>
+          </p:nvPr>
+        </p:nvSpPr>
+        <p:spPr/>
+        <p:txBody>
+          <a:bodyPr/>
+          <a:p>
+            <a:r>
+              <a:rPr lang="en-US" altLang="zh-CN"/>
+              <a:t>I designed and implemented the multi-language feature on the frontend.</a:t>
+            </a:r>
+            <a:endParaRPr lang="en-US" altLang="zh-CN"/>
+          </a:p>
+          <a:p>
+            <a:r>
+              <a:rPr lang="en-US" altLang="zh-CN"/>
+              <a:t>I added vue-i18n to support Chinese, English, and German.</a:t>
+            </a:r>
+            <a:endParaRPr lang="en-US" altLang="zh-CN"/>
+          </a:p>
+          <a:p>
+            <a:r>
+              <a:rPr lang="en-US" altLang="zh-CN"/>
+              <a:t>On first visit, the system detects the browser language automatically. After that, the user’s choice is saved in localStorage.</a:t>
+            </a:r>
+            <a:endParaRPr lang="en-US" altLang="zh-CN"/>
+          </a:p>
+          <a:p>
+            <a:r>
+              <a:rPr lang="en-US" altLang="zh-CN"/>
+              <a:t>Error codes are mapped to localized messages on the frontend, which gives better user experience than using backend-fixed messages.</a:t>
+            </a:r>
+            <a:endParaRPr lang="en-US" altLang="zh-CN"/>
+          </a:p>
+          <a:p>
+            <a:r>
+              <a:rPr lang="en-US" altLang="zh-CN"/>
+              <a:t>Importantly, all these changes are only on the frontend – no backend changes were needed.</a:t>
+            </a:r>
+            <a:endParaRPr lang="en-US" altLang="zh-CN"/>
+          </a:p>
+          <a:p>
+            <a:r>
+              <a:rPr lang="en-US" altLang="zh-CN"/>
+              <a:t>(</a:t>
+            </a:r>
+            <a:r>
+              <a:rPr lang="zh-CN" altLang="en-US"/>
+              <a:t>为什么使用</a:t>
+            </a:r>
+            <a:r>
+              <a:rPr lang="en-US" altLang="zh-CN"/>
+              <a:t>vue-i18n</a:t>
+            </a:r>
+            <a:r>
+              <a:rPr lang="zh-CN" altLang="en-US"/>
+              <a:t>是因为手动实现需要遍历</a:t>
+            </a:r>
+            <a:r>
+              <a:rPr lang="en-US" altLang="zh-CN"/>
+              <a:t>dom</a:t>
+            </a:r>
+            <a:r>
+              <a:rPr lang="zh-CN" altLang="en-US"/>
+              <a:t>树，这样可以通过</a:t>
+            </a:r>
+            <a:r>
+              <a:rPr lang="en-US" altLang="zh-CN"/>
+              <a:t>t()</a:t>
+            </a:r>
+            <a:r>
+              <a:rPr lang="zh-CN" altLang="en-US"/>
+              <a:t>自动绑定，支持语言包懒加载，更快实现</a:t>
+            </a:r>
+            <a:r>
+              <a:rPr lang="en-US" altLang="zh-CN"/>
+              <a:t>)</a:t>
+            </a:r>
+            <a:endParaRPr lang="en-US" altLang="zh-CN"/>
+          </a:p>
+          <a:p>
+            <a:r>
+              <a:rPr lang="en-US" altLang="zh-CN"/>
+              <a:t>Originally, the auto-transition always ended in COMPLETED – so we couldn’t show the FAILED path.</a:t>
+            </a:r>
+            <a:endParaRPr lang="en-US" altLang="zh-CN"/>
+          </a:p>
+          <a:p>
+            <a:r>
+              <a:rPr lang="en-US" altLang="zh-CN"/>
+              <a:t>I added a configurable failure-probability, set to 20% by default.</a:t>
+            </a:r>
+            <a:endParaRPr lang="en-US" altLang="zh-CN"/>
+          </a:p>
+          <a:p>
+            <a:r>
+              <a:rPr lang="en-US" altLang="zh-CN"/>
+              <a:t>When a failure is triggered, the system picks a realistic error code – like PROCESSING_ERROR or NETWORK_ERROR – depending on the current stage.</a:t>
+            </a:r>
+            <a:endParaRPr lang="en-US" altLang="zh-CN"/>
+          </a:p>
+          <a:p>
+            <a:r>
+              <a:rPr lang="en-US" altLang="zh-CN"/>
+              <a:t>With a 20% chance per step we can demo both happy and failure paths.</a:t>
+            </a:r>
+            <a:endParaRPr lang="en-US" altLang="zh-CN"/>
+          </a:p>
+          <a:p>
+            <a:r>
+              <a:rPr lang="en-US" altLang="zh-CN"/>
+              <a:t>But we made sure that real business rules – like balance checks – always take priority over the random demo logic.</a:t>
+            </a:r>
+            <a:endParaRPr lang="en-US" altLang="zh-CN"/>
+          </a:p>
+          <a:p>
+            <a:endParaRPr lang="en-US" altLang="zh-CN"/>
+          </a:p>
+          <a:p>
+            <a:r>
+              <a:rPr lang="en-US" altLang="zh-CN"/>
+              <a:t>The requirement was to check if the account has enough balance – but we do not deduct any money, and we don’t handle concurrency conflicts. The balance never changes.</a:t>
+            </a:r>
+            <a:endParaRPr lang="en-US" altLang="zh-CN"/>
+          </a:p>
+          <a:p>
+            <a:r>
+              <a:rPr lang="en-US" altLang="zh-CN"/>
+              <a:t>I added a balance field to the payment table via a separate migration script – without modifying the original schema.</a:t>
+            </a:r>
+            <a:endParaRPr lang="en-US" altLang="zh-CN"/>
+          </a:p>
+          <a:p>
+            <a:r>
+              <a:rPr lang="en-US" altLang="zh-CN"/>
+              <a:t>The method hasSufficientBalance() performs a read‑only query – no UPDATE at all.</a:t>
+            </a:r>
+            <a:endParaRPr lang="en-US" altLang="zh-CN"/>
+          </a:p>
+          <a:p>
+            <a:r>
+              <a:rPr lang="en-US" altLang="zh-CN"/>
+              <a:t>This check is triggered only during the CREATED→VALIDATED transition.</a:t>
+            </a:r>
+            <a:endParaRPr lang="en-US" altLang="zh-CN"/>
+          </a:p>
+          <a:p>
+            <a:r>
+              <a:rPr lang="en-US" altLang="zh-CN"/>
+              <a:t>If the balance is insufficient, the target state is forced to FAILED with error code INSUFFICIENT_FUNDS.</a:t>
+            </a:r>
+            <a:endParaRPr lang="en-US" altLang="zh-CN"/>
+          </a:p>
+          <a:p>
+            <a:r>
+              <a:rPr lang="en-US" altLang="zh-CN"/>
+              <a:t>Both the manual API and the scheduled auto‑transition reuse the same validation logic.</a:t>
+            </a:r>
+            <a:endParaRPr lang="en-US" altLang="zh-CN"/>
+          </a:p>
+          <a:p>
+            <a:endParaRPr lang="en-US" altLang="zh-CN"/>
+          </a:p>
+          <a:p>
+            <a:r>
+              <a:rPr lang="en-US" altLang="zh-CN"/>
+              <a:t>I wrote a test cases document – test-cases.md – with many test cases covering core scenarios.I only completed half of it; the other half was done by another colleague.</a:t>
+            </a:r>
+            <a:endParaRPr lang="en-US" altLang="zh-CN"/>
+          </a:p>
+          <a:p>
+            <a:r>
+              <a:rPr lang="en-US" altLang="zh-CN"/>
+              <a:t>I wrote the paymentvalidatortest class.</a:t>
+            </a:r>
+            <a:endParaRPr lang="en-US" altLang="zh-CN"/>
+          </a:p>
+          <a:p>
+            <a:r>
+              <a:rPr lang="en-US" altLang="zh-CN"/>
+              <a:t>PaymentValidatorTest – 15 cases covering amount, account, and balance checks.</a:t>
+            </a:r>
+            <a:endParaRPr lang="en-US" altLang="zh-CN"/>
+          </a:p>
+          <a:p>
+            <a:r>
+              <a:rPr lang="en-US" altLang="zh-CN"/>
+              <a:t>PaymentStateMachineTest – uses parameterized tests to cover 25 state transition combinations.</a:t>
+            </a:r>
+            <a:endParaRPr lang="en-US" altLang="zh-CN"/>
+          </a:p>
+          <a:p>
+            <a:r>
+              <a:rPr lang="en-US" altLang="zh-CN"/>
+              <a:t>PaymentServiceImplTest – covers state parsing and optimistic lock scenarios, as they exist in the current code.</a:t>
+            </a:r>
+            <a:endParaRPr lang="en-US" altLang="zh-CN"/>
+          </a:p>
+          <a:p>
+            <a:r>
+              <a:rPr lang="en-US" altLang="zh-CN"/>
+              <a:t>All tests use Mockito to isolate the database and background scheduler – so they are stable and repeatable.</a:t>
+            </a:r>
+            <a:endParaRPr lang="en-US" altLang="zh-CN"/>
+          </a:p>
+          <a:p>
+            <a:endParaRPr lang="en-US" altLang="zh-CN"/>
+          </a:p>
+        </p:txBody>
+      </p:sp>
+    </p:spTree>
+  </p:cSld>
+  <p:clrMapOvr>
+    <a:masterClrMapping/>
+  </p:clrMapOvr>
+</p:notes>
 </file>
 
 <file path=ppt/slideLayouts/slideLayout1.xml><?xml version="1.0" encoding="utf-8"?>
@@ -303,7 +1473,6 @@
           <a:p>
             <a:fld id="{5BCAD085-E8A6-8845-BD4E-CB4CCA059FC4}" type="datetimeFigureOut">
               <a:rPr lang="en-US" smtClean="0"/>
-              <a:t>1/27/13</a:t>
             </a:fld>
             <a:endParaRPr lang="en-US"/>
           </a:p>
@@ -345,18 +1514,12 @@
           <a:p>
             <a:fld id="{C1FF6DA9-008F-8B48-92A6-B652298478BF}" type="slidenum">
               <a:rPr lang="en-US" smtClean="0"/>
-              <a:t>‹#›</a:t>
             </a:fld>
             <a:endParaRPr lang="en-US"/>
           </a:p>
         </p:txBody>
       </p:sp>
     </p:spTree>
-    <p:extLst>
-      <p:ext uri="{BB962C8B-B14F-4D97-AF65-F5344CB8AC3E}">
-        <p14:creationId xmlns:p14="http://schemas.microsoft.com/office/powerpoint/2010/main" val="3168075583"/>
-      </p:ext>
-    </p:extLst>
   </p:cSld>
   <p:clrMapOvr>
     <a:masterClrMapping/>
@@ -424,6 +1587,7 @@
               <a:rPr lang="en-US" smtClean="0"/>
               <a:t>Click to edit Master text styles</a:t>
             </a:r>
+            <a:endParaRPr lang="en-US" smtClean="0"/>
           </a:p>
           <a:p>
             <a:pPr lvl="1"/>
@@ -431,6 +1595,7 @@
               <a:rPr lang="en-US" smtClean="0"/>
               <a:t>Second level</a:t>
             </a:r>
+            <a:endParaRPr lang="en-US" smtClean="0"/>
           </a:p>
           <a:p>
             <a:pPr lvl="2"/>
@@ -438,6 +1603,7 @@
               <a:rPr lang="en-US" smtClean="0"/>
               <a:t>Third level</a:t>
             </a:r>
+            <a:endParaRPr lang="en-US" smtClean="0"/>
           </a:p>
           <a:p>
             <a:pPr lvl="3"/>
@@ -445,6 +1611,7 @@
               <a:rPr lang="en-US" smtClean="0"/>
               <a:t>Fourth level</a:t>
             </a:r>
+            <a:endParaRPr lang="en-US" smtClean="0"/>
           </a:p>
           <a:p>
             <a:pPr lvl="4"/>
@@ -473,7 +1640,6 @@
           <a:p>
             <a:fld id="{5BCAD085-E8A6-8845-BD4E-CB4CCA059FC4}" type="datetimeFigureOut">
               <a:rPr lang="en-US" smtClean="0"/>
-              <a:t>1/27/13</a:t>
             </a:fld>
             <a:endParaRPr lang="en-US"/>
           </a:p>
@@ -515,18 +1681,12 @@
           <a:p>
             <a:fld id="{C1FF6DA9-008F-8B48-92A6-B652298478BF}" type="slidenum">
               <a:rPr lang="en-US" smtClean="0"/>
-              <a:t>‹#›</a:t>
             </a:fld>
             <a:endParaRPr lang="en-US"/>
           </a:p>
         </p:txBody>
       </p:sp>
     </p:spTree>
-    <p:extLst>
-      <p:ext uri="{BB962C8B-B14F-4D97-AF65-F5344CB8AC3E}">
-        <p14:creationId xmlns:p14="http://schemas.microsoft.com/office/powerpoint/2010/main" val="2910927964"/>
-      </p:ext>
-    </p:extLst>
   </p:cSld>
   <p:clrMapOvr>
     <a:masterClrMapping/>
@@ -604,6 +1764,7 @@
               <a:rPr lang="en-US" smtClean="0"/>
               <a:t>Click to edit Master text styles</a:t>
             </a:r>
+            <a:endParaRPr lang="en-US" smtClean="0"/>
           </a:p>
           <a:p>
             <a:pPr lvl="1"/>
@@ -611,6 +1772,7 @@
               <a:rPr lang="en-US" smtClean="0"/>
               <a:t>Second level</a:t>
             </a:r>
+            <a:endParaRPr lang="en-US" smtClean="0"/>
           </a:p>
           <a:p>
             <a:pPr lvl="2"/>
@@ -618,6 +1780,7 @@
               <a:rPr lang="en-US" smtClean="0"/>
               <a:t>Third level</a:t>
             </a:r>
+            <a:endParaRPr lang="en-US" smtClean="0"/>
           </a:p>
           <a:p>
             <a:pPr lvl="3"/>
@@ -625,6 +1788,7 @@
               <a:rPr lang="en-US" smtClean="0"/>
               <a:t>Fourth level</a:t>
             </a:r>
+            <a:endParaRPr lang="en-US" smtClean="0"/>
           </a:p>
           <a:p>
             <a:pPr lvl="4"/>
@@ -653,7 +1817,6 @@
           <a:p>
             <a:fld id="{5BCAD085-E8A6-8845-BD4E-CB4CCA059FC4}" type="datetimeFigureOut">
               <a:rPr lang="en-US" smtClean="0"/>
-              <a:t>1/27/13</a:t>
             </a:fld>
             <a:endParaRPr lang="en-US"/>
           </a:p>
@@ -695,18 +1858,12 @@
           <a:p>
             <a:fld id="{C1FF6DA9-008F-8B48-92A6-B652298478BF}" type="slidenum">
               <a:rPr lang="en-US" smtClean="0"/>
-              <a:t>‹#›</a:t>
             </a:fld>
             <a:endParaRPr lang="en-US"/>
           </a:p>
         </p:txBody>
       </p:sp>
     </p:spTree>
-    <p:extLst>
-      <p:ext uri="{BB962C8B-B14F-4D97-AF65-F5344CB8AC3E}">
-        <p14:creationId xmlns:p14="http://schemas.microsoft.com/office/powerpoint/2010/main" val="3612223792"/>
-      </p:ext>
-    </p:extLst>
   </p:cSld>
   <p:clrMapOvr>
     <a:masterClrMapping/>
@@ -774,6 +1931,7 @@
               <a:rPr lang="en-US" smtClean="0"/>
               <a:t>Click to edit Master text styles</a:t>
             </a:r>
+            <a:endParaRPr lang="en-US" smtClean="0"/>
           </a:p>
           <a:p>
             <a:pPr lvl="1"/>
@@ -781,6 +1939,7 @@
               <a:rPr lang="en-US" smtClean="0"/>
               <a:t>Second level</a:t>
             </a:r>
+            <a:endParaRPr lang="en-US" smtClean="0"/>
           </a:p>
           <a:p>
             <a:pPr lvl="2"/>
@@ -788,6 +1947,7 @@
               <a:rPr lang="en-US" smtClean="0"/>
               <a:t>Third level</a:t>
             </a:r>
+            <a:endParaRPr lang="en-US" smtClean="0"/>
           </a:p>
           <a:p>
             <a:pPr lvl="3"/>
@@ -795,6 +1955,7 @@
               <a:rPr lang="en-US" smtClean="0"/>
               <a:t>Fourth level</a:t>
             </a:r>
+            <a:endParaRPr lang="en-US" smtClean="0"/>
           </a:p>
           <a:p>
             <a:pPr lvl="4"/>
@@ -823,7 +1984,6 @@
           <a:p>
             <a:fld id="{5BCAD085-E8A6-8845-BD4E-CB4CCA059FC4}" type="datetimeFigureOut">
               <a:rPr lang="en-US" smtClean="0"/>
-              <a:t>1/27/13</a:t>
             </a:fld>
             <a:endParaRPr lang="en-US"/>
           </a:p>
@@ -865,18 +2025,12 @@
           <a:p>
             <a:fld id="{C1FF6DA9-008F-8B48-92A6-B652298478BF}" type="slidenum">
               <a:rPr lang="en-US" smtClean="0"/>
-              <a:t>‹#›</a:t>
             </a:fld>
             <a:endParaRPr lang="en-US"/>
           </a:p>
         </p:txBody>
       </p:sp>
     </p:spTree>
-    <p:extLst>
-      <p:ext uri="{BB962C8B-B14F-4D97-AF65-F5344CB8AC3E}">
-        <p14:creationId xmlns:p14="http://schemas.microsoft.com/office/powerpoint/2010/main" val="2614314258"/>
-      </p:ext>
-    </p:extLst>
   </p:cSld>
   <p:clrMapOvr>
     <a:masterClrMapping/>
@@ -1049,6 +2203,7 @@
               <a:rPr lang="en-US" smtClean="0"/>
               <a:t>Click to edit Master text styles</a:t>
             </a:r>
+            <a:endParaRPr lang="en-US" smtClean="0"/>
           </a:p>
         </p:txBody>
       </p:sp>
@@ -1069,7 +2224,6 @@
           <a:p>
             <a:fld id="{5BCAD085-E8A6-8845-BD4E-CB4CCA059FC4}" type="datetimeFigureOut">
               <a:rPr lang="en-US" smtClean="0"/>
-              <a:t>1/27/13</a:t>
             </a:fld>
             <a:endParaRPr lang="en-US"/>
           </a:p>
@@ -1111,18 +2265,12 @@
           <a:p>
             <a:fld id="{C1FF6DA9-008F-8B48-92A6-B652298478BF}" type="slidenum">
               <a:rPr lang="en-US" smtClean="0"/>
-              <a:t>‹#›</a:t>
             </a:fld>
             <a:endParaRPr lang="en-US"/>
           </a:p>
         </p:txBody>
       </p:sp>
     </p:spTree>
-    <p:extLst>
-      <p:ext uri="{BB962C8B-B14F-4D97-AF65-F5344CB8AC3E}">
-        <p14:creationId xmlns:p14="http://schemas.microsoft.com/office/powerpoint/2010/main" val="960648375"/>
-      </p:ext>
-    </p:extLst>
   </p:cSld>
   <p:clrMapOvr>
     <a:masterClrMapping/>
@@ -1223,6 +2371,7 @@
               <a:rPr lang="en-US" smtClean="0"/>
               <a:t>Click to edit Master text styles</a:t>
             </a:r>
+            <a:endParaRPr lang="en-US" smtClean="0"/>
           </a:p>
           <a:p>
             <a:pPr lvl="1"/>
@@ -1230,6 +2379,7 @@
               <a:rPr lang="en-US" smtClean="0"/>
               <a:t>Second level</a:t>
             </a:r>
+            <a:endParaRPr lang="en-US" smtClean="0"/>
           </a:p>
           <a:p>
             <a:pPr lvl="2"/>
@@ -1237,6 +2387,7 @@
               <a:rPr lang="en-US" smtClean="0"/>
               <a:t>Third level</a:t>
             </a:r>
+            <a:endParaRPr lang="en-US" smtClean="0"/>
           </a:p>
           <a:p>
             <a:pPr lvl="3"/>
@@ -1244,6 +2395,7 @@
               <a:rPr lang="en-US" smtClean="0"/>
               <a:t>Fourth level</a:t>
             </a:r>
+            <a:endParaRPr lang="en-US" smtClean="0"/>
           </a:p>
           <a:p>
             <a:pPr lvl="4"/>
@@ -1308,6 +2460,7 @@
               <a:rPr lang="en-US" smtClean="0"/>
               <a:t>Click to edit Master text styles</a:t>
             </a:r>
+            <a:endParaRPr lang="en-US" smtClean="0"/>
           </a:p>
           <a:p>
             <a:pPr lvl="1"/>
@@ -1315,6 +2468,7 @@
               <a:rPr lang="en-US" smtClean="0"/>
               <a:t>Second level</a:t>
             </a:r>
+            <a:endParaRPr lang="en-US" smtClean="0"/>
           </a:p>
           <a:p>
             <a:pPr lvl="2"/>
@@ -1322,6 +2476,7 @@
               <a:rPr lang="en-US" smtClean="0"/>
               <a:t>Third level</a:t>
             </a:r>
+            <a:endParaRPr lang="en-US" smtClean="0"/>
           </a:p>
           <a:p>
             <a:pPr lvl="3"/>
@@ -1329,6 +2484,7 @@
               <a:rPr lang="en-US" smtClean="0"/>
               <a:t>Fourth level</a:t>
             </a:r>
+            <a:endParaRPr lang="en-US" smtClean="0"/>
           </a:p>
           <a:p>
             <a:pPr lvl="4"/>
@@ -1357,7 +2513,6 @@
           <a:p>
             <a:fld id="{5BCAD085-E8A6-8845-BD4E-CB4CCA059FC4}" type="datetimeFigureOut">
               <a:rPr lang="en-US" smtClean="0"/>
-              <a:t>1/27/13</a:t>
             </a:fld>
             <a:endParaRPr lang="en-US"/>
           </a:p>
@@ -1399,18 +2554,12 @@
           <a:p>
             <a:fld id="{C1FF6DA9-008F-8B48-92A6-B652298478BF}" type="slidenum">
               <a:rPr lang="en-US" smtClean="0"/>
-              <a:t>‹#›</a:t>
             </a:fld>
             <a:endParaRPr lang="en-US"/>
           </a:p>
         </p:txBody>
       </p:sp>
     </p:spTree>
-    <p:extLst>
-      <p:ext uri="{BB962C8B-B14F-4D97-AF65-F5344CB8AC3E}">
-        <p14:creationId xmlns:p14="http://schemas.microsoft.com/office/powerpoint/2010/main" val="2782244947"/>
-      </p:ext>
-    </p:extLst>
   </p:cSld>
   <p:clrMapOvr>
     <a:masterClrMapping/>
@@ -1524,6 +2673,7 @@
               <a:rPr lang="en-US" smtClean="0"/>
               <a:t>Click to edit Master text styles</a:t>
             </a:r>
+            <a:endParaRPr lang="en-US" smtClean="0"/>
           </a:p>
         </p:txBody>
       </p:sp>
@@ -1580,6 +2730,7 @@
               <a:rPr lang="en-US" smtClean="0"/>
               <a:t>Click to edit Master text styles</a:t>
             </a:r>
+            <a:endParaRPr lang="en-US" smtClean="0"/>
           </a:p>
           <a:p>
             <a:pPr lvl="1"/>
@@ -1587,6 +2738,7 @@
               <a:rPr lang="en-US" smtClean="0"/>
               <a:t>Second level</a:t>
             </a:r>
+            <a:endParaRPr lang="en-US" smtClean="0"/>
           </a:p>
           <a:p>
             <a:pPr lvl="2"/>
@@ -1594,6 +2746,7 @@
               <a:rPr lang="en-US" smtClean="0"/>
               <a:t>Third level</a:t>
             </a:r>
+            <a:endParaRPr lang="en-US" smtClean="0"/>
           </a:p>
           <a:p>
             <a:pPr lvl="3"/>
@@ -1601,6 +2754,7 @@
               <a:rPr lang="en-US" smtClean="0"/>
               <a:t>Fourth level</a:t>
             </a:r>
+            <a:endParaRPr lang="en-US" smtClean="0"/>
           </a:p>
           <a:p>
             <a:pPr lvl="4"/>
@@ -1674,6 +2828,7 @@
               <a:rPr lang="en-US" smtClean="0"/>
               <a:t>Click to edit Master text styles</a:t>
             </a:r>
+            <a:endParaRPr lang="en-US" smtClean="0"/>
           </a:p>
         </p:txBody>
       </p:sp>
@@ -1730,6 +2885,7 @@
               <a:rPr lang="en-US" smtClean="0"/>
               <a:t>Click to edit Master text styles</a:t>
             </a:r>
+            <a:endParaRPr lang="en-US" smtClean="0"/>
           </a:p>
           <a:p>
             <a:pPr lvl="1"/>
@@ -1737,6 +2893,7 @@
               <a:rPr lang="en-US" smtClean="0"/>
               <a:t>Second level</a:t>
             </a:r>
+            <a:endParaRPr lang="en-US" smtClean="0"/>
           </a:p>
           <a:p>
             <a:pPr lvl="2"/>
@@ -1744,6 +2901,7 @@
               <a:rPr lang="en-US" smtClean="0"/>
               <a:t>Third level</a:t>
             </a:r>
+            <a:endParaRPr lang="en-US" smtClean="0"/>
           </a:p>
           <a:p>
             <a:pPr lvl="3"/>
@@ -1751,6 +2909,7 @@
               <a:rPr lang="en-US" smtClean="0"/>
               <a:t>Fourth level</a:t>
             </a:r>
+            <a:endParaRPr lang="en-US" smtClean="0"/>
           </a:p>
           <a:p>
             <a:pPr lvl="4"/>
@@ -1779,7 +2938,6 @@
           <a:p>
             <a:fld id="{5BCAD085-E8A6-8845-BD4E-CB4CCA059FC4}" type="datetimeFigureOut">
               <a:rPr lang="en-US" smtClean="0"/>
-              <a:t>1/27/13</a:t>
             </a:fld>
             <a:endParaRPr lang="en-US"/>
           </a:p>
@@ -1821,18 +2979,12 @@
           <a:p>
             <a:fld id="{C1FF6DA9-008F-8B48-92A6-B652298478BF}" type="slidenum">
               <a:rPr lang="en-US" smtClean="0"/>
-              <a:t>‹#›</a:t>
             </a:fld>
             <a:endParaRPr lang="en-US"/>
           </a:p>
         </p:txBody>
       </p:sp>
     </p:spTree>
-    <p:extLst>
-      <p:ext uri="{BB962C8B-B14F-4D97-AF65-F5344CB8AC3E}">
-        <p14:creationId xmlns:p14="http://schemas.microsoft.com/office/powerpoint/2010/main" val="990158736"/>
-      </p:ext>
-    </p:extLst>
   </p:cSld>
   <p:clrMapOvr>
     <a:masterClrMapping/>
@@ -1897,7 +3049,6 @@
           <a:p>
             <a:fld id="{5BCAD085-E8A6-8845-BD4E-CB4CCA059FC4}" type="datetimeFigureOut">
               <a:rPr lang="en-US" smtClean="0"/>
-              <a:t>1/27/13</a:t>
             </a:fld>
             <a:endParaRPr lang="en-US"/>
           </a:p>
@@ -1939,18 +3090,12 @@
           <a:p>
             <a:fld id="{C1FF6DA9-008F-8B48-92A6-B652298478BF}" type="slidenum">
               <a:rPr lang="en-US" smtClean="0"/>
-              <a:t>‹#›</a:t>
             </a:fld>
             <a:endParaRPr lang="en-US"/>
           </a:p>
         </p:txBody>
       </p:sp>
     </p:spTree>
-    <p:extLst>
-      <p:ext uri="{BB962C8B-B14F-4D97-AF65-F5344CB8AC3E}">
-        <p14:creationId xmlns:p14="http://schemas.microsoft.com/office/powerpoint/2010/main" val="727027711"/>
-      </p:ext>
-    </p:extLst>
   </p:cSld>
   <p:clrMapOvr>
     <a:masterClrMapping/>
@@ -1992,7 +3137,6 @@
           <a:p>
             <a:fld id="{5BCAD085-E8A6-8845-BD4E-CB4CCA059FC4}" type="datetimeFigureOut">
               <a:rPr lang="en-US" smtClean="0"/>
-              <a:t>1/27/13</a:t>
             </a:fld>
             <a:endParaRPr lang="en-US"/>
           </a:p>
@@ -2034,18 +3178,12 @@
           <a:p>
             <a:fld id="{C1FF6DA9-008F-8B48-92A6-B652298478BF}" type="slidenum">
               <a:rPr lang="en-US" smtClean="0"/>
-              <a:t>‹#›</a:t>
             </a:fld>
             <a:endParaRPr lang="en-US"/>
           </a:p>
         </p:txBody>
       </p:sp>
     </p:spTree>
-    <p:extLst>
-      <p:ext uri="{BB962C8B-B14F-4D97-AF65-F5344CB8AC3E}">
-        <p14:creationId xmlns:p14="http://schemas.microsoft.com/office/powerpoint/2010/main" val="1212999818"/>
-      </p:ext>
-    </p:extLst>
   </p:cSld>
   <p:clrMapOvr>
     <a:masterClrMapping/>
@@ -2155,6 +3293,7 @@
               <a:rPr lang="en-US" smtClean="0"/>
               <a:t>Click to edit Master text styles</a:t>
             </a:r>
+            <a:endParaRPr lang="en-US" smtClean="0"/>
           </a:p>
           <a:p>
             <a:pPr lvl="1"/>
@@ -2162,6 +3301,7 @@
               <a:rPr lang="en-US" smtClean="0"/>
               <a:t>Second level</a:t>
             </a:r>
+            <a:endParaRPr lang="en-US" smtClean="0"/>
           </a:p>
           <a:p>
             <a:pPr lvl="2"/>
@@ -2169,6 +3309,7 @@
               <a:rPr lang="en-US" smtClean="0"/>
               <a:t>Third level</a:t>
             </a:r>
+            <a:endParaRPr lang="en-US" smtClean="0"/>
           </a:p>
           <a:p>
             <a:pPr lvl="3"/>
@@ -2176,6 +3317,7 @@
               <a:rPr lang="en-US" smtClean="0"/>
               <a:t>Fourth level</a:t>
             </a:r>
+            <a:endParaRPr lang="en-US" smtClean="0"/>
           </a:p>
           <a:p>
             <a:pPr lvl="4"/>
@@ -2249,6 +3391,7 @@
               <a:rPr lang="en-US" smtClean="0"/>
               <a:t>Click to edit Master text styles</a:t>
             </a:r>
+            <a:endParaRPr lang="en-US" smtClean="0"/>
           </a:p>
         </p:txBody>
       </p:sp>
@@ -2269,7 +3412,6 @@
           <a:p>
             <a:fld id="{5BCAD085-E8A6-8845-BD4E-CB4CCA059FC4}" type="datetimeFigureOut">
               <a:rPr lang="en-US" smtClean="0"/>
-              <a:t>1/27/13</a:t>
             </a:fld>
             <a:endParaRPr lang="en-US"/>
           </a:p>
@@ -2311,18 +3453,12 @@
           <a:p>
             <a:fld id="{C1FF6DA9-008F-8B48-92A6-B652298478BF}" type="slidenum">
               <a:rPr lang="en-US" smtClean="0"/>
-              <a:t>‹#›</a:t>
             </a:fld>
             <a:endParaRPr lang="en-US"/>
           </a:p>
         </p:txBody>
       </p:sp>
     </p:spTree>
-    <p:extLst>
-      <p:ext uri="{BB962C8B-B14F-4D97-AF65-F5344CB8AC3E}">
-        <p14:creationId xmlns:p14="http://schemas.microsoft.com/office/powerpoint/2010/main" val="1840726560"/>
-      </p:ext>
-    </p:extLst>
   </p:cSld>
   <p:clrMapOvr>
     <a:masterClrMapping/>
@@ -2502,6 +3638,7 @@
               <a:rPr lang="en-US" smtClean="0"/>
               <a:t>Click to edit Master text styles</a:t>
             </a:r>
+            <a:endParaRPr lang="en-US" smtClean="0"/>
           </a:p>
         </p:txBody>
       </p:sp>
@@ -2522,7 +3659,6 @@
           <a:p>
             <a:fld id="{5BCAD085-E8A6-8845-BD4E-CB4CCA059FC4}" type="datetimeFigureOut">
               <a:rPr lang="en-US" smtClean="0"/>
-              <a:t>1/27/13</a:t>
             </a:fld>
             <a:endParaRPr lang="en-US"/>
           </a:p>
@@ -2564,18 +3700,12 @@
           <a:p>
             <a:fld id="{C1FF6DA9-008F-8B48-92A6-B652298478BF}" type="slidenum">
               <a:rPr lang="en-US" smtClean="0"/>
-              <a:t>‹#›</a:t>
             </a:fld>
             <a:endParaRPr lang="en-US"/>
           </a:p>
         </p:txBody>
       </p:sp>
     </p:spTree>
-    <p:extLst>
-      <p:ext uri="{BB962C8B-B14F-4D97-AF65-F5344CB8AC3E}">
-        <p14:creationId xmlns:p14="http://schemas.microsoft.com/office/powerpoint/2010/main" val="3889236939"/>
-      </p:ext>
-    </p:extLst>
   </p:cSld>
   <p:clrMapOvr>
     <a:masterClrMapping/>
@@ -2668,6 +3798,7 @@
               <a:rPr lang="en-US" smtClean="0"/>
               <a:t>Click to edit Master text styles</a:t>
             </a:r>
+            <a:endParaRPr lang="en-US" smtClean="0"/>
           </a:p>
           <a:p>
             <a:pPr lvl="1"/>
@@ -2675,6 +3806,7 @@
               <a:rPr lang="en-US" smtClean="0"/>
               <a:t>Second level</a:t>
             </a:r>
+            <a:endParaRPr lang="en-US" smtClean="0"/>
           </a:p>
           <a:p>
             <a:pPr lvl="2"/>
@@ -2682,6 +3814,7 @@
               <a:rPr lang="en-US" smtClean="0"/>
               <a:t>Third level</a:t>
             </a:r>
+            <a:endParaRPr lang="en-US" smtClean="0"/>
           </a:p>
           <a:p>
             <a:pPr lvl="3"/>
@@ -2689,6 +3822,7 @@
               <a:rPr lang="en-US" smtClean="0"/>
               <a:t>Fourth level</a:t>
             </a:r>
+            <a:endParaRPr lang="en-US" smtClean="0"/>
           </a:p>
           <a:p>
             <a:pPr lvl="4"/>
@@ -2735,7 +3869,6 @@
           <a:p>
             <a:fld id="{5BCAD085-E8A6-8845-BD4E-CB4CCA059FC4}" type="datetimeFigureOut">
               <a:rPr lang="en-US" smtClean="0"/>
-              <a:t>1/27/13</a:t>
             </a:fld>
             <a:endParaRPr lang="en-US"/>
           </a:p>
@@ -2813,18 +3946,12 @@
           <a:p>
             <a:fld id="{C1FF6DA9-008F-8B48-92A6-B652298478BF}" type="slidenum">
               <a:rPr lang="en-US" smtClean="0"/>
-              <a:t>‹#›</a:t>
             </a:fld>
             <a:endParaRPr lang="en-US"/>
           </a:p>
         </p:txBody>
       </p:sp>
     </p:spTree>
-    <p:extLst>
-      <p:ext uri="{BB962C8B-B14F-4D97-AF65-F5344CB8AC3E}">
-        <p14:creationId xmlns:p14="http://schemas.microsoft.com/office/powerpoint/2010/main" val="2209977519"/>
-      </p:ext>
-    </p:extLst>
   </p:cSld>
   <p:clrMap bg1="lt1" tx1="dk1" bg2="lt2" tx2="dk2" accent1="accent1" accent2="accent2" accent3="accent3" accent4="accent4" accent5="accent5" accent6="accent6" hlink="hlink" folHlink="folHlink"/>
   <p:sldLayoutIdLst>
@@ -2862,7 +3989,7 @@
         <a:spcBef>
           <a:spcPct val="20000"/>
         </a:spcBef>
-        <a:buFont typeface="Arial"/>
+        <a:buFont typeface="Arial" panose="020B0604020202020204"/>
         <a:buChar char="•"/>
         <a:defRPr sz="3200" kern="1200">
           <a:solidFill>
@@ -2877,7 +4004,7 @@
         <a:spcBef>
           <a:spcPct val="20000"/>
         </a:spcBef>
-        <a:buFont typeface="Arial"/>
+        <a:buFont typeface="Arial" panose="020B0604020202020204"/>
         <a:buChar char="–"/>
         <a:defRPr sz="2800" kern="1200">
           <a:solidFill>
@@ -2892,7 +4019,7 @@
         <a:spcBef>
           <a:spcPct val="20000"/>
         </a:spcBef>
-        <a:buFont typeface="Arial"/>
+        <a:buFont typeface="Arial" panose="020B0604020202020204"/>
         <a:buChar char="•"/>
         <a:defRPr sz="2400" kern="1200">
           <a:solidFill>
@@ -2907,7 +4034,7 @@
         <a:spcBef>
           <a:spcPct val="20000"/>
         </a:spcBef>
-        <a:buFont typeface="Arial"/>
+        <a:buFont typeface="Arial" panose="020B0604020202020204"/>
         <a:buChar char="–"/>
         <a:defRPr sz="2000" kern="1200">
           <a:solidFill>
@@ -2922,7 +4049,7 @@
         <a:spcBef>
           <a:spcPct val="20000"/>
         </a:spcBef>
-        <a:buFont typeface="Arial"/>
+        <a:buFont typeface="Arial" panose="020B0604020202020204"/>
         <a:buChar char="»"/>
         <a:defRPr sz="2000" kern="1200">
           <a:solidFill>
@@ -2937,7 +4064,7 @@
         <a:spcBef>
           <a:spcPct val="20000"/>
         </a:spcBef>
-        <a:buFont typeface="Arial"/>
+        <a:buFont typeface="Arial" panose="020B0604020202020204"/>
         <a:buChar char="•"/>
         <a:defRPr sz="2000" kern="1200">
           <a:solidFill>
@@ -2952,7 +4079,7 @@
         <a:spcBef>
           <a:spcPct val="20000"/>
         </a:spcBef>
-        <a:buFont typeface="Arial"/>
+        <a:buFont typeface="Arial" panose="020B0604020202020204"/>
         <a:buChar char="•"/>
         <a:defRPr sz="2000" kern="1200">
           <a:solidFill>
@@ -2967,7 +4094,7 @@
         <a:spcBef>
           <a:spcPct val="20000"/>
         </a:spcBef>
-        <a:buFont typeface="Arial"/>
+        <a:buFont typeface="Arial" panose="020B0604020202020204"/>
         <a:buChar char="•"/>
         <a:defRPr sz="2000" kern="1200">
           <a:solidFill>
@@ -2982,7 +4109,7 @@
         <a:spcBef>
           <a:spcPct val="20000"/>
         </a:spcBef>
-        <a:buFont typeface="Arial"/>
+        <a:buFont typeface="Arial" panose="020B0604020202020204"/>
         <a:buChar char="•"/>
         <a:defRPr sz="2000" kern="1200">
           <a:solidFill>
@@ -3094,7 +4221,7 @@
 </file>
 
 <file path=ppt/slides/slide1.xml><?xml version="1.0" encoding="utf-8"?>
-<p:sld xmlns:a="http://schemas.openxmlformats.org/drawingml/2006/main" xmlns:p="http://schemas.openxmlformats.org/presentationml/2006/main" xmlns:r="http://schemas.openxmlformats.org/officeDocument/2006/relationships">
+<p:sld xmlns:a="http://schemas.openxmlformats.org/drawingml/2006/main" xmlns:r="http://schemas.openxmlformats.org/officeDocument/2006/relationships" xmlns:p="http://schemas.openxmlformats.org/presentationml/2006/main">
   <p:cSld>
     <p:bg>
       <p:bgPr>
@@ -3120,7 +4247,7 @@
         <p:spPr>
           <a:xfrm>
             <a:off x="640080" y="2377440"/>
-            <a:ext cx="10972800" cy="1097280"/>
+            <a:ext cx="10972800" cy="1014730"/>
           </a:xfrm>
           <a:prstGeom prst="rect">
             <a:avLst/>
@@ -3135,26 +4262,31 @@
           <a:p>
             <a:pPr algn="l"/>
             <a:r>
-              <a:rPr sz="4800" b="1">
+              <a:rPr sz="6000" b="1">
                 <a:solidFill>
                   <a:srgbClr val="FFFFFF"/>
                 </a:solidFill>
               </a:rPr>
               <a:t>Payments Processing System</a:t>
             </a:r>
-          </a:p>
-        </p:txBody>
-      </p:sp>
-      <p:sp>
-        <p:nvSpPr>
-          <p:cNvPr id="3" name="TextBox 2"/>
+            <a:endParaRPr sz="6000" b="1">
+              <a:solidFill>
+                <a:srgbClr val="FFFFFF"/>
+              </a:solidFill>
+            </a:endParaRPr>
+          </a:p>
+        </p:txBody>
+      </p:sp>
+      <p:sp>
+        <p:nvSpPr>
+          <p:cNvPr id="4" name="TextBox 3"/>
           <p:cNvSpPr txBox="1"/>
           <p:nvPr/>
         </p:nvSpPr>
         <p:spPr>
           <a:xfrm>
-            <a:off x="640080" y="3291840"/>
-            <a:ext cx="10972800" cy="731520"/>
+            <a:off x="640080" y="3931920"/>
+            <a:ext cx="10972800" cy="460375"/>
           </a:xfrm>
           <a:prstGeom prst="rect">
             <a:avLst/>
@@ -3168,46 +4300,18 @@
           <a:lstStyle/>
           <a:p>
             <a:r>
-              <a:rPr sz="2000">
-                <a:solidFill>
-                  <a:srgbClr val="DBEAFE"/>
-                </a:solidFill>
-              </a:rPr>
-              <a:t>支付处理生命周期管理系统 —— 课程项目答辩</a:t>
-            </a:r>
-          </a:p>
-        </p:txBody>
-      </p:sp>
-      <p:sp>
-        <p:nvSpPr>
-          <p:cNvPr id="4" name="TextBox 3"/>
-          <p:cNvSpPr txBox="1"/>
-          <p:nvPr/>
-        </p:nvSpPr>
-        <p:spPr>
-          <a:xfrm>
-            <a:off x="640080" y="3931920"/>
-            <a:ext cx="10972800" cy="731520"/>
-          </a:xfrm>
-          <a:prstGeom prst="rect">
-            <a:avLst/>
-          </a:prstGeom>
-          <a:noFill/>
-        </p:spPr>
-        <p:txBody>
-          <a:bodyPr wrap="square">
-            <a:spAutoFit/>
-          </a:bodyPr>
-          <a:lstStyle/>
-          <a:p>
-            <a:r>
-              <a:rPr sz="1600">
+              <a:rPr sz="2400">
                 <a:solidFill>
                   <a:srgbClr val="DBEAFE"/>
                 </a:solidFill>
               </a:rPr>
               <a:t>Spring Boot 3 + MyBatis-Plus + MySQL  |  Vue 3 + Element Plus + vue-i18n</a:t>
             </a:r>
+            <a:endParaRPr sz="2400">
+              <a:solidFill>
+                <a:srgbClr val="DBEAFE"/>
+              </a:solidFill>
+            </a:endParaRPr>
           </a:p>
         </p:txBody>
       </p:sp>
@@ -3220,7 +4324,211 @@
 </file>
 
 <file path=ppt/slides/slide10.xml><?xml version="1.0" encoding="utf-8"?>
-<p:sld xmlns:a="http://schemas.openxmlformats.org/drawingml/2006/main" xmlns:p="http://schemas.openxmlformats.org/presentationml/2006/main" xmlns:r="http://schemas.openxmlformats.org/officeDocument/2006/relationships">
+<p:sld xmlns:a="http://schemas.openxmlformats.org/drawingml/2006/main" xmlns:r="http://schemas.openxmlformats.org/officeDocument/2006/relationships" xmlns:p="http://schemas.openxmlformats.org/presentationml/2006/main">
+  <p:cSld>
+    <p:spTree>
+      <p:nvGrpSpPr>
+        <p:cNvPr id="1" name=""/>
+        <p:cNvGrpSpPr/>
+        <p:nvPr/>
+      </p:nvGrpSpPr>
+      <p:grpSpPr/>
+      <p:pic>
+        <p:nvPicPr>
+          <p:cNvPr id="5" name="图片 4"/>
+          <p:cNvPicPr>
+            <a:picLocks noChangeAspect="1"/>
+          </p:cNvPicPr>
+          <p:nvPr/>
+        </p:nvPicPr>
+        <p:blipFill>
+          <a:blip r:embed="rId1"/>
+          <a:stretch>
+            <a:fillRect/>
+          </a:stretch>
+        </p:blipFill>
+        <p:spPr>
+          <a:xfrm>
+            <a:off x="190219" y="52788"/>
+            <a:ext cx="6021517" cy="3224456"/>
+          </a:xfrm>
+          <a:prstGeom prst="rect">
+            <a:avLst/>
+          </a:prstGeom>
+        </p:spPr>
+      </p:pic>
+      <p:pic>
+        <p:nvPicPr>
+          <p:cNvPr id="7" name="图片 6"/>
+          <p:cNvPicPr>
+            <a:picLocks noChangeAspect="1"/>
+          </p:cNvPicPr>
+          <p:nvPr/>
+        </p:nvPicPr>
+        <p:blipFill>
+          <a:blip r:embed="rId2"/>
+          <a:stretch>
+            <a:fillRect/>
+          </a:stretch>
+        </p:blipFill>
+        <p:spPr>
+          <a:xfrm>
+            <a:off x="6696371" y="0"/>
+            <a:ext cx="4481256" cy="3567143"/>
+          </a:xfrm>
+          <a:prstGeom prst="rect">
+            <a:avLst/>
+          </a:prstGeom>
+        </p:spPr>
+      </p:pic>
+      <p:pic>
+        <p:nvPicPr>
+          <p:cNvPr id="11" name="图片 10"/>
+          <p:cNvPicPr>
+            <a:picLocks noChangeAspect="1"/>
+          </p:cNvPicPr>
+          <p:nvPr/>
+        </p:nvPicPr>
+        <p:blipFill>
+          <a:blip r:embed="rId3"/>
+          <a:stretch>
+            <a:fillRect/>
+          </a:stretch>
+        </p:blipFill>
+        <p:spPr>
+          <a:xfrm>
+            <a:off x="6476912" y="3616894"/>
+            <a:ext cx="5671735" cy="3006108"/>
+          </a:xfrm>
+          <a:prstGeom prst="rect">
+            <a:avLst/>
+          </a:prstGeom>
+        </p:spPr>
+      </p:pic>
+      <p:pic>
+        <p:nvPicPr>
+          <p:cNvPr id="15" name="图片 14"/>
+          <p:cNvPicPr>
+            <a:picLocks noChangeAspect="1"/>
+          </p:cNvPicPr>
+          <p:nvPr/>
+        </p:nvPicPr>
+        <p:blipFill>
+          <a:blip r:embed="rId4"/>
+          <a:stretch>
+            <a:fillRect/>
+          </a:stretch>
+        </p:blipFill>
+        <p:spPr>
+          <a:xfrm>
+            <a:off x="276870" y="3429000"/>
+            <a:ext cx="6108168" cy="3194002"/>
+          </a:xfrm>
+          <a:prstGeom prst="rect">
+            <a:avLst/>
+          </a:prstGeom>
+        </p:spPr>
+      </p:pic>
+    </p:spTree>
+  </p:cSld>
+  <p:clrMapOvr>
+    <a:masterClrMapping/>
+  </p:clrMapOvr>
+</p:sld>
+</file>
+
+<file path=ppt/slides/slide11.xml><?xml version="1.0" encoding="utf-8"?>
+<p:sld xmlns:a="http://schemas.openxmlformats.org/drawingml/2006/main" xmlns:r="http://schemas.openxmlformats.org/officeDocument/2006/relationships" xmlns:p="http://schemas.openxmlformats.org/presentationml/2006/main">
+  <p:cSld>
+    <p:spTree>
+      <p:nvGrpSpPr>
+        <p:cNvPr id="1" name=""/>
+        <p:cNvGrpSpPr/>
+        <p:nvPr/>
+      </p:nvGrpSpPr>
+      <p:grpSpPr/>
+      <p:pic>
+        <p:nvPicPr>
+          <p:cNvPr id="4" name="图片 3"/>
+          <p:cNvPicPr/>
+          <p:nvPr/>
+        </p:nvPicPr>
+        <p:blipFill>
+          <a:blip r:embed="rId1"/>
+          <a:stretch>
+            <a:fillRect/>
+          </a:stretch>
+        </p:blipFill>
+        <p:spPr>
+          <a:xfrm>
+            <a:off x="318770" y="2159000"/>
+            <a:ext cx="11553825" cy="2950210"/>
+          </a:xfrm>
+          <a:prstGeom prst="rect">
+            <a:avLst/>
+          </a:prstGeom>
+        </p:spPr>
+      </p:pic>
+      <p:sp>
+        <p:nvSpPr>
+          <p:cNvPr id="5" name="文本框 4"/>
+          <p:cNvSpPr txBox="1"/>
+          <p:nvPr/>
+        </p:nvSpPr>
+        <p:spPr>
+          <a:xfrm>
+            <a:off x="598805" y="354330"/>
+            <a:ext cx="6096000" cy="583565"/>
+          </a:xfrm>
+          <a:prstGeom prst="rect">
+            <a:avLst/>
+          </a:prstGeom>
+          <a:noFill/>
+        </p:spPr>
+        <p:txBody>
+          <a:bodyPr wrap="square" rtlCol="0" anchor="t">
+            <a:spAutoFit/>
+          </a:bodyPr>
+          <a:p>
+            <a:pPr defTabSz="457200">
+              <a:lnSpc>
+                <a:spcPct val="100000"/>
+              </a:lnSpc>
+            </a:pPr>
+            <a:r>
+              <a:rPr lang="en-US" sz="3200" b="1">
+                <a:solidFill>
+                  <a:srgbClr val="1F2329"/>
+                </a:solidFill>
+                <a:effectLst/>
+                <a:uFillTx/>
+                <a:latin typeface="Calibri" panose="020F0502020204030204"/>
+                <a:sym typeface="+mn-ea"/>
+              </a:rPr>
+              <a:t>Felix W H Gou’s Contribution</a:t>
+            </a:r>
+            <a:endParaRPr lang="en-US" altLang="en-US" sz="3200" b="1">
+              <a:solidFill>
+                <a:srgbClr val="1F2329"/>
+              </a:solidFill>
+              <a:effectLst/>
+              <a:uFillTx/>
+              <a:latin typeface="Calibri" panose="020F0502020204030204"/>
+              <a:sym typeface="+mn-ea"/>
+            </a:endParaRPr>
+          </a:p>
+        </p:txBody>
+      </p:sp>
+    </p:spTree>
+  </p:cSld>
+  <p:clrMapOvr>
+    <a:masterClrMapping/>
+  </p:clrMapOvr>
+</p:sld>
+</file>
+
+<file path=ppt/slides/slide12.xml><?xml version="1.0" encoding="utf-8"?>
+<p:sld xmlns:a="http://schemas.openxmlformats.org/drawingml/2006/main" xmlns:r="http://schemas.openxmlformats.org/officeDocument/2006/relationships" xmlns:p="http://schemas.openxmlformats.org/presentationml/2006/main">
   <p:cSld>
     <p:bg>
       <p:bgPr>
@@ -3237,16 +4545,795 @@
         <p:nvPr/>
       </p:nvGrpSpPr>
       <p:grpSpPr/>
-      <p:sp>
-        <p:nvSpPr>
-          <p:cNvPr id="2" name="TextBox 1"/>
+      <p:grpSp>
+        <p:nvGrpSpPr>
+          <p:cNvPr id="24" name="组合 23"/>
+          <p:cNvGrpSpPr/>
+          <p:nvPr/>
+        </p:nvGrpSpPr>
+        <p:grpSpPr>
+          <a:xfrm>
+            <a:off x="454978" y="1341120"/>
+            <a:ext cx="11430000" cy="5303520"/>
+            <a:chOff x="1224" y="2592"/>
+            <a:chExt cx="18000" cy="8352"/>
+          </a:xfrm>
+        </p:grpSpPr>
+        <p:sp>
+          <p:nvSpPr>
+            <p:cNvPr id="4" name="Rounded Rectangle 2"/>
+            <p:cNvSpPr/>
+            <p:nvPr/>
+          </p:nvSpPr>
+          <p:spPr>
+            <a:xfrm>
+              <a:off x="1224" y="2592"/>
+              <a:ext cx="8352" cy="3744"/>
+            </a:xfrm>
+            <a:prstGeom prst="roundRect">
+              <a:avLst/>
+            </a:prstGeom>
+            <a:solidFill>
+              <a:srgbClr val="FFFFFF"/>
+            </a:solidFill>
+            <a:ln w="12700">
+              <a:solidFill>
+                <a:srgbClr val="E8E8E8"/>
+              </a:solidFill>
+            </a:ln>
+          </p:spPr>
+          <p:style>
+            <a:lnRef idx="1">
+              <a:schemeClr val="accent1"/>
+            </a:lnRef>
+            <a:fillRef idx="3">
+              <a:schemeClr val="accent1"/>
+            </a:fillRef>
+            <a:effectRef idx="2">
+              <a:schemeClr val="accent1"/>
+            </a:effectRef>
+            <a:fontRef idx="minor">
+              <a:schemeClr val="lt1"/>
+            </a:fontRef>
+          </p:style>
+          <p:txBody>
+            <a:bodyPr rtlCol="0" anchor="ctr"/>
+            <a:lstStyle/>
+            <a:p>
+              <a:pPr algn="ctr"/>
+            </a:p>
+          </p:txBody>
+        </p:sp>
+        <p:sp>
+          <p:nvSpPr>
+            <p:cNvPr id="5" name="Rectangle 3"/>
+            <p:cNvSpPr/>
+            <p:nvPr/>
+          </p:nvSpPr>
+          <p:spPr>
+            <a:xfrm>
+              <a:off x="1224" y="2592"/>
+              <a:ext cx="8352" cy="115"/>
+            </a:xfrm>
+            <a:prstGeom prst="rect">
+              <a:avLst/>
+            </a:prstGeom>
+            <a:solidFill>
+              <a:srgbClr val="4A90D9"/>
+            </a:solidFill>
+            <a:ln>
+              <a:noFill/>
+            </a:ln>
+          </p:spPr>
+          <p:style>
+            <a:lnRef idx="1">
+              <a:schemeClr val="accent1"/>
+            </a:lnRef>
+            <a:fillRef idx="3">
+              <a:schemeClr val="accent1"/>
+            </a:fillRef>
+            <a:effectRef idx="2">
+              <a:schemeClr val="accent1"/>
+            </a:effectRef>
+            <a:fontRef idx="minor">
+              <a:schemeClr val="lt1"/>
+            </a:fontRef>
+          </p:style>
+          <p:txBody>
+            <a:bodyPr rtlCol="0" anchor="ctr"/>
+            <a:lstStyle/>
+            <a:p>
+              <a:pPr algn="ctr"/>
+            </a:p>
+          </p:txBody>
+        </p:sp>
+        <p:sp>
+          <p:nvSpPr>
+            <p:cNvPr id="6" name="TextBox 4"/>
+            <p:cNvSpPr txBox="1"/>
+            <p:nvPr/>
+          </p:nvSpPr>
+          <p:spPr>
+            <a:xfrm>
+              <a:off x="1728" y="3096"/>
+              <a:ext cx="864" cy="864"/>
+            </a:xfrm>
+            <a:prstGeom prst="rect">
+              <a:avLst/>
+            </a:prstGeom>
+            <a:noFill/>
+          </p:spPr>
+          <p:txBody>
+            <a:bodyPr wrap="none">
+              <a:spAutoFit/>
+            </a:bodyPr>
+            <a:lstStyle/>
+            <a:p>
+              <a:pPr algn="ctr">
+                <a:defRPr sz="2800"/>
+              </a:pPr>
+              <a:r>
+                <a:t>🌐</a:t>
+              </a:r>
+            </a:p>
+          </p:txBody>
+        </p:sp>
+        <p:sp>
+          <p:nvSpPr>
+            <p:cNvPr id="7" name="TextBox 5"/>
+            <p:cNvSpPr txBox="1"/>
+            <p:nvPr/>
+          </p:nvSpPr>
+          <p:spPr>
+            <a:xfrm>
+              <a:off x="1728" y="4032"/>
+              <a:ext cx="7344" cy="720"/>
+            </a:xfrm>
+            <a:prstGeom prst="rect">
+              <a:avLst/>
+            </a:prstGeom>
+            <a:noFill/>
+          </p:spPr>
+          <p:txBody>
+            <a:bodyPr wrap="square">
+              <a:spAutoFit/>
+            </a:bodyPr>
+            <a:lstStyle/>
+            <a:p>
+              <a:pPr>
+                <a:defRPr sz="2000" b="1">
+                  <a:solidFill>
+                    <a:srgbClr val="2D2D2D"/>
+                  </a:solidFill>
+                  <a:latin typeface="Arial" panose="020B0604020202020204"/>
+                </a:defRPr>
+              </a:pPr>
+              <a:r>
+                <a:t>Internationalization (i18n)</a:t>
+              </a:r>
+            </a:p>
+          </p:txBody>
+        </p:sp>
+        <p:sp>
+          <p:nvSpPr>
+            <p:cNvPr id="8" name="TextBox 6"/>
+            <p:cNvSpPr txBox="1"/>
+            <p:nvPr/>
+          </p:nvSpPr>
+          <p:spPr>
+            <a:xfrm>
+              <a:off x="1728" y="4752"/>
+              <a:ext cx="7344" cy="1296"/>
+            </a:xfrm>
+            <a:prstGeom prst="rect">
+              <a:avLst/>
+            </a:prstGeom>
+            <a:noFill/>
+          </p:spPr>
+          <p:txBody>
+            <a:bodyPr wrap="square">
+              <a:spAutoFit/>
+            </a:bodyPr>
+            <a:lstStyle/>
+            <a:p>
+              <a:pPr>
+                <a:defRPr sz="1400">
+                  <a:solidFill>
+                    <a:srgbClr val="666666"/>
+                  </a:solidFill>
+                  <a:latin typeface="Arial" panose="020B0604020202020204"/>
+                </a:defRPr>
+              </a:pPr>
+              <a:r>
+                <a:t>Multi-language support and locale-aware formatting for global users.</a:t>
+              </a:r>
+            </a:p>
+          </p:txBody>
+        </p:sp>
+        <p:sp>
+          <p:nvSpPr>
+            <p:cNvPr id="9" name="Rounded Rectangle 7"/>
+            <p:cNvSpPr/>
+            <p:nvPr/>
+          </p:nvSpPr>
+          <p:spPr>
+            <a:xfrm>
+              <a:off x="10872" y="2592"/>
+              <a:ext cx="8352" cy="3744"/>
+            </a:xfrm>
+            <a:prstGeom prst="roundRect">
+              <a:avLst/>
+            </a:prstGeom>
+            <a:solidFill>
+              <a:srgbClr val="FFFFFF"/>
+            </a:solidFill>
+            <a:ln w="12700">
+              <a:solidFill>
+                <a:srgbClr val="E8E8E8"/>
+              </a:solidFill>
+            </a:ln>
+          </p:spPr>
+          <p:style>
+            <a:lnRef idx="1">
+              <a:schemeClr val="accent1"/>
+            </a:lnRef>
+            <a:fillRef idx="3">
+              <a:schemeClr val="accent1"/>
+            </a:fillRef>
+            <a:effectRef idx="2">
+              <a:schemeClr val="accent1"/>
+            </a:effectRef>
+            <a:fontRef idx="minor">
+              <a:schemeClr val="lt1"/>
+            </a:fontRef>
+          </p:style>
+          <p:txBody>
+            <a:bodyPr rtlCol="0" anchor="ctr"/>
+            <a:lstStyle/>
+            <a:p>
+              <a:pPr algn="ctr"/>
+            </a:p>
+          </p:txBody>
+        </p:sp>
+        <p:sp>
+          <p:nvSpPr>
+            <p:cNvPr id="10" name="Rectangle 8"/>
+            <p:cNvSpPr/>
+            <p:nvPr/>
+          </p:nvSpPr>
+          <p:spPr>
+            <a:xfrm>
+              <a:off x="10872" y="2592"/>
+              <a:ext cx="8352" cy="115"/>
+            </a:xfrm>
+            <a:prstGeom prst="rect">
+              <a:avLst/>
+            </a:prstGeom>
+            <a:solidFill>
+              <a:srgbClr val="7B68EE"/>
+            </a:solidFill>
+            <a:ln>
+              <a:noFill/>
+            </a:ln>
+          </p:spPr>
+          <p:style>
+            <a:lnRef idx="1">
+              <a:schemeClr val="accent1"/>
+            </a:lnRef>
+            <a:fillRef idx="3">
+              <a:schemeClr val="accent1"/>
+            </a:fillRef>
+            <a:effectRef idx="2">
+              <a:schemeClr val="accent1"/>
+            </a:effectRef>
+            <a:fontRef idx="minor">
+              <a:schemeClr val="lt1"/>
+            </a:fontRef>
+          </p:style>
+          <p:txBody>
+            <a:bodyPr rtlCol="0" anchor="ctr"/>
+            <a:lstStyle/>
+            <a:p>
+              <a:pPr algn="ctr"/>
+            </a:p>
+          </p:txBody>
+        </p:sp>
+        <p:sp>
+          <p:nvSpPr>
+            <p:cNvPr id="11" name="TextBox 9"/>
+            <p:cNvSpPr txBox="1"/>
+            <p:nvPr/>
+          </p:nvSpPr>
+          <p:spPr>
+            <a:xfrm>
+              <a:off x="11376" y="3096"/>
+              <a:ext cx="864" cy="864"/>
+            </a:xfrm>
+            <a:prstGeom prst="rect">
+              <a:avLst/>
+            </a:prstGeom>
+            <a:noFill/>
+          </p:spPr>
+          <p:txBody>
+            <a:bodyPr wrap="none">
+              <a:spAutoFit/>
+            </a:bodyPr>
+            <a:lstStyle/>
+            <a:p>
+              <a:pPr algn="ctr">
+                <a:defRPr sz="2800"/>
+              </a:pPr>
+              <a:r>
+                <a:t>⚡</a:t>
+              </a:r>
+            </a:p>
+          </p:txBody>
+        </p:sp>
+        <p:sp>
+          <p:nvSpPr>
+            <p:cNvPr id="12" name="TextBox 10"/>
+            <p:cNvSpPr txBox="1"/>
+            <p:nvPr/>
+          </p:nvSpPr>
+          <p:spPr>
+            <a:xfrm>
+              <a:off x="11376" y="4032"/>
+              <a:ext cx="7344" cy="720"/>
+            </a:xfrm>
+            <a:prstGeom prst="rect">
+              <a:avLst/>
+            </a:prstGeom>
+            <a:noFill/>
+          </p:spPr>
+          <p:txBody>
+            <a:bodyPr wrap="square">
+              <a:spAutoFit/>
+            </a:bodyPr>
+            <a:lstStyle/>
+            <a:p>
+              <a:pPr>
+                <a:defRPr sz="2000" b="1">
+                  <a:solidFill>
+                    <a:srgbClr val="2D2D2D"/>
+                  </a:solidFill>
+                  <a:latin typeface="Arial" panose="020B0604020202020204"/>
+                </a:defRPr>
+              </a:pPr>
+              <a:r>
+                <a:t>Auto-Transition with Random Failure</a:t>
+              </a:r>
+            </a:p>
+          </p:txBody>
+        </p:sp>
+        <p:sp>
+          <p:nvSpPr>
+            <p:cNvPr id="13" name="TextBox 11"/>
+            <p:cNvSpPr txBox="1"/>
+            <p:nvPr/>
+          </p:nvSpPr>
+          <p:spPr>
+            <a:xfrm>
+              <a:off x="11376" y="4752"/>
+              <a:ext cx="7344" cy="1296"/>
+            </a:xfrm>
+            <a:prstGeom prst="rect">
+              <a:avLst/>
+            </a:prstGeom>
+            <a:noFill/>
+          </p:spPr>
+          <p:txBody>
+            <a:bodyPr wrap="square">
+              <a:spAutoFit/>
+            </a:bodyPr>
+            <a:lstStyle/>
+            <a:p>
+              <a:pPr>
+                <a:defRPr sz="1400">
+                  <a:solidFill>
+                    <a:srgbClr val="666666"/>
+                  </a:solidFill>
+                  <a:latin typeface="Arial" panose="020B0604020202020204"/>
+                </a:defRPr>
+              </a:pPr>
+              <a:r>
+                <a:t>Simulated state transitions with configurable random failure injection.</a:t>
+              </a:r>
+            </a:p>
+          </p:txBody>
+        </p:sp>
+        <p:sp>
+          <p:nvSpPr>
+            <p:cNvPr id="14" name="Rounded Rectangle 12"/>
+            <p:cNvSpPr/>
+            <p:nvPr/>
+          </p:nvSpPr>
+          <p:spPr>
+            <a:xfrm>
+              <a:off x="1224" y="7200"/>
+              <a:ext cx="8352" cy="3744"/>
+            </a:xfrm>
+            <a:prstGeom prst="roundRect">
+              <a:avLst/>
+            </a:prstGeom>
+            <a:solidFill>
+              <a:srgbClr val="FFFFFF"/>
+            </a:solidFill>
+            <a:ln w="12700">
+              <a:solidFill>
+                <a:srgbClr val="E8E8E8"/>
+              </a:solidFill>
+            </a:ln>
+          </p:spPr>
+          <p:style>
+            <a:lnRef idx="1">
+              <a:schemeClr val="accent1"/>
+            </a:lnRef>
+            <a:fillRef idx="3">
+              <a:schemeClr val="accent1"/>
+            </a:fillRef>
+            <a:effectRef idx="2">
+              <a:schemeClr val="accent1"/>
+            </a:effectRef>
+            <a:fontRef idx="minor">
+              <a:schemeClr val="lt1"/>
+            </a:fontRef>
+          </p:style>
+          <p:txBody>
+            <a:bodyPr rtlCol="0" anchor="ctr"/>
+            <a:lstStyle/>
+            <a:p>
+              <a:pPr algn="ctr"/>
+            </a:p>
+          </p:txBody>
+        </p:sp>
+        <p:sp>
+          <p:nvSpPr>
+            <p:cNvPr id="15" name="Rectangle 13"/>
+            <p:cNvSpPr/>
+            <p:nvPr/>
+          </p:nvSpPr>
+          <p:spPr>
+            <a:xfrm>
+              <a:off x="1224" y="7200"/>
+              <a:ext cx="8352" cy="115"/>
+            </a:xfrm>
+            <a:prstGeom prst="rect">
+              <a:avLst/>
+            </a:prstGeom>
+            <a:solidFill>
+              <a:srgbClr val="F5A623"/>
+            </a:solidFill>
+            <a:ln>
+              <a:noFill/>
+            </a:ln>
+          </p:spPr>
+          <p:style>
+            <a:lnRef idx="1">
+              <a:schemeClr val="accent1"/>
+            </a:lnRef>
+            <a:fillRef idx="3">
+              <a:schemeClr val="accent1"/>
+            </a:fillRef>
+            <a:effectRef idx="2">
+              <a:schemeClr val="accent1"/>
+            </a:effectRef>
+            <a:fontRef idx="minor">
+              <a:schemeClr val="lt1"/>
+            </a:fontRef>
+          </p:style>
+          <p:txBody>
+            <a:bodyPr rtlCol="0" anchor="ctr"/>
+            <a:lstStyle/>
+            <a:p>
+              <a:pPr algn="ctr"/>
+            </a:p>
+          </p:txBody>
+        </p:sp>
+        <p:sp>
+          <p:nvSpPr>
+            <p:cNvPr id="16" name="TextBox 14"/>
+            <p:cNvSpPr txBox="1"/>
+            <p:nvPr/>
+          </p:nvSpPr>
+          <p:spPr>
+            <a:xfrm>
+              <a:off x="1728" y="7704"/>
+              <a:ext cx="864" cy="864"/>
+            </a:xfrm>
+            <a:prstGeom prst="rect">
+              <a:avLst/>
+            </a:prstGeom>
+            <a:noFill/>
+          </p:spPr>
+          <p:txBody>
+            <a:bodyPr wrap="none">
+              <a:spAutoFit/>
+            </a:bodyPr>
+            <a:lstStyle/>
+            <a:p>
+              <a:pPr algn="ctr">
+                <a:defRPr sz="2800"/>
+              </a:pPr>
+              <a:r>
+                <a:t>💰</a:t>
+              </a:r>
+            </a:p>
+          </p:txBody>
+        </p:sp>
+        <p:sp>
+          <p:nvSpPr>
+            <p:cNvPr id="17" name="TextBox 15"/>
+            <p:cNvSpPr txBox="1"/>
+            <p:nvPr/>
+          </p:nvSpPr>
+          <p:spPr>
+            <a:xfrm>
+              <a:off x="1728" y="8640"/>
+              <a:ext cx="7344" cy="720"/>
+            </a:xfrm>
+            <a:prstGeom prst="rect">
+              <a:avLst/>
+            </a:prstGeom>
+            <a:noFill/>
+          </p:spPr>
+          <p:txBody>
+            <a:bodyPr wrap="square">
+              <a:spAutoFit/>
+            </a:bodyPr>
+            <a:lstStyle/>
+            <a:p>
+              <a:pPr>
+                <a:defRPr sz="2000" b="1">
+                  <a:solidFill>
+                    <a:srgbClr val="2D2D2D"/>
+                  </a:solidFill>
+                  <a:latin typeface="Arial" panose="020B0604020202020204"/>
+                </a:defRPr>
+              </a:pPr>
+              <a:r>
+                <a:t>Balance Sufficiency Check</a:t>
+              </a:r>
+            </a:p>
+          </p:txBody>
+        </p:sp>
+        <p:sp>
+          <p:nvSpPr>
+            <p:cNvPr id="18" name="TextBox 16"/>
+            <p:cNvSpPr txBox="1"/>
+            <p:nvPr/>
+          </p:nvSpPr>
+          <p:spPr>
+            <a:xfrm>
+              <a:off x="1728" y="9360"/>
+              <a:ext cx="7344" cy="1296"/>
+            </a:xfrm>
+            <a:prstGeom prst="rect">
+              <a:avLst/>
+            </a:prstGeom>
+            <a:noFill/>
+          </p:spPr>
+          <p:txBody>
+            <a:bodyPr wrap="square">
+              <a:spAutoFit/>
+            </a:bodyPr>
+            <a:lstStyle/>
+            <a:p>
+              <a:pPr>
+                <a:defRPr sz="1400">
+                  <a:solidFill>
+                    <a:srgbClr val="666666"/>
+                  </a:solidFill>
+                  <a:latin typeface="Arial" panose="020B0604020202020204"/>
+                </a:defRPr>
+              </a:pPr>
+              <a:r>
+                <a:t>Real-time validation of account balance before transaction execution.</a:t>
+              </a:r>
+            </a:p>
+          </p:txBody>
+        </p:sp>
+        <p:sp>
+          <p:nvSpPr>
+            <p:cNvPr id="19" name="Rounded Rectangle 17"/>
+            <p:cNvSpPr/>
+            <p:nvPr/>
+          </p:nvSpPr>
+          <p:spPr>
+            <a:xfrm>
+              <a:off x="10872" y="7200"/>
+              <a:ext cx="8352" cy="3744"/>
+            </a:xfrm>
+            <a:prstGeom prst="roundRect">
+              <a:avLst/>
+            </a:prstGeom>
+            <a:solidFill>
+              <a:srgbClr val="FFFFFF"/>
+            </a:solidFill>
+            <a:ln w="12700">
+              <a:solidFill>
+                <a:srgbClr val="E8E8E8"/>
+              </a:solidFill>
+            </a:ln>
+          </p:spPr>
+          <p:style>
+            <a:lnRef idx="1">
+              <a:schemeClr val="accent1"/>
+            </a:lnRef>
+            <a:fillRef idx="3">
+              <a:schemeClr val="accent1"/>
+            </a:fillRef>
+            <a:effectRef idx="2">
+              <a:schemeClr val="accent1"/>
+            </a:effectRef>
+            <a:fontRef idx="minor">
+              <a:schemeClr val="lt1"/>
+            </a:fontRef>
+          </p:style>
+          <p:txBody>
+            <a:bodyPr rtlCol="0" anchor="ctr"/>
+            <a:lstStyle/>
+            <a:p>
+              <a:pPr algn="ctr"/>
+            </a:p>
+          </p:txBody>
+        </p:sp>
+        <p:sp>
+          <p:nvSpPr>
+            <p:cNvPr id="20" name="Rectangle 18"/>
+            <p:cNvSpPr/>
+            <p:nvPr/>
+          </p:nvSpPr>
+          <p:spPr>
+            <a:xfrm>
+              <a:off x="10872" y="7200"/>
+              <a:ext cx="8352" cy="115"/>
+            </a:xfrm>
+            <a:prstGeom prst="rect">
+              <a:avLst/>
+            </a:prstGeom>
+            <a:solidFill>
+              <a:srgbClr val="50C878"/>
+            </a:solidFill>
+            <a:ln>
+              <a:noFill/>
+            </a:ln>
+          </p:spPr>
+          <p:style>
+            <a:lnRef idx="1">
+              <a:schemeClr val="accent1"/>
+            </a:lnRef>
+            <a:fillRef idx="3">
+              <a:schemeClr val="accent1"/>
+            </a:fillRef>
+            <a:effectRef idx="2">
+              <a:schemeClr val="accent1"/>
+            </a:effectRef>
+            <a:fontRef idx="minor">
+              <a:schemeClr val="lt1"/>
+            </a:fontRef>
+          </p:style>
+          <p:txBody>
+            <a:bodyPr rtlCol="0" anchor="ctr"/>
+            <a:lstStyle/>
+            <a:p>
+              <a:pPr algn="ctr"/>
+            </a:p>
+          </p:txBody>
+        </p:sp>
+        <p:sp>
+          <p:nvSpPr>
+            <p:cNvPr id="21" name="TextBox 19"/>
+            <p:cNvSpPr txBox="1"/>
+            <p:nvPr/>
+          </p:nvSpPr>
+          <p:spPr>
+            <a:xfrm>
+              <a:off x="11376" y="7704"/>
+              <a:ext cx="864" cy="864"/>
+            </a:xfrm>
+            <a:prstGeom prst="rect">
+              <a:avLst/>
+            </a:prstGeom>
+            <a:noFill/>
+          </p:spPr>
+          <p:txBody>
+            <a:bodyPr wrap="none">
+              <a:spAutoFit/>
+            </a:bodyPr>
+            <a:lstStyle/>
+            <a:p>
+              <a:pPr algn="ctr">
+                <a:defRPr sz="2800"/>
+              </a:pPr>
+              <a:r>
+                <a:t>📝</a:t>
+              </a:r>
+            </a:p>
+          </p:txBody>
+        </p:sp>
+        <p:sp>
+          <p:nvSpPr>
+            <p:cNvPr id="22" name="TextBox 20"/>
+            <p:cNvSpPr txBox="1"/>
+            <p:nvPr/>
+          </p:nvSpPr>
+          <p:spPr>
+            <a:xfrm>
+              <a:off x="11376" y="8640"/>
+              <a:ext cx="7344" cy="720"/>
+            </a:xfrm>
+            <a:prstGeom prst="rect">
+              <a:avLst/>
+            </a:prstGeom>
+            <a:noFill/>
+          </p:spPr>
+          <p:txBody>
+            <a:bodyPr wrap="square">
+              <a:spAutoFit/>
+            </a:bodyPr>
+            <a:lstStyle/>
+            <a:p>
+              <a:pPr>
+                <a:defRPr sz="2000" b="1">
+                  <a:solidFill>
+                    <a:srgbClr val="2D2D2D"/>
+                  </a:solidFill>
+                  <a:latin typeface="Arial" panose="020B0604020202020204"/>
+                </a:defRPr>
+              </a:pPr>
+              <a:r>
+                <a:t>Test Documentation &amp; JUnit 5</a:t>
+              </a:r>
+            </a:p>
+          </p:txBody>
+        </p:sp>
+        <p:sp>
+          <p:nvSpPr>
+            <p:cNvPr id="23" name="TextBox 21"/>
+            <p:cNvSpPr txBox="1"/>
+            <p:nvPr/>
+          </p:nvSpPr>
+          <p:spPr>
+            <a:xfrm>
+              <a:off x="11376" y="9360"/>
+              <a:ext cx="7344" cy="1296"/>
+            </a:xfrm>
+            <a:prstGeom prst="rect">
+              <a:avLst/>
+            </a:prstGeom>
+            <a:noFill/>
+          </p:spPr>
+          <p:txBody>
+            <a:bodyPr wrap="square">
+              <a:spAutoFit/>
+            </a:bodyPr>
+            <a:lstStyle/>
+            <a:p>
+              <a:pPr>
+                <a:defRPr sz="1400">
+                  <a:solidFill>
+                    <a:srgbClr val="666666"/>
+                  </a:solidFill>
+                  <a:latin typeface="Arial" panose="020B0604020202020204"/>
+                </a:defRPr>
+              </a:pPr>
+              <a:r>
+                <a:t>Comprehensive test docs and JUnit 5 unit tests for code reliability.</a:t>
+              </a:r>
+            </a:p>
+          </p:txBody>
+        </p:sp>
+      </p:grpSp>
+      <p:sp>
+        <p:nvSpPr>
+          <p:cNvPr id="25" name="文本框 24"/>
           <p:cNvSpPr txBox="1"/>
           <p:nvPr/>
         </p:nvSpPr>
         <p:spPr>
           <a:xfrm>
-            <a:off x="640080" y="457200"/>
-            <a:ext cx="10972800" cy="1097280"/>
+            <a:off x="598805" y="354330"/>
+            <a:ext cx="6096000" cy="583565"/>
           </a:xfrm>
           <a:prstGeom prst="rect">
             <a:avLst/>
@@ -3254,133 +5341,36 @@
           <a:noFill/>
         </p:spPr>
         <p:txBody>
-          <a:bodyPr wrap="square">
+          <a:bodyPr wrap="square" rtlCol="0" anchor="t">
             <a:spAutoFit/>
           </a:bodyPr>
-          <a:lstStyle/>
-          <a:p>
-            <a:pPr algn="l"/>
-            <a:r>
-              <a:rPr sz="3200" b="1">
+          <a:p>
+            <a:pPr defTabSz="457200">
+              <a:lnSpc>
+                <a:spcPct val="100000"/>
+              </a:lnSpc>
+            </a:pPr>
+            <a:r>
+              <a:rPr lang="en-US" sz="3200" b="1">
                 <a:solidFill>
                   <a:srgbClr val="1F2329"/>
                 </a:solidFill>
+                <a:effectLst/>
+                <a:uFillTx/>
+                <a:latin typeface="Calibri" panose="020F0502020204030204"/>
+                <a:sym typeface="+mn-ea"/>
               </a:rPr>
-              <a:t>贡献 3：账户余额充足性校验</a:t>
-            </a:r>
-          </a:p>
-        </p:txBody>
-      </p:sp>
-      <p:sp>
-        <p:nvSpPr>
-          <p:cNvPr id="3" name="TextBox 2"/>
-          <p:cNvSpPr txBox="1"/>
-          <p:nvPr/>
-        </p:nvSpPr>
-        <p:spPr>
-          <a:xfrm>
-            <a:off x="822960" y="1371600"/>
-            <a:ext cx="10515600" cy="4754880"/>
-          </a:xfrm>
-          <a:prstGeom prst="rect">
-            <a:avLst/>
-          </a:prstGeom>
-          <a:noFill/>
-        </p:spPr>
-        <p:txBody>
-          <a:bodyPr wrap="square">
-            <a:spAutoFit/>
-          </a:bodyPr>
-          <a:lstStyle/>
-          <a:p>
-            <a:pPr>
-              <a:spcAft>
-                <a:spcPts val="1200"/>
-              </a:spcAft>
-            </a:pPr>
-            <a:r>
-              <a:rPr sz="2000" b="1">
-                <a:solidFill>
-                  <a:srgbClr val="1F2329"/>
-                </a:solidFill>
-              </a:rPr>
-              <a:t>• 需求：只做余额充足性判断，不扣款、不涉及并发扣减，余额自始至终不变</a:t>
-            </a:r>
-          </a:p>
-          <a:p>
-            <a:pPr>
-              <a:spcAft>
-                <a:spcPts val="1200"/>
-              </a:spcAft>
-            </a:pPr>
-            <a:r>
-              <a:rPr sz="2000" b="1">
-                <a:solidFill>
-                  <a:srgbClr val="1F2329"/>
-                </a:solidFill>
-              </a:rPr>
-              <a:t>• 新增 balance 字段（独立迁移脚本，不改动 schema.sql / data.sql）</a:t>
-            </a:r>
-          </a:p>
-          <a:p>
-            <a:pPr>
-              <a:spcAft>
-                <a:spcPts val="1200"/>
-              </a:spcAft>
-            </a:pPr>
-            <a:r>
-              <a:rPr sz="2000" b="1">
-                <a:solidFill>
-                  <a:srgbClr val="1F2329"/>
-                </a:solidFill>
-              </a:rPr>
-              <a:t>• hasSufficientBalance()：只读查询，无任何 UPDATE 语句</a:t>
-            </a:r>
-          </a:p>
-          <a:p>
-            <a:pPr>
-              <a:spcAft>
-                <a:spcPts val="1200"/>
-              </a:spcAft>
-            </a:pPr>
-            <a:r>
-              <a:rPr sz="2000" b="1">
-                <a:solidFill>
-                  <a:srgbClr val="1F2329"/>
-                </a:solidFill>
-              </a:rPr>
-              <a:t>• 只在 CREATED → VALIDATED 这一步触发校验</a:t>
-            </a:r>
-          </a:p>
-          <a:p>
-            <a:pPr>
-              <a:spcAft>
-                <a:spcPts val="1200"/>
-              </a:spcAft>
-            </a:pPr>
-            <a:r>
-              <a:rPr sz="2000" b="1">
-                <a:solidFill>
-                  <a:srgbClr val="1F2329"/>
-                </a:solidFill>
-              </a:rPr>
-              <a:t>• 余额不足时，实际执行的目标状态被强制改写为 FAILED / INSUFFICIENT_FUNDS</a:t>
-            </a:r>
-          </a:p>
-          <a:p>
-            <a:pPr>
-              <a:spcAft>
-                <a:spcPts val="1200"/>
-              </a:spcAft>
-            </a:pPr>
-            <a:r>
-              <a:rPr sz="2000" b="1">
-                <a:solidFill>
-                  <a:srgbClr val="1F2329"/>
-                </a:solidFill>
-              </a:rPr>
-              <a:t>• 手动接口与自动调度两处入口统一复用同一段判断逻辑</a:t>
-            </a:r>
+              <a:t>Vianne W Q Xu’s Contribution</a:t>
+            </a:r>
+            <a:endParaRPr lang="en-US" altLang="en-US" sz="3200" b="1">
+              <a:solidFill>
+                <a:srgbClr val="1F2329"/>
+              </a:solidFill>
+              <a:effectLst/>
+              <a:uFillTx/>
+              <a:latin typeface="Calibri" panose="020F0502020204030204"/>
+              <a:sym typeface="+mn-ea"/>
+            </a:endParaRPr>
           </a:p>
         </p:txBody>
       </p:sp>
@@ -3392,8 +5382,1237 @@
 </p:sld>
 </file>
 
-<file path=ppt/slides/slide11.xml><?xml version="1.0" encoding="utf-8"?>
-<p:sld xmlns:a="http://schemas.openxmlformats.org/drawingml/2006/main" xmlns:p="http://schemas.openxmlformats.org/presentationml/2006/main" xmlns:r="http://schemas.openxmlformats.org/officeDocument/2006/relationships">
+<file path=ppt/slides/slide13.xml><?xml version="1.0" encoding="utf-8"?>
+<p:sld xmlns:a="http://schemas.openxmlformats.org/drawingml/2006/main" xmlns:r="http://schemas.openxmlformats.org/officeDocument/2006/relationships" xmlns:p="http://schemas.openxmlformats.org/presentationml/2006/main">
+  <p:cSld>
+    <p:spTree>
+      <p:nvGrpSpPr>
+        <p:cNvPr id="1" name=""/>
+        <p:cNvGrpSpPr/>
+        <p:nvPr/>
+      </p:nvGrpSpPr>
+      <p:grpSpPr/>
+      <p:sp>
+        <p:nvSpPr>
+          <p:cNvPr id="2" name="文本框 1"/>
+          <p:cNvSpPr txBox="1"/>
+          <p:nvPr/>
+        </p:nvSpPr>
+        <p:spPr>
+          <a:xfrm>
+            <a:off x="598805" y="354330"/>
+            <a:ext cx="6096000" cy="583565"/>
+          </a:xfrm>
+          <a:prstGeom prst="rect">
+            <a:avLst/>
+          </a:prstGeom>
+          <a:noFill/>
+        </p:spPr>
+        <p:txBody>
+          <a:bodyPr wrap="square" rtlCol="0" anchor="t">
+            <a:spAutoFit/>
+          </a:bodyPr>
+          <a:p>
+            <a:pPr defTabSz="457200">
+              <a:lnSpc>
+                <a:spcPct val="100000"/>
+              </a:lnSpc>
+            </a:pPr>
+            <a:r>
+              <a:rPr lang="en-US" sz="3200" b="1">
+                <a:solidFill>
+                  <a:srgbClr val="1F2329"/>
+                </a:solidFill>
+                <a:effectLst/>
+                <a:uFillTx/>
+                <a:latin typeface="Calibri" panose="020F0502020204030204"/>
+                <a:sym typeface="+mn-ea"/>
+              </a:rPr>
+              <a:t>Mia W T Mai’s Contribution</a:t>
+            </a:r>
+            <a:endParaRPr lang="en-US" altLang="en-US" sz="3200" b="1">
+              <a:solidFill>
+                <a:srgbClr val="1F2329"/>
+              </a:solidFill>
+              <a:effectLst/>
+              <a:uFillTx/>
+              <a:latin typeface="Calibri" panose="020F0502020204030204"/>
+              <a:sym typeface="+mn-ea"/>
+            </a:endParaRPr>
+          </a:p>
+        </p:txBody>
+      </p:sp>
+      <p:grpSp>
+        <p:nvGrpSpPr>
+          <p:cNvPr id="33" name="组合 32"/>
+          <p:cNvGrpSpPr/>
+          <p:nvPr/>
+        </p:nvGrpSpPr>
+        <p:grpSpPr>
+          <a:xfrm>
+            <a:off x="380683" y="1263015"/>
+            <a:ext cx="11430000" cy="5074920"/>
+            <a:chOff x="864" y="1584"/>
+            <a:chExt cx="18000" cy="7992"/>
+          </a:xfrm>
+        </p:grpSpPr>
+        <p:sp>
+          <p:nvSpPr>
+            <p:cNvPr id="3" name="Rounded Rectangle 1"/>
+            <p:cNvSpPr/>
+            <p:nvPr/>
+          </p:nvSpPr>
+          <p:spPr>
+            <a:xfrm>
+              <a:off x="864" y="1584"/>
+              <a:ext cx="5472" cy="3600"/>
+            </a:xfrm>
+            <a:prstGeom prst="roundRect">
+              <a:avLst/>
+            </a:prstGeom>
+            <a:solidFill>
+              <a:srgbClr val="FFFFFF"/>
+            </a:solidFill>
+            <a:ln w="12700">
+              <a:solidFill>
+                <a:srgbClr val="E8E8E8"/>
+              </a:solidFill>
+            </a:ln>
+          </p:spPr>
+          <p:style>
+            <a:lnRef idx="1">
+              <a:schemeClr val="accent1"/>
+            </a:lnRef>
+            <a:fillRef idx="3">
+              <a:schemeClr val="accent1"/>
+            </a:fillRef>
+            <a:effectRef idx="2">
+              <a:schemeClr val="accent1"/>
+            </a:effectRef>
+            <a:fontRef idx="minor">
+              <a:schemeClr val="lt1"/>
+            </a:fontRef>
+          </p:style>
+          <p:txBody>
+            <a:bodyPr rtlCol="0" anchor="ctr"/>
+            <a:lstStyle/>
+            <a:p>
+              <a:pPr algn="ctr"/>
+            </a:p>
+          </p:txBody>
+        </p:sp>
+        <p:sp>
+          <p:nvSpPr>
+            <p:cNvPr id="25" name="Rectangle 2"/>
+            <p:cNvSpPr/>
+            <p:nvPr/>
+          </p:nvSpPr>
+          <p:spPr>
+            <a:xfrm>
+              <a:off x="864" y="1584"/>
+              <a:ext cx="5472" cy="115"/>
+            </a:xfrm>
+            <a:prstGeom prst="rect">
+              <a:avLst/>
+            </a:prstGeom>
+            <a:solidFill>
+              <a:srgbClr val="4A90D9"/>
+            </a:solidFill>
+            <a:ln>
+              <a:noFill/>
+            </a:ln>
+          </p:spPr>
+          <p:style>
+            <a:lnRef idx="1">
+              <a:schemeClr val="accent1"/>
+            </a:lnRef>
+            <a:fillRef idx="3">
+              <a:schemeClr val="accent1"/>
+            </a:fillRef>
+            <a:effectRef idx="2">
+              <a:schemeClr val="accent1"/>
+            </a:effectRef>
+            <a:fontRef idx="minor">
+              <a:schemeClr val="lt1"/>
+            </a:fontRef>
+          </p:style>
+          <p:txBody>
+            <a:bodyPr rtlCol="0" anchor="ctr"/>
+            <a:lstStyle/>
+            <a:p>
+              <a:pPr algn="ctr"/>
+            </a:p>
+          </p:txBody>
+        </p:sp>
+        <p:sp>
+          <p:nvSpPr>
+            <p:cNvPr id="26" name="TextBox 3"/>
+            <p:cNvSpPr txBox="1"/>
+            <p:nvPr/>
+          </p:nvSpPr>
+          <p:spPr>
+            <a:xfrm>
+              <a:off x="1296" y="2016"/>
+              <a:ext cx="864" cy="864"/>
+            </a:xfrm>
+            <a:prstGeom prst="rect">
+              <a:avLst/>
+            </a:prstGeom>
+            <a:noFill/>
+          </p:spPr>
+          <p:txBody>
+            <a:bodyPr wrap="none">
+              <a:spAutoFit/>
+            </a:bodyPr>
+            <a:lstStyle/>
+            <a:p>
+              <a:pPr algn="ctr">
+                <a:defRPr sz="2600"/>
+              </a:pPr>
+              <a:r>
+                <a:t>🎨</a:t>
+              </a:r>
+            </a:p>
+          </p:txBody>
+        </p:sp>
+        <p:sp>
+          <p:nvSpPr>
+            <p:cNvPr id="27" name="TextBox 4"/>
+            <p:cNvSpPr txBox="1"/>
+            <p:nvPr/>
+          </p:nvSpPr>
+          <p:spPr>
+            <a:xfrm>
+              <a:off x="1296" y="2952"/>
+              <a:ext cx="4608" cy="720"/>
+            </a:xfrm>
+            <a:prstGeom prst="rect">
+              <a:avLst/>
+            </a:prstGeom>
+            <a:noFill/>
+          </p:spPr>
+          <p:txBody>
+            <a:bodyPr wrap="square">
+              <a:spAutoFit/>
+            </a:bodyPr>
+            <a:lstStyle/>
+            <a:p>
+              <a:pPr>
+                <a:defRPr sz="1800" b="1">
+                  <a:solidFill>
+                    <a:srgbClr val="2D2D2D"/>
+                  </a:solidFill>
+                  <a:latin typeface="Arial" panose="020B0604020202020204"/>
+                </a:defRPr>
+              </a:pPr>
+              <a:r>
+                <a:t>Global Design Systems</a:t>
+              </a:r>
+            </a:p>
+          </p:txBody>
+        </p:sp>
+        <p:sp>
+          <p:nvSpPr>
+            <p:cNvPr id="28" name="TextBox 5"/>
+            <p:cNvSpPr txBox="1"/>
+            <p:nvPr/>
+          </p:nvSpPr>
+          <p:spPr>
+            <a:xfrm>
+              <a:off x="1296" y="3600"/>
+              <a:ext cx="4608" cy="1296"/>
+            </a:xfrm>
+            <a:prstGeom prst="rect">
+              <a:avLst/>
+            </a:prstGeom>
+            <a:noFill/>
+          </p:spPr>
+          <p:txBody>
+            <a:bodyPr wrap="square">
+              <a:spAutoFit/>
+            </a:bodyPr>
+            <a:lstStyle/>
+            <a:p>
+              <a:pPr>
+                <a:defRPr sz="1300">
+                  <a:solidFill>
+                    <a:srgbClr val="666666"/>
+                  </a:solidFill>
+                  <a:latin typeface="Arial" panose="020B0604020202020204"/>
+                </a:defRPr>
+              </a:pPr>
+              <a:r>
+                <a:t>CSS custom properties, gradient sets, and reusable component tokens.</a:t>
+              </a:r>
+            </a:p>
+          </p:txBody>
+        </p:sp>
+        <p:sp>
+          <p:nvSpPr>
+            <p:cNvPr id="29" name="Rounded Rectangle 6"/>
+            <p:cNvSpPr/>
+            <p:nvPr/>
+          </p:nvSpPr>
+          <p:spPr>
+            <a:xfrm>
+              <a:off x="7128" y="1584"/>
+              <a:ext cx="5472" cy="3600"/>
+            </a:xfrm>
+            <a:prstGeom prst="roundRect">
+              <a:avLst/>
+            </a:prstGeom>
+            <a:solidFill>
+              <a:srgbClr val="FFFFFF"/>
+            </a:solidFill>
+            <a:ln w="12700">
+              <a:solidFill>
+                <a:srgbClr val="E8E8E8"/>
+              </a:solidFill>
+            </a:ln>
+          </p:spPr>
+          <p:style>
+            <a:lnRef idx="1">
+              <a:schemeClr val="accent1"/>
+            </a:lnRef>
+            <a:fillRef idx="3">
+              <a:schemeClr val="accent1"/>
+            </a:fillRef>
+            <a:effectRef idx="2">
+              <a:schemeClr val="accent1"/>
+            </a:effectRef>
+            <a:fontRef idx="minor">
+              <a:schemeClr val="lt1"/>
+            </a:fontRef>
+          </p:style>
+          <p:txBody>
+            <a:bodyPr rtlCol="0" anchor="ctr"/>
+            <a:lstStyle/>
+            <a:p>
+              <a:pPr algn="ctr"/>
+            </a:p>
+          </p:txBody>
+        </p:sp>
+        <p:sp>
+          <p:nvSpPr>
+            <p:cNvPr id="30" name="Rectangle 7"/>
+            <p:cNvSpPr/>
+            <p:nvPr/>
+          </p:nvSpPr>
+          <p:spPr>
+            <a:xfrm>
+              <a:off x="7128" y="1584"/>
+              <a:ext cx="5472" cy="115"/>
+            </a:xfrm>
+            <a:prstGeom prst="rect">
+              <a:avLst/>
+            </a:prstGeom>
+            <a:solidFill>
+              <a:srgbClr val="7B68EE"/>
+            </a:solidFill>
+            <a:ln>
+              <a:noFill/>
+            </a:ln>
+          </p:spPr>
+          <p:style>
+            <a:lnRef idx="1">
+              <a:schemeClr val="accent1"/>
+            </a:lnRef>
+            <a:fillRef idx="3">
+              <a:schemeClr val="accent1"/>
+            </a:fillRef>
+            <a:effectRef idx="2">
+              <a:schemeClr val="accent1"/>
+            </a:effectRef>
+            <a:fontRef idx="minor">
+              <a:schemeClr val="lt1"/>
+            </a:fontRef>
+          </p:style>
+          <p:txBody>
+            <a:bodyPr rtlCol="0" anchor="ctr"/>
+            <a:lstStyle/>
+            <a:p>
+              <a:pPr algn="ctr"/>
+            </a:p>
+          </p:txBody>
+        </p:sp>
+        <p:sp>
+          <p:nvSpPr>
+            <p:cNvPr id="31" name="TextBox 8"/>
+            <p:cNvSpPr txBox="1"/>
+            <p:nvPr/>
+          </p:nvSpPr>
+          <p:spPr>
+            <a:xfrm>
+              <a:off x="7560" y="2016"/>
+              <a:ext cx="864" cy="864"/>
+            </a:xfrm>
+            <a:prstGeom prst="rect">
+              <a:avLst/>
+            </a:prstGeom>
+            <a:noFill/>
+          </p:spPr>
+          <p:txBody>
+            <a:bodyPr wrap="none">
+              <a:spAutoFit/>
+            </a:bodyPr>
+            <a:lstStyle/>
+            <a:p>
+              <a:pPr algn="ctr">
+                <a:defRPr sz="2600"/>
+              </a:pPr>
+              <a:r>
+                <a:t>📄</a:t>
+              </a:r>
+            </a:p>
+          </p:txBody>
+        </p:sp>
+        <p:sp>
+          <p:nvSpPr>
+            <p:cNvPr id="32" name="TextBox 9"/>
+            <p:cNvSpPr txBox="1"/>
+            <p:nvPr/>
+          </p:nvSpPr>
+          <p:spPr>
+            <a:xfrm>
+              <a:off x="7560" y="2952"/>
+              <a:ext cx="4608" cy="720"/>
+            </a:xfrm>
+            <a:prstGeom prst="rect">
+              <a:avLst/>
+            </a:prstGeom>
+            <a:noFill/>
+          </p:spPr>
+          <p:txBody>
+            <a:bodyPr wrap="square">
+              <a:spAutoFit/>
+            </a:bodyPr>
+            <a:lstStyle/>
+            <a:p>
+              <a:pPr>
+                <a:defRPr sz="1800" b="1">
+                  <a:solidFill>
+                    <a:srgbClr val="2D2D2D"/>
+                  </a:solidFill>
+                  <a:latin typeface="Arial" panose="020B0604020202020204"/>
+                </a:defRPr>
+              </a:pPr>
+              <a:r>
+                <a:t>Four Core Pages</a:t>
+              </a:r>
+            </a:p>
+          </p:txBody>
+        </p:sp>
+        <p:sp>
+          <p:nvSpPr>
+            <p:cNvPr id="34" name="TextBox 10"/>
+            <p:cNvSpPr txBox="1"/>
+            <p:nvPr/>
+          </p:nvSpPr>
+          <p:spPr>
+            <a:xfrm>
+              <a:off x="7560" y="3600"/>
+              <a:ext cx="4608" cy="1296"/>
+            </a:xfrm>
+            <a:prstGeom prst="rect">
+              <a:avLst/>
+            </a:prstGeom>
+            <a:noFill/>
+          </p:spPr>
+          <p:txBody>
+            <a:bodyPr wrap="square">
+              <a:spAutoFit/>
+            </a:bodyPr>
+            <a:lstStyle/>
+            <a:p>
+              <a:pPr>
+                <a:defRPr sz="1300">
+                  <a:solidFill>
+                    <a:srgbClr val="666666"/>
+                  </a:solidFill>
+                  <a:latin typeface="Arial" panose="020B0604020202020204"/>
+                </a:defRPr>
+              </a:pPr>
+              <a:r>
+                <a:t>Login, create user, detail, and overview pages.</a:t>
+              </a:r>
+            </a:p>
+          </p:txBody>
+        </p:sp>
+        <p:sp>
+          <p:nvSpPr>
+            <p:cNvPr id="35" name="Rounded Rectangle 11"/>
+            <p:cNvSpPr/>
+            <p:nvPr/>
+          </p:nvSpPr>
+          <p:spPr>
+            <a:xfrm>
+              <a:off x="13392" y="1584"/>
+              <a:ext cx="5472" cy="3600"/>
+            </a:xfrm>
+            <a:prstGeom prst="roundRect">
+              <a:avLst/>
+            </a:prstGeom>
+            <a:solidFill>
+              <a:srgbClr val="FFFFFF"/>
+            </a:solidFill>
+            <a:ln w="12700">
+              <a:solidFill>
+                <a:srgbClr val="E8E8E8"/>
+              </a:solidFill>
+            </a:ln>
+          </p:spPr>
+          <p:style>
+            <a:lnRef idx="1">
+              <a:schemeClr val="accent1"/>
+            </a:lnRef>
+            <a:fillRef idx="3">
+              <a:schemeClr val="accent1"/>
+            </a:fillRef>
+            <a:effectRef idx="2">
+              <a:schemeClr val="accent1"/>
+            </a:effectRef>
+            <a:fontRef idx="minor">
+              <a:schemeClr val="lt1"/>
+            </a:fontRef>
+          </p:style>
+          <p:txBody>
+            <a:bodyPr rtlCol="0" anchor="ctr"/>
+            <a:lstStyle/>
+            <a:p>
+              <a:pPr algn="ctr"/>
+            </a:p>
+          </p:txBody>
+        </p:sp>
+        <p:sp>
+          <p:nvSpPr>
+            <p:cNvPr id="36" name="Rectangle 12"/>
+            <p:cNvSpPr/>
+            <p:nvPr/>
+          </p:nvSpPr>
+          <p:spPr>
+            <a:xfrm>
+              <a:off x="13392" y="1584"/>
+              <a:ext cx="5472" cy="115"/>
+            </a:xfrm>
+            <a:prstGeom prst="rect">
+              <a:avLst/>
+            </a:prstGeom>
+            <a:solidFill>
+              <a:srgbClr val="50C878"/>
+            </a:solidFill>
+            <a:ln>
+              <a:noFill/>
+            </a:ln>
+          </p:spPr>
+          <p:style>
+            <a:lnRef idx="1">
+              <a:schemeClr val="accent1"/>
+            </a:lnRef>
+            <a:fillRef idx="3">
+              <a:schemeClr val="accent1"/>
+            </a:fillRef>
+            <a:effectRef idx="2">
+              <a:schemeClr val="accent1"/>
+            </a:effectRef>
+            <a:fontRef idx="minor">
+              <a:schemeClr val="lt1"/>
+            </a:fontRef>
+          </p:style>
+          <p:txBody>
+            <a:bodyPr rtlCol="0" anchor="ctr"/>
+            <a:lstStyle/>
+            <a:p>
+              <a:pPr algn="ctr"/>
+            </a:p>
+          </p:txBody>
+        </p:sp>
+        <p:sp>
+          <p:nvSpPr>
+            <p:cNvPr id="37" name="TextBox 13"/>
+            <p:cNvSpPr txBox="1"/>
+            <p:nvPr/>
+          </p:nvSpPr>
+          <p:spPr>
+            <a:xfrm>
+              <a:off x="13824" y="2016"/>
+              <a:ext cx="864" cy="864"/>
+            </a:xfrm>
+            <a:prstGeom prst="rect">
+              <a:avLst/>
+            </a:prstGeom>
+            <a:noFill/>
+          </p:spPr>
+          <p:txBody>
+            <a:bodyPr wrap="none">
+              <a:spAutoFit/>
+            </a:bodyPr>
+            <a:lstStyle/>
+            <a:p>
+              <a:pPr algn="ctr">
+                <a:defRPr sz="2600"/>
+              </a:pPr>
+              <a:r>
+                <a:t>✅</a:t>
+              </a:r>
+            </a:p>
+          </p:txBody>
+        </p:sp>
+        <p:sp>
+          <p:nvSpPr>
+            <p:cNvPr id="38" name="TextBox 14"/>
+            <p:cNvSpPr txBox="1"/>
+            <p:nvPr/>
+          </p:nvSpPr>
+          <p:spPr>
+            <a:xfrm>
+              <a:off x="13824" y="2952"/>
+              <a:ext cx="4608" cy="720"/>
+            </a:xfrm>
+            <a:prstGeom prst="rect">
+              <a:avLst/>
+            </a:prstGeom>
+            <a:noFill/>
+          </p:spPr>
+          <p:txBody>
+            <a:bodyPr wrap="square">
+              <a:spAutoFit/>
+            </a:bodyPr>
+            <a:lstStyle/>
+            <a:p>
+              <a:pPr>
+                <a:defRPr sz="1800" b="1">
+                  <a:solidFill>
+                    <a:srgbClr val="2D2D2D"/>
+                  </a:solidFill>
+                  <a:latin typeface="Arial" panose="020B0604020202020204"/>
+                </a:defRPr>
+              </a:pPr>
+              <a:r>
+                <a:t>Smart Form Validation</a:t>
+              </a:r>
+            </a:p>
+          </p:txBody>
+        </p:sp>
+        <p:sp>
+          <p:nvSpPr>
+            <p:cNvPr id="39" name="TextBox 15"/>
+            <p:cNvSpPr txBox="1"/>
+            <p:nvPr/>
+          </p:nvSpPr>
+          <p:spPr>
+            <a:xfrm>
+              <a:off x="13824" y="3600"/>
+              <a:ext cx="4608" cy="1296"/>
+            </a:xfrm>
+            <a:prstGeom prst="rect">
+              <a:avLst/>
+            </a:prstGeom>
+            <a:noFill/>
+          </p:spPr>
+          <p:txBody>
+            <a:bodyPr wrap="square">
+              <a:spAutoFit/>
+            </a:bodyPr>
+            <a:lstStyle/>
+            <a:p>
+              <a:pPr>
+                <a:defRPr sz="1300">
+                  <a:solidFill>
+                    <a:srgbClr val="666666"/>
+                  </a:solidFill>
+                  <a:latin typeface="Arial" panose="020B0604020202020204"/>
+                </a:defRPr>
+              </a:pPr>
+              <a:r>
+                <a:t>Input checks and hidden requirements with real-time validation.</a:t>
+              </a:r>
+            </a:p>
+          </p:txBody>
+        </p:sp>
+        <p:sp>
+          <p:nvSpPr>
+            <p:cNvPr id="40" name="Rounded Rectangle 16"/>
+            <p:cNvSpPr/>
+            <p:nvPr/>
+          </p:nvSpPr>
+          <p:spPr>
+            <a:xfrm>
+              <a:off x="864" y="5976"/>
+              <a:ext cx="5472" cy="3600"/>
+            </a:xfrm>
+            <a:prstGeom prst="roundRect">
+              <a:avLst/>
+            </a:prstGeom>
+            <a:solidFill>
+              <a:srgbClr val="FFFFFF"/>
+            </a:solidFill>
+            <a:ln w="12700">
+              <a:solidFill>
+                <a:srgbClr val="E8E8E8"/>
+              </a:solidFill>
+            </a:ln>
+          </p:spPr>
+          <p:style>
+            <a:lnRef idx="1">
+              <a:schemeClr val="accent1"/>
+            </a:lnRef>
+            <a:fillRef idx="3">
+              <a:schemeClr val="accent1"/>
+            </a:fillRef>
+            <a:effectRef idx="2">
+              <a:schemeClr val="accent1"/>
+            </a:effectRef>
+            <a:fontRef idx="minor">
+              <a:schemeClr val="lt1"/>
+            </a:fontRef>
+          </p:style>
+          <p:txBody>
+            <a:bodyPr rtlCol="0" anchor="ctr"/>
+            <a:lstStyle/>
+            <a:p>
+              <a:pPr algn="ctr"/>
+            </a:p>
+          </p:txBody>
+        </p:sp>
+        <p:sp>
+          <p:nvSpPr>
+            <p:cNvPr id="41" name="Rectangle 17"/>
+            <p:cNvSpPr/>
+            <p:nvPr/>
+          </p:nvSpPr>
+          <p:spPr>
+            <a:xfrm>
+              <a:off x="864" y="5976"/>
+              <a:ext cx="5472" cy="115"/>
+            </a:xfrm>
+            <a:prstGeom prst="rect">
+              <a:avLst/>
+            </a:prstGeom>
+            <a:solidFill>
+              <a:srgbClr val="F5A623"/>
+            </a:solidFill>
+            <a:ln>
+              <a:noFill/>
+            </a:ln>
+          </p:spPr>
+          <p:style>
+            <a:lnRef idx="1">
+              <a:schemeClr val="accent1"/>
+            </a:lnRef>
+            <a:fillRef idx="3">
+              <a:schemeClr val="accent1"/>
+            </a:fillRef>
+            <a:effectRef idx="2">
+              <a:schemeClr val="accent1"/>
+            </a:effectRef>
+            <a:fontRef idx="minor">
+              <a:schemeClr val="lt1"/>
+            </a:fontRef>
+          </p:style>
+          <p:txBody>
+            <a:bodyPr rtlCol="0" anchor="ctr"/>
+            <a:lstStyle/>
+            <a:p>
+              <a:pPr algn="ctr"/>
+            </a:p>
+          </p:txBody>
+        </p:sp>
+        <p:sp>
+          <p:nvSpPr>
+            <p:cNvPr id="42" name="TextBox 18"/>
+            <p:cNvSpPr txBox="1"/>
+            <p:nvPr/>
+          </p:nvSpPr>
+          <p:spPr>
+            <a:xfrm>
+              <a:off x="1296" y="6408"/>
+              <a:ext cx="864" cy="864"/>
+            </a:xfrm>
+            <a:prstGeom prst="rect">
+              <a:avLst/>
+            </a:prstGeom>
+            <a:noFill/>
+          </p:spPr>
+          <p:txBody>
+            <a:bodyPr wrap="none">
+              <a:spAutoFit/>
+            </a:bodyPr>
+            <a:lstStyle/>
+            <a:p>
+              <a:pPr algn="ctr">
+                <a:defRPr sz="2600"/>
+              </a:pPr>
+              <a:r>
+                <a:t>🏷️</a:t>
+              </a:r>
+            </a:p>
+          </p:txBody>
+        </p:sp>
+        <p:sp>
+          <p:nvSpPr>
+            <p:cNvPr id="43" name="TextBox 19"/>
+            <p:cNvSpPr txBox="1"/>
+            <p:nvPr/>
+          </p:nvSpPr>
+          <p:spPr>
+            <a:xfrm>
+              <a:off x="1296" y="7344"/>
+              <a:ext cx="4608" cy="720"/>
+            </a:xfrm>
+            <a:prstGeom prst="rect">
+              <a:avLst/>
+            </a:prstGeom>
+            <a:noFill/>
+          </p:spPr>
+          <p:txBody>
+            <a:bodyPr wrap="square">
+              <a:spAutoFit/>
+            </a:bodyPr>
+            <a:lstStyle/>
+            <a:p>
+              <a:pPr>
+                <a:defRPr sz="1800" b="1">
+                  <a:solidFill>
+                    <a:srgbClr val="2D2D2D"/>
+                  </a:solidFill>
+                  <a:latin typeface="Arial" panose="020B0604020202020204"/>
+                </a:defRPr>
+              </a:pPr>
+              <a:r>
+                <a:t>Visual Status Design</a:t>
+              </a:r>
+            </a:p>
+          </p:txBody>
+        </p:sp>
+        <p:sp>
+          <p:nvSpPr>
+            <p:cNvPr id="44" name="TextBox 20"/>
+            <p:cNvSpPr txBox="1"/>
+            <p:nvPr/>
+          </p:nvSpPr>
+          <p:spPr>
+            <a:xfrm>
+              <a:off x="1296" y="7992"/>
+              <a:ext cx="4608" cy="1296"/>
+            </a:xfrm>
+            <a:prstGeom prst="rect">
+              <a:avLst/>
+            </a:prstGeom>
+            <a:noFill/>
+          </p:spPr>
+          <p:txBody>
+            <a:bodyPr wrap="square">
+              <a:spAutoFit/>
+            </a:bodyPr>
+            <a:lstStyle/>
+            <a:p>
+              <a:pPr>
+                <a:defRPr sz="1300">
+                  <a:solidFill>
+                    <a:srgbClr val="666666"/>
+                  </a:solidFill>
+                  <a:latin typeface="Arial" panose="020B0604020202020204"/>
+                </a:defRPr>
+              </a:pPr>
+              <a:r>
+                <a:t>Color-coded tags and status icons for quick reading.</a:t>
+              </a:r>
+            </a:p>
+          </p:txBody>
+        </p:sp>
+        <p:sp>
+          <p:nvSpPr>
+            <p:cNvPr id="45" name="Rounded Rectangle 21"/>
+            <p:cNvSpPr/>
+            <p:nvPr/>
+          </p:nvSpPr>
+          <p:spPr>
+            <a:xfrm>
+              <a:off x="7128" y="5976"/>
+              <a:ext cx="5472" cy="3600"/>
+            </a:xfrm>
+            <a:prstGeom prst="roundRect">
+              <a:avLst/>
+            </a:prstGeom>
+            <a:solidFill>
+              <a:srgbClr val="FFFFFF"/>
+            </a:solidFill>
+            <a:ln w="12700">
+              <a:solidFill>
+                <a:srgbClr val="E8E8E8"/>
+              </a:solidFill>
+            </a:ln>
+          </p:spPr>
+          <p:style>
+            <a:lnRef idx="1">
+              <a:schemeClr val="accent1"/>
+            </a:lnRef>
+            <a:fillRef idx="3">
+              <a:schemeClr val="accent1"/>
+            </a:fillRef>
+            <a:effectRef idx="2">
+              <a:schemeClr val="accent1"/>
+            </a:effectRef>
+            <a:fontRef idx="minor">
+              <a:schemeClr val="lt1"/>
+            </a:fontRef>
+          </p:style>
+          <p:txBody>
+            <a:bodyPr rtlCol="0" anchor="ctr"/>
+            <a:lstStyle/>
+            <a:p>
+              <a:pPr algn="ctr"/>
+            </a:p>
+          </p:txBody>
+        </p:sp>
+        <p:sp>
+          <p:nvSpPr>
+            <p:cNvPr id="46" name="Rectangle 22"/>
+            <p:cNvSpPr/>
+            <p:nvPr/>
+          </p:nvSpPr>
+          <p:spPr>
+            <a:xfrm>
+              <a:off x="7128" y="5976"/>
+              <a:ext cx="5472" cy="115"/>
+            </a:xfrm>
+            <a:prstGeom prst="rect">
+              <a:avLst/>
+            </a:prstGeom>
+            <a:solidFill>
+              <a:srgbClr val="E74C3C"/>
+            </a:solidFill>
+            <a:ln>
+              <a:noFill/>
+            </a:ln>
+          </p:spPr>
+          <p:style>
+            <a:lnRef idx="1">
+              <a:schemeClr val="accent1"/>
+            </a:lnRef>
+            <a:fillRef idx="3">
+              <a:schemeClr val="accent1"/>
+            </a:fillRef>
+            <a:effectRef idx="2">
+              <a:schemeClr val="accent1"/>
+            </a:effectRef>
+            <a:fontRef idx="minor">
+              <a:schemeClr val="lt1"/>
+            </a:fontRef>
+          </p:style>
+          <p:txBody>
+            <a:bodyPr rtlCol="0" anchor="ctr"/>
+            <a:lstStyle/>
+            <a:p>
+              <a:pPr algn="ctr"/>
+            </a:p>
+          </p:txBody>
+        </p:sp>
+        <p:sp>
+          <p:nvSpPr>
+            <p:cNvPr id="47" name="TextBox 23"/>
+            <p:cNvSpPr txBox="1"/>
+            <p:nvPr/>
+          </p:nvSpPr>
+          <p:spPr>
+            <a:xfrm>
+              <a:off x="7560" y="6408"/>
+              <a:ext cx="864" cy="864"/>
+            </a:xfrm>
+            <a:prstGeom prst="rect">
+              <a:avLst/>
+            </a:prstGeom>
+            <a:noFill/>
+          </p:spPr>
+          <p:txBody>
+            <a:bodyPr wrap="none">
+              <a:spAutoFit/>
+            </a:bodyPr>
+            <a:lstStyle/>
+            <a:p>
+              <a:pPr algn="ctr">
+                <a:defRPr sz="2600"/>
+              </a:pPr>
+              <a:r>
+                <a:t>📋</a:t>
+              </a:r>
+            </a:p>
+          </p:txBody>
+        </p:sp>
+        <p:sp>
+          <p:nvSpPr>
+            <p:cNvPr id="48" name="TextBox 24"/>
+            <p:cNvSpPr txBox="1"/>
+            <p:nvPr/>
+          </p:nvSpPr>
+          <p:spPr>
+            <a:xfrm>
+              <a:off x="7560" y="7344"/>
+              <a:ext cx="4608" cy="720"/>
+            </a:xfrm>
+            <a:prstGeom prst="rect">
+              <a:avLst/>
+            </a:prstGeom>
+            <a:noFill/>
+          </p:spPr>
+          <p:txBody>
+            <a:bodyPr wrap="square">
+              <a:spAutoFit/>
+            </a:bodyPr>
+            <a:lstStyle/>
+            <a:p>
+              <a:pPr>
+                <a:defRPr sz="1800" b="1">
+                  <a:solidFill>
+                    <a:srgbClr val="2D2D2D"/>
+                  </a:solidFill>
+                  <a:latin typeface="Arial" panose="020B0604020202020204"/>
+                </a:defRPr>
+              </a:pPr>
+              <a:r>
+                <a:t>Audit Trail Timeline</a:t>
+              </a:r>
+            </a:p>
+          </p:txBody>
+        </p:sp>
+        <p:sp>
+          <p:nvSpPr>
+            <p:cNvPr id="49" name="TextBox 25"/>
+            <p:cNvSpPr txBox="1"/>
+            <p:nvPr/>
+          </p:nvSpPr>
+          <p:spPr>
+            <a:xfrm>
+              <a:off x="7560" y="7992"/>
+              <a:ext cx="4608" cy="1296"/>
+            </a:xfrm>
+            <a:prstGeom prst="rect">
+              <a:avLst/>
+            </a:prstGeom>
+            <a:noFill/>
+          </p:spPr>
+          <p:txBody>
+            <a:bodyPr wrap="square">
+              <a:spAutoFit/>
+            </a:bodyPr>
+            <a:lstStyle/>
+            <a:p>
+              <a:pPr>
+                <a:defRPr sz="1300">
+                  <a:solidFill>
+                    <a:srgbClr val="666666"/>
+                  </a:solidFill>
+                  <a:latin typeface="Arial" panose="020B0604020202020204"/>
+                </a:defRPr>
+              </a:pPr>
+              <a:r>
+                <a:t>Step-by-step status history with timestamps and error details.</a:t>
+              </a:r>
+            </a:p>
+          </p:txBody>
+        </p:sp>
+        <p:sp>
+          <p:nvSpPr>
+            <p:cNvPr id="50" name="Rounded Rectangle 26"/>
+            <p:cNvSpPr/>
+            <p:nvPr/>
+          </p:nvSpPr>
+          <p:spPr>
+            <a:xfrm>
+              <a:off x="13392" y="5976"/>
+              <a:ext cx="5472" cy="3600"/>
+            </a:xfrm>
+            <a:prstGeom prst="roundRect">
+              <a:avLst/>
+            </a:prstGeom>
+            <a:solidFill>
+              <a:srgbClr val="FFFFFF"/>
+            </a:solidFill>
+            <a:ln w="12700">
+              <a:solidFill>
+                <a:srgbClr val="E8E8E8"/>
+              </a:solidFill>
+            </a:ln>
+          </p:spPr>
+          <p:style>
+            <a:lnRef idx="1">
+              <a:schemeClr val="accent1"/>
+            </a:lnRef>
+            <a:fillRef idx="3">
+              <a:schemeClr val="accent1"/>
+            </a:fillRef>
+            <a:effectRef idx="2">
+              <a:schemeClr val="accent1"/>
+            </a:effectRef>
+            <a:fontRef idx="minor">
+              <a:schemeClr val="lt1"/>
+            </a:fontRef>
+          </p:style>
+          <p:txBody>
+            <a:bodyPr rtlCol="0" anchor="ctr"/>
+            <a:lstStyle/>
+            <a:p>
+              <a:pPr algn="ctr"/>
+            </a:p>
+          </p:txBody>
+        </p:sp>
+        <p:sp>
+          <p:nvSpPr>
+            <p:cNvPr id="51" name="Rectangle 27"/>
+            <p:cNvSpPr/>
+            <p:nvPr/>
+          </p:nvSpPr>
+          <p:spPr>
+            <a:xfrm>
+              <a:off x="13392" y="5976"/>
+              <a:ext cx="5472" cy="115"/>
+            </a:xfrm>
+            <a:prstGeom prst="rect">
+              <a:avLst/>
+            </a:prstGeom>
+            <a:solidFill>
+              <a:srgbClr val="17A2B8"/>
+            </a:solidFill>
+            <a:ln>
+              <a:noFill/>
+            </a:ln>
+          </p:spPr>
+          <p:style>
+            <a:lnRef idx="1">
+              <a:schemeClr val="accent1"/>
+            </a:lnRef>
+            <a:fillRef idx="3">
+              <a:schemeClr val="accent1"/>
+            </a:fillRef>
+            <a:effectRef idx="2">
+              <a:schemeClr val="accent1"/>
+            </a:effectRef>
+            <a:fontRef idx="minor">
+              <a:schemeClr val="lt1"/>
+            </a:fontRef>
+          </p:style>
+          <p:txBody>
+            <a:bodyPr rtlCol="0" anchor="ctr"/>
+            <a:lstStyle/>
+            <a:p>
+              <a:pPr algn="ctr"/>
+            </a:p>
+          </p:txBody>
+        </p:sp>
+        <p:sp>
+          <p:nvSpPr>
+            <p:cNvPr id="52" name="TextBox 28"/>
+            <p:cNvSpPr txBox="1"/>
+            <p:nvPr/>
+          </p:nvSpPr>
+          <p:spPr>
+            <a:xfrm>
+              <a:off x="13824" y="6408"/>
+              <a:ext cx="864" cy="864"/>
+            </a:xfrm>
+            <a:prstGeom prst="rect">
+              <a:avLst/>
+            </a:prstGeom>
+            <a:noFill/>
+          </p:spPr>
+          <p:txBody>
+            <a:bodyPr wrap="none">
+              <a:spAutoFit/>
+            </a:bodyPr>
+            <a:lstStyle/>
+            <a:p>
+              <a:pPr algn="ctr">
+                <a:defRPr sz="2600"/>
+              </a:pPr>
+              <a:r>
+                <a:t>🔌</a:t>
+              </a:r>
+            </a:p>
+          </p:txBody>
+        </p:sp>
+        <p:sp>
+          <p:nvSpPr>
+            <p:cNvPr id="53" name="TextBox 29"/>
+            <p:cNvSpPr txBox="1"/>
+            <p:nvPr/>
+          </p:nvSpPr>
+          <p:spPr>
+            <a:xfrm>
+              <a:off x="13824" y="7344"/>
+              <a:ext cx="4608" cy="720"/>
+            </a:xfrm>
+            <a:prstGeom prst="rect">
+              <a:avLst/>
+            </a:prstGeom>
+            <a:noFill/>
+          </p:spPr>
+          <p:txBody>
+            <a:bodyPr wrap="square">
+              <a:spAutoFit/>
+            </a:bodyPr>
+            <a:lstStyle/>
+            <a:p>
+              <a:pPr>
+                <a:defRPr sz="1800" b="1">
+                  <a:solidFill>
+                    <a:srgbClr val="2D2D2D"/>
+                  </a:solidFill>
+                  <a:latin typeface="Arial" panose="020B0604020202020204"/>
+                </a:defRPr>
+              </a:pPr>
+              <a:r>
+                <a:t>Clean API Layer</a:t>
+              </a:r>
+            </a:p>
+          </p:txBody>
+        </p:sp>
+        <p:sp>
+          <p:nvSpPr>
+            <p:cNvPr id="54" name="TextBox 30"/>
+            <p:cNvSpPr txBox="1"/>
+            <p:nvPr/>
+          </p:nvSpPr>
+          <p:spPr>
+            <a:xfrm>
+              <a:off x="13824" y="7992"/>
+              <a:ext cx="4608" cy="1296"/>
+            </a:xfrm>
+            <a:prstGeom prst="rect">
+              <a:avLst/>
+            </a:prstGeom>
+            <a:noFill/>
+          </p:spPr>
+          <p:txBody>
+            <a:bodyPr wrap="square">
+              <a:spAutoFit/>
+            </a:bodyPr>
+            <a:lstStyle/>
+            <a:p>
+              <a:pPr>
+                <a:defRPr sz="1300">
+                  <a:solidFill>
+                    <a:srgbClr val="666666"/>
+                  </a:solidFill>
+                  <a:latin typeface="Arial" panose="020B0604020202020204"/>
+                </a:defRPr>
+              </a:pPr>
+              <a:r>
+                <a:t>Unified Axios calls with global error handling.</a:t>
+              </a:r>
+            </a:p>
+          </p:txBody>
+        </p:sp>
+      </p:grpSp>
+    </p:spTree>
+  </p:cSld>
+  <p:clrMapOvr>
+    <a:masterClrMapping/>
+  </p:clrMapOvr>
+</p:sld>
+</file>
+
+<file path=ppt/slides/slide14.xml><?xml version="1.0" encoding="utf-8"?>
+<p:sld xmlns:a="http://schemas.openxmlformats.org/drawingml/2006/main" xmlns:r="http://schemas.openxmlformats.org/officeDocument/2006/relationships" xmlns:p="http://schemas.openxmlformats.org/presentationml/2006/main">
   <p:cSld>
     <p:bg>
       <p:bgPr>
@@ -3419,7 +6638,7 @@
         <p:spPr>
           <a:xfrm>
             <a:off x="640080" y="457200"/>
-            <a:ext cx="10972800" cy="1097280"/>
+            <a:ext cx="10972800" cy="583565"/>
           </a:xfrm>
           <a:prstGeom prst="rect">
             <a:avLst/>
@@ -3439,8 +6658,13 @@
                   <a:srgbClr val="1F2329"/>
                 </a:solidFill>
               </a:rPr>
-              <a:t>贡献 4：列表页 / 详情页自动轮询</a:t>
-            </a:r>
+              <a:t>Live Demo </a:t>
+            </a:r>
+            <a:endParaRPr sz="3200" b="1">
+              <a:solidFill>
+                <a:srgbClr val="1F2329"/>
+              </a:solidFill>
+            </a:endParaRPr>
           </a:p>
         </p:txBody>
       </p:sp>
@@ -3453,7 +6677,7 @@
         <p:spPr>
           <a:xfrm>
             <a:off x="822960" y="1371600"/>
-            <a:ext cx="10515600" cy="4754880"/>
+            <a:ext cx="10515600" cy="3630930"/>
           </a:xfrm>
           <a:prstGeom prst="rect">
             <a:avLst/>
@@ -3477,8 +6701,21 @@
                   <a:srgbClr val="1F2329"/>
                 </a:solidFill>
               </a:rPr>
-              <a:t>• 问题：后端每 5 秒自动推进状态，前端不刷新则用户看不到变化</a:t>
-            </a:r>
+              <a:t>• 1. </a:t>
+            </a:r>
+            <a:r>
+              <a:rPr lang="en-US" altLang="zh-CN" sz="2000" b="1">
+                <a:solidFill>
+                  <a:srgbClr val="1F2329"/>
+                </a:solidFill>
+              </a:rPr>
+              <a:t>Create a payment, including validation for amount, currency, and account.</a:t>
+            </a:r>
+            <a:endParaRPr lang="en-US" altLang="zh-CN" sz="2000" b="1">
+              <a:solidFill>
+                <a:srgbClr val="1F2329"/>
+              </a:solidFill>
+            </a:endParaRPr>
           </a:p>
           <a:p>
             <a:pPr>
@@ -3492,8 +6729,21 @@
                   <a:srgbClr val="1F2329"/>
                 </a:solidFill>
               </a:rPr>
-              <a:t>• 详情页：单笔支付非终态时，每 5 秒静默刷新，到终态自动停止</a:t>
-            </a:r>
+              <a:t>• 2. </a:t>
+            </a:r>
+            <a:r>
+              <a:rPr lang="en-US" altLang="zh-CN" sz="2000" b="1">
+                <a:solidFill>
+                  <a:srgbClr val="1F2329"/>
+                </a:solidFill>
+              </a:rPr>
+              <a:t>Switch languages between Chinese, English, and German, and show how the UI text as well as the amount and date formats change accordingly.</a:t>
+            </a:r>
+            <a:endParaRPr lang="en-US" altLang="zh-CN" sz="2000" b="1">
+              <a:solidFill>
+                <a:srgbClr val="1F2329"/>
+              </a:solidFill>
+            </a:endParaRPr>
           </a:p>
           <a:p>
             <a:pPr>
@@ -3507,8 +6757,21 @@
                   <a:srgbClr val="1F2329"/>
                 </a:solidFill>
               </a:rPr>
-              <a:t>• 列表页（新增）：只要当前页存在任意非终态记录就继续轮询</a:t>
-            </a:r>
+              <a:t>• 3. </a:t>
+            </a:r>
+            <a:r>
+              <a:rPr lang="en-US" altLang="zh-CN" sz="2000" b="1">
+                <a:solidFill>
+                  <a:srgbClr val="1F2329"/>
+                </a:solidFill>
+              </a:rPr>
+              <a:t>Open the detail page and demonstrate automatic polling, with the status progressing automatically from CREATED.</a:t>
+            </a:r>
+            <a:endParaRPr lang="en-US" altLang="zh-CN" sz="2000" b="1">
+              <a:solidFill>
+                <a:srgbClr val="1F2329"/>
+              </a:solidFill>
+            </a:endParaRPr>
           </a:p>
           <a:p>
             <a:pPr>
@@ -3522,8 +6785,21 @@
                   <a:srgbClr val="1F2329"/>
                 </a:solidFill>
               </a:rPr>
-              <a:t>• 静默刷新不显示整页 loading 遮罩，避免闪烁</a:t>
-            </a:r>
+              <a:t>• 4. </a:t>
+            </a:r>
+            <a:r>
+              <a:rPr lang="en-US" altLang="zh-CN" sz="2000" b="1">
+                <a:solidFill>
+                  <a:srgbClr val="1F2329"/>
+                </a:solidFill>
+              </a:rPr>
+              <a:t>Demonstrate a payment with insufficient funds by forcing it to change to FAILED / INSUFFICIENT_FUNDS.</a:t>
+            </a:r>
+            <a:endParaRPr lang="en-US" altLang="zh-CN" sz="2000" b="1">
+              <a:solidFill>
+                <a:srgbClr val="1F2329"/>
+              </a:solidFill>
+            </a:endParaRPr>
           </a:p>
           <a:p>
             <a:pPr>
@@ -3537,8 +6813,49 @@
                   <a:srgbClr val="1F2329"/>
                 </a:solidFill>
               </a:rPr>
-              <a:t>• onUnmounted 清理定时器，离开页面不产生后台请求</a:t>
-            </a:r>
+              <a:t>• 5.</a:t>
+            </a:r>
+            <a:r>
+              <a:rPr lang="en-US" altLang="zh-CN" sz="2000" b="1">
+                <a:solidFill>
+                  <a:srgbClr val="1F2329"/>
+                </a:solidFill>
+              </a:rPr>
+              <a:t>View the status history timeline (Audit Trail).</a:t>
+            </a:r>
+            <a:endParaRPr lang="en-US" altLang="zh-CN" sz="2000" b="1">
+              <a:solidFill>
+                <a:srgbClr val="1F2329"/>
+              </a:solidFill>
+            </a:endParaRPr>
+          </a:p>
+          <a:p>
+            <a:pPr>
+              <a:spcAft>
+                <a:spcPts val="1200"/>
+              </a:spcAft>
+            </a:pPr>
+            <a:r>
+              <a:rPr sz="2000" b="1">
+                <a:solidFill>
+                  <a:srgbClr val="1F2329"/>
+                </a:solidFill>
+              </a:rPr>
+              <a:t>• 6. </a:t>
+            </a:r>
+            <a:r>
+              <a:rPr lang="en-US" altLang="zh-CN" sz="2000" b="1">
+                <a:solidFill>
+                  <a:srgbClr val="1F2329"/>
+                </a:solidFill>
+              </a:rPr>
+              <a:t>Demonstrate the recycle bin: soft delete, then restore or permanently delete.</a:t>
+            </a:r>
+            <a:endParaRPr lang="en-US" altLang="zh-CN" sz="2000" b="1">
+              <a:solidFill>
+                <a:srgbClr val="1F2329"/>
+              </a:solidFill>
+            </a:endParaRPr>
           </a:p>
         </p:txBody>
       </p:sp>
@@ -3550,8 +6867,8 @@
 </p:sld>
 </file>
 
-<file path=ppt/slides/slide12.xml><?xml version="1.0" encoding="utf-8"?>
-<p:sld xmlns:a="http://schemas.openxmlformats.org/drawingml/2006/main" xmlns:p="http://schemas.openxmlformats.org/presentationml/2006/main" xmlns:r="http://schemas.openxmlformats.org/officeDocument/2006/relationships">
+<file path=ppt/slides/slide15.xml><?xml version="1.0" encoding="utf-8"?>
+<p:sld xmlns:a="http://schemas.openxmlformats.org/drawingml/2006/main" xmlns:r="http://schemas.openxmlformats.org/officeDocument/2006/relationships" xmlns:p="http://schemas.openxmlformats.org/presentationml/2006/main">
   <p:cSld>
     <p:bg>
       <p:bgPr>
@@ -3577,7 +6894,7 @@
         <p:spPr>
           <a:xfrm>
             <a:off x="640080" y="457200"/>
-            <a:ext cx="10972800" cy="1097280"/>
+            <a:ext cx="10972800" cy="583565"/>
           </a:xfrm>
           <a:prstGeom prst="rect">
             <a:avLst/>
@@ -3592,13 +6909,18 @@
           <a:p>
             <a:pPr algn="l"/>
             <a:r>
-              <a:rPr sz="3200" b="1">
+              <a:rPr lang="en-US" sz="3200" b="1">
                 <a:solidFill>
                   <a:srgbClr val="1F2329"/>
                 </a:solidFill>
               </a:rPr>
-              <a:t>贡献 5：测试用例文档 + JUnit 5 单元测试</a:t>
-            </a:r>
+              <a:t>Summary</a:t>
+            </a:r>
+            <a:endParaRPr lang="en-US" sz="3200" b="1">
+              <a:solidFill>
+                <a:srgbClr val="1F2329"/>
+              </a:solidFill>
+            </a:endParaRPr>
           </a:p>
         </p:txBody>
       </p:sp>
@@ -3611,7 +6933,7 @@
         <p:spPr>
           <a:xfrm>
             <a:off x="822960" y="1371600"/>
-            <a:ext cx="10515600" cy="4754880"/>
+            <a:ext cx="10515600" cy="1783715"/>
           </a:xfrm>
           <a:prstGeom prst="rect">
             <a:avLst/>
@@ -3635,8 +6957,21 @@
                   <a:srgbClr val="1F2329"/>
                 </a:solidFill>
               </a:rPr>
-              <a:t>• test-cases.md：14 个章节，96 个测试用例，覆盖全部核心场景</a:t>
-            </a:r>
+              <a:t>• </a:t>
+            </a:r>
+            <a:r>
+              <a:rPr lang="en-US" altLang="zh-CN" sz="2000" b="1">
+                <a:solidFill>
+                  <a:srgbClr val="1F2329"/>
+                </a:solidFill>
+              </a:rPr>
+              <a:t>This project is more than pages and APIs. It brings payment logic into a working system.</a:t>
+            </a:r>
+            <a:endParaRPr lang="en-US" altLang="zh-CN" sz="2000" b="1">
+              <a:solidFill>
+                <a:srgbClr val="1F2329"/>
+              </a:solidFill>
+            </a:endParaRPr>
           </a:p>
           <a:p>
             <a:pPr>
@@ -3650,8 +6985,21 @@
                   <a:srgbClr val="1F2329"/>
                 </a:solidFill>
               </a:rPr>
-              <a:t>• 主动标注 5 处代码审查发现的“待确认事项”，不回避已知缺口</a:t>
-            </a:r>
+              <a:t>• </a:t>
+            </a:r>
+            <a:r>
+              <a:rPr lang="en-US" altLang="zh-CN" sz="2000" b="1">
+                <a:solidFill>
+                  <a:srgbClr val="1F2329"/>
+                </a:solidFill>
+              </a:rPr>
+              <a:t>We expanded basic CRUD into a fuller prototype.</a:t>
+            </a:r>
+            <a:endParaRPr lang="en-US" altLang="zh-CN" sz="2000" b="1">
+              <a:solidFill>
+                <a:srgbClr val="1F2329"/>
+              </a:solidFill>
+            </a:endParaRPr>
           </a:p>
           <a:p>
             <a:pPr>
@@ -3665,8 +7013,21 @@
                   <a:srgbClr val="1F2329"/>
                 </a:solidFill>
               </a:rPr>
-              <a:t>• PaymentValidatorTest：金额 / 账户 / 余额校验，15 个用例</a:t>
-            </a:r>
+              <a:t>• </a:t>
+            </a:r>
+            <a:r>
+              <a:rPr lang="en-US" altLang="zh-CN" sz="2000" b="1">
+                <a:solidFill>
+                  <a:srgbClr val="1F2329"/>
+                </a:solidFill>
+              </a:rPr>
+              <a:t>The system covers status, errors, recovery, scheduling, and testing.</a:t>
+            </a:r>
+            <a:endParaRPr lang="en-US" altLang="zh-CN" sz="2000" b="1">
+              <a:solidFill>
+                <a:srgbClr val="1F2329"/>
+              </a:solidFill>
+            </a:endParaRPr>
           </a:p>
           <a:p>
             <a:pPr>
@@ -3680,38 +7041,21 @@
                   <a:srgbClr val="1F2329"/>
                 </a:solidFill>
               </a:rPr>
-              <a:t>• PaymentStateMachineTest：参数化测试一次覆盖 25 种状态流转组合</a:t>
-            </a:r>
-          </a:p>
-          <a:p>
-            <a:pPr>
-              <a:spcAft>
-                <a:spcPts val="1200"/>
-              </a:spcAft>
-            </a:pPr>
-            <a:r>
-              <a:rPr sz="2000" b="1">
+              <a:t>• </a:t>
+            </a:r>
+            <a:r>
+              <a:rPr lang="en-US" altLang="zh-CN" sz="2000" b="1">
                 <a:solidFill>
                   <a:srgbClr val="1F2329"/>
                 </a:solidFill>
               </a:rPr>
-              <a:t>• PaymentServiceImplTest：状态解析 + 乐观锁冲突场景（如实记录代码现状）</a:t>
-            </a:r>
-          </a:p>
-          <a:p>
-            <a:pPr>
-              <a:spcAft>
-                <a:spcPts val="1200"/>
-              </a:spcAft>
-            </a:pPr>
-            <a:r>
-              <a:rPr sz="2000" b="1">
-                <a:solidFill>
-                  <a:srgbClr val="1F2329"/>
-                </a:solidFill>
-              </a:rPr>
-              <a:t>• 全部使用 Mockito，隔离数据库与后台调度任务，测试稳定可重复</a:t>
-            </a:r>
+              <a:t>It shows our understanding of business workflows, and also improved our engineering skills.</a:t>
+            </a:r>
+            <a:endParaRPr sz="2000" b="1">
+              <a:solidFill>
+                <a:srgbClr val="1F2329"/>
+              </a:solidFill>
+            </a:endParaRPr>
           </a:p>
         </p:txBody>
       </p:sp>
@@ -3723,8 +7067,111 @@
 </p:sld>
 </file>
 
-<file path=ppt/slides/slide13.xml><?xml version="1.0" encoding="utf-8"?>
-<p:sld xmlns:a="http://schemas.openxmlformats.org/drawingml/2006/main" xmlns:p="http://schemas.openxmlformats.org/presentationml/2006/main" xmlns:r="http://schemas.openxmlformats.org/officeDocument/2006/relationships">
+<file path=ppt/slides/slide16.xml><?xml version="1.0" encoding="utf-8"?>
+<p:sld xmlns:a="http://schemas.openxmlformats.org/drawingml/2006/main" xmlns:r="http://schemas.openxmlformats.org/officeDocument/2006/relationships" xmlns:p="http://schemas.openxmlformats.org/presentationml/2006/main">
+  <p:cSld>
+    <p:bg>
+      <p:bgPr>
+        <a:solidFill>
+          <a:srgbClr val="2563EB"/>
+        </a:solidFill>
+        <a:effectLst/>
+      </p:bgPr>
+    </p:bg>
+    <p:spTree>
+      <p:nvGrpSpPr>
+        <p:cNvPr id="1" name=""/>
+        <p:cNvGrpSpPr/>
+        <p:nvPr/>
+      </p:nvGrpSpPr>
+      <p:grpSpPr/>
+      <p:sp>
+        <p:nvSpPr>
+          <p:cNvPr id="2" name="TextBox 1"/>
+          <p:cNvSpPr txBox="1"/>
+          <p:nvPr/>
+        </p:nvSpPr>
+        <p:spPr>
+          <a:xfrm>
+            <a:off x="640080" y="2743200"/>
+            <a:ext cx="10972800" cy="768350"/>
+          </a:xfrm>
+          <a:prstGeom prst="rect">
+            <a:avLst/>
+          </a:prstGeom>
+          <a:noFill/>
+        </p:spPr>
+        <p:txBody>
+          <a:bodyPr wrap="square">
+            <a:spAutoFit/>
+          </a:bodyPr>
+          <a:lstStyle/>
+          <a:p>
+            <a:pPr algn="l"/>
+            <a:r>
+              <a:rPr lang="en-US" sz="4400" b="1">
+                <a:solidFill>
+                  <a:srgbClr val="FFFFFF"/>
+                </a:solidFill>
+              </a:rPr>
+              <a:t>Thanks for listening</a:t>
+            </a:r>
+            <a:endParaRPr lang="en-US" sz="4400" b="1">
+              <a:solidFill>
+                <a:srgbClr val="FFFFFF"/>
+              </a:solidFill>
+            </a:endParaRPr>
+          </a:p>
+        </p:txBody>
+      </p:sp>
+      <p:sp>
+        <p:nvSpPr>
+          <p:cNvPr id="3" name="TextBox 2"/>
+          <p:cNvSpPr txBox="1"/>
+          <p:nvPr/>
+        </p:nvSpPr>
+        <p:spPr>
+          <a:xfrm>
+            <a:off x="640080" y="3657600"/>
+            <a:ext cx="10972800" cy="731520"/>
+          </a:xfrm>
+          <a:prstGeom prst="rect">
+            <a:avLst/>
+          </a:prstGeom>
+          <a:noFill/>
+        </p:spPr>
+        <p:txBody>
+          <a:bodyPr wrap="square">
+            <a:spAutoFit/>
+          </a:bodyPr>
+          <a:lstStyle/>
+          <a:p>
+            <a:r>
+              <a:rPr sz="2400">
+                <a:solidFill>
+                  <a:srgbClr val="DBEAFE"/>
+                </a:solidFill>
+              </a:rPr>
+              <a:t>Q &amp; A</a:t>
+            </a:r>
+            <a:endParaRPr sz="2400">
+              <a:solidFill>
+                <a:srgbClr val="DBEAFE"/>
+              </a:solidFill>
+            </a:endParaRPr>
+          </a:p>
+        </p:txBody>
+      </p:sp>
+    </p:spTree>
+  </p:cSld>
+  <p:clrMapOvr>
+    <a:masterClrMapping/>
+  </p:clrMapOvr>
+</p:sld>
+</file>
+
+<file path=ppt/slides/slide2.xml><?xml version="1.0" encoding="utf-8"?>
+<p:sld xmlns:a="http://schemas.openxmlformats.org/drawingml/2006/main" xmlns:r="http://schemas.openxmlformats.org/officeDocument/2006/relationships" xmlns:p="http://schemas.openxmlformats.org/presentationml/2006/main">
   <p:cSld>
     <p:bg>
       <p:bgPr>
@@ -3750,7 +7197,7 @@
         <p:spPr>
           <a:xfrm>
             <a:off x="640080" y="457200"/>
-            <a:ext cx="10972800" cy="1097280"/>
+            <a:ext cx="10972800" cy="768350"/>
           </a:xfrm>
           <a:prstGeom prst="rect">
             <a:avLst/>
@@ -3765,13 +7212,18 @@
           <a:p>
             <a:pPr algn="l"/>
             <a:r>
-              <a:rPr sz="3200" b="1">
+              <a:rPr sz="4400" b="1">
                 <a:solidFill>
                   <a:srgbClr val="1F2329"/>
                 </a:solidFill>
               </a:rPr>
-              <a:t>Live Demo 演示提纲</a:t>
-            </a:r>
+              <a:t> Agenda</a:t>
+            </a:r>
+            <a:endParaRPr sz="4400" b="1">
+              <a:solidFill>
+                <a:srgbClr val="1F2329"/>
+              </a:solidFill>
+            </a:endParaRPr>
           </a:p>
         </p:txBody>
       </p:sp>
@@ -3783,8 +7235,8 @@
         </p:nvSpPr>
         <p:spPr>
           <a:xfrm>
-            <a:off x="822960" y="1371600"/>
-            <a:ext cx="10515600" cy="4754880"/>
+            <a:off x="822960" y="1664970"/>
+            <a:ext cx="10515600" cy="3446145"/>
           </a:xfrm>
           <a:prstGeom prst="rect">
             <a:avLst/>
@@ -3803,13 +7255,34 @@
               </a:spcAft>
             </a:pPr>
             <a:r>
-              <a:rPr sz="2000" b="1">
+              <a:rPr sz="2800" b="1">
                 <a:solidFill>
                   <a:srgbClr val="1F2329"/>
                 </a:solidFill>
               </a:rPr>
-              <a:t>• 1. 创建一笔支付（展示幂等键、金额/币种/账户校验）</a:t>
-            </a:r>
+              <a:t>• </a:t>
+            </a:r>
+            <a:r>
+              <a:rPr lang="en-US" sz="2800" b="1">
+                <a:solidFill>
+                  <a:srgbClr val="1F2329"/>
+                </a:solidFill>
+              </a:rPr>
+              <a:t>P</a:t>
+            </a:r>
+            <a:r>
+              <a:rPr lang="en-US" altLang="zh-CN" sz="2800" b="1">
+                <a:solidFill>
+                  <a:srgbClr val="1F2329"/>
+                </a:solidFill>
+              </a:rPr>
+              <a:t>roject Background and Goals</a:t>
+            </a:r>
+            <a:endParaRPr lang="en-US" altLang="zh-CN" sz="2800" b="1">
+              <a:solidFill>
+                <a:srgbClr val="1F2329"/>
+              </a:solidFill>
+            </a:endParaRPr>
           </a:p>
           <a:p>
             <a:pPr>
@@ -3818,13 +7291,34 @@
               </a:spcAft>
             </a:pPr>
             <a:r>
-              <a:rPr sz="2000" b="1">
+              <a:rPr sz="2800" b="1">
                 <a:solidFill>
                   <a:srgbClr val="1F2329"/>
                 </a:solidFill>
               </a:rPr>
-              <a:t>• 2. 切换语言（中/英/德），展示界面文案与金额/日期格式联动变化</a:t>
-            </a:r>
+              <a:t>• </a:t>
+            </a:r>
+            <a:r>
+              <a:rPr lang="en-US" sz="2800" b="1">
+                <a:solidFill>
+                  <a:srgbClr val="1F2329"/>
+                </a:solidFill>
+              </a:rPr>
+              <a:t>S</a:t>
+            </a:r>
+            <a:r>
+              <a:rPr lang="en-US" altLang="zh-CN" sz="2800" b="1">
+                <a:solidFill>
+                  <a:srgbClr val="1F2329"/>
+                </a:solidFill>
+              </a:rPr>
+              <a:t>ystem Design and Tech Stack</a:t>
+            </a:r>
+            <a:endParaRPr lang="en-US" altLang="zh-CN" sz="2800" b="1">
+              <a:solidFill>
+                <a:srgbClr val="1F2329"/>
+              </a:solidFill>
+            </a:endParaRPr>
           </a:p>
           <a:p>
             <a:pPr>
@@ -3833,13 +7327,26 @@
               </a:spcAft>
             </a:pPr>
             <a:r>
-              <a:rPr sz="2000" b="1">
+              <a:rPr sz="2800" b="1">
                 <a:solidFill>
                   <a:srgbClr val="1F2329"/>
                 </a:solidFill>
               </a:rPr>
-              <a:t>• 3. 打开详情页，展示自动轮询：状态从 CREATED 自动推进</a:t>
-            </a:r>
+              <a:t>• </a:t>
+            </a:r>
+            <a:r>
+              <a:rPr lang="en-US" sz="2800" b="1">
+                <a:solidFill>
+                  <a:srgbClr val="1F2329"/>
+                </a:solidFill>
+              </a:rPr>
+              <a:t>Our Contribution</a:t>
+            </a:r>
+            <a:endParaRPr lang="en-US" sz="2800" b="1">
+              <a:solidFill>
+                <a:srgbClr val="1F2329"/>
+              </a:solidFill>
+            </a:endParaRPr>
           </a:p>
           <a:p>
             <a:pPr>
@@ -3848,13 +7355,19 @@
               </a:spcAft>
             </a:pPr>
             <a:r>
-              <a:rPr sz="2000" b="1">
+              <a:rPr sz="2800" b="1">
                 <a:solidFill>
                   <a:srgbClr val="1F2329"/>
                 </a:solidFill>
+                <a:sym typeface="+mn-ea"/>
               </a:rPr>
-              <a:t>• 4. 演示一笔余额不足的支付：强制转为 FAILED / INSUFFICIENT_FUNDS</a:t>
-            </a:r>
+              <a:t>• Live Demo</a:t>
+            </a:r>
+            <a:endParaRPr sz="2800" b="1">
+              <a:solidFill>
+                <a:srgbClr val="1F2329"/>
+              </a:solidFill>
+            </a:endParaRPr>
           </a:p>
           <a:p>
             <a:pPr>
@@ -3863,13 +7376,26 @@
               </a:spcAft>
             </a:pPr>
             <a:r>
-              <a:rPr sz="2000" b="1">
+              <a:rPr sz="2800" b="1">
                 <a:solidFill>
                   <a:srgbClr val="1F2329"/>
                 </a:solidFill>
               </a:rPr>
-              <a:t>• 5. 查看状态历史时间线（Audit Trail）</a:t>
-            </a:r>
+              <a:t>• </a:t>
+            </a:r>
+            <a:r>
+              <a:rPr lang="en-US" sz="2800" b="1">
+                <a:solidFill>
+                  <a:srgbClr val="1F2329"/>
+                </a:solidFill>
+              </a:rPr>
+              <a:t>Testing</a:t>
+            </a:r>
+            <a:endParaRPr sz="2800" b="1">
+              <a:solidFill>
+                <a:srgbClr val="1F2329"/>
+              </a:solidFill>
+            </a:endParaRPr>
           </a:p>
           <a:p>
             <a:pPr>
@@ -3878,13 +7404,26 @@
               </a:spcAft>
             </a:pPr>
             <a:r>
-              <a:rPr sz="2000" b="1">
+              <a:rPr sz="2800" b="1">
                 <a:solidFill>
                   <a:srgbClr val="1F2329"/>
                 </a:solidFill>
               </a:rPr>
-              <a:t>• 6. 演示回收站：软删除 → 恢复 / 永久删除</a:t>
-            </a:r>
+              <a:t>•</a:t>
+            </a:r>
+            <a:r>
+              <a:rPr lang="en-US" sz="2800" b="1">
+                <a:solidFill>
+                  <a:srgbClr val="1F2329"/>
+                </a:solidFill>
+              </a:rPr>
+              <a:t> Summary</a:t>
+            </a:r>
+            <a:endParaRPr lang="en-US" sz="2800" b="1">
+              <a:solidFill>
+                <a:srgbClr val="1F2329"/>
+              </a:solidFill>
+            </a:endParaRPr>
           </a:p>
         </p:txBody>
       </p:sp>
@@ -3896,8 +7435,8 @@
 </p:sld>
 </file>
 
-<file path=ppt/slides/slide14.xml><?xml version="1.0" encoding="utf-8"?>
-<p:sld xmlns:a="http://schemas.openxmlformats.org/drawingml/2006/main" xmlns:p="http://schemas.openxmlformats.org/presentationml/2006/main" xmlns:r="http://schemas.openxmlformats.org/officeDocument/2006/relationships">
+<file path=ppt/slides/slide3.xml><?xml version="1.0" encoding="utf-8"?>
+<p:sld xmlns:a="http://schemas.openxmlformats.org/drawingml/2006/main" xmlns:r="http://schemas.openxmlformats.org/officeDocument/2006/relationships" xmlns:p="http://schemas.openxmlformats.org/presentationml/2006/main">
   <p:cSld>
     <p:bg>
       <p:bgPr>
@@ -3923,7 +7462,7 @@
         <p:spPr>
           <a:xfrm>
             <a:off x="640080" y="457200"/>
-            <a:ext cx="10972800" cy="1097280"/>
+            <a:ext cx="10972800" cy="768350"/>
           </a:xfrm>
           <a:prstGeom prst="rect">
             <a:avLst/>
@@ -3938,13 +7477,18 @@
           <a:p>
             <a:pPr algn="l"/>
             <a:r>
-              <a:rPr sz="3200" b="1">
+              <a:rPr lang="en-US" altLang="zh-CN" sz="4400" b="1">
                 <a:solidFill>
                   <a:srgbClr val="1F2329"/>
                 </a:solidFill>
               </a:rPr>
-              <a:t>遇到的挑战与解决方案</a:t>
-            </a:r>
+              <a:t>Project Background and Goals</a:t>
+            </a:r>
+            <a:endParaRPr lang="en-US" altLang="zh-CN" sz="4400" b="1">
+              <a:solidFill>
+                <a:srgbClr val="1F2329"/>
+              </a:solidFill>
+            </a:endParaRPr>
           </a:p>
         </p:txBody>
       </p:sp>
@@ -3956,8 +7500,8 @@
         </p:nvSpPr>
         <p:spPr>
           <a:xfrm>
-            <a:off x="822960" y="1371600"/>
-            <a:ext cx="10515600" cy="4754880"/>
+            <a:off x="822960" y="1684655"/>
+            <a:ext cx="10515600" cy="3895090"/>
           </a:xfrm>
           <a:prstGeom prst="rect">
             <a:avLst/>
@@ -3971,93 +7515,162 @@
           <a:lstStyle/>
           <a:p>
             <a:pPr>
+              <a:lnSpc>
+                <a:spcPct val="120000"/>
+              </a:lnSpc>
               <a:spcAft>
                 <a:spcPts val="1200"/>
               </a:spcAft>
             </a:pPr>
             <a:r>
-              <a:rPr sz="2000" b="1">
+              <a:rPr lang="en-US" sz="2800" b="1">
                 <a:solidFill>
                   <a:srgbClr val="1F2329"/>
                 </a:solidFill>
               </a:rPr>
-              <a:t>• 挑战：后台定时任务与集成测试断言冲突（flaky test）</a:t>
-            </a:r>
-          </a:p>
-          <a:p>
-            <a:pPr>
+              <a:t>Project background</a:t>
+            </a:r>
+            <a:endParaRPr sz="2800" b="1">
+              <a:solidFill>
+                <a:srgbClr val="1F2329"/>
+              </a:solidFill>
+            </a:endParaRPr>
+          </a:p>
+          <a:p>
+            <a:pPr indent="457200">
+              <a:lnSpc>
+                <a:spcPct val="120000"/>
+              </a:lnSpc>
               <a:spcAft>
                 <a:spcPts val="1200"/>
               </a:spcAft>
             </a:pPr>
             <a:r>
-              <a:rPr sz="1800" b="0">
-                <a:solidFill>
-                  <a:srgbClr val="1F2329"/>
-                </a:solidFill>
+              <a:rPr lang="en-US" altLang="zh-CN" sz="2000">
+                <a:sym typeface="+mn-ea"/>
               </a:rPr>
-              <a:t>    - 解决：改用 Mockito 纯单元测试，不依赖真实 Spring 容器与数据库</a:t>
-            </a:r>
+              <a:t>Full-stack development hands-on training that simulates a real-world payment system lifecycle.</a:t>
+            </a:r>
+            <a:endParaRPr sz="2000" b="1">
+              <a:solidFill>
+                <a:srgbClr val="1F2329"/>
+              </a:solidFill>
+            </a:endParaRPr>
           </a:p>
           <a:p>
             <a:pPr>
+              <a:lnSpc>
+                <a:spcPct val="120000"/>
+              </a:lnSpc>
               <a:spcAft>
                 <a:spcPts val="1200"/>
               </a:spcAft>
             </a:pPr>
             <a:r>
-              <a:rPr sz="2000" b="1">
+              <a:rPr lang="en-US" sz="2800" b="1">
                 <a:solidFill>
                   <a:srgbClr val="1F2329"/>
                 </a:solidFill>
               </a:rPr>
-              <a:t>• 挑战：多语言切换后，Element Plus 内置组件文案未同步</a:t>
-            </a:r>
-          </a:p>
-          <a:p>
-            <a:pPr>
+              <a:t>Goals</a:t>
+            </a:r>
+            <a:endParaRPr lang="en-US" sz="2800" b="1">
+              <a:solidFill>
+                <a:srgbClr val="1F2329"/>
+              </a:solidFill>
+            </a:endParaRPr>
+          </a:p>
+          <a:p>
+            <a:pPr indent="457200">
+              <a:lnSpc>
+                <a:spcPct val="120000"/>
+              </a:lnSpc>
               <a:spcAft>
                 <a:spcPts val="1200"/>
               </a:spcAft>
             </a:pPr>
             <a:r>
-              <a:rPr sz="1800" b="0">
+              <a:rPr lang="en-US" altLang="zh-CN" sz="2000">
                 <a:solidFill>
                   <a:srgbClr val="1F2329"/>
                 </a:solidFill>
               </a:rPr>
-              <a:t>    - 解决：引入 el-config-provider 统一注入语言配置</a:t>
-            </a:r>
-          </a:p>
-          <a:p>
-            <a:pPr>
+              <a:t>Build a payment full-lifecycle management system that enables:</a:t>
+            </a:r>
+            <a:endParaRPr lang="en-US" altLang="zh-CN" sz="2000">
+              <a:solidFill>
+                <a:srgbClr val="1F2329"/>
+              </a:solidFill>
+            </a:endParaRPr>
+          </a:p>
+          <a:p>
+            <a:pPr indent="457200">
+              <a:lnSpc>
+                <a:spcPct val="120000"/>
+              </a:lnSpc>
               <a:spcAft>
                 <a:spcPts val="1200"/>
               </a:spcAft>
             </a:pPr>
             <a:r>
-              <a:rPr sz="2000" b="1">
+              <a:rPr lang="en-US" altLang="zh-CN" sz="2000">
                 <a:solidFill>
                   <a:srgbClr val="1F2329"/>
                 </a:solidFill>
               </a:rPr>
-              <a:t>• 挑战：随机失败模拟与真实余额校验的错误码语义冲突</a:t>
-            </a:r>
-          </a:p>
-          <a:p>
-            <a:pPr>
+              <a:t>Payment creation → validation → sending → completion (or failure)</a:t>
+            </a:r>
+            <a:endParaRPr lang="en-US" altLang="zh-CN" sz="2000">
+              <a:solidFill>
+                <a:srgbClr val="1F2329"/>
+              </a:solidFill>
+            </a:endParaRPr>
+          </a:p>
+          <a:p>
+            <a:pPr indent="457200">
+              <a:lnSpc>
+                <a:spcPct val="120000"/>
+              </a:lnSpc>
               <a:spcAft>
                 <a:spcPts val="1200"/>
               </a:spcAft>
             </a:pPr>
             <a:r>
-              <a:rPr sz="1800" b="0">
+              <a:rPr lang="en-US" altLang="zh-CN" sz="2000">
                 <a:solidFill>
                   <a:srgbClr val="1F2329"/>
                 </a:solidFill>
               </a:rPr>
-              <a:t>    - 解决：明确优先级——真实业务规则先于随机演示逻辑判断</a:t>
-            </a:r>
+              <a:t>Strict state machine transitions (5 statuses: CREATED, VALIDATED, SENT, COMPLETED, FAILED)</a:t>
+            </a:r>
+            <a:endParaRPr lang="en-US" altLang="zh-CN" sz="2000">
+              <a:solidFill>
+                <a:srgbClr val="1F2329"/>
+              </a:solidFill>
+            </a:endParaRPr>
+          </a:p>
+          <a:p>
+            <a:pPr indent="457200">
+              <a:lnSpc>
+                <a:spcPct val="120000"/>
+              </a:lnSpc>
+              <a:spcAft>
+                <a:spcPts val="1200"/>
+              </a:spcAft>
+            </a:pPr>
+            <a:r>
+              <a:rPr lang="en-US" altLang="zh-CN" sz="2000">
+                <a:solidFill>
+                  <a:srgbClr val="1F2329"/>
+                </a:solidFill>
+              </a:rPr>
+              <a:t>Complete audit trail (timestamp recorded for every status change)</a:t>
+            </a:r>
+            <a:endParaRPr lang="en-US" altLang="zh-CN" sz="2000">
+              <a:solidFill>
+                <a:srgbClr val="1F2329"/>
+              </a:solidFill>
+            </a:endParaRPr>
           </a:p>
         </p:txBody>
       </p:sp>
@@ -4069,8 +7682,8 @@
 </p:sld>
 </file>
 
-<file path=ppt/slides/slide15.xml><?xml version="1.0" encoding="utf-8"?>
-<p:sld xmlns:a="http://schemas.openxmlformats.org/drawingml/2006/main" xmlns:p="http://schemas.openxmlformats.org/presentationml/2006/main" xmlns:r="http://schemas.openxmlformats.org/officeDocument/2006/relationships">
+<file path=ppt/slides/slide4.xml><?xml version="1.0" encoding="utf-8"?>
+<p:sld xmlns:a="http://schemas.openxmlformats.org/drawingml/2006/main" xmlns:r="http://schemas.openxmlformats.org/officeDocument/2006/relationships" xmlns:p="http://schemas.openxmlformats.org/presentationml/2006/main">
   <p:cSld>
     <p:bg>
       <p:bgPr>
@@ -4096,7 +7709,7 @@
         <p:spPr>
           <a:xfrm>
             <a:off x="640080" y="457200"/>
-            <a:ext cx="10972800" cy="1097280"/>
+            <a:ext cx="10972800" cy="768350"/>
           </a:xfrm>
           <a:prstGeom prst="rect">
             <a:avLst/>
@@ -4111,13 +7724,18 @@
           <a:p>
             <a:pPr algn="l"/>
             <a:r>
-              <a:rPr sz="3200" b="1">
+              <a:rPr lang="en-US" altLang="zh-CN" sz="4400" b="1">
                 <a:solidFill>
                   <a:srgbClr val="1F2329"/>
                 </a:solidFill>
               </a:rPr>
-              <a:t>未来展望</a:t>
-            </a:r>
+              <a:t>Payment Lifecycle &amp; State Machine Design</a:t>
+            </a:r>
+            <a:endParaRPr lang="en-US" altLang="zh-CN" sz="4400" b="1">
+              <a:solidFill>
+                <a:srgbClr val="1F2329"/>
+              </a:solidFill>
+            </a:endParaRPr>
           </a:p>
         </p:txBody>
       </p:sp>
@@ -4129,8 +7747,8 @@
         </p:nvSpPr>
         <p:spPr>
           <a:xfrm>
-            <a:off x="822960" y="1371600"/>
-            <a:ext cx="10515600" cy="4754880"/>
+            <a:off x="822960" y="1584960"/>
+            <a:ext cx="11237595" cy="4492625"/>
           </a:xfrm>
           <a:prstGeom prst="rect">
             <a:avLst/>
@@ -4143,79 +7761,189 @@
           </a:bodyPr>
           <a:lstStyle/>
           <a:p>
+            <a:pPr marL="342900" indent="-342900">
+              <a:lnSpc>
+                <a:spcPct val="150000"/>
+              </a:lnSpc>
+              <a:spcAft>
+                <a:spcPts val="1200"/>
+              </a:spcAft>
+              <a:buFont typeface="Wingdings" panose="05000000000000000000" charset="0"/>
+              <a:buChar char="l"/>
+            </a:pPr>
+            <a:r>
+              <a:rPr lang="en-US" sz="2000">
+                <a:solidFill>
+                  <a:srgbClr val="1F2329"/>
+                </a:solidFill>
+              </a:rPr>
+              <a:t>FIve states</a:t>
+            </a:r>
+            <a:r>
+              <a:rPr sz="2000">
+                <a:solidFill>
+                  <a:srgbClr val="1F2329"/>
+                </a:solidFill>
+              </a:rPr>
+              <a:t>：CREATED → VALIDATED → SENT → COMPLETED</a:t>
+            </a:r>
+            <a:endParaRPr sz="2000">
+              <a:solidFill>
+                <a:srgbClr val="1F2329"/>
+              </a:solidFill>
+            </a:endParaRPr>
+          </a:p>
+          <a:p>
+            <a:pPr marL="342900" indent="-342900">
+              <a:lnSpc>
+                <a:spcPct val="150000"/>
+              </a:lnSpc>
+              <a:spcAft>
+                <a:spcPts val="1200"/>
+              </a:spcAft>
+              <a:buFont typeface="Wingdings" panose="05000000000000000000" charset="0"/>
+              <a:buChar char="l"/>
+            </a:pPr>
+            <a:r>
+              <a:rPr lang="en-US" altLang="zh-CN" sz="2000">
+                <a:solidFill>
+                  <a:srgbClr val="1F2329"/>
+                </a:solidFill>
+              </a:rPr>
+              <a:t>Any state can transition to FAILED (terminal state)</a:t>
+            </a:r>
+            <a:endParaRPr lang="en-US" altLang="zh-CN" sz="2000">
+              <a:solidFill>
+                <a:srgbClr val="1F2329"/>
+              </a:solidFill>
+            </a:endParaRPr>
+          </a:p>
+          <a:p>
+            <a:pPr marL="342900" indent="-342900">
+              <a:lnSpc>
+                <a:spcPct val="150000"/>
+              </a:lnSpc>
+              <a:spcAft>
+                <a:spcPts val="1200"/>
+              </a:spcAft>
+              <a:buFont typeface="Wingdings" panose="05000000000000000000" charset="0"/>
+              <a:buChar char="l"/>
+            </a:pPr>
+            <a:r>
+              <a:rPr lang="en-US" altLang="zh-CN" sz="2000">
+                <a:solidFill>
+                  <a:srgbClr val="1F2329"/>
+                </a:solidFill>
+              </a:rPr>
+              <a:t>Valid transitions are centrally managed by PaymentStateMachine – no skipping or reversing allowed</a:t>
+            </a:r>
+            <a:endParaRPr lang="en-US" altLang="zh-CN" sz="2000">
+              <a:solidFill>
+                <a:srgbClr val="1F2329"/>
+              </a:solidFill>
+            </a:endParaRPr>
+          </a:p>
+          <a:p>
+            <a:pPr marL="742950" lvl="1" indent="-285750">
+              <a:lnSpc>
+                <a:spcPct val="150000"/>
+              </a:lnSpc>
+              <a:spcAft>
+                <a:spcPts val="1200"/>
+              </a:spcAft>
+              <a:buFont typeface="Arial" panose="020B0604020202020204" pitchFamily="34" charset="0"/>
+              <a:buChar char="•"/>
+            </a:pPr>
+            <a:r>
+              <a:rPr lang="en-US" altLang="zh-CN" sz="1800" b="0">
+                <a:solidFill>
+                  <a:srgbClr val="1F2329"/>
+                </a:solidFill>
+              </a:rPr>
+              <a:t>CREATED → VALIDATED: three-layer validation (amount / currency / account) + sufficient balance check</a:t>
+            </a:r>
+            <a:endParaRPr lang="en-US" altLang="zh-CN" sz="1800" b="0">
+              <a:solidFill>
+                <a:srgbClr val="1F2329"/>
+              </a:solidFill>
+            </a:endParaRPr>
+          </a:p>
+          <a:p>
+            <a:pPr marL="742950" lvl="1" indent="-285750">
+              <a:lnSpc>
+                <a:spcPct val="150000"/>
+              </a:lnSpc>
+              <a:spcAft>
+                <a:spcPts val="1200"/>
+              </a:spcAft>
+              <a:buFont typeface="Arial" panose="020B0604020202020204" pitchFamily="34" charset="0"/>
+              <a:buChar char="•"/>
+            </a:pPr>
+            <a:r>
+              <a:rPr lang="en-US" altLang="zh-CN" sz="1800" b="0">
+                <a:solidFill>
+                  <a:srgbClr val="1F2329"/>
+                </a:solidFill>
+              </a:rPr>
+              <a:t>VALIDATED → SENT, SENT → COMPLETED: normal progression</a:t>
+            </a:r>
+            <a:endParaRPr lang="en-US" altLang="zh-CN" sz="1800" b="0">
+              <a:solidFill>
+                <a:srgbClr val="1F2329"/>
+              </a:solidFill>
+            </a:endParaRPr>
+          </a:p>
+          <a:p>
+            <a:pPr marL="742950" lvl="1" indent="-285750">
+              <a:lnSpc>
+                <a:spcPct val="150000"/>
+              </a:lnSpc>
+              <a:spcAft>
+                <a:spcPts val="1200"/>
+              </a:spcAft>
+              <a:buFont typeface="Arial" panose="020B0604020202020204" pitchFamily="34" charset="0"/>
+              <a:buChar char="•"/>
+            </a:pPr>
+            <a:r>
+              <a:rPr lang="en-US" altLang="zh-CN" sz="1800" b="0">
+                <a:solidFill>
+                  <a:srgbClr val="1F2329"/>
+                </a:solidFill>
+              </a:rPr>
+              <a:t>Any state → FAILED: carries errorCode + errorMessage</a:t>
+            </a:r>
+            <a:endParaRPr lang="en-US" altLang="zh-CN" sz="1800" b="0">
+              <a:solidFill>
+                <a:srgbClr val="1F2329"/>
+              </a:solidFill>
+            </a:endParaRPr>
+          </a:p>
+          <a:p>
+            <a:pPr>
+              <a:lnSpc>
+                <a:spcPct val="150000"/>
+              </a:lnSpc>
+              <a:spcAft>
+                <a:spcPts val="1200"/>
+              </a:spcAft>
+            </a:pPr>
+            <a:endParaRPr lang="en-US" altLang="zh-CN" sz="1800" b="0">
+              <a:solidFill>
+                <a:srgbClr val="1F2329"/>
+              </a:solidFill>
+            </a:endParaRPr>
+          </a:p>
+          <a:p>
             <a:pPr>
               <a:spcAft>
                 <a:spcPts val="1200"/>
               </a:spcAft>
             </a:pPr>
-            <a:r>
-              <a:rPr sz="2000" b="1">
-                <a:solidFill>
-                  <a:srgbClr val="1F2329"/>
-                </a:solidFill>
-              </a:rPr>
-              <a:t>• 补充 Controller 层 @WebMvcTest，提升整体测试覆盖率至 80%+</a:t>
-            </a:r>
-          </a:p>
-          <a:p>
-            <a:pPr>
-              <a:spcAft>
-                <a:spcPts val="1200"/>
-              </a:spcAft>
-            </a:pPr>
-            <a:r>
-              <a:rPr sz="2000" b="1">
-                <a:solidFill>
-                  <a:srgbClr val="1F2329"/>
-                </a:solidFill>
-              </a:rPr>
-              <a:t>• 引入可 mock 的 Clock，解决回收站保留期边界测试的时间注入问题</a:t>
-            </a:r>
-          </a:p>
-          <a:p>
-            <a:pPr>
-              <a:spcAft>
-                <a:spcPts val="1200"/>
-              </a:spcAft>
-            </a:pPr>
-            <a:r>
-              <a:rPr sz="2000" b="1">
-                <a:solidFill>
-                  <a:srgbClr val="1F2329"/>
-                </a:solidFill>
-              </a:rPr>
-              <a:t>• 为乐观锁冲突场景补充真实的异常检测与友好错误码</a:t>
-            </a:r>
-          </a:p>
-          <a:p>
-            <a:pPr>
-              <a:spcAft>
-                <a:spcPts val="1200"/>
-              </a:spcAft>
-            </a:pPr>
-            <a:r>
-              <a:rPr sz="2000" b="1">
-                <a:solidFill>
-                  <a:srgbClr val="1F2329"/>
-                </a:solidFill>
-              </a:rPr>
-              <a:t>• 多语言支持更多语种，補充德语专业术语校对</a:t>
-            </a:r>
-          </a:p>
-          <a:p>
-            <a:pPr>
-              <a:spcAft>
-                <a:spcPts val="1200"/>
-              </a:spcAft>
-            </a:pPr>
-            <a:r>
-              <a:rPr sz="2000" b="1">
-                <a:solidFill>
-                  <a:srgbClr val="1F2329"/>
-                </a:solidFill>
-              </a:rPr>
-              <a:t>• 接入真实 CI/CD，将 JaCoCo 覆盖率检查纳入流水线门禁</a:t>
-            </a:r>
+            <a:endParaRPr lang="en-US" altLang="zh-CN" sz="1800" b="0">
+              <a:solidFill>
+                <a:srgbClr val="1F2329"/>
+              </a:solidFill>
+            </a:endParaRPr>
           </a:p>
         </p:txBody>
       </p:sp>
@@ -4227,8 +7955,551 @@
 </p:sld>
 </file>
 
-<file path=ppt/slides/slide16.xml><?xml version="1.0" encoding="utf-8"?>
-<p:sld xmlns:a="http://schemas.openxmlformats.org/drawingml/2006/main" xmlns:p="http://schemas.openxmlformats.org/presentationml/2006/main" xmlns:r="http://schemas.openxmlformats.org/officeDocument/2006/relationships">
+<file path=ppt/slides/slide5.xml><?xml version="1.0" encoding="utf-8"?>
+<p:sld xmlns:a="http://schemas.openxmlformats.org/drawingml/2006/main" xmlns:r="http://schemas.openxmlformats.org/officeDocument/2006/relationships" xmlns:p="http://schemas.openxmlformats.org/presentationml/2006/main">
+  <p:cSld>
+    <p:bg>
+      <p:bgPr>
+        <a:solidFill>
+          <a:srgbClr val="FFFFFF"/>
+        </a:solidFill>
+        <a:effectLst/>
+      </p:bgPr>
+    </p:bg>
+    <p:spTree>
+      <p:nvGrpSpPr>
+        <p:cNvPr id="1" name=""/>
+        <p:cNvGrpSpPr/>
+        <p:nvPr/>
+      </p:nvGrpSpPr>
+      <p:grpSpPr/>
+      <p:sp>
+        <p:nvSpPr>
+          <p:cNvPr id="2" name="TextBox 1"/>
+          <p:cNvSpPr txBox="1"/>
+          <p:nvPr/>
+        </p:nvSpPr>
+        <p:spPr>
+          <a:xfrm>
+            <a:off x="640080" y="457200"/>
+            <a:ext cx="10972800" cy="768350"/>
+          </a:xfrm>
+          <a:prstGeom prst="rect">
+            <a:avLst/>
+          </a:prstGeom>
+          <a:noFill/>
+        </p:spPr>
+        <p:txBody>
+          <a:bodyPr wrap="square">
+            <a:spAutoFit/>
+          </a:bodyPr>
+          <a:lstStyle/>
+          <a:p>
+            <a:pPr algn="l"/>
+            <a:r>
+              <a:rPr lang="en-US" altLang="zh-CN" sz="4400" b="1">
+                <a:solidFill>
+                  <a:srgbClr val="1F2329"/>
+                </a:solidFill>
+              </a:rPr>
+              <a:t>System Architecture &amp; Tech Stack</a:t>
+            </a:r>
+            <a:endParaRPr lang="en-US" altLang="zh-CN" sz="4400" b="1">
+              <a:solidFill>
+                <a:srgbClr val="1F2329"/>
+              </a:solidFill>
+            </a:endParaRPr>
+          </a:p>
+        </p:txBody>
+      </p:sp>
+      <p:sp>
+        <p:nvSpPr>
+          <p:cNvPr id="3" name="TextBox 2"/>
+          <p:cNvSpPr txBox="1"/>
+          <p:nvPr/>
+        </p:nvSpPr>
+        <p:spPr>
+          <a:xfrm>
+            <a:off x="822960" y="1371600"/>
+            <a:ext cx="10515600" cy="4461510"/>
+          </a:xfrm>
+          <a:prstGeom prst="rect">
+            <a:avLst/>
+          </a:prstGeom>
+          <a:noFill/>
+        </p:spPr>
+        <p:txBody>
+          <a:bodyPr wrap="square">
+            <a:spAutoFit/>
+          </a:bodyPr>
+          <a:lstStyle/>
+          <a:p>
+            <a:pPr marL="342900" indent="-342900">
+              <a:lnSpc>
+                <a:spcPct val="140000"/>
+              </a:lnSpc>
+              <a:spcAft>
+                <a:spcPts val="1200"/>
+              </a:spcAft>
+              <a:buFont typeface="Arial" panose="020B0604020202020204" pitchFamily="34" charset="0"/>
+              <a:buChar char="•"/>
+            </a:pPr>
+            <a:r>
+              <a:rPr lang="en-US" altLang="zh-CN" sz="2000">
+                <a:solidFill>
+                  <a:srgbClr val="1F2329"/>
+                </a:solidFill>
+              </a:rPr>
+              <a:t>Frontend: Vue 3 + Element Plus + vue-router + vue-i18n</a:t>
+            </a:r>
+            <a:endParaRPr lang="en-US" altLang="zh-CN" sz="2000">
+              <a:solidFill>
+                <a:srgbClr val="1F2329"/>
+              </a:solidFill>
+            </a:endParaRPr>
+          </a:p>
+          <a:p>
+            <a:pPr marL="342900" indent="-342900">
+              <a:lnSpc>
+                <a:spcPct val="140000"/>
+              </a:lnSpc>
+              <a:spcAft>
+                <a:spcPts val="1200"/>
+              </a:spcAft>
+              <a:buFont typeface="Arial" panose="020B0604020202020204" pitchFamily="34" charset="0"/>
+              <a:buChar char="•"/>
+            </a:pPr>
+            <a:r>
+              <a:rPr lang="en-US" altLang="zh-CN" sz="2000">
+                <a:solidFill>
+                  <a:srgbClr val="1F2329"/>
+                </a:solidFill>
+              </a:rPr>
+              <a:t>Backend: Spring Boot 3 + MyBatis-Plus + MySQL, with a layered architecture:</a:t>
+            </a:r>
+            <a:endParaRPr lang="en-US" altLang="zh-CN" sz="2000">
+              <a:solidFill>
+                <a:srgbClr val="1F2329"/>
+              </a:solidFill>
+            </a:endParaRPr>
+          </a:p>
+          <a:p>
+            <a:pPr marL="342900" indent="-342900">
+              <a:lnSpc>
+                <a:spcPct val="140000"/>
+              </a:lnSpc>
+              <a:spcAft>
+                <a:spcPts val="1200"/>
+              </a:spcAft>
+              <a:buFont typeface="Arial" panose="020B0604020202020204" pitchFamily="34" charset="0"/>
+              <a:buChar char="•"/>
+            </a:pPr>
+            <a:r>
+              <a:rPr lang="en-US" altLang="zh-CN" sz="2000">
+                <a:solidFill>
+                  <a:srgbClr val="1F2329"/>
+                </a:solidFill>
+              </a:rPr>
+              <a:t>Controller / Service / Validator / StateMachine</a:t>
+            </a:r>
+            <a:endParaRPr lang="en-US" altLang="zh-CN" sz="2000">
+              <a:solidFill>
+                <a:srgbClr val="1F2329"/>
+              </a:solidFill>
+            </a:endParaRPr>
+          </a:p>
+          <a:p>
+            <a:pPr marL="342900" indent="-342900">
+              <a:lnSpc>
+                <a:spcPct val="140000"/>
+              </a:lnSpc>
+              <a:spcAft>
+                <a:spcPts val="1200"/>
+              </a:spcAft>
+              <a:buFont typeface="Arial" panose="020B0604020202020204" pitchFamily="34" charset="0"/>
+              <a:buChar char="•"/>
+            </a:pPr>
+            <a:r>
+              <a:rPr lang="en-US" altLang="zh-CN" sz="2000">
+                <a:solidFill>
+                  <a:srgbClr val="1F2329"/>
+                </a:solidFill>
+              </a:rPr>
+              <a:t>Unified Response Body: { success, data, errorCode, message }</a:t>
+            </a:r>
+            <a:endParaRPr lang="en-US" altLang="zh-CN" sz="2000">
+              <a:solidFill>
+                <a:srgbClr val="1F2329"/>
+              </a:solidFill>
+            </a:endParaRPr>
+          </a:p>
+          <a:p>
+            <a:pPr marL="342900" indent="-342900">
+              <a:lnSpc>
+                <a:spcPct val="140000"/>
+              </a:lnSpc>
+              <a:spcAft>
+                <a:spcPts val="1200"/>
+              </a:spcAft>
+              <a:buFont typeface="Arial" panose="020B0604020202020204" pitchFamily="34" charset="0"/>
+              <a:buChar char="•"/>
+            </a:pPr>
+            <a:r>
+              <a:rPr lang="en-US" altLang="zh-CN" sz="2000">
+                <a:solidFill>
+                  <a:srgbClr val="1F2329"/>
+                </a:solidFill>
+              </a:rPr>
+              <a:t>Global Exception Handling: @RestControllerAdvice to uniformly transform error responses</a:t>
+            </a:r>
+            <a:endParaRPr lang="en-US" altLang="zh-CN" sz="2000">
+              <a:solidFill>
+                <a:srgbClr val="1F2329"/>
+              </a:solidFill>
+            </a:endParaRPr>
+          </a:p>
+          <a:p>
+            <a:pPr marL="342900" indent="-342900">
+              <a:lnSpc>
+                <a:spcPct val="140000"/>
+              </a:lnSpc>
+              <a:spcAft>
+                <a:spcPts val="1200"/>
+              </a:spcAft>
+              <a:buFont typeface="Arial" panose="020B0604020202020204" pitchFamily="34" charset="0"/>
+              <a:buChar char="•"/>
+            </a:pPr>
+            <a:r>
+              <a:rPr lang="en-US" altLang="zh-CN" sz="2000">
+                <a:solidFill>
+                  <a:srgbClr val="1F2329"/>
+                </a:solidFill>
+              </a:rPr>
+              <a:t>API Documentation: Swagger / OpenAPI</a:t>
+            </a:r>
+            <a:endParaRPr lang="en-US" altLang="zh-CN" sz="2000">
+              <a:solidFill>
+                <a:srgbClr val="1F2329"/>
+              </a:solidFill>
+            </a:endParaRPr>
+          </a:p>
+          <a:p>
+            <a:pPr marL="342900" indent="-342900">
+              <a:lnSpc>
+                <a:spcPct val="140000"/>
+              </a:lnSpc>
+              <a:spcAft>
+                <a:spcPts val="1200"/>
+              </a:spcAft>
+              <a:buFont typeface="Arial" panose="020B0604020202020204" pitchFamily="34" charset="0"/>
+              <a:buChar char="•"/>
+            </a:pPr>
+            <a:r>
+              <a:rPr lang="en-US" altLang="zh-CN" sz="2000">
+                <a:solidFill>
+                  <a:srgbClr val="1F2329"/>
+                </a:solidFill>
+              </a:rPr>
+              <a:t>Scheduled Task: PaymentAutoTransitionScheduler to simulate asynchronous processing delays experienced in real-world network calls</a:t>
+            </a:r>
+            <a:endParaRPr lang="en-US" altLang="zh-CN" sz="2000">
+              <a:solidFill>
+                <a:srgbClr val="1F2329"/>
+              </a:solidFill>
+            </a:endParaRPr>
+          </a:p>
+        </p:txBody>
+      </p:sp>
+    </p:spTree>
+  </p:cSld>
+  <p:clrMapOvr>
+    <a:masterClrMapping/>
+  </p:clrMapOvr>
+</p:sld>
+</file>
+
+<file path=ppt/slides/slide6.xml><?xml version="1.0" encoding="utf-8"?>
+<p:sld xmlns:a="http://schemas.openxmlformats.org/drawingml/2006/main" xmlns:r="http://schemas.openxmlformats.org/officeDocument/2006/relationships" xmlns:p="http://schemas.openxmlformats.org/presentationml/2006/main">
+  <p:cSld>
+    <p:bg>
+      <p:bgPr>
+        <a:solidFill>
+          <a:srgbClr val="FFFFFF"/>
+        </a:solidFill>
+        <a:effectLst/>
+      </p:bgPr>
+    </p:bg>
+    <p:spTree>
+      <p:nvGrpSpPr>
+        <p:cNvPr id="1" name=""/>
+        <p:cNvGrpSpPr/>
+        <p:nvPr/>
+      </p:nvGrpSpPr>
+      <p:grpSpPr/>
+      <p:sp>
+        <p:nvSpPr>
+          <p:cNvPr id="2" name="TextBox 1"/>
+          <p:cNvSpPr txBox="1"/>
+          <p:nvPr/>
+        </p:nvSpPr>
+        <p:spPr>
+          <a:xfrm>
+            <a:off x="640080" y="457200"/>
+            <a:ext cx="10972800" cy="768350"/>
+          </a:xfrm>
+          <a:prstGeom prst="rect">
+            <a:avLst/>
+          </a:prstGeom>
+          <a:noFill/>
+        </p:spPr>
+        <p:txBody>
+          <a:bodyPr wrap="square">
+            <a:spAutoFit/>
+          </a:bodyPr>
+          <a:lstStyle/>
+          <a:p>
+            <a:pPr algn="l"/>
+            <a:r>
+              <a:rPr lang="en-US" altLang="zh-CN" sz="4400" b="1">
+                <a:solidFill>
+                  <a:srgbClr val="1F2329"/>
+                </a:solidFill>
+              </a:rPr>
+              <a:t>Core Feature Modules Overview</a:t>
+            </a:r>
+            <a:endParaRPr lang="en-US" altLang="zh-CN" sz="3200" b="1">
+              <a:solidFill>
+                <a:srgbClr val="1F2329"/>
+              </a:solidFill>
+            </a:endParaRPr>
+          </a:p>
+        </p:txBody>
+      </p:sp>
+      <p:sp>
+        <p:nvSpPr>
+          <p:cNvPr id="3" name="TextBox 2"/>
+          <p:cNvSpPr txBox="1"/>
+          <p:nvPr/>
+        </p:nvSpPr>
+        <p:spPr>
+          <a:xfrm>
+            <a:off x="822960" y="1558290"/>
+            <a:ext cx="10515600" cy="3446145"/>
+          </a:xfrm>
+          <a:prstGeom prst="rect">
+            <a:avLst/>
+          </a:prstGeom>
+          <a:noFill/>
+        </p:spPr>
+        <p:txBody>
+          <a:bodyPr wrap="square">
+            <a:spAutoFit/>
+          </a:bodyPr>
+          <a:lstStyle/>
+          <a:p>
+            <a:pPr marL="342900" indent="-342900">
+              <a:lnSpc>
+                <a:spcPct val="140000"/>
+              </a:lnSpc>
+              <a:spcAft>
+                <a:spcPts val="1200"/>
+              </a:spcAft>
+              <a:buFont typeface="Arial" panose="020B0604020202020204" pitchFamily="34" charset="0"/>
+              <a:buChar char="•"/>
+            </a:pPr>
+            <a:r>
+              <a:rPr lang="en-US" altLang="zh-CN" sz="2000">
+                <a:solidFill>
+                  <a:srgbClr val="1F2329"/>
+                </a:solidFill>
+              </a:rPr>
+              <a:t>Payment creation (idempotency key to prevent duplicate submissions)</a:t>
+            </a:r>
+            <a:endParaRPr lang="en-US" altLang="zh-CN" sz="2000">
+              <a:solidFill>
+                <a:srgbClr val="1F2329"/>
+              </a:solidFill>
+            </a:endParaRPr>
+          </a:p>
+          <a:p>
+            <a:pPr marL="342900" indent="-342900">
+              <a:lnSpc>
+                <a:spcPct val="140000"/>
+              </a:lnSpc>
+              <a:spcAft>
+                <a:spcPts val="1200"/>
+              </a:spcAft>
+              <a:buFont typeface="Arial" panose="020B0604020202020204" pitchFamily="34" charset="0"/>
+              <a:buChar char="•"/>
+            </a:pPr>
+            <a:r>
+              <a:rPr lang="en-US" altLang="zh-CN" sz="2000">
+                <a:solidFill>
+                  <a:srgbClr val="1F2329"/>
+                </a:solidFill>
+              </a:rPr>
+              <a:t>Payment details view + failure error details display</a:t>
+            </a:r>
+            <a:endParaRPr lang="en-US" altLang="zh-CN" sz="2000">
+              <a:solidFill>
+                <a:srgbClr val="1F2329"/>
+              </a:solidFill>
+            </a:endParaRPr>
+          </a:p>
+          <a:p>
+            <a:pPr marL="342900" indent="-342900">
+              <a:lnSpc>
+                <a:spcPct val="140000"/>
+              </a:lnSpc>
+              <a:spcAft>
+                <a:spcPts val="1200"/>
+              </a:spcAft>
+              <a:buFont typeface="Arial" panose="020B0604020202020204" pitchFamily="34" charset="0"/>
+              <a:buChar char="•"/>
+            </a:pPr>
+            <a:r>
+              <a:rPr lang="en-US" altLang="zh-CN" sz="2000">
+                <a:solidFill>
+                  <a:srgbClr val="1F2329"/>
+                </a:solidFill>
+              </a:rPr>
+              <a:t>Payment status history timeline (Audit Trail)</a:t>
+            </a:r>
+            <a:endParaRPr lang="en-US" altLang="zh-CN" sz="2000">
+              <a:solidFill>
+                <a:srgbClr val="1F2329"/>
+              </a:solidFill>
+            </a:endParaRPr>
+          </a:p>
+          <a:p>
+            <a:pPr marL="342900" indent="-342900">
+              <a:lnSpc>
+                <a:spcPct val="140000"/>
+              </a:lnSpc>
+              <a:spcAft>
+                <a:spcPts val="1200"/>
+              </a:spcAft>
+              <a:buFont typeface="Arial" panose="020B0604020202020204" pitchFamily="34" charset="0"/>
+              <a:buChar char="•"/>
+            </a:pPr>
+            <a:r>
+              <a:rPr lang="en-US" altLang="zh-CN" sz="2000">
+                <a:solidFill>
+                  <a:srgbClr val="1F2329"/>
+                </a:solidFill>
+              </a:rPr>
+              <a:t>Payment list retrieval, filtering by status, pagination</a:t>
+            </a:r>
+            <a:endParaRPr lang="en-US" altLang="zh-CN" sz="2000">
+              <a:solidFill>
+                <a:srgbClr val="1F2329"/>
+              </a:solidFill>
+            </a:endParaRPr>
+          </a:p>
+          <a:p>
+            <a:pPr marL="342900" indent="-342900">
+              <a:lnSpc>
+                <a:spcPct val="140000"/>
+              </a:lnSpc>
+              <a:spcAft>
+                <a:spcPts val="1200"/>
+              </a:spcAft>
+              <a:buFont typeface="Arial" panose="020B0604020202020204" pitchFamily="34" charset="0"/>
+              <a:buChar char="•"/>
+            </a:pPr>
+            <a:r>
+              <a:rPr lang="en-US" altLang="zh-CN" sz="2000">
+                <a:solidFill>
+                  <a:srgbClr val="1F2329"/>
+                </a:solidFill>
+              </a:rPr>
+              <a:t>Recycle bin (soft delete / restore / permanent delete, 30-day retention)</a:t>
+            </a:r>
+            <a:endParaRPr lang="en-US" altLang="zh-CN" sz="2000">
+              <a:solidFill>
+                <a:srgbClr val="1F2329"/>
+              </a:solidFill>
+            </a:endParaRPr>
+          </a:p>
+          <a:p>
+            <a:pPr marL="342900" indent="-342900">
+              <a:lnSpc>
+                <a:spcPct val="140000"/>
+              </a:lnSpc>
+              <a:spcAft>
+                <a:spcPts val="1200"/>
+              </a:spcAft>
+              <a:buFont typeface="Arial" panose="020B0604020202020204" pitchFamily="34" charset="0"/>
+              <a:buChar char="•"/>
+            </a:pPr>
+            <a:r>
+              <a:rPr lang="en-US" altLang="zh-CN" sz="2000">
+                <a:solidFill>
+                  <a:srgbClr val="1F2329"/>
+                </a:solidFill>
+              </a:rPr>
+              <a:t>Manual status transition interface</a:t>
+            </a:r>
+            <a:endParaRPr lang="en-US" altLang="zh-CN" sz="2000">
+              <a:solidFill>
+                <a:srgbClr val="1F2329"/>
+              </a:solidFill>
+            </a:endParaRPr>
+          </a:p>
+        </p:txBody>
+      </p:sp>
+    </p:spTree>
+  </p:cSld>
+  <p:clrMapOvr>
+    <a:masterClrMapping/>
+  </p:clrMapOvr>
+</p:sld>
+</file>
+
+<file path=ppt/slides/slide7.xml><?xml version="1.0" encoding="utf-8"?>
+<p:sld xmlns:a="http://schemas.openxmlformats.org/drawingml/2006/main" xmlns:r="http://schemas.openxmlformats.org/officeDocument/2006/relationships" xmlns:p="http://schemas.openxmlformats.org/presentationml/2006/main">
+  <p:cSld>
+    <p:spTree>
+      <p:nvGrpSpPr>
+        <p:cNvPr id="1" name=""/>
+        <p:cNvGrpSpPr/>
+        <p:nvPr/>
+      </p:nvGrpSpPr>
+      <p:grpSpPr/>
+      <p:pic>
+        <p:nvPicPr>
+          <p:cNvPr id="5" name="图片 4"/>
+          <p:cNvPicPr>
+            <a:picLocks noChangeAspect="1"/>
+          </p:cNvPicPr>
+          <p:nvPr/>
+        </p:nvPicPr>
+        <p:blipFill>
+          <a:blip r:embed="rId1"/>
+          <a:stretch>
+            <a:fillRect/>
+          </a:stretch>
+        </p:blipFill>
+        <p:spPr>
+          <a:xfrm>
+            <a:off x="2965188" y="200528"/>
+            <a:ext cx="6515312" cy="6456944"/>
+          </a:xfrm>
+          <a:prstGeom prst="rect">
+            <a:avLst/>
+          </a:prstGeom>
+        </p:spPr>
+      </p:pic>
+    </p:spTree>
+  </p:cSld>
+  <p:clrMapOvr>
+    <a:masterClrMapping/>
+  </p:clrMapOvr>
+</p:sld>
+</file>
+
+<file path=ppt/slides/slide8.xml><?xml version="1.0" encoding="utf-8"?>
+<p:sld xmlns:a="http://schemas.openxmlformats.org/drawingml/2006/main" xmlns:r="http://schemas.openxmlformats.org/officeDocument/2006/relationships" xmlns:p="http://schemas.openxmlformats.org/presentationml/2006/main">
   <p:cSld>
     <p:bg>
       <p:bgPr>
@@ -4254,7 +8525,7 @@
         <p:spPr>
           <a:xfrm>
             <a:off x="640080" y="2743200"/>
-            <a:ext cx="10972800" cy="1097280"/>
+            <a:ext cx="10972800" cy="768350"/>
           </a:xfrm>
           <a:prstGeom prst="rect">
             <a:avLst/>
@@ -4269,1192 +8540,18 @@
           <a:p>
             <a:pPr algn="l"/>
             <a:r>
-              <a:rPr sz="4400" b="1">
+              <a:rPr lang="en-US" sz="4400" b="1">
                 <a:solidFill>
                   <a:srgbClr val="FFFFFF"/>
                 </a:solidFill>
               </a:rPr>
-              <a:t>谢谢聆听</a:t>
-            </a:r>
-          </a:p>
-        </p:txBody>
-      </p:sp>
-      <p:sp>
-        <p:nvSpPr>
-          <p:cNvPr id="3" name="TextBox 2"/>
-          <p:cNvSpPr txBox="1"/>
-          <p:nvPr/>
-        </p:nvSpPr>
-        <p:spPr>
-          <a:xfrm>
-            <a:off x="640080" y="3657600"/>
-            <a:ext cx="10972800" cy="731520"/>
-          </a:xfrm>
-          <a:prstGeom prst="rect">
-            <a:avLst/>
-          </a:prstGeom>
-          <a:noFill/>
-        </p:spPr>
-        <p:txBody>
-          <a:bodyPr wrap="square">
-            <a:spAutoFit/>
-          </a:bodyPr>
-          <a:lstStyle/>
-          <a:p>
-            <a:r>
-              <a:rPr sz="2400">
-                <a:solidFill>
-                  <a:srgbClr val="DBEAFE"/>
-                </a:solidFill>
-              </a:rPr>
-              <a:t>Q &amp; A</a:t>
-            </a:r>
-          </a:p>
-        </p:txBody>
-      </p:sp>
-    </p:spTree>
-  </p:cSld>
-  <p:clrMapOvr>
-    <a:masterClrMapping/>
-  </p:clrMapOvr>
-</p:sld>
-</file>
-
-<file path=ppt/slides/slide2.xml><?xml version="1.0" encoding="utf-8"?>
-<p:sld xmlns:a="http://schemas.openxmlformats.org/drawingml/2006/main" xmlns:p="http://schemas.openxmlformats.org/presentationml/2006/main" xmlns:r="http://schemas.openxmlformats.org/officeDocument/2006/relationships">
-  <p:cSld>
-    <p:bg>
-      <p:bgPr>
-        <a:solidFill>
-          <a:srgbClr val="FFFFFF"/>
-        </a:solidFill>
-        <a:effectLst/>
-      </p:bgPr>
-    </p:bg>
-    <p:spTree>
-      <p:nvGrpSpPr>
-        <p:cNvPr id="1" name=""/>
-        <p:cNvGrpSpPr/>
-        <p:nvPr/>
-      </p:nvGrpSpPr>
-      <p:grpSpPr/>
-      <p:sp>
-        <p:nvSpPr>
-          <p:cNvPr id="2" name="TextBox 1"/>
-          <p:cNvSpPr txBox="1"/>
-          <p:nvPr/>
-        </p:nvSpPr>
-        <p:spPr>
-          <a:xfrm>
-            <a:off x="640080" y="457200"/>
-            <a:ext cx="10972800" cy="1097280"/>
-          </a:xfrm>
-          <a:prstGeom prst="rect">
-            <a:avLst/>
-          </a:prstGeom>
-          <a:noFill/>
-        </p:spPr>
-        <p:txBody>
-          <a:bodyPr wrap="square">
-            <a:spAutoFit/>
-          </a:bodyPr>
-          <a:lstStyle/>
-          <a:p>
-            <a:pPr algn="l"/>
-            <a:r>
-              <a:rPr sz="3200" b="1">
-                <a:solidFill>
-                  <a:srgbClr val="1F2329"/>
-                </a:solidFill>
-              </a:rPr>
-              <a:t>目录 Agenda</a:t>
-            </a:r>
-          </a:p>
-        </p:txBody>
-      </p:sp>
-      <p:sp>
-        <p:nvSpPr>
-          <p:cNvPr id="3" name="TextBox 2"/>
-          <p:cNvSpPr txBox="1"/>
-          <p:nvPr/>
-        </p:nvSpPr>
-        <p:spPr>
-          <a:xfrm>
-            <a:off x="822960" y="1371600"/>
-            <a:ext cx="10515600" cy="4754880"/>
-          </a:xfrm>
-          <a:prstGeom prst="rect">
-            <a:avLst/>
-          </a:prstGeom>
-          <a:noFill/>
-        </p:spPr>
-        <p:txBody>
-          <a:bodyPr wrap="square">
-            <a:spAutoFit/>
-          </a:bodyPr>
-          <a:lstStyle/>
-          <a:p>
-            <a:pPr>
-              <a:spcAft>
-                <a:spcPts val="1200"/>
-              </a:spcAft>
-            </a:pPr>
-            <a:r>
-              <a:rPr sz="2000" b="1">
-                <a:solidFill>
-                  <a:srgbClr val="1F2329"/>
-                </a:solidFill>
-              </a:rPr>
-              <a:t>• 项目背景与目标</a:t>
-            </a:r>
-          </a:p>
-          <a:p>
-            <a:pPr>
-              <a:spcAft>
-                <a:spcPts val="1200"/>
-              </a:spcAft>
-            </a:pPr>
-            <a:r>
-              <a:rPr sz="2000" b="1">
-                <a:solidFill>
-                  <a:srgbClr val="1F2329"/>
-                </a:solidFill>
-              </a:rPr>
-              <a:t>• 支付生命周期与状态机设计</a:t>
-            </a:r>
-          </a:p>
-          <a:p>
-            <a:pPr>
-              <a:spcAft>
-                <a:spcPts val="1200"/>
-              </a:spcAft>
-            </a:pPr>
-            <a:r>
-              <a:rPr sz="2000" b="1">
-                <a:solidFill>
-                  <a:srgbClr val="1F2329"/>
-                </a:solidFill>
-              </a:rPr>
-              <a:t>• 系统架构与技术栈</a:t>
-            </a:r>
-          </a:p>
-          <a:p>
-            <a:pPr>
-              <a:spcAft>
-                <a:spcPts val="1200"/>
-              </a:spcAft>
-            </a:pPr>
-            <a:r>
-              <a:rPr sz="2000" b="1">
-                <a:solidFill>
-                  <a:srgbClr val="1F2329"/>
-                </a:solidFill>
-              </a:rPr>
-              <a:t>• 核心功能演示（Live Demo）</a:t>
-            </a:r>
-          </a:p>
-          <a:p>
-            <a:pPr>
-              <a:spcAft>
-                <a:spcPts val="1200"/>
-              </a:spcAft>
-            </a:pPr>
-            <a:r>
-              <a:rPr sz="2000" b="1">
-                <a:solidFill>
-                  <a:srgbClr val="1F2329"/>
-                </a:solidFill>
-              </a:rPr>
-              <a:t>• 我的贡献：五大功能模块详解</a:t>
-            </a:r>
-          </a:p>
-          <a:p>
-            <a:pPr>
-              <a:spcAft>
-                <a:spcPts val="1200"/>
-              </a:spcAft>
-            </a:pPr>
-            <a:r>
-              <a:rPr sz="2000" b="1">
-                <a:solidFill>
-                  <a:srgbClr val="1F2329"/>
-                </a:solidFill>
-              </a:rPr>
-              <a:t>• 遇到的挑战与解决方案</a:t>
-            </a:r>
-          </a:p>
-          <a:p>
-            <a:pPr>
-              <a:spcAft>
-                <a:spcPts val="1200"/>
-              </a:spcAft>
-            </a:pPr>
-            <a:r>
-              <a:rPr sz="2000" b="1">
-                <a:solidFill>
-                  <a:srgbClr val="1F2329"/>
-                </a:solidFill>
-              </a:rPr>
-              <a:t>• 测试覆盖与质量保障</a:t>
-            </a:r>
-          </a:p>
-          <a:p>
-            <a:pPr>
-              <a:spcAft>
-                <a:spcPts val="1200"/>
-              </a:spcAft>
-            </a:pPr>
-            <a:r>
-              <a:rPr sz="2000" b="1">
-                <a:solidFill>
-                  <a:srgbClr val="1F2329"/>
-                </a:solidFill>
-              </a:rPr>
-              <a:t>• 未来展望</a:t>
-            </a:r>
-          </a:p>
-        </p:txBody>
-      </p:sp>
-    </p:spTree>
-  </p:cSld>
-  <p:clrMapOvr>
-    <a:masterClrMapping/>
-  </p:clrMapOvr>
-</p:sld>
-</file>
-
-<file path=ppt/slides/slide3.xml><?xml version="1.0" encoding="utf-8"?>
-<p:sld xmlns:a="http://schemas.openxmlformats.org/drawingml/2006/main" xmlns:p="http://schemas.openxmlformats.org/presentationml/2006/main" xmlns:r="http://schemas.openxmlformats.org/officeDocument/2006/relationships">
-  <p:cSld>
-    <p:bg>
-      <p:bgPr>
-        <a:solidFill>
-          <a:srgbClr val="FFFFFF"/>
-        </a:solidFill>
-        <a:effectLst/>
-      </p:bgPr>
-    </p:bg>
-    <p:spTree>
-      <p:nvGrpSpPr>
-        <p:cNvPr id="1" name=""/>
-        <p:cNvGrpSpPr/>
-        <p:nvPr/>
-      </p:nvGrpSpPr>
-      <p:grpSpPr/>
-      <p:sp>
-        <p:nvSpPr>
-          <p:cNvPr id="2" name="TextBox 1"/>
-          <p:cNvSpPr txBox="1"/>
-          <p:nvPr/>
-        </p:nvSpPr>
-        <p:spPr>
-          <a:xfrm>
-            <a:off x="640080" y="457200"/>
-            <a:ext cx="10972800" cy="1097280"/>
-          </a:xfrm>
-          <a:prstGeom prst="rect">
-            <a:avLst/>
-          </a:prstGeom>
-          <a:noFill/>
-        </p:spPr>
-        <p:txBody>
-          <a:bodyPr wrap="square">
-            <a:spAutoFit/>
-          </a:bodyPr>
-          <a:lstStyle/>
-          <a:p>
-            <a:pPr algn="l"/>
-            <a:r>
-              <a:rPr sz="3200" b="1">
-                <a:solidFill>
-                  <a:srgbClr val="1F2329"/>
-                </a:solidFill>
-              </a:rPr>
-              <a:t>项目背景与目标</a:t>
-            </a:r>
-          </a:p>
-        </p:txBody>
-      </p:sp>
-      <p:sp>
-        <p:nvSpPr>
-          <p:cNvPr id="3" name="TextBox 2"/>
-          <p:cNvSpPr txBox="1"/>
-          <p:nvPr/>
-        </p:nvSpPr>
-        <p:spPr>
-          <a:xfrm>
-            <a:off x="822960" y="1371600"/>
-            <a:ext cx="10515600" cy="4754880"/>
-          </a:xfrm>
-          <a:prstGeom prst="rect">
-            <a:avLst/>
-          </a:prstGeom>
-          <a:noFill/>
-        </p:spPr>
-        <p:txBody>
-          <a:bodyPr wrap="square">
-            <a:spAutoFit/>
-          </a:bodyPr>
-          <a:lstStyle/>
-          <a:p>
-            <a:pPr>
-              <a:spcAft>
-                <a:spcPts val="1200"/>
-              </a:spcAft>
-            </a:pPr>
-            <a:r>
-              <a:rPr sz="2000" b="1">
-                <a:solidFill>
-                  <a:srgbClr val="1F2329"/>
-                </a:solidFill>
-              </a:rPr>
-              <a:t>• 目标：设计并实现一个处理金融支付完整生命周期的系统</a:t>
-            </a:r>
-          </a:p>
-          <a:p>
-            <a:pPr>
-              <a:spcAft>
-                <a:spcPts val="1200"/>
-              </a:spcAft>
-            </a:pPr>
-            <a:r>
-              <a:rPr sz="2000" b="1">
-                <a:solidFill>
-                  <a:srgbClr val="1F2329"/>
-                </a:solidFill>
-              </a:rPr>
-              <a:t>• 核心要求：创建、验证、处理、完成/失败的全流程管理</a:t>
-            </a:r>
-          </a:p>
-          <a:p>
-            <a:pPr>
-              <a:spcAft>
-                <a:spcPts val="1200"/>
-              </a:spcAft>
-            </a:pPr>
-            <a:r>
-              <a:rPr sz="2000" b="1">
-                <a:solidFill>
-                  <a:srgbClr val="1F2329"/>
-                </a:solidFill>
-              </a:rPr>
-              <a:t>• 维护完整的状态变更 Audit Trail（审计时间线）</a:t>
-            </a:r>
-          </a:p>
-          <a:p>
-            <a:pPr>
-              <a:spcAft>
-                <a:spcPts val="1200"/>
-              </a:spcAft>
-            </a:pPr>
-            <a:r>
-              <a:rPr sz="2000" b="1">
-                <a:solidFill>
-                  <a:srgbClr val="1F2329"/>
-                </a:solidFill>
-              </a:rPr>
-              <a:t>• 无需认证、单用户假设，不对接真实支付网关（内部模拟）</a:t>
-            </a:r>
-          </a:p>
-          <a:p>
-            <a:pPr>
-              <a:spcAft>
-                <a:spcPts val="1200"/>
-              </a:spcAft>
-            </a:pPr>
-            <a:r>
-              <a:rPr sz="2000" b="1">
-                <a:solidFill>
-                  <a:srgbClr val="1F2329"/>
-                </a:solidFill>
-              </a:rPr>
-              <a:t>• 技术栈由团队自主选择：Spring Boot + Vue</a:t>
-            </a:r>
-          </a:p>
-        </p:txBody>
-      </p:sp>
-    </p:spTree>
-  </p:cSld>
-  <p:clrMapOvr>
-    <a:masterClrMapping/>
-  </p:clrMapOvr>
-</p:sld>
-</file>
-
-<file path=ppt/slides/slide4.xml><?xml version="1.0" encoding="utf-8"?>
-<p:sld xmlns:a="http://schemas.openxmlformats.org/drawingml/2006/main" xmlns:p="http://schemas.openxmlformats.org/presentationml/2006/main" xmlns:r="http://schemas.openxmlformats.org/officeDocument/2006/relationships">
-  <p:cSld>
-    <p:bg>
-      <p:bgPr>
-        <a:solidFill>
-          <a:srgbClr val="FFFFFF"/>
-        </a:solidFill>
-        <a:effectLst/>
-      </p:bgPr>
-    </p:bg>
-    <p:spTree>
-      <p:nvGrpSpPr>
-        <p:cNvPr id="1" name=""/>
-        <p:cNvGrpSpPr/>
-        <p:nvPr/>
-      </p:nvGrpSpPr>
-      <p:grpSpPr/>
-      <p:sp>
-        <p:nvSpPr>
-          <p:cNvPr id="2" name="TextBox 1"/>
-          <p:cNvSpPr txBox="1"/>
-          <p:nvPr/>
-        </p:nvSpPr>
-        <p:spPr>
-          <a:xfrm>
-            <a:off x="640080" y="457200"/>
-            <a:ext cx="10972800" cy="1097280"/>
-          </a:xfrm>
-          <a:prstGeom prst="rect">
-            <a:avLst/>
-          </a:prstGeom>
-          <a:noFill/>
-        </p:spPr>
-        <p:txBody>
-          <a:bodyPr wrap="square">
-            <a:spAutoFit/>
-          </a:bodyPr>
-          <a:lstStyle/>
-          <a:p>
-            <a:pPr algn="l"/>
-            <a:r>
-              <a:rPr sz="3200" b="1">
-                <a:solidFill>
-                  <a:srgbClr val="1F2329"/>
-                </a:solidFill>
-              </a:rPr>
-              <a:t>支付生命周期与状态机设计</a:t>
-            </a:r>
-          </a:p>
-        </p:txBody>
-      </p:sp>
-      <p:sp>
-        <p:nvSpPr>
-          <p:cNvPr id="3" name="TextBox 2"/>
-          <p:cNvSpPr txBox="1"/>
-          <p:nvPr/>
-        </p:nvSpPr>
-        <p:spPr>
-          <a:xfrm>
-            <a:off x="822960" y="1371600"/>
-            <a:ext cx="10515600" cy="4754880"/>
-          </a:xfrm>
-          <a:prstGeom prst="rect">
-            <a:avLst/>
-          </a:prstGeom>
-          <a:noFill/>
-        </p:spPr>
-        <p:txBody>
-          <a:bodyPr wrap="square">
-            <a:spAutoFit/>
-          </a:bodyPr>
-          <a:lstStyle/>
-          <a:p>
-            <a:pPr>
-              <a:spcAft>
-                <a:spcPts val="1200"/>
-              </a:spcAft>
-            </a:pPr>
-            <a:r>
-              <a:rPr sz="2000" b="1">
-                <a:solidFill>
-                  <a:srgbClr val="1F2329"/>
-                </a:solidFill>
-              </a:rPr>
-              <a:t>• 五种状态：CREATED → VALIDATED → SENT → COMPLETED</a:t>
-            </a:r>
-          </a:p>
-          <a:p>
-            <a:pPr>
-              <a:spcAft>
-                <a:spcPts val="1200"/>
-              </a:spcAft>
-            </a:pPr>
-            <a:r>
-              <a:rPr sz="2000" b="1">
-                <a:solidFill>
-                  <a:srgbClr val="1F2329"/>
-                </a:solidFill>
-              </a:rPr>
-              <a:t>• 任意阶段均可流转至 FAILED（终态）</a:t>
-            </a:r>
-          </a:p>
-          <a:p>
-            <a:pPr>
-              <a:spcAft>
-                <a:spcPts val="1200"/>
-              </a:spcAft>
-            </a:pPr>
-            <a:r>
-              <a:rPr sz="2000" b="1">
-                <a:solidFill>
-                  <a:srgbClr val="1F2329"/>
-                </a:solidFill>
-              </a:rPr>
-              <a:t>• 合法流转由 PaymentStateMachine 集中维护，杜绝跳级/逆向</a:t>
-            </a:r>
-          </a:p>
-          <a:p>
-            <a:pPr>
-              <a:spcAft>
-                <a:spcPts val="1200"/>
-              </a:spcAft>
-            </a:pPr>
-            <a:r>
-              <a:rPr sz="1800" b="0">
-                <a:solidFill>
-                  <a:srgbClr val="1F2329"/>
-                </a:solidFill>
-              </a:rPr>
-              <a:t>    - CREATED → VALIDATED：三层校验（金额 / 币种 / 账户）+ 余额充足性校验</a:t>
-            </a:r>
-          </a:p>
-          <a:p>
-            <a:pPr>
-              <a:spcAft>
-                <a:spcPts val="1200"/>
-              </a:spcAft>
-            </a:pPr>
-            <a:r>
-              <a:rPr sz="1800" b="0">
-                <a:solidFill>
-                  <a:srgbClr val="1F2329"/>
-                </a:solidFill>
-              </a:rPr>
-              <a:t>    - VALIDATED → SENT，SENT → COMPLETED：正常推进</a:t>
-            </a:r>
-          </a:p>
-          <a:p>
-            <a:pPr>
-              <a:spcAft>
-                <a:spcPts val="1200"/>
-              </a:spcAft>
-            </a:pPr>
-            <a:r>
-              <a:rPr sz="1800" b="0">
-                <a:solidFill>
-                  <a:srgbClr val="1F2329"/>
-                </a:solidFill>
-              </a:rPr>
-              <a:t>    - 任意阶段 → FAILED：携带 errorCode + errorMessage</a:t>
-            </a:r>
-          </a:p>
-        </p:txBody>
-      </p:sp>
-    </p:spTree>
-  </p:cSld>
-  <p:clrMapOvr>
-    <a:masterClrMapping/>
-  </p:clrMapOvr>
-</p:sld>
-</file>
-
-<file path=ppt/slides/slide5.xml><?xml version="1.0" encoding="utf-8"?>
-<p:sld xmlns:a="http://schemas.openxmlformats.org/drawingml/2006/main" xmlns:p="http://schemas.openxmlformats.org/presentationml/2006/main" xmlns:r="http://schemas.openxmlformats.org/officeDocument/2006/relationships">
-  <p:cSld>
-    <p:bg>
-      <p:bgPr>
-        <a:solidFill>
-          <a:srgbClr val="FFFFFF"/>
-        </a:solidFill>
-        <a:effectLst/>
-      </p:bgPr>
-    </p:bg>
-    <p:spTree>
-      <p:nvGrpSpPr>
-        <p:cNvPr id="1" name=""/>
-        <p:cNvGrpSpPr/>
-        <p:nvPr/>
-      </p:nvGrpSpPr>
-      <p:grpSpPr/>
-      <p:sp>
-        <p:nvSpPr>
-          <p:cNvPr id="2" name="TextBox 1"/>
-          <p:cNvSpPr txBox="1"/>
-          <p:nvPr/>
-        </p:nvSpPr>
-        <p:spPr>
-          <a:xfrm>
-            <a:off x="640080" y="457200"/>
-            <a:ext cx="10972800" cy="1097280"/>
-          </a:xfrm>
-          <a:prstGeom prst="rect">
-            <a:avLst/>
-          </a:prstGeom>
-          <a:noFill/>
-        </p:spPr>
-        <p:txBody>
-          <a:bodyPr wrap="square">
-            <a:spAutoFit/>
-          </a:bodyPr>
-          <a:lstStyle/>
-          <a:p>
-            <a:pPr algn="l"/>
-            <a:r>
-              <a:rPr sz="3200" b="1">
-                <a:solidFill>
-                  <a:srgbClr val="1F2329"/>
-                </a:solidFill>
-              </a:rPr>
-              <a:t>系统架构与技术栈</a:t>
-            </a:r>
-          </a:p>
-        </p:txBody>
-      </p:sp>
-      <p:sp>
-        <p:nvSpPr>
-          <p:cNvPr id="3" name="TextBox 2"/>
-          <p:cNvSpPr txBox="1"/>
-          <p:nvPr/>
-        </p:nvSpPr>
-        <p:spPr>
-          <a:xfrm>
-            <a:off x="822960" y="1371600"/>
-            <a:ext cx="10515600" cy="4754880"/>
-          </a:xfrm>
-          <a:prstGeom prst="rect">
-            <a:avLst/>
-          </a:prstGeom>
-          <a:noFill/>
-        </p:spPr>
-        <p:txBody>
-          <a:bodyPr wrap="square">
-            <a:spAutoFit/>
-          </a:bodyPr>
-          <a:lstStyle/>
-          <a:p>
-            <a:pPr>
-              <a:spcAft>
-                <a:spcPts val="1200"/>
-              </a:spcAft>
-            </a:pPr>
-            <a:r>
-              <a:rPr sz="2000" b="1">
-                <a:solidFill>
-                  <a:srgbClr val="1F2329"/>
-                </a:solidFill>
-              </a:rPr>
-              <a:t>• 前端：Vue 3 + Element Plus + vue-router + vue-i18n（三语言：中/英/德）</a:t>
-            </a:r>
-          </a:p>
-          <a:p>
-            <a:pPr>
-              <a:spcAft>
-                <a:spcPts val="1200"/>
-              </a:spcAft>
-            </a:pPr>
-            <a:r>
-              <a:rPr sz="2000" b="1">
-                <a:solidFill>
-                  <a:srgbClr val="1F2329"/>
-                </a:solidFill>
-              </a:rPr>
-              <a:t>• 后端：Spring Boot 3 + MyBatis-Plus + MySQL，分层架构 Controller/Service/Validator/StateMachine</a:t>
-            </a:r>
-          </a:p>
-          <a:p>
-            <a:pPr>
-              <a:spcAft>
-                <a:spcPts val="1200"/>
-              </a:spcAft>
-            </a:pPr>
-            <a:r>
-              <a:rPr sz="2000" b="1">
-                <a:solidFill>
-                  <a:srgbClr val="1F2329"/>
-                </a:solidFill>
-              </a:rPr>
-              <a:t>• 统一响应体：{ success, data, errorCode, message }</a:t>
-            </a:r>
-          </a:p>
-          <a:p>
-            <a:pPr>
-              <a:spcAft>
-                <a:spcPts val="1200"/>
-              </a:spcAft>
-            </a:pPr>
-            <a:r>
-              <a:rPr sz="2000" b="1">
-                <a:solidFill>
-                  <a:srgbClr val="1F2329"/>
-                </a:solidFill>
-              </a:rPr>
-              <a:t>• 全局异常处理：@RestControllerAdvice 统一转换错误响应</a:t>
-            </a:r>
-          </a:p>
-          <a:p>
-            <a:pPr>
-              <a:spcAft>
-                <a:spcPts val="1200"/>
-              </a:spcAft>
-            </a:pPr>
-            <a:r>
-              <a:rPr sz="2000" b="1">
-                <a:solidFill>
-                  <a:srgbClr val="1F2329"/>
-                </a:solidFill>
-              </a:rPr>
-              <a:t>• 接口文档：Swagger / OpenAPI</a:t>
-            </a:r>
-          </a:p>
-          <a:p>
-            <a:pPr>
-              <a:spcAft>
-                <a:spcPts val="1200"/>
-              </a:spcAft>
-            </a:pPr>
-            <a:r>
-              <a:rPr sz="2000" b="1">
-                <a:solidFill>
-                  <a:srgbClr val="1F2329"/>
-                </a:solidFill>
-              </a:rPr>
-              <a:t>• 定时任务：PaymentAutoTransitionScheduler 模拟真实网络异步处理延迟</a:t>
-            </a:r>
-          </a:p>
-        </p:txBody>
-      </p:sp>
-    </p:spTree>
-  </p:cSld>
-  <p:clrMapOvr>
-    <a:masterClrMapping/>
-  </p:clrMapOvr>
-</p:sld>
-</file>
-
-<file path=ppt/slides/slide6.xml><?xml version="1.0" encoding="utf-8"?>
-<p:sld xmlns:a="http://schemas.openxmlformats.org/drawingml/2006/main" xmlns:p="http://schemas.openxmlformats.org/presentationml/2006/main" xmlns:r="http://schemas.openxmlformats.org/officeDocument/2006/relationships">
-  <p:cSld>
-    <p:bg>
-      <p:bgPr>
-        <a:solidFill>
-          <a:srgbClr val="FFFFFF"/>
-        </a:solidFill>
-        <a:effectLst/>
-      </p:bgPr>
-    </p:bg>
-    <p:spTree>
-      <p:nvGrpSpPr>
-        <p:cNvPr id="1" name=""/>
-        <p:cNvGrpSpPr/>
-        <p:nvPr/>
-      </p:nvGrpSpPr>
-      <p:grpSpPr/>
-      <p:sp>
-        <p:nvSpPr>
-          <p:cNvPr id="2" name="TextBox 1"/>
-          <p:cNvSpPr txBox="1"/>
-          <p:nvPr/>
-        </p:nvSpPr>
-        <p:spPr>
-          <a:xfrm>
-            <a:off x="640080" y="457200"/>
-            <a:ext cx="10972800" cy="1097280"/>
-          </a:xfrm>
-          <a:prstGeom prst="rect">
-            <a:avLst/>
-          </a:prstGeom>
-          <a:noFill/>
-        </p:spPr>
-        <p:txBody>
-          <a:bodyPr wrap="square">
-            <a:spAutoFit/>
-          </a:bodyPr>
-          <a:lstStyle/>
-          <a:p>
-            <a:pPr algn="l"/>
-            <a:r>
-              <a:rPr sz="3200" b="1">
-                <a:solidFill>
-                  <a:srgbClr val="1F2329"/>
-                </a:solidFill>
-              </a:rPr>
-              <a:t>核心功能模块概览</a:t>
-            </a:r>
-          </a:p>
-        </p:txBody>
-      </p:sp>
-      <p:sp>
-        <p:nvSpPr>
-          <p:cNvPr id="3" name="TextBox 2"/>
-          <p:cNvSpPr txBox="1"/>
-          <p:nvPr/>
-        </p:nvSpPr>
-        <p:spPr>
-          <a:xfrm>
-            <a:off x="822960" y="1371600"/>
-            <a:ext cx="10515600" cy="4754880"/>
-          </a:xfrm>
-          <a:prstGeom prst="rect">
-            <a:avLst/>
-          </a:prstGeom>
-          <a:noFill/>
-        </p:spPr>
-        <p:txBody>
-          <a:bodyPr wrap="square">
-            <a:spAutoFit/>
-          </a:bodyPr>
-          <a:lstStyle/>
-          <a:p>
-            <a:pPr>
-              <a:spcAft>
-                <a:spcPts val="1200"/>
-              </a:spcAft>
-            </a:pPr>
-            <a:r>
-              <a:rPr sz="2000" b="1">
-                <a:solidFill>
-                  <a:srgbClr val="1F2329"/>
-                </a:solidFill>
-              </a:rPr>
-              <a:t>• 支付创建（幂等键防重复提交）</a:t>
-            </a:r>
-          </a:p>
-          <a:p>
-            <a:pPr>
-              <a:spcAft>
-                <a:spcPts val="1200"/>
-              </a:spcAft>
-            </a:pPr>
-            <a:r>
-              <a:rPr sz="2000" b="1">
-                <a:solidFill>
-                  <a:srgbClr val="1F2329"/>
-                </a:solidFill>
-              </a:rPr>
-              <a:t>• 支付详情查看 + 失败错误详情展示</a:t>
-            </a:r>
-          </a:p>
-          <a:p>
-            <a:pPr>
-              <a:spcAft>
-                <a:spcPts val="1200"/>
-              </a:spcAft>
-            </a:pPr>
-            <a:r>
-              <a:rPr sz="2000" b="1">
-                <a:solidFill>
-                  <a:srgbClr val="1F2329"/>
-                </a:solidFill>
-              </a:rPr>
-              <a:t>• 支付状态历史时间线（Audit Trail）</a:t>
-            </a:r>
-          </a:p>
-          <a:p>
-            <a:pPr>
-              <a:spcAft>
-                <a:spcPts val="1200"/>
-              </a:spcAft>
-            </a:pPr>
-            <a:r>
-              <a:rPr sz="2000" b="1">
-                <a:solidFill>
-                  <a:srgbClr val="1F2329"/>
-                </a:solidFill>
-              </a:rPr>
-              <a:t>• 支付列表检索、按状态筛选、分页</a:t>
-            </a:r>
-          </a:p>
-          <a:p>
-            <a:pPr>
-              <a:spcAft>
-                <a:spcPts val="1200"/>
-              </a:spcAft>
-            </a:pPr>
-            <a:r>
-              <a:rPr sz="2000" b="1">
-                <a:solidFill>
-                  <a:srgbClr val="1F2329"/>
-                </a:solidFill>
-              </a:rPr>
-              <a:t>• 回收站（软删除 / 恢复 / 永久删除，30 天保留期）</a:t>
-            </a:r>
-          </a:p>
-          <a:p>
-            <a:pPr>
-              <a:spcAft>
-                <a:spcPts val="1200"/>
-              </a:spcAft>
-            </a:pPr>
-            <a:r>
-              <a:rPr sz="2000" b="1">
-                <a:solidFill>
-                  <a:srgbClr val="1F2329"/>
-                </a:solidFill>
-              </a:rPr>
-              <a:t>• 手动状态流转接口（课程演示 / 测试用）</a:t>
-            </a:r>
-          </a:p>
-        </p:txBody>
-      </p:sp>
-    </p:spTree>
-  </p:cSld>
-  <p:clrMapOvr>
-    <a:masterClrMapping/>
-  </p:clrMapOvr>
-</p:sld>
-</file>
-
-<file path=ppt/slides/slide7.xml><?xml version="1.0" encoding="utf-8"?>
-<p:sld xmlns:a="http://schemas.openxmlformats.org/drawingml/2006/main" xmlns:p="http://schemas.openxmlformats.org/presentationml/2006/main" xmlns:r="http://schemas.openxmlformats.org/officeDocument/2006/relationships">
-  <p:cSld>
-    <p:bg>
-      <p:bgPr>
-        <a:solidFill>
-          <a:srgbClr val="2563EB"/>
-        </a:solidFill>
-        <a:effectLst/>
-      </p:bgPr>
-    </p:bg>
-    <p:spTree>
-      <p:nvGrpSpPr>
-        <p:cNvPr id="1" name=""/>
-        <p:cNvGrpSpPr/>
-        <p:nvPr/>
-      </p:nvGrpSpPr>
-      <p:grpSpPr/>
-      <p:sp>
-        <p:nvSpPr>
-          <p:cNvPr id="2" name="TextBox 1"/>
-          <p:cNvSpPr txBox="1"/>
-          <p:nvPr/>
-        </p:nvSpPr>
-        <p:spPr>
-          <a:xfrm>
-            <a:off x="640080" y="2743200"/>
-            <a:ext cx="10972800" cy="1097280"/>
-          </a:xfrm>
-          <a:prstGeom prst="rect">
-            <a:avLst/>
-          </a:prstGeom>
-          <a:noFill/>
-        </p:spPr>
-        <p:txBody>
-          <a:bodyPr wrap="square">
-            <a:spAutoFit/>
-          </a:bodyPr>
-          <a:lstStyle/>
-          <a:p>
-            <a:pPr algn="l"/>
-            <a:r>
-              <a:rPr sz="4400" b="1">
-                <a:solidFill>
-                  <a:srgbClr val="FFFFFF"/>
-                </a:solidFill>
-              </a:rPr>
-              <a:t>我的贡献</a:t>
-            </a:r>
-          </a:p>
-        </p:txBody>
-      </p:sp>
-      <p:sp>
-        <p:nvSpPr>
-          <p:cNvPr id="3" name="TextBox 2"/>
-          <p:cNvSpPr txBox="1"/>
-          <p:nvPr/>
-        </p:nvSpPr>
-        <p:spPr>
-          <a:xfrm>
-            <a:off x="640080" y="3657600"/>
-            <a:ext cx="10972800" cy="731520"/>
-          </a:xfrm>
-          <a:prstGeom prst="rect">
-            <a:avLst/>
-          </a:prstGeom>
-          <a:noFill/>
-        </p:spPr>
-        <p:txBody>
-          <a:bodyPr wrap="square">
-            <a:spAutoFit/>
-          </a:bodyPr>
-          <a:lstStyle/>
-          <a:p>
-            <a:r>
-              <a:rPr sz="2000">
-                <a:solidFill>
-                  <a:srgbClr val="DBEAFE"/>
-                </a:solidFill>
-              </a:rPr>
-              <a:t>五个由我独立设计并实现的功能模块</a:t>
-            </a:r>
-          </a:p>
-        </p:txBody>
-      </p:sp>
-    </p:spTree>
-  </p:cSld>
-  <p:clrMapOvr>
-    <a:masterClrMapping/>
-  </p:clrMapOvr>
-</p:sld>
-</file>
-
-<file path=ppt/slides/slide8.xml><?xml version="1.0" encoding="utf-8"?>
-<p:sld xmlns:a="http://schemas.openxmlformats.org/drawingml/2006/main" xmlns:p="http://schemas.openxmlformats.org/presentationml/2006/main" xmlns:r="http://schemas.openxmlformats.org/officeDocument/2006/relationships">
-  <p:cSld>
-    <p:bg>
-      <p:bgPr>
-        <a:solidFill>
-          <a:srgbClr val="FFFFFF"/>
-        </a:solidFill>
-        <a:effectLst/>
-      </p:bgPr>
-    </p:bg>
-    <p:spTree>
-      <p:nvGrpSpPr>
-        <p:cNvPr id="1" name=""/>
-        <p:cNvGrpSpPr/>
-        <p:nvPr/>
-      </p:nvGrpSpPr>
-      <p:grpSpPr/>
-      <p:sp>
-        <p:nvSpPr>
-          <p:cNvPr id="2" name="TextBox 1"/>
-          <p:cNvSpPr txBox="1"/>
-          <p:nvPr/>
-        </p:nvSpPr>
-        <p:spPr>
-          <a:xfrm>
-            <a:off x="640080" y="457200"/>
-            <a:ext cx="10972800" cy="1097280"/>
-          </a:xfrm>
-          <a:prstGeom prst="rect">
-            <a:avLst/>
-          </a:prstGeom>
-          <a:noFill/>
-        </p:spPr>
-        <p:txBody>
-          <a:bodyPr wrap="square">
-            <a:spAutoFit/>
-          </a:bodyPr>
-          <a:lstStyle/>
-          <a:p>
-            <a:pPr algn="l"/>
-            <a:r>
-              <a:rPr sz="3200" b="1">
-                <a:solidFill>
-                  <a:srgbClr val="1F2329"/>
-                </a:solidFill>
-              </a:rPr>
-              <a:t>贡献 1：多语言国际化（i18n）</a:t>
-            </a:r>
-          </a:p>
-        </p:txBody>
-      </p:sp>
-      <p:sp>
-        <p:nvSpPr>
-          <p:cNvPr id="3" name="TextBox 2"/>
-          <p:cNvSpPr txBox="1"/>
-          <p:nvPr/>
-        </p:nvSpPr>
-        <p:spPr>
-          <a:xfrm>
-            <a:off x="822960" y="1371600"/>
-            <a:ext cx="10515600" cy="4754880"/>
-          </a:xfrm>
-          <a:prstGeom prst="rect">
-            <a:avLst/>
-          </a:prstGeom>
-          <a:noFill/>
-        </p:spPr>
-        <p:txBody>
-          <a:bodyPr wrap="square">
-            <a:spAutoFit/>
-          </a:bodyPr>
-          <a:lstStyle/>
-          <a:p>
-            <a:pPr>
-              <a:spcAft>
-                <a:spcPts val="1200"/>
-              </a:spcAft>
-            </a:pPr>
-            <a:r>
-              <a:rPr sz="2000" b="1">
-                <a:solidFill>
-                  <a:srgbClr val="1F2329"/>
-                </a:solidFill>
-              </a:rPr>
-              <a:t>• 引入 vue-i18n，实现中文 / English / Deutsch 三语言切换</a:t>
-            </a:r>
-          </a:p>
-          <a:p>
-            <a:pPr>
-              <a:spcAft>
-                <a:spcPts val="1200"/>
-              </a:spcAft>
-            </a:pPr>
-            <a:r>
-              <a:rPr sz="2000" b="1">
-                <a:solidFill>
-                  <a:srgbClr val="1F2329"/>
-                </a:solidFill>
-              </a:rPr>
-              <a:t>• 首次访问按浏览器语言自动探测，其后持久化到 localStorage</a:t>
-            </a:r>
-          </a:p>
-          <a:p>
-            <a:pPr>
-              <a:spcAft>
-                <a:spcPts val="1200"/>
-              </a:spcAft>
-            </a:pPr>
-            <a:r>
-              <a:rPr sz="2000" b="1">
-                <a:solidFill>
-                  <a:srgbClr val="1F2329"/>
-                </a:solidFill>
-              </a:rPr>
-              <a:t>• el-config-provider 联动 Element Plus 内置组件语言（分页器等）</a:t>
-            </a:r>
-          </a:p>
-          <a:p>
-            <a:pPr>
-              <a:spcAft>
-                <a:spcPts val="1200"/>
-              </a:spcAft>
-            </a:pPr>
-            <a:r>
-              <a:rPr sz="2000" b="1">
-                <a:solidFill>
-                  <a:srgbClr val="1F2329"/>
-                </a:solidFill>
-              </a:rPr>
-              <a:t>• 金额 / 日期按语言环境本地化格式化（n() / d()）</a:t>
-            </a:r>
-          </a:p>
-          <a:p>
-            <a:pPr>
-              <a:spcAft>
-                <a:spcPts val="1200"/>
-              </a:spcAft>
-            </a:pPr>
-            <a:r>
-              <a:rPr sz="2000" b="1">
-                <a:solidFill>
-                  <a:srgbClr val="1F2329"/>
-                </a:solidFill>
-              </a:rPr>
-              <a:t>• 错误码前端本地化字典，优先于后端固定语言 message 展示</a:t>
-            </a:r>
-          </a:p>
-          <a:p>
-            <a:pPr>
-              <a:spcAft>
-                <a:spcPts val="1200"/>
-              </a:spcAft>
-            </a:pPr>
-            <a:r>
-              <a:rPr sz="2000" b="1">
-                <a:solidFill>
-                  <a:srgbClr val="1F2329"/>
-                </a:solidFill>
-              </a:rPr>
-              <a:t>• 仅改动前端代码，未触碰后端接口</a:t>
-            </a:r>
+              <a:t>Our Contribution</a:t>
+            </a:r>
+            <a:endParaRPr lang="en-US" sz="4400" b="1">
+              <a:solidFill>
+                <a:srgbClr val="FFFFFF"/>
+              </a:solidFill>
+            </a:endParaRPr>
           </a:p>
         </p:txBody>
       </p:sp>
@@ -5467,16 +8564,8 @@
 </file>
 
 <file path=ppt/slides/slide9.xml><?xml version="1.0" encoding="utf-8"?>
-<p:sld xmlns:a="http://schemas.openxmlformats.org/drawingml/2006/main" xmlns:p="http://schemas.openxmlformats.org/presentationml/2006/main" xmlns:r="http://schemas.openxmlformats.org/officeDocument/2006/relationships">
+<p:sld xmlns:a="http://schemas.openxmlformats.org/drawingml/2006/main" xmlns:r="http://schemas.openxmlformats.org/officeDocument/2006/relationships" xmlns:p="http://schemas.openxmlformats.org/presentationml/2006/main">
   <p:cSld>
-    <p:bg>
-      <p:bgPr>
-        <a:solidFill>
-          <a:srgbClr val="FFFFFF"/>
-        </a:solidFill>
-        <a:effectLst/>
-      </p:bgPr>
-    </p:bg>
     <p:spTree>
       <p:nvGrpSpPr>
         <p:cNvPr id="1" name=""/>
@@ -5484,16 +8573,64 @@
         <p:nvPr/>
       </p:nvGrpSpPr>
       <p:grpSpPr/>
-      <p:sp>
-        <p:nvSpPr>
-          <p:cNvPr id="2" name="TextBox 1"/>
+      <p:pic>
+        <p:nvPicPr>
+          <p:cNvPr id="7" name="图片 6"/>
+          <p:cNvPicPr>
+            <a:picLocks noChangeAspect="1"/>
+          </p:cNvPicPr>
+          <p:nvPr/>
+        </p:nvPicPr>
+        <p:blipFill>
+          <a:blip r:embed="rId1"/>
+          <a:stretch>
+            <a:fillRect/>
+          </a:stretch>
+        </p:blipFill>
+        <p:spPr>
+          <a:xfrm>
+            <a:off x="1115695" y="1118870"/>
+            <a:ext cx="4058285" cy="5427345"/>
+          </a:xfrm>
+          <a:prstGeom prst="rect">
+            <a:avLst/>
+          </a:prstGeom>
+        </p:spPr>
+      </p:pic>
+      <p:pic>
+        <p:nvPicPr>
+          <p:cNvPr id="13" name="图片 12"/>
+          <p:cNvPicPr>
+            <a:picLocks noChangeAspect="1"/>
+          </p:cNvPicPr>
+          <p:nvPr/>
+        </p:nvPicPr>
+        <p:blipFill>
+          <a:blip r:embed="rId2"/>
+          <a:stretch>
+            <a:fillRect/>
+          </a:stretch>
+        </p:blipFill>
+        <p:spPr>
+          <a:xfrm>
+            <a:off x="6763309" y="1813937"/>
+            <a:ext cx="3929536" cy="3985873"/>
+          </a:xfrm>
+          <a:prstGeom prst="rect">
+            <a:avLst/>
+          </a:prstGeom>
+        </p:spPr>
+      </p:pic>
+      <p:sp>
+        <p:nvSpPr>
+          <p:cNvPr id="3" name="文本框 2"/>
           <p:cNvSpPr txBox="1"/>
           <p:nvPr/>
         </p:nvSpPr>
         <p:spPr>
           <a:xfrm>
-            <a:off x="640080" y="457200"/>
-            <a:ext cx="10972800" cy="1097280"/>
+            <a:off x="598805" y="354330"/>
+            <a:ext cx="6096000" cy="583565"/>
           </a:xfrm>
           <a:prstGeom prst="rect">
             <a:avLst/>
@@ -5501,118 +8638,36 @@
           <a:noFill/>
         </p:spPr>
         <p:txBody>
-          <a:bodyPr wrap="square">
+          <a:bodyPr wrap="square" rtlCol="0" anchor="t">
             <a:spAutoFit/>
           </a:bodyPr>
-          <a:lstStyle/>
-          <a:p>
-            <a:pPr algn="l"/>
-            <a:r>
-              <a:rPr sz="3200" b="1">
+          <a:p>
+            <a:pPr defTabSz="457200">
+              <a:lnSpc>
+                <a:spcPct val="100000"/>
+              </a:lnSpc>
+            </a:pPr>
+            <a:r>
+              <a:rPr lang="en-US" sz="3200" b="1">
                 <a:solidFill>
                   <a:srgbClr val="1F2329"/>
                 </a:solidFill>
+                <a:effectLst/>
+                <a:uFillTx/>
+                <a:latin typeface="Calibri" panose="020F0502020204030204"/>
+                <a:sym typeface="+mn-ea"/>
               </a:rPr>
-              <a:t>贡献 2：自动状态推进 + 随机失败模拟</a:t>
-            </a:r>
-          </a:p>
-        </p:txBody>
-      </p:sp>
-      <p:sp>
-        <p:nvSpPr>
-          <p:cNvPr id="3" name="TextBox 2"/>
-          <p:cNvSpPr txBox="1"/>
-          <p:nvPr/>
-        </p:nvSpPr>
-        <p:spPr>
-          <a:xfrm>
-            <a:off x="822960" y="1371600"/>
-            <a:ext cx="10515600" cy="4754880"/>
-          </a:xfrm>
-          <a:prstGeom prst="rect">
-            <a:avLst/>
-          </a:prstGeom>
-          <a:noFill/>
-        </p:spPr>
-        <p:txBody>
-          <a:bodyPr wrap="square">
-            <a:spAutoFit/>
-          </a:bodyPr>
-          <a:lstStyle/>
-          <a:p>
-            <a:pPr>
-              <a:spcAft>
-                <a:spcPts val="1200"/>
-              </a:spcAft>
-            </a:pPr>
-            <a:r>
-              <a:rPr sz="2000" b="1">
-                <a:solidFill>
-                  <a:srgbClr val="1F2329"/>
-                </a:solidFill>
-              </a:rPr>
-              <a:t>• 问题：原自动推进逻辑必然走向 COMPLETED，无法演示 FAILED 分支</a:t>
-            </a:r>
-          </a:p>
-          <a:p>
-            <a:pPr>
-              <a:spcAft>
-                <a:spcPts val="1200"/>
-              </a:spcAft>
-            </a:pPr>
-            <a:r>
-              <a:rPr sz="2000" b="1">
-                <a:solidFill>
-                  <a:srgbClr val="1F2329"/>
-                </a:solidFill>
-              </a:rPr>
-              <a:t>• 方案：新增可配置的 failure-probability（默认 20%）</a:t>
-            </a:r>
-          </a:p>
-          <a:p>
-            <a:pPr>
-              <a:spcAft>
-                <a:spcPts val="1200"/>
-              </a:spcAft>
-            </a:pPr>
-            <a:r>
-              <a:rPr sz="2000" b="1">
-                <a:solidFill>
-                  <a:srgbClr val="1F2329"/>
-                </a:solidFill>
-              </a:rPr>
-              <a:t>• 按当前所处阶段选用贴近场景的错误码（PROCESSING_ERROR / NETWORK_ERROR）</a:t>
-            </a:r>
-          </a:p>
-          <a:p>
-            <a:pPr>
-              <a:spcAft>
-                <a:spcPts val="1200"/>
-              </a:spcAft>
-            </a:pPr>
-            <a:r>
-              <a:rPr sz="2000" b="1">
-                <a:solidFill>
-                  <a:srgbClr val="1F2329"/>
-                </a:solidFill>
-              </a:rPr>
-              <a:t>• 单次 20% 概率下，全流程整体失败率约 49%，同时演示两种真实分支</a:t>
-            </a:r>
-          </a:p>
-          <a:p>
-            <a:pPr>
-              <a:spcAft>
-                <a:spcPts val="1200"/>
-              </a:spcAft>
-            </a:pPr>
-            <a:r>
-              <a:rPr sz="2000" b="1">
-                <a:solidFill>
-                  <a:srgbClr val="1F2329"/>
-                </a:solidFill>
-              </a:rPr>
-              <a:t>• 与余额校验协同：真实业务规则优先于随机演示逻辑</a:t>
-            </a:r>
+              <a:t>Elan Y Z Hui’s Contribution</a:t>
+            </a:r>
+            <a:endParaRPr lang="en-US" altLang="en-US" sz="3200" b="1">
+              <a:solidFill>
+                <a:srgbClr val="1F2329"/>
+              </a:solidFill>
+              <a:effectLst/>
+              <a:uFillTx/>
+              <a:latin typeface="Calibri" panose="020F0502020204030204"/>
+              <a:sym typeface="+mn-ea"/>
+            </a:endParaRPr>
           </a:p>
         </p:txBody>
       </p:sp>
@@ -5940,6 +8995,269 @@
       </a:style>
     </a:lnDef>
   </a:objectDefaults>
-  <a:extraClrSchemeLst/>
+  <a:extLst>
+    <a:ext uri="{05A4C25C-085E-4340-85A3-A5531E510DB2}">
+      <thm15:themeFamily xmlns:thm15="http://schemas.microsoft.com/office/thememl/2012/main" name="Office Theme" id="{62F939B6-93AF-4DB8-9C6B-D6C7DFDC589F}" vid="{4A3C46E8-61CC-4603-A589-7422A47A8E4A}"/>
+    </a:ext>
+  </a:extLst>
+</a:theme>
+</file>
+
+<file path=ppt/theme/theme2.xml><?xml version="1.0" encoding="utf-8"?>
+<a:theme xmlns:a="http://schemas.openxmlformats.org/drawingml/2006/main" name="Office 主题">
+  <a:themeElements>
+    <a:clrScheme name="Office">
+      <a:dk1>
+        <a:sysClr val="windowText" lastClr="000000"/>
+      </a:dk1>
+      <a:lt1>
+        <a:sysClr val="window" lastClr="FFFFFF"/>
+      </a:lt1>
+      <a:dk2>
+        <a:srgbClr val="44546A"/>
+      </a:dk2>
+      <a:lt2>
+        <a:srgbClr val="E7E6E6"/>
+      </a:lt2>
+      <a:accent1>
+        <a:srgbClr val="5B9BD5"/>
+      </a:accent1>
+      <a:accent2>
+        <a:srgbClr val="ED7D31"/>
+      </a:accent2>
+      <a:accent3>
+        <a:srgbClr val="A5A5A5"/>
+      </a:accent3>
+      <a:accent4>
+        <a:srgbClr val="FFC000"/>
+      </a:accent4>
+      <a:accent5>
+        <a:srgbClr val="4472C4"/>
+      </a:accent5>
+      <a:accent6>
+        <a:srgbClr val="70AD47"/>
+      </a:accent6>
+      <a:hlink>
+        <a:srgbClr val="0563C1"/>
+      </a:hlink>
+      <a:folHlink>
+        <a:srgbClr val="954F72"/>
+      </a:folHlink>
+    </a:clrScheme>
+    <a:fontScheme name="Office">
+      <a:majorFont>
+        <a:latin typeface="Calibri Light"/>
+        <a:ea typeface=""/>
+        <a:cs typeface=""/>
+        <a:font script="Jpan" typeface="ＭＳ Ｐゴシック"/>
+        <a:font script="Hang" typeface="맑은 고딕"/>
+        <a:font script="Hans" typeface="宋体"/>
+        <a:font script="Hant" typeface="新細明體"/>
+        <a:font script="Arab" typeface="Times New Roman"/>
+        <a:font script="Hebr" typeface="Times New Roman"/>
+        <a:font script="Thai" typeface="Angsana New"/>
+        <a:font script="Ethi" typeface="Nyala"/>
+        <a:font script="Beng" typeface="Vrinda"/>
+        <a:font script="Gujr" typeface="Shruti"/>
+        <a:font script="Khmr" typeface="MoolBoran"/>
+        <a:font script="Knda" typeface="Tunga"/>
+        <a:font script="Guru" typeface="Raavi"/>
+        <a:font script="Cans" typeface="Euphemia"/>
+        <a:font script="Cher" typeface="Plantagenet Cherokee"/>
+        <a:font script="Yiii" typeface="Microsoft Yi Baiti"/>
+        <a:font script="Tibt" typeface="Microsoft Himalaya"/>
+        <a:font script="Thaa" typeface="MV Boli"/>
+        <a:font script="Deva" typeface="Mangal"/>
+        <a:font script="Telu" typeface="Gautami"/>
+        <a:font script="Taml" typeface="Latha"/>
+        <a:font script="Syrc" typeface="Estrangelo Edessa"/>
+        <a:font script="Orya" typeface="Kalinga"/>
+        <a:font script="Mlym" typeface="Kartika"/>
+        <a:font script="Laoo" typeface="DokChampa"/>
+        <a:font script="Sinh" typeface="Iskoola Pota"/>
+        <a:font script="Mong" typeface="Mongolian Baiti"/>
+        <a:font script="Viet" typeface="Times New Roman"/>
+        <a:font script="Uigh" typeface="Microsoft Uighur"/>
+        <a:font script="Geor" typeface="Sylfaen"/>
+      </a:majorFont>
+      <a:minorFont>
+        <a:latin typeface="Calibri"/>
+        <a:ea typeface=""/>
+        <a:cs typeface=""/>
+        <a:font script="Jpan" typeface="ＭＳ Ｐゴシック"/>
+        <a:font script="Hang" typeface="맑은 고딕"/>
+        <a:font script="Hans" typeface="宋体"/>
+        <a:font script="Hant" typeface="新細明體"/>
+        <a:font script="Arab" typeface="Arial"/>
+        <a:font script="Hebr" typeface="Arial"/>
+        <a:font script="Thai" typeface="Cordia New"/>
+        <a:font script="Ethi" typeface="Nyala"/>
+        <a:font script="Beng" typeface="Vrinda"/>
+        <a:font script="Gujr" typeface="Shruti"/>
+        <a:font script="Khmr" typeface="DaunPenh"/>
+        <a:font script="Knda" typeface="Tunga"/>
+        <a:font script="Guru" typeface="Raavi"/>
+        <a:font script="Cans" typeface="Euphemia"/>
+        <a:font script="Cher" typeface="Plantagenet Cherokee"/>
+        <a:font script="Yiii" typeface="Microsoft Yi Baiti"/>
+        <a:font script="Tibt" typeface="Microsoft Himalaya"/>
+        <a:font script="Thaa" typeface="MV Boli"/>
+        <a:font script="Deva" typeface="Mangal"/>
+        <a:font script="Telu" typeface="Gautami"/>
+        <a:font script="Taml" typeface="Latha"/>
+        <a:font script="Syrc" typeface="Estrangelo Edessa"/>
+        <a:font script="Orya" typeface="Kalinga"/>
+        <a:font script="Mlym" typeface="Kartika"/>
+        <a:font script="Laoo" typeface="DokChampa"/>
+        <a:font script="Sinh" typeface="Iskoola Pota"/>
+        <a:font script="Mong" typeface="Mongolian Baiti"/>
+        <a:font script="Viet" typeface="Arial"/>
+        <a:font script="Uigh" typeface="Microsoft Uighur"/>
+        <a:font script="Geor" typeface="Sylfaen"/>
+      </a:minorFont>
+    </a:fontScheme>
+    <a:fmtScheme name="Office">
+      <a:fillStyleLst>
+        <a:solidFill>
+          <a:schemeClr val="phClr"/>
+        </a:solidFill>
+        <a:gradFill rotWithShape="1">
+          <a:gsLst>
+            <a:gs pos="0">
+              <a:schemeClr val="phClr">
+                <a:lumMod val="110000"/>
+                <a:satMod val="105000"/>
+                <a:tint val="67000"/>
+              </a:schemeClr>
+            </a:gs>
+            <a:gs pos="50000">
+              <a:schemeClr val="phClr">
+                <a:lumMod val="105000"/>
+                <a:satMod val="103000"/>
+                <a:tint val="73000"/>
+              </a:schemeClr>
+            </a:gs>
+            <a:gs pos="100000">
+              <a:schemeClr val="phClr">
+                <a:lumMod val="105000"/>
+                <a:satMod val="109000"/>
+                <a:tint val="81000"/>
+              </a:schemeClr>
+            </a:gs>
+          </a:gsLst>
+          <a:lin ang="5400000" scaled="0"/>
+        </a:gradFill>
+        <a:gradFill rotWithShape="1">
+          <a:gsLst>
+            <a:gs pos="0">
+              <a:schemeClr val="phClr">
+                <a:satMod val="103000"/>
+                <a:lumMod val="102000"/>
+                <a:tint val="94000"/>
+              </a:schemeClr>
+            </a:gs>
+            <a:gs pos="50000">
+              <a:schemeClr val="phClr">
+                <a:satMod val="110000"/>
+                <a:lumMod val="100000"/>
+                <a:shade val="100000"/>
+              </a:schemeClr>
+            </a:gs>
+            <a:gs pos="100000">
+              <a:schemeClr val="phClr">
+                <a:lumMod val="99000"/>
+                <a:satMod val="120000"/>
+                <a:shade val="78000"/>
+              </a:schemeClr>
+            </a:gs>
+          </a:gsLst>
+          <a:lin ang="5400000" scaled="0"/>
+        </a:gradFill>
+      </a:fillStyleLst>
+      <a:lnStyleLst>
+        <a:ln w="6350" cap="flat" cmpd="sng" algn="ctr">
+          <a:solidFill>
+            <a:schemeClr val="phClr"/>
+          </a:solidFill>
+          <a:prstDash val="solid"/>
+          <a:miter lim="800000"/>
+        </a:ln>
+        <a:ln w="12700" cap="flat" cmpd="sng" algn="ctr">
+          <a:solidFill>
+            <a:schemeClr val="phClr"/>
+          </a:solidFill>
+          <a:prstDash val="solid"/>
+          <a:miter lim="800000"/>
+        </a:ln>
+        <a:ln w="19050" cap="flat" cmpd="sng" algn="ctr">
+          <a:solidFill>
+            <a:schemeClr val="phClr"/>
+          </a:solidFill>
+          <a:prstDash val="solid"/>
+          <a:miter lim="800000"/>
+        </a:ln>
+      </a:lnStyleLst>
+      <a:effectStyleLst>
+        <a:effectStyle>
+          <a:effectLst/>
+        </a:effectStyle>
+        <a:effectStyle>
+          <a:effectLst/>
+        </a:effectStyle>
+        <a:effectStyle>
+          <a:effectLst>
+            <a:outerShdw blurRad="57150" dist="19050" dir="5400000" algn="ctr" rotWithShape="0">
+              <a:srgbClr val="000000">
+                <a:alpha val="63000"/>
+              </a:srgbClr>
+            </a:outerShdw>
+          </a:effectLst>
+        </a:effectStyle>
+      </a:effectStyleLst>
+      <a:bgFillStyleLst>
+        <a:solidFill>
+          <a:schemeClr val="phClr"/>
+        </a:solidFill>
+        <a:solidFill>
+          <a:schemeClr val="phClr">
+            <a:tint val="95000"/>
+            <a:satMod val="170000"/>
+          </a:schemeClr>
+        </a:solidFill>
+        <a:gradFill rotWithShape="1">
+          <a:gsLst>
+            <a:gs pos="0">
+              <a:schemeClr val="phClr">
+                <a:tint val="93000"/>
+                <a:satMod val="150000"/>
+                <a:shade val="98000"/>
+                <a:lumMod val="102000"/>
+              </a:schemeClr>
+            </a:gs>
+            <a:gs pos="50000">
+              <a:schemeClr val="phClr">
+                <a:tint val="98000"/>
+                <a:satMod val="130000"/>
+                <a:shade val="90000"/>
+                <a:lumMod val="103000"/>
+              </a:schemeClr>
+            </a:gs>
+            <a:gs pos="100000">
+              <a:schemeClr val="phClr">
+                <a:shade val="63000"/>
+                <a:satMod val="120000"/>
+              </a:schemeClr>
+            </a:gs>
+          </a:gsLst>
+          <a:lin ang="5400000" scaled="0"/>
+        </a:gradFill>
+      </a:bgFillStyleLst>
+    </a:fmtScheme>
+  </a:themeElements>
+  <a:extLst>
+    <a:ext uri="{05A4C25C-085E-4340-85A3-A5531E510DB2}">
+      <thm15:themeFamily xmlns:thm15="http://schemas.microsoft.com/office/thememl/2012/main" name="Office Theme" id="{62F939B6-93AF-4DB8-9C6B-D6C7DFDC589F}" vid="{4A3C46E8-61CC-4603-A589-7422A47A8E4A}"/>
+    </a:ext>
+  </a:extLst>
 </a:theme>
 </file>
--- a/Payments-Processing-Presentation.pptx
+++ b/Payments-Processing-Presentation.pptx
@@ -11,19 +11,18 @@
     <p:sldId id="256" r:id="rId3"/>
     <p:sldId id="257" r:id="rId5"/>
     <p:sldId id="258" r:id="rId6"/>
-    <p:sldId id="259" r:id="rId7"/>
-    <p:sldId id="260" r:id="rId8"/>
-    <p:sldId id="261" r:id="rId9"/>
-    <p:sldId id="277" r:id="rId10"/>
-    <p:sldId id="262" r:id="rId11"/>
-    <p:sldId id="275" r:id="rId12"/>
-    <p:sldId id="276" r:id="rId13"/>
-    <p:sldId id="278" r:id="rId14"/>
-    <p:sldId id="263" r:id="rId15"/>
-    <p:sldId id="274" r:id="rId16"/>
-    <p:sldId id="268" r:id="rId17"/>
-    <p:sldId id="270" r:id="rId18"/>
-    <p:sldId id="271" r:id="rId19"/>
+    <p:sldId id="260" r:id="rId7"/>
+    <p:sldId id="261" r:id="rId8"/>
+    <p:sldId id="277" r:id="rId9"/>
+    <p:sldId id="262" r:id="rId10"/>
+    <p:sldId id="275" r:id="rId11"/>
+    <p:sldId id="278" r:id="rId12"/>
+    <p:sldId id="263" r:id="rId13"/>
+    <p:sldId id="274" r:id="rId14"/>
+    <p:sldId id="268" r:id="rId15"/>
+    <p:sldId id="270" r:id="rId16"/>
+    <p:sldId id="279" r:id="rId17"/>
+    <p:sldId id="271" r:id="rId18"/>
   </p:sldIdLst>
   <p:sldSz cx="12191365" cy="6858000" type="screen4x3"/>
   <p:notesSz cx="6858000" cy="9144000"/>
@@ -125,12 +124,12 @@
   <p:extLst>
     <p:ext uri="{EFAFB233-063F-42B5-8137-9DF3F51BA10A}">
       <p15:sldGuideLst xmlns:p15="http://schemas.microsoft.com/office/powerpoint/2012/main">
-        <p15:guide id="1" orient="horz" pos="2160" userDrawn="1">
+        <p15:guide id="1" orient="horz" pos="2136" userDrawn="1">
           <p15:clr>
             <a:srgbClr val="A4A3A4"/>
           </p15:clr>
         </p15:guide>
-        <p15:guide id="2" pos="2880" userDrawn="1">
+        <p15:guide id="2" pos="2826" userDrawn="1">
           <p15:clr>
             <a:srgbClr val="A4A3A4"/>
           </p15:clr>
@@ -760,49 +759,42 @@
           <a:p>
             <a:r>
               <a:rPr lang="en-US" altLang="zh-CN"/>
-              <a:t>We defined five states for a payment:</a:t>
+              <a:t>On the frontend, we use Vue 3 with Element Plus for UI components, vue-router for navigation, and vue-i18n for three languages: English, Chinese, and German.</a:t>
             </a:r>
             <a:endParaRPr lang="en-US" altLang="zh-CN"/>
           </a:p>
           <a:p>
             <a:r>
               <a:rPr lang="en-US" altLang="zh-CN"/>
-              <a:t>CREATED → VALIDATED → SENT → COMPLETED – this is the happy path.</a:t>
+              <a:t>On the backend, it’s Spring Boot 3, MyBatis-Plus for database access, and MySQL. We follow a clear layered architecture: Controller, Service, Validator, and State Machine.</a:t>
             </a:r>
             <a:endParaRPr lang="en-US" altLang="zh-CN"/>
           </a:p>
           <a:p>
             <a:r>
               <a:rPr lang="en-US" altLang="zh-CN"/>
-              <a:t>But at any point, the payment can also go to FAILED – which is a final state.</a:t>
+              <a:t>All API responses follow a uniform format: { success, data, errorCode, message }.</a:t>
             </a:r>
             <a:endParaRPr lang="en-US" altLang="zh-CN"/>
           </a:p>
           <a:p>
             <a:r>
               <a:rPr lang="en-US" altLang="zh-CN"/>
-              <a:t>We manage all legal transitions with a central PaymentStateMachine class. This prevents skipping states or going backwards.</a:t>
+              <a:t>We have global exception handling using @RestControllerAdvice to convert errors into that same format.</a:t>
             </a:r>
             <a:endParaRPr lang="en-US" altLang="zh-CN"/>
           </a:p>
           <a:p>
             <a:r>
               <a:rPr lang="en-US" altLang="zh-CN"/>
-              <a:t>For example, from CREATED to VALIDATED, we run three checks: amount, currency, and account validity – plus a balance check.</a:t>
+              <a:t>We also provide Swagger/OpenAPI documentation for all endpoints.</a:t>
             </a:r>
             <a:endParaRPr lang="en-US" altLang="zh-CN"/>
           </a:p>
           <a:p>
             <a:r>
               <a:rPr lang="en-US" altLang="zh-CN"/>
-              <a:t>From VALIDATED to SENT, and SENT to COMPLETED, we just move forward.</a:t>
-            </a:r>
-            <a:endParaRPr lang="en-US" altLang="zh-CN"/>
-          </a:p>
-          <a:p>
-            <a:r>
-              <a:rPr lang="en-US" altLang="zh-CN"/>
-              <a:t>And any transition to FAILED must include an error code and an error message.</a:t>
+              <a:t>And we have a scheduled task that simulates network delay – it automatically advances payments asynchronously.</a:t>
             </a:r>
             <a:endParaRPr lang="en-US" altLang="zh-CN"/>
           </a:p>
@@ -854,42 +846,49 @@
           <a:p>
             <a:r>
               <a:rPr lang="en-US" altLang="zh-CN"/>
-              <a:t>On the frontend, we use Vue 3 with Element Plus for UI components, vue-router for navigation, and vue-i18n for three languages: English, Chinese, and German.</a:t>
+              <a:t>Let me quickly list the main features we built:</a:t>
             </a:r>
             <a:endParaRPr lang="en-US" altLang="zh-CN"/>
           </a:p>
           <a:p>
             <a:r>
               <a:rPr lang="en-US" altLang="zh-CN"/>
-              <a:t>On the backend, it’s Spring Boot 3, MyBatis-Plus for database access, and MySQL. We follow a clear layered architecture: Controller, Service, Validator, and State Machine.</a:t>
+              <a:t>Create a payment with an idempotency key to prevent duplicate submissions.</a:t>
             </a:r>
             <a:endParaRPr lang="en-US" altLang="zh-CN"/>
           </a:p>
           <a:p>
             <a:r>
               <a:rPr lang="en-US" altLang="zh-CN"/>
-              <a:t>All API responses follow a uniform format: { success, data, errorCode, message }.</a:t>
+              <a:t>View payment details, including failure error details.</a:t>
             </a:r>
             <a:endParaRPr lang="en-US" altLang="zh-CN"/>
           </a:p>
           <a:p>
             <a:r>
               <a:rPr lang="en-US" altLang="zh-CN"/>
-              <a:t>We have global exception handling using @RestControllerAdvice to convert errors into that same format.</a:t>
+              <a:t>See the full audit trail – the history timeline of state changes.</a:t>
             </a:r>
             <a:endParaRPr lang="en-US" altLang="zh-CN"/>
           </a:p>
           <a:p>
             <a:r>
               <a:rPr lang="en-US" altLang="zh-CN"/>
-              <a:t>We also provide Swagger/OpenAPI documentation for all endpoints.</a:t>
+              <a:t>List all payments with filtering by status and pagination.</a:t>
             </a:r>
             <a:endParaRPr lang="en-US" altLang="zh-CN"/>
           </a:p>
           <a:p>
             <a:r>
               <a:rPr lang="en-US" altLang="zh-CN"/>
-              <a:t>And we have a scheduled task that simulates network delay – it automatically advances payments asynchronously.</a:t>
+              <a:t>A recycle bin – for soft delete, restore, and permanent delete – with a 30‑day retention rule.</a:t>
+            </a:r>
+            <a:endParaRPr lang="en-US" altLang="zh-CN"/>
+          </a:p>
+          <a:p>
+            <a:r>
+              <a:rPr lang="en-US" altLang="zh-CN"/>
+              <a:t>And manual state transition endpoints – these are useful for demos and testing.</a:t>
             </a:r>
             <a:endParaRPr lang="en-US" altLang="zh-CN"/>
           </a:p>
@@ -939,53 +938,7 @@
         <p:txBody>
           <a:bodyPr/>
           <a:p>
-            <a:r>
-              <a:rPr lang="en-US" altLang="zh-CN"/>
-              <a:t>Let me quickly list the main features we built:</a:t>
-            </a:r>
-            <a:endParaRPr lang="en-US" altLang="zh-CN"/>
-          </a:p>
-          <a:p>
-            <a:r>
-              <a:rPr lang="en-US" altLang="zh-CN"/>
-              <a:t>Create a payment with an idempotency key to prevent duplicate submissions.</a:t>
-            </a:r>
-            <a:endParaRPr lang="en-US" altLang="zh-CN"/>
-          </a:p>
-          <a:p>
-            <a:r>
-              <a:rPr lang="en-US" altLang="zh-CN"/>
-              <a:t>View payment details, including failure error details.</a:t>
-            </a:r>
-            <a:endParaRPr lang="en-US" altLang="zh-CN"/>
-          </a:p>
-          <a:p>
-            <a:r>
-              <a:rPr lang="en-US" altLang="zh-CN"/>
-              <a:t>See the full audit trail – the history timeline of state changes.</a:t>
-            </a:r>
-            <a:endParaRPr lang="en-US" altLang="zh-CN"/>
-          </a:p>
-          <a:p>
-            <a:r>
-              <a:rPr lang="en-US" altLang="zh-CN"/>
-              <a:t>List all payments with filtering by status and pagination.</a:t>
-            </a:r>
-            <a:endParaRPr lang="en-US" altLang="zh-CN"/>
-          </a:p>
-          <a:p>
-            <a:r>
-              <a:rPr lang="en-US" altLang="zh-CN"/>
-              <a:t>A recycle bin – for soft delete, restore, and permanent delete – with a 30‑day retention rule.</a:t>
-            </a:r>
-            <a:endParaRPr lang="en-US" altLang="zh-CN"/>
-          </a:p>
-          <a:p>
-            <a:r>
-              <a:rPr lang="en-US" altLang="zh-CN"/>
-              <a:t>And manual state transition endpoints – these are useful for demos and testing.</a:t>
-            </a:r>
-            <a:endParaRPr lang="en-US" altLang="zh-CN"/>
+            <a:endParaRPr lang="zh-CN" altLang="en-US"/>
           </a:p>
         </p:txBody>
       </p:sp>
@@ -1046,6 +999,54 @@
 </file>
 
 <file path=ppt/notesSlides/notesSlide8.xml><?xml version="1.0" encoding="utf-8"?>
+<p:notes xmlns:a="http://schemas.openxmlformats.org/drawingml/2006/main" xmlns:r="http://schemas.openxmlformats.org/officeDocument/2006/relationships" xmlns:p="http://schemas.openxmlformats.org/presentationml/2006/main">
+  <p:cSld>
+    <p:spTree>
+      <p:nvGrpSpPr>
+        <p:cNvPr id="1" name=""/>
+        <p:cNvGrpSpPr/>
+        <p:nvPr/>
+      </p:nvGrpSpPr>
+      <p:grpSpPr/>
+      <p:sp>
+        <p:nvSpPr>
+          <p:cNvPr id="2" name="幻灯片图像占位符 1"/>
+          <p:cNvSpPr>
+            <a:spLocks noGrp="1"/>
+          </p:cNvSpPr>
+          <p:nvPr>
+            <p:ph type="sldImg" idx="2"/>
+          </p:nvPr>
+        </p:nvSpPr>
+        <p:spPr/>
+      </p:sp>
+      <p:sp>
+        <p:nvSpPr>
+          <p:cNvPr id="3" name="文本占位符 2"/>
+          <p:cNvSpPr>
+            <a:spLocks noGrp="1"/>
+          </p:cNvSpPr>
+          <p:nvPr>
+            <p:ph type="body" idx="3"/>
+          </p:nvPr>
+        </p:nvSpPr>
+        <p:spPr/>
+        <p:txBody>
+          <a:bodyPr/>
+          <a:p>
+            <a:endParaRPr lang="zh-CN" altLang="en-US"/>
+          </a:p>
+        </p:txBody>
+      </p:sp>
+    </p:spTree>
+  </p:cSld>
+  <p:clrMapOvr>
+    <a:masterClrMapping/>
+  </p:clrMapOvr>
+</p:notes>
+</file>
+
+<file path=ppt/notesSlides/notesSlide9.xml><?xml version="1.0" encoding="utf-8"?>
 <p:notes xmlns:a="http://schemas.openxmlformats.org/drawingml/2006/main" xmlns:r="http://schemas.openxmlformats.org/officeDocument/2006/relationships" xmlns:p="http://schemas.openxmlformats.org/presentationml/2006/main">
   <p:cSld>
     <p:spTree>
@@ -4246,7 +4247,7 @@
         </p:nvSpPr>
         <p:spPr>
           <a:xfrm>
-            <a:off x="640080" y="2377440"/>
+            <a:off x="609283" y="2377440"/>
             <a:ext cx="10972800" cy="1014730"/>
           </a:xfrm>
           <a:prstGeom prst="rect">
@@ -4260,7 +4261,7 @@
           </a:bodyPr>
           <a:lstStyle/>
           <a:p>
-            <a:pPr algn="l"/>
+            <a:pPr algn="ctr"/>
             <a:r>
               <a:rPr sz="6000" b="1">
                 <a:solidFill>
@@ -4279,14 +4280,14 @@
       </p:sp>
       <p:sp>
         <p:nvSpPr>
-          <p:cNvPr id="4" name="TextBox 3"/>
+          <p:cNvPr id="3" name="TextBox 1"/>
           <p:cNvSpPr txBox="1"/>
           <p:nvPr/>
         </p:nvSpPr>
         <p:spPr>
           <a:xfrm>
-            <a:off x="640080" y="3931920"/>
-            <a:ext cx="10972800" cy="460375"/>
+            <a:off x="609283" y="4373880"/>
+            <a:ext cx="10972800" cy="1764665"/>
           </a:xfrm>
           <a:prstGeom prst="rect">
             <a:avLst/>
@@ -4299,17 +4300,42 @@
           </a:bodyPr>
           <a:lstStyle/>
           <a:p>
-            <a:r>
-              <a:rPr sz="2400">
+            <a:pPr algn="ctr">
+              <a:lnSpc>
+                <a:spcPct val="170000"/>
+              </a:lnSpc>
+            </a:pPr>
+            <a:r>
+              <a:rPr lang="en-US" sz="3200" b="1">
                 <a:solidFill>
-                  <a:srgbClr val="DBEAFE"/>
+                  <a:srgbClr val="FFFFFF"/>
                 </a:solidFill>
               </a:rPr>
-              <a:t>Spring Boot 3 + MyBatis-Plus + MySQL  |  Vue 3 + Element Plus + vue-i18n</a:t>
-            </a:r>
-            <a:endParaRPr sz="2400">
+              <a:t>Presenter: Felix, Ellan, Vianne, Mia</a:t>
+            </a:r>
+            <a:endParaRPr lang="en-US" sz="3200" b="1">
               <a:solidFill>
-                <a:srgbClr val="DBEAFE"/>
+                <a:srgbClr val="FFFFFF"/>
+              </a:solidFill>
+            </a:endParaRPr>
+          </a:p>
+          <a:p>
+            <a:pPr algn="ctr">
+              <a:lnSpc>
+                <a:spcPct val="170000"/>
+              </a:lnSpc>
+            </a:pPr>
+            <a:r>
+              <a:rPr lang="en-US" sz="3200" b="1">
+                <a:solidFill>
+                  <a:srgbClr val="FFFFFF"/>
+                </a:solidFill>
+              </a:rPr>
+              <a:t>2026.7.31</a:t>
+            </a:r>
+            <a:endParaRPr lang="en-US" sz="3200" b="1">
+              <a:solidFill>
+                <a:srgbClr val="FFFFFF"/>
               </a:solidFill>
             </a:endParaRPr>
           </a:p>
@@ -4324,210 +4350,6 @@
 </file>
 
 <file path=ppt/slides/slide10.xml><?xml version="1.0" encoding="utf-8"?>
-<p:sld xmlns:a="http://schemas.openxmlformats.org/drawingml/2006/main" xmlns:r="http://schemas.openxmlformats.org/officeDocument/2006/relationships" xmlns:p="http://schemas.openxmlformats.org/presentationml/2006/main">
-  <p:cSld>
-    <p:spTree>
-      <p:nvGrpSpPr>
-        <p:cNvPr id="1" name=""/>
-        <p:cNvGrpSpPr/>
-        <p:nvPr/>
-      </p:nvGrpSpPr>
-      <p:grpSpPr/>
-      <p:pic>
-        <p:nvPicPr>
-          <p:cNvPr id="5" name="图片 4"/>
-          <p:cNvPicPr>
-            <a:picLocks noChangeAspect="1"/>
-          </p:cNvPicPr>
-          <p:nvPr/>
-        </p:nvPicPr>
-        <p:blipFill>
-          <a:blip r:embed="rId1"/>
-          <a:stretch>
-            <a:fillRect/>
-          </a:stretch>
-        </p:blipFill>
-        <p:spPr>
-          <a:xfrm>
-            <a:off x="190219" y="52788"/>
-            <a:ext cx="6021517" cy="3224456"/>
-          </a:xfrm>
-          <a:prstGeom prst="rect">
-            <a:avLst/>
-          </a:prstGeom>
-        </p:spPr>
-      </p:pic>
-      <p:pic>
-        <p:nvPicPr>
-          <p:cNvPr id="7" name="图片 6"/>
-          <p:cNvPicPr>
-            <a:picLocks noChangeAspect="1"/>
-          </p:cNvPicPr>
-          <p:nvPr/>
-        </p:nvPicPr>
-        <p:blipFill>
-          <a:blip r:embed="rId2"/>
-          <a:stretch>
-            <a:fillRect/>
-          </a:stretch>
-        </p:blipFill>
-        <p:spPr>
-          <a:xfrm>
-            <a:off x="6696371" y="0"/>
-            <a:ext cx="4481256" cy="3567143"/>
-          </a:xfrm>
-          <a:prstGeom prst="rect">
-            <a:avLst/>
-          </a:prstGeom>
-        </p:spPr>
-      </p:pic>
-      <p:pic>
-        <p:nvPicPr>
-          <p:cNvPr id="11" name="图片 10"/>
-          <p:cNvPicPr>
-            <a:picLocks noChangeAspect="1"/>
-          </p:cNvPicPr>
-          <p:nvPr/>
-        </p:nvPicPr>
-        <p:blipFill>
-          <a:blip r:embed="rId3"/>
-          <a:stretch>
-            <a:fillRect/>
-          </a:stretch>
-        </p:blipFill>
-        <p:spPr>
-          <a:xfrm>
-            <a:off x="6476912" y="3616894"/>
-            <a:ext cx="5671735" cy="3006108"/>
-          </a:xfrm>
-          <a:prstGeom prst="rect">
-            <a:avLst/>
-          </a:prstGeom>
-        </p:spPr>
-      </p:pic>
-      <p:pic>
-        <p:nvPicPr>
-          <p:cNvPr id="15" name="图片 14"/>
-          <p:cNvPicPr>
-            <a:picLocks noChangeAspect="1"/>
-          </p:cNvPicPr>
-          <p:nvPr/>
-        </p:nvPicPr>
-        <p:blipFill>
-          <a:blip r:embed="rId4"/>
-          <a:stretch>
-            <a:fillRect/>
-          </a:stretch>
-        </p:blipFill>
-        <p:spPr>
-          <a:xfrm>
-            <a:off x="276870" y="3429000"/>
-            <a:ext cx="6108168" cy="3194002"/>
-          </a:xfrm>
-          <a:prstGeom prst="rect">
-            <a:avLst/>
-          </a:prstGeom>
-        </p:spPr>
-      </p:pic>
-    </p:spTree>
-  </p:cSld>
-  <p:clrMapOvr>
-    <a:masterClrMapping/>
-  </p:clrMapOvr>
-</p:sld>
-</file>
-
-<file path=ppt/slides/slide11.xml><?xml version="1.0" encoding="utf-8"?>
-<p:sld xmlns:a="http://schemas.openxmlformats.org/drawingml/2006/main" xmlns:r="http://schemas.openxmlformats.org/officeDocument/2006/relationships" xmlns:p="http://schemas.openxmlformats.org/presentationml/2006/main">
-  <p:cSld>
-    <p:spTree>
-      <p:nvGrpSpPr>
-        <p:cNvPr id="1" name=""/>
-        <p:cNvGrpSpPr/>
-        <p:nvPr/>
-      </p:nvGrpSpPr>
-      <p:grpSpPr/>
-      <p:pic>
-        <p:nvPicPr>
-          <p:cNvPr id="4" name="图片 3"/>
-          <p:cNvPicPr/>
-          <p:nvPr/>
-        </p:nvPicPr>
-        <p:blipFill>
-          <a:blip r:embed="rId1"/>
-          <a:stretch>
-            <a:fillRect/>
-          </a:stretch>
-        </p:blipFill>
-        <p:spPr>
-          <a:xfrm>
-            <a:off x="318770" y="2159000"/>
-            <a:ext cx="11553825" cy="2950210"/>
-          </a:xfrm>
-          <a:prstGeom prst="rect">
-            <a:avLst/>
-          </a:prstGeom>
-        </p:spPr>
-      </p:pic>
-      <p:sp>
-        <p:nvSpPr>
-          <p:cNvPr id="5" name="文本框 4"/>
-          <p:cNvSpPr txBox="1"/>
-          <p:nvPr/>
-        </p:nvSpPr>
-        <p:spPr>
-          <a:xfrm>
-            <a:off x="598805" y="354330"/>
-            <a:ext cx="6096000" cy="583565"/>
-          </a:xfrm>
-          <a:prstGeom prst="rect">
-            <a:avLst/>
-          </a:prstGeom>
-          <a:noFill/>
-        </p:spPr>
-        <p:txBody>
-          <a:bodyPr wrap="square" rtlCol="0" anchor="t">
-            <a:spAutoFit/>
-          </a:bodyPr>
-          <a:p>
-            <a:pPr defTabSz="457200">
-              <a:lnSpc>
-                <a:spcPct val="100000"/>
-              </a:lnSpc>
-            </a:pPr>
-            <a:r>
-              <a:rPr lang="en-US" sz="3200" b="1">
-                <a:solidFill>
-                  <a:srgbClr val="1F2329"/>
-                </a:solidFill>
-                <a:effectLst/>
-                <a:uFillTx/>
-                <a:latin typeface="Calibri" panose="020F0502020204030204"/>
-                <a:sym typeface="+mn-ea"/>
-              </a:rPr>
-              <a:t>Felix W H Gou’s Contribution</a:t>
-            </a:r>
-            <a:endParaRPr lang="en-US" altLang="en-US" sz="3200" b="1">
-              <a:solidFill>
-                <a:srgbClr val="1F2329"/>
-              </a:solidFill>
-              <a:effectLst/>
-              <a:uFillTx/>
-              <a:latin typeface="Calibri" panose="020F0502020204030204"/>
-              <a:sym typeface="+mn-ea"/>
-            </a:endParaRPr>
-          </a:p>
-        </p:txBody>
-      </p:sp>
-    </p:spTree>
-  </p:cSld>
-  <p:clrMapOvr>
-    <a:masterClrMapping/>
-  </p:clrMapOvr>
-</p:sld>
-</file>
-
-<file path=ppt/slides/slide12.xml><?xml version="1.0" encoding="utf-8"?>
 <p:sld xmlns:a="http://schemas.openxmlformats.org/drawingml/2006/main" xmlns:r="http://schemas.openxmlformats.org/officeDocument/2006/relationships" xmlns:p="http://schemas.openxmlformats.org/presentationml/2006/main">
   <p:cSld>
     <p:bg>
@@ -4601,6 +4423,10 @@
             <a:lstStyle/>
             <a:p>
               <a:pPr algn="ctr"/>
+              <a:endParaRPr>
+                <a:latin typeface="Times New Roman" panose="02020603050405020304" charset="0"/>
+                <a:cs typeface="Times New Roman" panose="02020603050405020304" charset="0"/>
+              </a:endParaRPr>
             </a:p>
           </p:txBody>
         </p:sp>
@@ -4644,6 +4470,10 @@
             <a:lstStyle/>
             <a:p>
               <a:pPr algn="ctr"/>
+              <a:endParaRPr>
+                <a:latin typeface="Times New Roman" panose="02020603050405020304" charset="0"/>
+                <a:cs typeface="Times New Roman" panose="02020603050405020304" charset="0"/>
+              </a:endParaRPr>
             </a:p>
           </p:txBody>
         </p:sp>
@@ -4673,8 +4503,16 @@
                 <a:defRPr sz="2800"/>
               </a:pPr>
               <a:r>
+                <a:rPr>
+                  <a:latin typeface="Times New Roman" panose="02020603050405020304" charset="0"/>
+                  <a:cs typeface="Times New Roman" panose="02020603050405020304" charset="0"/>
+                </a:rPr>
                 <a:t>🌐</a:t>
               </a:r>
+              <a:endParaRPr>
+                <a:latin typeface="Times New Roman" panose="02020603050405020304" charset="0"/>
+                <a:cs typeface="Times New Roman" panose="02020603050405020304" charset="0"/>
+              </a:endParaRPr>
             </a:p>
           </p:txBody>
         </p:sp>
@@ -4709,44 +4547,16 @@
                 </a:defRPr>
               </a:pPr>
               <a:r>
+                <a:rPr>
+                  <a:latin typeface="Times New Roman" panose="02020603050405020304" charset="0"/>
+                  <a:cs typeface="Times New Roman" panose="02020603050405020304" charset="0"/>
+                </a:rPr>
                 <a:t>Internationalization (i18n)</a:t>
               </a:r>
-            </a:p>
-          </p:txBody>
-        </p:sp>
-        <p:sp>
-          <p:nvSpPr>
-            <p:cNvPr id="8" name="TextBox 6"/>
-            <p:cNvSpPr txBox="1"/>
-            <p:nvPr/>
-          </p:nvSpPr>
-          <p:spPr>
-            <a:xfrm>
-              <a:off x="1728" y="4752"/>
-              <a:ext cx="7344" cy="1296"/>
-            </a:xfrm>
-            <a:prstGeom prst="rect">
-              <a:avLst/>
-            </a:prstGeom>
-            <a:noFill/>
-          </p:spPr>
-          <p:txBody>
-            <a:bodyPr wrap="square">
-              <a:spAutoFit/>
-            </a:bodyPr>
-            <a:lstStyle/>
-            <a:p>
-              <a:pPr>
-                <a:defRPr sz="1400">
-                  <a:solidFill>
-                    <a:srgbClr val="666666"/>
-                  </a:solidFill>
-                  <a:latin typeface="Arial" panose="020B0604020202020204"/>
-                </a:defRPr>
-              </a:pPr>
-              <a:r>
-                <a:t>Multi-language support and locale-aware formatting for global users.</a:t>
-              </a:r>
+              <a:endParaRPr>
+                <a:latin typeface="Times New Roman" panose="02020603050405020304" charset="0"/>
+                <a:cs typeface="Times New Roman" panose="02020603050405020304" charset="0"/>
+              </a:endParaRPr>
             </a:p>
           </p:txBody>
         </p:sp>
@@ -4792,6 +4602,10 @@
             <a:lstStyle/>
             <a:p>
               <a:pPr algn="ctr"/>
+              <a:endParaRPr>
+                <a:latin typeface="Times New Roman" panose="02020603050405020304" charset="0"/>
+                <a:cs typeface="Times New Roman" panose="02020603050405020304" charset="0"/>
+              </a:endParaRPr>
             </a:p>
           </p:txBody>
         </p:sp>
@@ -4835,6 +4649,10 @@
             <a:lstStyle/>
             <a:p>
               <a:pPr algn="ctr"/>
+              <a:endParaRPr>
+                <a:latin typeface="Times New Roman" panose="02020603050405020304" charset="0"/>
+                <a:cs typeface="Times New Roman" panose="02020603050405020304" charset="0"/>
+              </a:endParaRPr>
             </a:p>
           </p:txBody>
         </p:sp>
@@ -4864,8 +4682,14 @@
                 <a:defRPr sz="2800"/>
               </a:pPr>
               <a:r>
+                <a:rPr>
+                  <a:latin typeface="Times New Roman" panose="02020603050405020304" charset="0"/>
+                </a:rPr>
                 <a:t>⚡</a:t>
               </a:r>
+              <a:endParaRPr>
+                <a:latin typeface="Times New Roman" panose="02020603050405020304" charset="0"/>
+              </a:endParaRPr>
             </a:p>
           </p:txBody>
         </p:sp>
@@ -4900,44 +4724,16 @@
                 </a:defRPr>
               </a:pPr>
               <a:r>
+                <a:rPr>
+                  <a:latin typeface="Times New Roman" panose="02020603050405020304" charset="0"/>
+                  <a:cs typeface="Times New Roman" panose="02020603050405020304" charset="0"/>
+                </a:rPr>
                 <a:t>Auto-Transition with Random Failure</a:t>
               </a:r>
-            </a:p>
-          </p:txBody>
-        </p:sp>
-        <p:sp>
-          <p:nvSpPr>
-            <p:cNvPr id="13" name="TextBox 11"/>
-            <p:cNvSpPr txBox="1"/>
-            <p:nvPr/>
-          </p:nvSpPr>
-          <p:spPr>
-            <a:xfrm>
-              <a:off x="11376" y="4752"/>
-              <a:ext cx="7344" cy="1296"/>
-            </a:xfrm>
-            <a:prstGeom prst="rect">
-              <a:avLst/>
-            </a:prstGeom>
-            <a:noFill/>
-          </p:spPr>
-          <p:txBody>
-            <a:bodyPr wrap="square">
-              <a:spAutoFit/>
-            </a:bodyPr>
-            <a:lstStyle/>
-            <a:p>
-              <a:pPr>
-                <a:defRPr sz="1400">
-                  <a:solidFill>
-                    <a:srgbClr val="666666"/>
-                  </a:solidFill>
-                  <a:latin typeface="Arial" panose="020B0604020202020204"/>
-                </a:defRPr>
-              </a:pPr>
-              <a:r>
-                <a:t>Simulated state transitions with configurable random failure injection.</a:t>
-              </a:r>
+              <a:endParaRPr>
+                <a:latin typeface="Times New Roman" panose="02020603050405020304" charset="0"/>
+                <a:cs typeface="Times New Roman" panose="02020603050405020304" charset="0"/>
+              </a:endParaRPr>
             </a:p>
           </p:txBody>
         </p:sp>
@@ -4983,6 +4779,10 @@
             <a:lstStyle/>
             <a:p>
               <a:pPr algn="ctr"/>
+              <a:endParaRPr>
+                <a:latin typeface="Times New Roman" panose="02020603050405020304" charset="0"/>
+                <a:cs typeface="Times New Roman" panose="02020603050405020304" charset="0"/>
+              </a:endParaRPr>
             </a:p>
           </p:txBody>
         </p:sp>
@@ -5026,6 +4826,10 @@
             <a:lstStyle/>
             <a:p>
               <a:pPr algn="ctr"/>
+              <a:endParaRPr>
+                <a:latin typeface="Times New Roman" panose="02020603050405020304" charset="0"/>
+                <a:cs typeface="Times New Roman" panose="02020603050405020304" charset="0"/>
+              </a:endParaRPr>
             </a:p>
           </p:txBody>
         </p:sp>
@@ -5055,8 +4859,16 @@
                 <a:defRPr sz="2800"/>
               </a:pPr>
               <a:r>
+                <a:rPr>
+                  <a:latin typeface="Times New Roman" panose="02020603050405020304" charset="0"/>
+                  <a:cs typeface="Times New Roman" panose="02020603050405020304" charset="0"/>
+                </a:rPr>
                 <a:t>💰</a:t>
               </a:r>
+              <a:endParaRPr>
+                <a:latin typeface="Times New Roman" panose="02020603050405020304" charset="0"/>
+                <a:cs typeface="Times New Roman" panose="02020603050405020304" charset="0"/>
+              </a:endParaRPr>
             </a:p>
           </p:txBody>
         </p:sp>
@@ -5091,44 +4903,16 @@
                 </a:defRPr>
               </a:pPr>
               <a:r>
+                <a:rPr>
+                  <a:latin typeface="Times New Roman" panose="02020603050405020304" charset="0"/>
+                  <a:cs typeface="Times New Roman" panose="02020603050405020304" charset="0"/>
+                </a:rPr>
                 <a:t>Balance Sufficiency Check</a:t>
               </a:r>
-            </a:p>
-          </p:txBody>
-        </p:sp>
-        <p:sp>
-          <p:nvSpPr>
-            <p:cNvPr id="18" name="TextBox 16"/>
-            <p:cNvSpPr txBox="1"/>
-            <p:nvPr/>
-          </p:nvSpPr>
-          <p:spPr>
-            <a:xfrm>
-              <a:off x="1728" y="9360"/>
-              <a:ext cx="7344" cy="1296"/>
-            </a:xfrm>
-            <a:prstGeom prst="rect">
-              <a:avLst/>
-            </a:prstGeom>
-            <a:noFill/>
-          </p:spPr>
-          <p:txBody>
-            <a:bodyPr wrap="square">
-              <a:spAutoFit/>
-            </a:bodyPr>
-            <a:lstStyle/>
-            <a:p>
-              <a:pPr>
-                <a:defRPr sz="1400">
-                  <a:solidFill>
-                    <a:srgbClr val="666666"/>
-                  </a:solidFill>
-                  <a:latin typeface="Arial" panose="020B0604020202020204"/>
-                </a:defRPr>
-              </a:pPr>
-              <a:r>
-                <a:t>Real-time validation of account balance before transaction execution.</a:t>
-              </a:r>
+              <a:endParaRPr>
+                <a:latin typeface="Times New Roman" panose="02020603050405020304" charset="0"/>
+                <a:cs typeface="Times New Roman" panose="02020603050405020304" charset="0"/>
+              </a:endParaRPr>
             </a:p>
           </p:txBody>
         </p:sp>
@@ -5174,6 +4958,10 @@
             <a:lstStyle/>
             <a:p>
               <a:pPr algn="ctr"/>
+              <a:endParaRPr>
+                <a:latin typeface="Times New Roman" panose="02020603050405020304" charset="0"/>
+                <a:cs typeface="Times New Roman" panose="02020603050405020304" charset="0"/>
+              </a:endParaRPr>
             </a:p>
           </p:txBody>
         </p:sp>
@@ -5217,6 +5005,10 @@
             <a:lstStyle/>
             <a:p>
               <a:pPr algn="ctr"/>
+              <a:endParaRPr>
+                <a:latin typeface="Times New Roman" panose="02020603050405020304" charset="0"/>
+                <a:cs typeface="Times New Roman" panose="02020603050405020304" charset="0"/>
+              </a:endParaRPr>
             </a:p>
           </p:txBody>
         </p:sp>
@@ -5246,8 +5038,16 @@
                 <a:defRPr sz="2800"/>
               </a:pPr>
               <a:r>
+                <a:rPr>
+                  <a:latin typeface="Times New Roman" panose="02020603050405020304" charset="0"/>
+                  <a:cs typeface="Times New Roman" panose="02020603050405020304" charset="0"/>
+                </a:rPr>
                 <a:t>📝</a:t>
               </a:r>
+              <a:endParaRPr>
+                <a:latin typeface="Times New Roman" panose="02020603050405020304" charset="0"/>
+                <a:cs typeface="Times New Roman" panose="02020603050405020304" charset="0"/>
+              </a:endParaRPr>
             </a:p>
           </p:txBody>
         </p:sp>
@@ -5282,44 +5082,16 @@
                 </a:defRPr>
               </a:pPr>
               <a:r>
+                <a:rPr>
+                  <a:latin typeface="Times New Roman" panose="02020603050405020304" charset="0"/>
+                  <a:cs typeface="Times New Roman" panose="02020603050405020304" charset="0"/>
+                </a:rPr>
                 <a:t>Test Documentation &amp; JUnit 5</a:t>
               </a:r>
-            </a:p>
-          </p:txBody>
-        </p:sp>
-        <p:sp>
-          <p:nvSpPr>
-            <p:cNvPr id="23" name="TextBox 21"/>
-            <p:cNvSpPr txBox="1"/>
-            <p:nvPr/>
-          </p:nvSpPr>
-          <p:spPr>
-            <a:xfrm>
-              <a:off x="11376" y="9360"/>
-              <a:ext cx="7344" cy="1296"/>
-            </a:xfrm>
-            <a:prstGeom prst="rect">
-              <a:avLst/>
-            </a:prstGeom>
-            <a:noFill/>
-          </p:spPr>
-          <p:txBody>
-            <a:bodyPr wrap="square">
-              <a:spAutoFit/>
-            </a:bodyPr>
-            <a:lstStyle/>
-            <a:p>
-              <a:pPr>
-                <a:defRPr sz="1400">
-                  <a:solidFill>
-                    <a:srgbClr val="666666"/>
-                  </a:solidFill>
-                  <a:latin typeface="Arial" panose="020B0604020202020204"/>
-                </a:defRPr>
-              </a:pPr>
-              <a:r>
-                <a:t>Comprehensive test docs and JUnit 5 unit tests for code reliability.</a:t>
-              </a:r>
+              <a:endParaRPr>
+                <a:latin typeface="Times New Roman" panose="02020603050405020304" charset="0"/>
+                <a:cs typeface="Times New Roman" panose="02020603050405020304" charset="0"/>
+              </a:endParaRPr>
             </a:p>
           </p:txBody>
         </p:sp>
@@ -5357,7 +5129,8 @@
                 </a:solidFill>
                 <a:effectLst/>
                 <a:uFillTx/>
-                <a:latin typeface="Calibri" panose="020F0502020204030204"/>
+                <a:latin typeface="Times New Roman" panose="02020603050405020304" charset="0"/>
+                <a:cs typeface="Times New Roman" panose="02020603050405020304" charset="0"/>
                 <a:sym typeface="+mn-ea"/>
               </a:rPr>
               <a:t>Vianne W Q Xu’s Contribution</a:t>
@@ -5368,7 +5141,8 @@
               </a:solidFill>
               <a:effectLst/>
               <a:uFillTx/>
-              <a:latin typeface="Calibri" panose="020F0502020204030204"/>
+              <a:latin typeface="Times New Roman" panose="02020603050405020304" charset="0"/>
+              <a:cs typeface="Times New Roman" panose="02020603050405020304" charset="0"/>
               <a:sym typeface="+mn-ea"/>
             </a:endParaRPr>
           </a:p>
@@ -5382,7 +5156,7 @@
 </p:sld>
 </file>
 
-<file path=ppt/slides/slide13.xml><?xml version="1.0" encoding="utf-8"?>
+<file path=ppt/slides/slide11.xml><?xml version="1.0" encoding="utf-8"?>
 <p:sld xmlns:a="http://schemas.openxmlformats.org/drawingml/2006/main" xmlns:r="http://schemas.openxmlformats.org/officeDocument/2006/relationships" xmlns:p="http://schemas.openxmlformats.org/presentationml/2006/main">
   <p:cSld>
     <p:spTree>
@@ -5425,7 +5199,8 @@
                 </a:solidFill>
                 <a:effectLst/>
                 <a:uFillTx/>
-                <a:latin typeface="Calibri" panose="020F0502020204030204"/>
+                <a:latin typeface="Times New Roman" panose="02020603050405020304" charset="0"/>
+                <a:cs typeface="Times New Roman" panose="02020603050405020304" charset="0"/>
                 <a:sym typeface="+mn-ea"/>
               </a:rPr>
               <a:t>Mia W T Mai’s Contribution</a:t>
@@ -5436,7 +5211,8 @@
               </a:solidFill>
               <a:effectLst/>
               <a:uFillTx/>
-              <a:latin typeface="Calibri" panose="020F0502020204030204"/>
+              <a:latin typeface="Times New Roman" panose="02020603050405020304" charset="0"/>
+              <a:cs typeface="Times New Roman" panose="02020603050405020304" charset="0"/>
               <a:sym typeface="+mn-ea"/>
             </a:endParaRPr>
           </a:p>
@@ -5498,6 +5274,10 @@
             <a:lstStyle/>
             <a:p>
               <a:pPr algn="ctr"/>
+              <a:endParaRPr>
+                <a:latin typeface="Times New Roman" panose="02020603050405020304" charset="0"/>
+                <a:cs typeface="Times New Roman" panose="02020603050405020304" charset="0"/>
+              </a:endParaRPr>
             </a:p>
           </p:txBody>
         </p:sp>
@@ -5541,6 +5321,10 @@
             <a:lstStyle/>
             <a:p>
               <a:pPr algn="ctr"/>
+              <a:endParaRPr>
+                <a:latin typeface="Times New Roman" panose="02020603050405020304" charset="0"/>
+                <a:cs typeface="Times New Roman" panose="02020603050405020304" charset="0"/>
+              </a:endParaRPr>
             </a:p>
           </p:txBody>
         </p:sp>
@@ -5552,8 +5336,8 @@
           </p:nvSpPr>
           <p:spPr>
             <a:xfrm>
-              <a:off x="1296" y="2016"/>
-              <a:ext cx="864" cy="864"/>
+              <a:off x="1344" y="2016"/>
+              <a:ext cx="768" cy="725"/>
             </a:xfrm>
             <a:prstGeom prst="rect">
               <a:avLst/>
@@ -5570,8 +5354,16 @@
                 <a:defRPr sz="2600"/>
               </a:pPr>
               <a:r>
+                <a:rPr sz="2400">
+                  <a:latin typeface="Times New Roman" panose="02020603050405020304" charset="0"/>
+                  <a:cs typeface="Times New Roman" panose="02020603050405020304" charset="0"/>
+                </a:rPr>
                 <a:t>🎨</a:t>
               </a:r>
+              <a:endParaRPr sz="2400">
+                <a:latin typeface="Times New Roman" panose="02020603050405020304" charset="0"/>
+                <a:cs typeface="Times New Roman" panose="02020603050405020304" charset="0"/>
+              </a:endParaRPr>
             </a:p>
           </p:txBody>
         </p:sp>
@@ -5584,7 +5376,7 @@
           <p:spPr>
             <a:xfrm>
               <a:off x="1296" y="2952"/>
-              <a:ext cx="4608" cy="720"/>
+              <a:ext cx="4608" cy="628"/>
             </a:xfrm>
             <a:prstGeom prst="rect">
               <a:avLst/>
@@ -5606,44 +5398,16 @@
                 </a:defRPr>
               </a:pPr>
               <a:r>
+                <a:rPr sz="2000">
+                  <a:latin typeface="Times New Roman" panose="02020603050405020304" charset="0"/>
+                  <a:cs typeface="Times New Roman" panose="02020603050405020304" charset="0"/>
+                </a:rPr>
                 <a:t>Global Design Systems</a:t>
               </a:r>
-            </a:p>
-          </p:txBody>
-        </p:sp>
-        <p:sp>
-          <p:nvSpPr>
-            <p:cNvPr id="28" name="TextBox 5"/>
-            <p:cNvSpPr txBox="1"/>
-            <p:nvPr/>
-          </p:nvSpPr>
-          <p:spPr>
-            <a:xfrm>
-              <a:off x="1296" y="3600"/>
-              <a:ext cx="4608" cy="1296"/>
-            </a:xfrm>
-            <a:prstGeom prst="rect">
-              <a:avLst/>
-            </a:prstGeom>
-            <a:noFill/>
-          </p:spPr>
-          <p:txBody>
-            <a:bodyPr wrap="square">
-              <a:spAutoFit/>
-            </a:bodyPr>
-            <a:lstStyle/>
-            <a:p>
-              <a:pPr>
-                <a:defRPr sz="1300">
-                  <a:solidFill>
-                    <a:srgbClr val="666666"/>
-                  </a:solidFill>
-                  <a:latin typeface="Arial" panose="020B0604020202020204"/>
-                </a:defRPr>
-              </a:pPr>
-              <a:r>
-                <a:t>CSS custom properties, gradient sets, and reusable component tokens.</a:t>
-              </a:r>
+              <a:endParaRPr sz="2000">
+                <a:latin typeface="Times New Roman" panose="02020603050405020304" charset="0"/>
+                <a:cs typeface="Times New Roman" panose="02020603050405020304" charset="0"/>
+              </a:endParaRPr>
             </a:p>
           </p:txBody>
         </p:sp>
@@ -5689,6 +5453,10 @@
             <a:lstStyle/>
             <a:p>
               <a:pPr algn="ctr"/>
+              <a:endParaRPr>
+                <a:latin typeface="Times New Roman" panose="02020603050405020304" charset="0"/>
+                <a:cs typeface="Times New Roman" panose="02020603050405020304" charset="0"/>
+              </a:endParaRPr>
             </a:p>
           </p:txBody>
         </p:sp>
@@ -5732,6 +5500,10 @@
             <a:lstStyle/>
             <a:p>
               <a:pPr algn="ctr"/>
+              <a:endParaRPr>
+                <a:latin typeface="Times New Roman" panose="02020603050405020304" charset="0"/>
+                <a:cs typeface="Times New Roman" panose="02020603050405020304" charset="0"/>
+              </a:endParaRPr>
             </a:p>
           </p:txBody>
         </p:sp>
@@ -5743,8 +5515,8 @@
           </p:nvSpPr>
           <p:spPr>
             <a:xfrm>
-              <a:off x="7560" y="2016"/>
-              <a:ext cx="864" cy="864"/>
+              <a:off x="7608" y="2016"/>
+              <a:ext cx="768" cy="725"/>
             </a:xfrm>
             <a:prstGeom prst="rect">
               <a:avLst/>
@@ -5761,8 +5533,16 @@
                 <a:defRPr sz="2600"/>
               </a:pPr>
               <a:r>
+                <a:rPr sz="2400">
+                  <a:latin typeface="Times New Roman" panose="02020603050405020304" charset="0"/>
+                  <a:cs typeface="Times New Roman" panose="02020603050405020304" charset="0"/>
+                </a:rPr>
                 <a:t>📄</a:t>
               </a:r>
+              <a:endParaRPr sz="2400">
+                <a:latin typeface="Times New Roman" panose="02020603050405020304" charset="0"/>
+                <a:cs typeface="Times New Roman" panose="02020603050405020304" charset="0"/>
+              </a:endParaRPr>
             </a:p>
           </p:txBody>
         </p:sp>
@@ -5775,7 +5555,7 @@
           <p:spPr>
             <a:xfrm>
               <a:off x="7560" y="2952"/>
-              <a:ext cx="4608" cy="720"/>
+              <a:ext cx="4608" cy="628"/>
             </a:xfrm>
             <a:prstGeom prst="rect">
               <a:avLst/>
@@ -5797,44 +5577,23 @@
                 </a:defRPr>
               </a:pPr>
               <a:r>
-                <a:t>Four Core Pages</a:t>
+                <a:rPr lang="en-US" sz="2000">
+                  <a:latin typeface="Times New Roman" panose="02020603050405020304" charset="0"/>
+                  <a:cs typeface="Times New Roman" panose="02020603050405020304" charset="0"/>
+                </a:rPr>
+                <a:t>Some</a:t>
               </a:r>
-            </a:p>
-          </p:txBody>
-        </p:sp>
-        <p:sp>
-          <p:nvSpPr>
-            <p:cNvPr id="34" name="TextBox 10"/>
-            <p:cNvSpPr txBox="1"/>
-            <p:nvPr/>
-          </p:nvSpPr>
-          <p:spPr>
-            <a:xfrm>
-              <a:off x="7560" y="3600"/>
-              <a:ext cx="4608" cy="1296"/>
-            </a:xfrm>
-            <a:prstGeom prst="rect">
-              <a:avLst/>
-            </a:prstGeom>
-            <a:noFill/>
-          </p:spPr>
-          <p:txBody>
-            <a:bodyPr wrap="square">
-              <a:spAutoFit/>
-            </a:bodyPr>
-            <a:lstStyle/>
-            <a:p>
-              <a:pPr>
-                <a:defRPr sz="1300">
-                  <a:solidFill>
-                    <a:srgbClr val="666666"/>
-                  </a:solidFill>
-                  <a:latin typeface="Arial" panose="020B0604020202020204"/>
-                </a:defRPr>
-              </a:pPr>
               <a:r>
-                <a:t>Login, create user, detail, and overview pages.</a:t>
+                <a:rPr sz="2000">
+                  <a:latin typeface="Times New Roman" panose="02020603050405020304" charset="0"/>
+                  <a:cs typeface="Times New Roman" panose="02020603050405020304" charset="0"/>
+                </a:rPr>
+                <a:t> Core Pages</a:t>
               </a:r>
+              <a:endParaRPr>
+                <a:latin typeface="Times New Roman" panose="02020603050405020304" charset="0"/>
+                <a:cs typeface="Times New Roman" panose="02020603050405020304" charset="0"/>
+              </a:endParaRPr>
             </a:p>
           </p:txBody>
         </p:sp>
@@ -5880,6 +5639,10 @@
             <a:lstStyle/>
             <a:p>
               <a:pPr algn="ctr"/>
+              <a:endParaRPr>
+                <a:latin typeface="Times New Roman" panose="02020603050405020304" charset="0"/>
+                <a:cs typeface="Times New Roman" panose="02020603050405020304" charset="0"/>
+              </a:endParaRPr>
             </a:p>
           </p:txBody>
         </p:sp>
@@ -5923,6 +5686,10 @@
             <a:lstStyle/>
             <a:p>
               <a:pPr algn="ctr"/>
+              <a:endParaRPr>
+                <a:latin typeface="Times New Roman" panose="02020603050405020304" charset="0"/>
+                <a:cs typeface="Times New Roman" panose="02020603050405020304" charset="0"/>
+              </a:endParaRPr>
             </a:p>
           </p:txBody>
         </p:sp>
@@ -5934,8 +5701,8 @@
           </p:nvSpPr>
           <p:spPr>
             <a:xfrm>
-              <a:off x="13824" y="2016"/>
-              <a:ext cx="864" cy="864"/>
+              <a:off x="13872" y="2016"/>
+              <a:ext cx="768" cy="725"/>
             </a:xfrm>
             <a:prstGeom prst="rect">
               <a:avLst/>
@@ -5952,8 +5719,14 @@
                 <a:defRPr sz="2600"/>
               </a:pPr>
               <a:r>
+                <a:rPr sz="2400">
+                  <a:latin typeface="Times New Roman" panose="02020603050405020304" charset="0"/>
+                </a:rPr>
                 <a:t>✅</a:t>
               </a:r>
+              <a:endParaRPr sz="2400">
+                <a:latin typeface="Times New Roman" panose="02020603050405020304" charset="0"/>
+              </a:endParaRPr>
             </a:p>
           </p:txBody>
         </p:sp>
@@ -5966,7 +5739,7 @@
           <p:spPr>
             <a:xfrm>
               <a:off x="13824" y="2952"/>
-              <a:ext cx="4608" cy="720"/>
+              <a:ext cx="4608" cy="628"/>
             </a:xfrm>
             <a:prstGeom prst="rect">
               <a:avLst/>
@@ -5988,44 +5761,30 @@
                 </a:defRPr>
               </a:pPr>
               <a:r>
-                <a:t>Smart Form Validation</a:t>
+                <a:rPr sz="2000">
+                  <a:latin typeface="Times New Roman" panose="02020603050405020304" charset="0"/>
+                  <a:cs typeface="Times New Roman" panose="02020603050405020304" charset="0"/>
+                </a:rPr>
+                <a:t>Smart Form</a:t>
               </a:r>
-            </a:p>
-          </p:txBody>
-        </p:sp>
-        <p:sp>
-          <p:nvSpPr>
-            <p:cNvPr id="39" name="TextBox 15"/>
-            <p:cNvSpPr txBox="1"/>
-            <p:nvPr/>
-          </p:nvSpPr>
-          <p:spPr>
-            <a:xfrm>
-              <a:off x="13824" y="3600"/>
-              <a:ext cx="4608" cy="1296"/>
-            </a:xfrm>
-            <a:prstGeom prst="rect">
-              <a:avLst/>
-            </a:prstGeom>
-            <a:noFill/>
-          </p:spPr>
-          <p:txBody>
-            <a:bodyPr wrap="square">
-              <a:spAutoFit/>
-            </a:bodyPr>
-            <a:lstStyle/>
-            <a:p>
-              <a:pPr>
-                <a:defRPr sz="1300">
-                  <a:solidFill>
-                    <a:srgbClr val="666666"/>
-                  </a:solidFill>
-                  <a:latin typeface="Arial" panose="020B0604020202020204"/>
-                </a:defRPr>
-              </a:pPr>
               <a:r>
-                <a:t>Input checks and hidden requirements with real-time validation.</a:t>
+                <a:rPr>
+                  <a:latin typeface="Times New Roman" panose="02020603050405020304" charset="0"/>
+                  <a:cs typeface="Times New Roman" panose="02020603050405020304" charset="0"/>
+                </a:rPr>
+                <a:t> </a:t>
               </a:r>
+              <a:r>
+                <a:rPr sz="2000">
+                  <a:latin typeface="Times New Roman" panose="02020603050405020304" charset="0"/>
+                  <a:cs typeface="Times New Roman" panose="02020603050405020304" charset="0"/>
+                </a:rPr>
+                <a:t>Validation</a:t>
+              </a:r>
+              <a:endParaRPr>
+                <a:latin typeface="Times New Roman" panose="02020603050405020304" charset="0"/>
+                <a:cs typeface="Times New Roman" panose="02020603050405020304" charset="0"/>
+              </a:endParaRPr>
             </a:p>
           </p:txBody>
         </p:sp>
@@ -6071,6 +5830,10 @@
             <a:lstStyle/>
             <a:p>
               <a:pPr algn="ctr"/>
+              <a:endParaRPr>
+                <a:latin typeface="Times New Roman" panose="02020603050405020304" charset="0"/>
+                <a:cs typeface="Times New Roman" panose="02020603050405020304" charset="0"/>
+              </a:endParaRPr>
             </a:p>
           </p:txBody>
         </p:sp>
@@ -6114,6 +5877,10 @@
             <a:lstStyle/>
             <a:p>
               <a:pPr algn="ctr"/>
+              <a:endParaRPr>
+                <a:latin typeface="Times New Roman" panose="02020603050405020304" charset="0"/>
+                <a:cs typeface="Times New Roman" panose="02020603050405020304" charset="0"/>
+              </a:endParaRPr>
             </a:p>
           </p:txBody>
         </p:sp>
@@ -6125,8 +5892,8 @@
           </p:nvSpPr>
           <p:spPr>
             <a:xfrm>
-              <a:off x="1296" y="6408"/>
-              <a:ext cx="864" cy="864"/>
+              <a:off x="1104" y="6408"/>
+              <a:ext cx="1248" cy="725"/>
             </a:xfrm>
             <a:prstGeom prst="rect">
               <a:avLst/>
@@ -6143,8 +5910,16 @@
                 <a:defRPr sz="2600"/>
               </a:pPr>
               <a:r>
+                <a:rPr sz="2400">
+                  <a:latin typeface="Times New Roman" panose="02020603050405020304" charset="0"/>
+                  <a:cs typeface="Times New Roman" panose="02020603050405020304" charset="0"/>
+                </a:rPr>
                 <a:t>🏷️</a:t>
               </a:r>
+              <a:endParaRPr sz="2400">
+                <a:latin typeface="Times New Roman" panose="02020603050405020304" charset="0"/>
+                <a:cs typeface="Times New Roman" panose="02020603050405020304" charset="0"/>
+              </a:endParaRPr>
             </a:p>
           </p:txBody>
         </p:sp>
@@ -6157,7 +5932,7 @@
           <p:spPr>
             <a:xfrm>
               <a:off x="1296" y="7344"/>
-              <a:ext cx="4608" cy="720"/>
+              <a:ext cx="4608" cy="628"/>
             </a:xfrm>
             <a:prstGeom prst="rect">
               <a:avLst/>
@@ -6179,44 +5954,16 @@
                 </a:defRPr>
               </a:pPr>
               <a:r>
+                <a:rPr sz="2000">
+                  <a:latin typeface="Times New Roman" panose="02020603050405020304" charset="0"/>
+                  <a:cs typeface="Times New Roman" panose="02020603050405020304" charset="0"/>
+                </a:rPr>
                 <a:t>Visual Status Design</a:t>
               </a:r>
-            </a:p>
-          </p:txBody>
-        </p:sp>
-        <p:sp>
-          <p:nvSpPr>
-            <p:cNvPr id="44" name="TextBox 20"/>
-            <p:cNvSpPr txBox="1"/>
-            <p:nvPr/>
-          </p:nvSpPr>
-          <p:spPr>
-            <a:xfrm>
-              <a:off x="1296" y="7992"/>
-              <a:ext cx="4608" cy="1296"/>
-            </a:xfrm>
-            <a:prstGeom prst="rect">
-              <a:avLst/>
-            </a:prstGeom>
-            <a:noFill/>
-          </p:spPr>
-          <p:txBody>
-            <a:bodyPr wrap="square">
-              <a:spAutoFit/>
-            </a:bodyPr>
-            <a:lstStyle/>
-            <a:p>
-              <a:pPr>
-                <a:defRPr sz="1300">
-                  <a:solidFill>
-                    <a:srgbClr val="666666"/>
-                  </a:solidFill>
-                  <a:latin typeface="Arial" panose="020B0604020202020204"/>
-                </a:defRPr>
-              </a:pPr>
-              <a:r>
-                <a:t>Color-coded tags and status icons for quick reading.</a:t>
-              </a:r>
+              <a:endParaRPr sz="2000">
+                <a:latin typeface="Times New Roman" panose="02020603050405020304" charset="0"/>
+                <a:cs typeface="Times New Roman" panose="02020603050405020304" charset="0"/>
+              </a:endParaRPr>
             </a:p>
           </p:txBody>
         </p:sp>
@@ -6262,6 +6009,10 @@
             <a:lstStyle/>
             <a:p>
               <a:pPr algn="ctr"/>
+              <a:endParaRPr>
+                <a:latin typeface="Times New Roman" panose="02020603050405020304" charset="0"/>
+                <a:cs typeface="Times New Roman" panose="02020603050405020304" charset="0"/>
+              </a:endParaRPr>
             </a:p>
           </p:txBody>
         </p:sp>
@@ -6305,6 +6056,10 @@
             <a:lstStyle/>
             <a:p>
               <a:pPr algn="ctr"/>
+              <a:endParaRPr>
+                <a:latin typeface="Times New Roman" panose="02020603050405020304" charset="0"/>
+                <a:cs typeface="Times New Roman" panose="02020603050405020304" charset="0"/>
+              </a:endParaRPr>
             </a:p>
           </p:txBody>
         </p:sp>
@@ -6316,8 +6071,8 @@
           </p:nvSpPr>
           <p:spPr>
             <a:xfrm>
-              <a:off x="7560" y="6408"/>
-              <a:ext cx="864" cy="864"/>
+              <a:off x="7608" y="6408"/>
+              <a:ext cx="768" cy="725"/>
             </a:xfrm>
             <a:prstGeom prst="rect">
               <a:avLst/>
@@ -6334,8 +6089,16 @@
                 <a:defRPr sz="2600"/>
               </a:pPr>
               <a:r>
+                <a:rPr sz="2400">
+                  <a:latin typeface="Times New Roman" panose="02020603050405020304" charset="0"/>
+                  <a:cs typeface="Times New Roman" panose="02020603050405020304" charset="0"/>
+                </a:rPr>
                 <a:t>📋</a:t>
               </a:r>
+              <a:endParaRPr sz="2400">
+                <a:latin typeface="Times New Roman" panose="02020603050405020304" charset="0"/>
+                <a:cs typeface="Times New Roman" panose="02020603050405020304" charset="0"/>
+              </a:endParaRPr>
             </a:p>
           </p:txBody>
         </p:sp>
@@ -6348,7 +6111,7 @@
           <p:spPr>
             <a:xfrm>
               <a:off x="7560" y="7344"/>
-              <a:ext cx="4608" cy="720"/>
+              <a:ext cx="4608" cy="628"/>
             </a:xfrm>
             <a:prstGeom prst="rect">
               <a:avLst/>
@@ -6370,44 +6133,16 @@
                 </a:defRPr>
               </a:pPr>
               <a:r>
+                <a:rPr sz="2000">
+                  <a:latin typeface="Times New Roman" panose="02020603050405020304" charset="0"/>
+                  <a:cs typeface="Times New Roman" panose="02020603050405020304" charset="0"/>
+                </a:rPr>
                 <a:t>Audit Trail Timeline</a:t>
               </a:r>
-            </a:p>
-          </p:txBody>
-        </p:sp>
-        <p:sp>
-          <p:nvSpPr>
-            <p:cNvPr id="49" name="TextBox 25"/>
-            <p:cNvSpPr txBox="1"/>
-            <p:nvPr/>
-          </p:nvSpPr>
-          <p:spPr>
-            <a:xfrm>
-              <a:off x="7560" y="7992"/>
-              <a:ext cx="4608" cy="1296"/>
-            </a:xfrm>
-            <a:prstGeom prst="rect">
-              <a:avLst/>
-            </a:prstGeom>
-            <a:noFill/>
-          </p:spPr>
-          <p:txBody>
-            <a:bodyPr wrap="square">
-              <a:spAutoFit/>
-            </a:bodyPr>
-            <a:lstStyle/>
-            <a:p>
-              <a:pPr>
-                <a:defRPr sz="1300">
-                  <a:solidFill>
-                    <a:srgbClr val="666666"/>
-                  </a:solidFill>
-                  <a:latin typeface="Arial" panose="020B0604020202020204"/>
-                </a:defRPr>
-              </a:pPr>
-              <a:r>
-                <a:t>Step-by-step status history with timestamps and error details.</a:t>
-              </a:r>
+              <a:endParaRPr sz="2000">
+                <a:latin typeface="Times New Roman" panose="02020603050405020304" charset="0"/>
+                <a:cs typeface="Times New Roman" panose="02020603050405020304" charset="0"/>
+              </a:endParaRPr>
             </a:p>
           </p:txBody>
         </p:sp>
@@ -6453,6 +6188,10 @@
             <a:lstStyle/>
             <a:p>
               <a:pPr algn="ctr"/>
+              <a:endParaRPr>
+                <a:latin typeface="Times New Roman" panose="02020603050405020304" charset="0"/>
+                <a:cs typeface="Times New Roman" panose="02020603050405020304" charset="0"/>
+              </a:endParaRPr>
             </a:p>
           </p:txBody>
         </p:sp>
@@ -6496,6 +6235,10 @@
             <a:lstStyle/>
             <a:p>
               <a:pPr algn="ctr"/>
+              <a:endParaRPr>
+                <a:latin typeface="Times New Roman" panose="02020603050405020304" charset="0"/>
+                <a:cs typeface="Times New Roman" panose="02020603050405020304" charset="0"/>
+              </a:endParaRPr>
             </a:p>
           </p:txBody>
         </p:sp>
@@ -6507,8 +6250,8 @@
           </p:nvSpPr>
           <p:spPr>
             <a:xfrm>
-              <a:off x="13824" y="6408"/>
-              <a:ext cx="864" cy="864"/>
+              <a:off x="13872" y="6408"/>
+              <a:ext cx="768" cy="725"/>
             </a:xfrm>
             <a:prstGeom prst="rect">
               <a:avLst/>
@@ -6525,8 +6268,16 @@
                 <a:defRPr sz="2600"/>
               </a:pPr>
               <a:r>
+                <a:rPr sz="2400">
+                  <a:latin typeface="Times New Roman" panose="02020603050405020304" charset="0"/>
+                  <a:cs typeface="Times New Roman" panose="02020603050405020304" charset="0"/>
+                </a:rPr>
                 <a:t>🔌</a:t>
               </a:r>
+              <a:endParaRPr sz="2400">
+                <a:latin typeface="Times New Roman" panose="02020603050405020304" charset="0"/>
+                <a:cs typeface="Times New Roman" panose="02020603050405020304" charset="0"/>
+              </a:endParaRPr>
             </a:p>
           </p:txBody>
         </p:sp>
@@ -6539,7 +6290,7 @@
           <p:spPr>
             <a:xfrm>
               <a:off x="13824" y="7344"/>
-              <a:ext cx="4608" cy="720"/>
+              <a:ext cx="4608" cy="628"/>
             </a:xfrm>
             <a:prstGeom prst="rect">
               <a:avLst/>
@@ -6561,48 +6312,319 @@
                 </a:defRPr>
               </a:pPr>
               <a:r>
-                <a:t>Clean API Layer</a:t>
+                <a:rPr sz="2000">
+                  <a:latin typeface="Times New Roman" panose="02020603050405020304" charset="0"/>
+                  <a:cs typeface="Times New Roman" panose="02020603050405020304" charset="0"/>
+                </a:rPr>
+                <a:t>Clean API </a:t>
               </a:r>
-            </a:p>
-          </p:txBody>
-        </p:sp>
-        <p:sp>
-          <p:nvSpPr>
-            <p:cNvPr id="54" name="TextBox 30"/>
-            <p:cNvSpPr txBox="1"/>
-            <p:nvPr/>
-          </p:nvSpPr>
-          <p:spPr>
-            <a:xfrm>
-              <a:off x="13824" y="7992"/>
-              <a:ext cx="4608" cy="1296"/>
-            </a:xfrm>
-            <a:prstGeom prst="rect">
-              <a:avLst/>
-            </a:prstGeom>
-            <a:noFill/>
-          </p:spPr>
-          <p:txBody>
-            <a:bodyPr wrap="square">
-              <a:spAutoFit/>
-            </a:bodyPr>
-            <a:lstStyle/>
-            <a:p>
-              <a:pPr>
-                <a:defRPr sz="1300">
-                  <a:solidFill>
-                    <a:srgbClr val="666666"/>
-                  </a:solidFill>
-                  <a:latin typeface="Arial" panose="020B0604020202020204"/>
-                </a:defRPr>
-              </a:pPr>
               <a:r>
-                <a:t>Unified Axios calls with global error handling.</a:t>
+                <a:rPr sz="2000">
+                  <a:latin typeface="Times New Roman" panose="02020603050405020304" charset="0"/>
+                  <a:cs typeface="Times New Roman" panose="02020603050405020304" charset="0"/>
+                </a:rPr>
+                <a:t>Layer</a:t>
               </a:r>
+              <a:endParaRPr sz="2000">
+                <a:latin typeface="Times New Roman" panose="02020603050405020304" charset="0"/>
+                <a:cs typeface="Times New Roman" panose="02020603050405020304" charset="0"/>
+              </a:endParaRPr>
             </a:p>
           </p:txBody>
         </p:sp>
       </p:grpSp>
+    </p:spTree>
+  </p:cSld>
+  <p:clrMapOvr>
+    <a:masterClrMapping/>
+  </p:clrMapOvr>
+</p:sld>
+</file>
+
+<file path=ppt/slides/slide12.xml><?xml version="1.0" encoding="utf-8"?>
+<p:sld xmlns:a="http://schemas.openxmlformats.org/drawingml/2006/main" xmlns:r="http://schemas.openxmlformats.org/officeDocument/2006/relationships" xmlns:p="http://schemas.openxmlformats.org/presentationml/2006/main">
+  <p:cSld>
+    <p:bg>
+      <p:bgPr>
+        <a:solidFill>
+          <a:srgbClr val="FFFFFF"/>
+        </a:solidFill>
+        <a:effectLst/>
+      </p:bgPr>
+    </p:bg>
+    <p:spTree>
+      <p:nvGrpSpPr>
+        <p:cNvPr id="1" name=""/>
+        <p:cNvGrpSpPr/>
+        <p:nvPr/>
+      </p:nvGrpSpPr>
+      <p:grpSpPr/>
+      <p:sp>
+        <p:nvSpPr>
+          <p:cNvPr id="2" name="TextBox 1"/>
+          <p:cNvSpPr txBox="1"/>
+          <p:nvPr/>
+        </p:nvSpPr>
+        <p:spPr>
+          <a:xfrm>
+            <a:off x="1676400" y="2778760"/>
+            <a:ext cx="8764270" cy="1300480"/>
+          </a:xfrm>
+          <a:prstGeom prst="rect">
+            <a:avLst/>
+          </a:prstGeom>
+          <a:noFill/>
+        </p:spPr>
+        <p:txBody>
+          <a:bodyPr wrap="square">
+            <a:noAutofit/>
+          </a:bodyPr>
+          <a:lstStyle/>
+          <a:p>
+            <a:pPr algn="ctr"/>
+            <a:r>
+              <a:rPr sz="8000">
+                <a:solidFill>
+                  <a:srgbClr val="1F2329"/>
+                </a:solidFill>
+                <a:latin typeface="Times New Roman" panose="02020603050405020304" charset="0"/>
+                <a:cs typeface="Times New Roman" panose="02020603050405020304" charset="0"/>
+              </a:rPr>
+              <a:t>Live Demo</a:t>
+            </a:r>
+            <a:r>
+              <a:rPr sz="3200" b="1">
+                <a:solidFill>
+                  <a:srgbClr val="1F2329"/>
+                </a:solidFill>
+              </a:rPr>
+              <a:t> </a:t>
+            </a:r>
+            <a:endParaRPr sz="3200" b="1">
+              <a:solidFill>
+                <a:srgbClr val="1F2329"/>
+              </a:solidFill>
+            </a:endParaRPr>
+          </a:p>
+        </p:txBody>
+      </p:sp>
+    </p:spTree>
+  </p:cSld>
+  <p:clrMapOvr>
+    <a:masterClrMapping/>
+  </p:clrMapOvr>
+</p:sld>
+</file>
+
+<file path=ppt/slides/slide13.xml><?xml version="1.0" encoding="utf-8"?>
+<p:sld xmlns:a="http://schemas.openxmlformats.org/drawingml/2006/main" xmlns:r="http://schemas.openxmlformats.org/officeDocument/2006/relationships" xmlns:p="http://schemas.openxmlformats.org/presentationml/2006/main">
+  <p:cSld>
+    <p:bg>
+      <p:bgPr>
+        <a:solidFill>
+          <a:srgbClr val="FFFFFF"/>
+        </a:solidFill>
+        <a:effectLst/>
+      </p:bgPr>
+    </p:bg>
+    <p:spTree>
+      <p:nvGrpSpPr>
+        <p:cNvPr id="1" name=""/>
+        <p:cNvGrpSpPr/>
+        <p:nvPr/>
+      </p:nvGrpSpPr>
+      <p:grpSpPr/>
+      <p:sp>
+        <p:nvSpPr>
+          <p:cNvPr id="2" name="TextBox 1"/>
+          <p:cNvSpPr txBox="1"/>
+          <p:nvPr/>
+        </p:nvSpPr>
+        <p:spPr>
+          <a:xfrm>
+            <a:off x="640080" y="457200"/>
+            <a:ext cx="10972800" cy="768350"/>
+          </a:xfrm>
+          <a:prstGeom prst="rect">
+            <a:avLst/>
+          </a:prstGeom>
+          <a:noFill/>
+        </p:spPr>
+        <p:txBody>
+          <a:bodyPr wrap="square">
+            <a:spAutoFit/>
+          </a:bodyPr>
+          <a:lstStyle/>
+          <a:p>
+            <a:pPr algn="l"/>
+            <a:r>
+              <a:rPr lang="en-US" sz="4400" b="1">
+                <a:solidFill>
+                  <a:srgbClr val="1F2329"/>
+                </a:solidFill>
+                <a:latin typeface="Times New Roman" panose="02020603050405020304" charset="0"/>
+                <a:cs typeface="Times New Roman" panose="02020603050405020304" charset="0"/>
+              </a:rPr>
+              <a:t>Summary</a:t>
+            </a:r>
+            <a:endParaRPr lang="en-US" sz="4400" b="1">
+              <a:solidFill>
+                <a:srgbClr val="1F2329"/>
+              </a:solidFill>
+              <a:latin typeface="Times New Roman" panose="02020603050405020304" charset="0"/>
+              <a:cs typeface="Times New Roman" panose="02020603050405020304" charset="0"/>
+            </a:endParaRPr>
+          </a:p>
+        </p:txBody>
+      </p:sp>
+      <p:sp>
+        <p:nvSpPr>
+          <p:cNvPr id="3" name="TextBox 2"/>
+          <p:cNvSpPr txBox="1"/>
+          <p:nvPr/>
+        </p:nvSpPr>
+        <p:spPr>
+          <a:xfrm>
+            <a:off x="822960" y="1668780"/>
+            <a:ext cx="10515600" cy="3138170"/>
+          </a:xfrm>
+          <a:prstGeom prst="rect">
+            <a:avLst/>
+          </a:prstGeom>
+          <a:noFill/>
+        </p:spPr>
+        <p:txBody>
+          <a:bodyPr wrap="square">
+            <a:spAutoFit/>
+          </a:bodyPr>
+          <a:lstStyle/>
+          <a:p>
+            <a:pPr indent="0" fontAlgn="auto">
+              <a:lnSpc>
+                <a:spcPct val="150000"/>
+              </a:lnSpc>
+              <a:spcAft>
+                <a:spcPts val="1200"/>
+              </a:spcAft>
+            </a:pPr>
+            <a:r>
+              <a:rPr sz="2400" b="1">
+                <a:solidFill>
+                  <a:srgbClr val="1F2329"/>
+                </a:solidFill>
+                <a:latin typeface="Times New Roman" panose="02020603050405020304" charset="0"/>
+                <a:cs typeface="Times New Roman" panose="02020603050405020304" charset="0"/>
+              </a:rPr>
+              <a:t>• </a:t>
+            </a:r>
+            <a:r>
+              <a:rPr lang="en-US" altLang="zh-CN" sz="2400" b="1">
+                <a:solidFill>
+                  <a:srgbClr val="1F2329"/>
+                </a:solidFill>
+                <a:latin typeface="Times New Roman" panose="02020603050405020304" charset="0"/>
+                <a:cs typeface="Times New Roman" panose="02020603050405020304" charset="0"/>
+              </a:rPr>
+              <a:t>This project is more than pages and APIs. It brings payment logic into a working system.</a:t>
+            </a:r>
+            <a:endParaRPr lang="en-US" altLang="zh-CN" sz="2400" b="1">
+              <a:solidFill>
+                <a:srgbClr val="1F2329"/>
+              </a:solidFill>
+              <a:latin typeface="Times New Roman" panose="02020603050405020304" charset="0"/>
+              <a:cs typeface="Times New Roman" panose="02020603050405020304" charset="0"/>
+            </a:endParaRPr>
+          </a:p>
+          <a:p>
+            <a:pPr indent="0" fontAlgn="auto">
+              <a:lnSpc>
+                <a:spcPct val="150000"/>
+              </a:lnSpc>
+              <a:spcAft>
+                <a:spcPts val="1200"/>
+              </a:spcAft>
+            </a:pPr>
+            <a:r>
+              <a:rPr sz="2400" b="1">
+                <a:solidFill>
+                  <a:srgbClr val="1F2329"/>
+                </a:solidFill>
+                <a:latin typeface="Times New Roman" panose="02020603050405020304" charset="0"/>
+                <a:cs typeface="Times New Roman" panose="02020603050405020304" charset="0"/>
+              </a:rPr>
+              <a:t>• </a:t>
+            </a:r>
+            <a:r>
+              <a:rPr lang="en-US" altLang="zh-CN" sz="2400" b="1">
+                <a:solidFill>
+                  <a:srgbClr val="1F2329"/>
+                </a:solidFill>
+                <a:latin typeface="Times New Roman" panose="02020603050405020304" charset="0"/>
+                <a:cs typeface="Times New Roman" panose="02020603050405020304" charset="0"/>
+              </a:rPr>
+              <a:t>We expanded basic CRUD into a fuller prototype.</a:t>
+            </a:r>
+            <a:endParaRPr lang="en-US" altLang="zh-CN" sz="2400" b="1">
+              <a:solidFill>
+                <a:srgbClr val="1F2329"/>
+              </a:solidFill>
+              <a:latin typeface="Times New Roman" panose="02020603050405020304" charset="0"/>
+              <a:cs typeface="Times New Roman" panose="02020603050405020304" charset="0"/>
+            </a:endParaRPr>
+          </a:p>
+          <a:p>
+            <a:pPr indent="0" fontAlgn="auto">
+              <a:lnSpc>
+                <a:spcPct val="150000"/>
+              </a:lnSpc>
+              <a:spcAft>
+                <a:spcPts val="1200"/>
+              </a:spcAft>
+            </a:pPr>
+            <a:r>
+              <a:rPr sz="2400" b="1">
+                <a:solidFill>
+                  <a:srgbClr val="1F2329"/>
+                </a:solidFill>
+                <a:latin typeface="Times New Roman" panose="02020603050405020304" charset="0"/>
+                <a:cs typeface="Times New Roman" panose="02020603050405020304" charset="0"/>
+              </a:rPr>
+              <a:t>• </a:t>
+            </a:r>
+            <a:r>
+              <a:rPr lang="en-US" altLang="zh-CN" sz="2400" b="1">
+                <a:solidFill>
+                  <a:srgbClr val="1F2329"/>
+                </a:solidFill>
+                <a:latin typeface="Times New Roman" panose="02020603050405020304" charset="0"/>
+                <a:cs typeface="Times New Roman" panose="02020603050405020304" charset="0"/>
+              </a:rPr>
+              <a:t>The system covers status, errors, recovery, scheduling, and testing.</a:t>
+            </a:r>
+            <a:endParaRPr lang="en-US" altLang="zh-CN" sz="2400" b="1">
+              <a:solidFill>
+                <a:srgbClr val="1F2329"/>
+              </a:solidFill>
+              <a:latin typeface="Times New Roman" panose="02020603050405020304" charset="0"/>
+              <a:cs typeface="Times New Roman" panose="02020603050405020304" charset="0"/>
+            </a:endParaRPr>
+          </a:p>
+          <a:p>
+            <a:pPr>
+              <a:spcAft>
+                <a:spcPts val="1200"/>
+              </a:spcAft>
+            </a:pPr>
+            <a:endParaRPr lang="en-US" altLang="zh-CN" sz="2400" b="1">
+              <a:solidFill>
+                <a:srgbClr val="1F2329"/>
+              </a:solidFill>
+              <a:latin typeface="Times New Roman" panose="02020603050405020304" charset="0"/>
+              <a:cs typeface="Times New Roman" panose="02020603050405020304" charset="0"/>
+            </a:endParaRPr>
+          </a:p>
+        </p:txBody>
+      </p:sp>
     </p:spTree>
   </p:cSld>
   <p:clrMapOvr>
@@ -6638,7 +6660,7 @@
         <p:spPr>
           <a:xfrm>
             <a:off x="640080" y="457200"/>
-            <a:ext cx="10972800" cy="583565"/>
+            <a:ext cx="10972800" cy="768350"/>
           </a:xfrm>
           <a:prstGeom prst="rect">
             <a:avLst/>
@@ -6653,17 +6675,21 @@
           <a:p>
             <a:pPr algn="l"/>
             <a:r>
-              <a:rPr sz="3200" b="1">
+              <a:rPr lang="en-US" sz="4400" b="1">
                 <a:solidFill>
                   <a:srgbClr val="1F2329"/>
                 </a:solidFill>
+                <a:latin typeface="Times New Roman" panose="02020603050405020304" charset="0"/>
+                <a:cs typeface="Times New Roman" panose="02020603050405020304" charset="0"/>
               </a:rPr>
-              <a:t>Live Demo </a:t>
-            </a:r>
-            <a:endParaRPr sz="3200" b="1">
+              <a:t>What we’ve learnt</a:t>
+            </a:r>
+            <a:endParaRPr lang="en-US" sz="4400" b="1">
               <a:solidFill>
                 <a:srgbClr val="1F2329"/>
               </a:solidFill>
+              <a:latin typeface="Times New Roman" panose="02020603050405020304" charset="0"/>
+              <a:cs typeface="Times New Roman" panose="02020603050405020304" charset="0"/>
             </a:endParaRPr>
           </a:p>
         </p:txBody>
@@ -6676,8 +6702,8 @@
         </p:nvSpPr>
         <p:spPr>
           <a:xfrm>
-            <a:off x="822960" y="1371600"/>
-            <a:ext cx="10515600" cy="3630930"/>
+            <a:off x="837565" y="1781810"/>
+            <a:ext cx="10515600" cy="2026920"/>
           </a:xfrm>
           <a:prstGeom prst="rect">
             <a:avLst/>
@@ -6686,175 +6712,132 @@
         </p:spPr>
         <p:txBody>
           <a:bodyPr wrap="square">
-            <a:spAutoFit/>
+            <a:noAutofit/>
           </a:bodyPr>
           <a:lstStyle/>
+          <a:p>
+            <a:pPr indent="0" fontAlgn="auto">
+              <a:lnSpc>
+                <a:spcPct val="150000"/>
+              </a:lnSpc>
+              <a:spcAft>
+                <a:spcPts val="1200"/>
+              </a:spcAft>
+            </a:pPr>
+            <a:r>
+              <a:rPr sz="2600" b="1">
+                <a:solidFill>
+                  <a:srgbClr val="1F2329"/>
+                </a:solidFill>
+                <a:latin typeface="Times New Roman" panose="02020603050405020304" charset="0"/>
+                <a:cs typeface="Times New Roman" panose="02020603050405020304" charset="0"/>
+              </a:rPr>
+              <a:t>• </a:t>
+            </a:r>
+            <a:r>
+              <a:rPr lang="en-US" altLang="zh-CN" sz="2600" b="1">
+                <a:solidFill>
+                  <a:srgbClr val="1F2329"/>
+                </a:solidFill>
+                <a:latin typeface="Times New Roman" panose="02020603050405020304" charset="0"/>
+                <a:cs typeface="Times New Roman" panose="02020603050405020304" charset="0"/>
+              </a:rPr>
+              <a:t>Team Cooperation</a:t>
+            </a:r>
+            <a:endParaRPr lang="en-US" altLang="zh-CN" sz="2600" b="1">
+              <a:solidFill>
+                <a:srgbClr val="1F2329"/>
+              </a:solidFill>
+              <a:latin typeface="Times New Roman" panose="02020603050405020304" charset="0"/>
+              <a:cs typeface="Times New Roman" panose="02020603050405020304" charset="0"/>
+            </a:endParaRPr>
+          </a:p>
+          <a:p>
+            <a:pPr indent="0" fontAlgn="auto">
+              <a:lnSpc>
+                <a:spcPct val="150000"/>
+              </a:lnSpc>
+              <a:spcAft>
+                <a:spcPts val="1200"/>
+              </a:spcAft>
+            </a:pPr>
+            <a:r>
+              <a:rPr sz="2600" b="1">
+                <a:solidFill>
+                  <a:srgbClr val="1F2329"/>
+                </a:solidFill>
+                <a:latin typeface="Times New Roman" panose="02020603050405020304" charset="0"/>
+                <a:cs typeface="Times New Roman" panose="02020603050405020304" charset="0"/>
+              </a:rPr>
+              <a:t>• </a:t>
+            </a:r>
+            <a:r>
+              <a:rPr lang="en-US" altLang="zh-CN" sz="2600" b="1">
+                <a:solidFill>
+                  <a:srgbClr val="1F2329"/>
+                </a:solidFill>
+                <a:latin typeface="Times New Roman" panose="02020603050405020304" charset="0"/>
+                <a:cs typeface="Times New Roman" panose="02020603050405020304" charset="0"/>
+              </a:rPr>
+              <a:t>How to build up a system from zero</a:t>
+            </a:r>
+            <a:endParaRPr lang="en-US" altLang="zh-CN" sz="2600" b="1">
+              <a:solidFill>
+                <a:srgbClr val="1F2329"/>
+              </a:solidFill>
+              <a:latin typeface="Times New Roman" panose="02020603050405020304" charset="0"/>
+              <a:cs typeface="Times New Roman" panose="02020603050405020304" charset="0"/>
+            </a:endParaRPr>
+          </a:p>
+          <a:p>
+            <a:pPr indent="0" fontAlgn="auto">
+              <a:lnSpc>
+                <a:spcPct val="150000"/>
+              </a:lnSpc>
+              <a:spcAft>
+                <a:spcPts val="1200"/>
+              </a:spcAft>
+            </a:pPr>
+            <a:r>
+              <a:rPr sz="2600" b="1">
+                <a:solidFill>
+                  <a:srgbClr val="1F2329"/>
+                </a:solidFill>
+                <a:latin typeface="Times New Roman" panose="02020603050405020304" charset="0"/>
+                <a:cs typeface="Times New Roman" panose="02020603050405020304" charset="0"/>
+              </a:rPr>
+              <a:t>• </a:t>
+            </a:r>
+            <a:r>
+              <a:rPr lang="en-US" sz="2600" b="1">
+                <a:solidFill>
+                  <a:srgbClr val="1F2329"/>
+                </a:solidFill>
+                <a:latin typeface="Times New Roman" panose="02020603050405020304" charset="0"/>
+                <a:cs typeface="Times New Roman" panose="02020603050405020304" charset="0"/>
+              </a:rPr>
+              <a:t>Technology we may need in the future</a:t>
+            </a:r>
+            <a:endParaRPr lang="en-US" altLang="zh-CN" sz="2600" b="1">
+              <a:solidFill>
+                <a:srgbClr val="1F2329"/>
+              </a:solidFill>
+              <a:latin typeface="Times New Roman" panose="02020603050405020304" charset="0"/>
+              <a:cs typeface="Times New Roman" panose="02020603050405020304" charset="0"/>
+            </a:endParaRPr>
+          </a:p>
           <a:p>
             <a:pPr>
               <a:spcAft>
                 <a:spcPts val="1200"/>
               </a:spcAft>
             </a:pPr>
-            <a:r>
-              <a:rPr sz="2000" b="1">
-                <a:solidFill>
-                  <a:srgbClr val="1F2329"/>
-                </a:solidFill>
-              </a:rPr>
-              <a:t>• 1. </a:t>
-            </a:r>
-            <a:r>
-              <a:rPr lang="en-US" altLang="zh-CN" sz="2000" b="1">
-                <a:solidFill>
-                  <a:srgbClr val="1F2329"/>
-                </a:solidFill>
-              </a:rPr>
-              <a:t>Create a payment, including validation for amount, currency, and account.</a:t>
-            </a:r>
-            <a:endParaRPr lang="en-US" altLang="zh-CN" sz="2000" b="1">
+            <a:endParaRPr lang="en-US" altLang="zh-CN" sz="2600" b="1">
               <a:solidFill>
                 <a:srgbClr val="1F2329"/>
               </a:solidFill>
-            </a:endParaRPr>
-          </a:p>
-          <a:p>
-            <a:pPr>
-              <a:spcAft>
-                <a:spcPts val="1200"/>
-              </a:spcAft>
-            </a:pPr>
-            <a:r>
-              <a:rPr sz="2000" b="1">
-                <a:solidFill>
-                  <a:srgbClr val="1F2329"/>
-                </a:solidFill>
-              </a:rPr>
-              <a:t>• 2. </a:t>
-            </a:r>
-            <a:r>
-              <a:rPr lang="en-US" altLang="zh-CN" sz="2000" b="1">
-                <a:solidFill>
-                  <a:srgbClr val="1F2329"/>
-                </a:solidFill>
-              </a:rPr>
-              <a:t>Switch languages between Chinese, English, and German, and show how the UI text as well as the amount and date formats change accordingly.</a:t>
-            </a:r>
-            <a:endParaRPr lang="en-US" altLang="zh-CN" sz="2000" b="1">
-              <a:solidFill>
-                <a:srgbClr val="1F2329"/>
-              </a:solidFill>
-            </a:endParaRPr>
-          </a:p>
-          <a:p>
-            <a:pPr>
-              <a:spcAft>
-                <a:spcPts val="1200"/>
-              </a:spcAft>
-            </a:pPr>
-            <a:r>
-              <a:rPr sz="2000" b="1">
-                <a:solidFill>
-                  <a:srgbClr val="1F2329"/>
-                </a:solidFill>
-              </a:rPr>
-              <a:t>• 3. </a:t>
-            </a:r>
-            <a:r>
-              <a:rPr lang="en-US" altLang="zh-CN" sz="2000" b="1">
-                <a:solidFill>
-                  <a:srgbClr val="1F2329"/>
-                </a:solidFill>
-              </a:rPr>
-              <a:t>Open the detail page and demonstrate automatic polling, with the status progressing automatically from CREATED.</a:t>
-            </a:r>
-            <a:endParaRPr lang="en-US" altLang="zh-CN" sz="2000" b="1">
-              <a:solidFill>
-                <a:srgbClr val="1F2329"/>
-              </a:solidFill>
-            </a:endParaRPr>
-          </a:p>
-          <a:p>
-            <a:pPr>
-              <a:spcAft>
-                <a:spcPts val="1200"/>
-              </a:spcAft>
-            </a:pPr>
-            <a:r>
-              <a:rPr sz="2000" b="1">
-                <a:solidFill>
-                  <a:srgbClr val="1F2329"/>
-                </a:solidFill>
-              </a:rPr>
-              <a:t>• 4. </a:t>
-            </a:r>
-            <a:r>
-              <a:rPr lang="en-US" altLang="zh-CN" sz="2000" b="1">
-                <a:solidFill>
-                  <a:srgbClr val="1F2329"/>
-                </a:solidFill>
-              </a:rPr>
-              <a:t>Demonstrate a payment with insufficient funds by forcing it to change to FAILED / INSUFFICIENT_FUNDS.</a:t>
-            </a:r>
-            <a:endParaRPr lang="en-US" altLang="zh-CN" sz="2000" b="1">
-              <a:solidFill>
-                <a:srgbClr val="1F2329"/>
-              </a:solidFill>
-            </a:endParaRPr>
-          </a:p>
-          <a:p>
-            <a:pPr>
-              <a:spcAft>
-                <a:spcPts val="1200"/>
-              </a:spcAft>
-            </a:pPr>
-            <a:r>
-              <a:rPr sz="2000" b="1">
-                <a:solidFill>
-                  <a:srgbClr val="1F2329"/>
-                </a:solidFill>
-              </a:rPr>
-              <a:t>• 5.</a:t>
-            </a:r>
-            <a:r>
-              <a:rPr lang="en-US" altLang="zh-CN" sz="2000" b="1">
-                <a:solidFill>
-                  <a:srgbClr val="1F2329"/>
-                </a:solidFill>
-              </a:rPr>
-              <a:t>View the status history timeline (Audit Trail).</a:t>
-            </a:r>
-            <a:endParaRPr lang="en-US" altLang="zh-CN" sz="2000" b="1">
-              <a:solidFill>
-                <a:srgbClr val="1F2329"/>
-              </a:solidFill>
-            </a:endParaRPr>
-          </a:p>
-          <a:p>
-            <a:pPr>
-              <a:spcAft>
-                <a:spcPts val="1200"/>
-              </a:spcAft>
-            </a:pPr>
-            <a:r>
-              <a:rPr sz="2000" b="1">
-                <a:solidFill>
-                  <a:srgbClr val="1F2329"/>
-                </a:solidFill>
-              </a:rPr>
-              <a:t>• 6. </a:t>
-            </a:r>
-            <a:r>
-              <a:rPr lang="en-US" altLang="zh-CN" sz="2000" b="1">
-                <a:solidFill>
-                  <a:srgbClr val="1F2329"/>
-                </a:solidFill>
-              </a:rPr>
-              <a:t>Demonstrate the recycle bin: soft delete, then restore or permanently delete.</a:t>
-            </a:r>
-            <a:endParaRPr lang="en-US" altLang="zh-CN" sz="2000" b="1">
-              <a:solidFill>
-                <a:srgbClr val="1F2329"/>
-              </a:solidFill>
+              <a:latin typeface="Times New Roman" panose="02020603050405020304" charset="0"/>
+              <a:cs typeface="Times New Roman" panose="02020603050405020304" charset="0"/>
             </a:endParaRPr>
           </a:p>
         </p:txBody>
@@ -6868,206 +6851,6 @@
 </file>
 
 <file path=ppt/slides/slide15.xml><?xml version="1.0" encoding="utf-8"?>
-<p:sld xmlns:a="http://schemas.openxmlformats.org/drawingml/2006/main" xmlns:r="http://schemas.openxmlformats.org/officeDocument/2006/relationships" xmlns:p="http://schemas.openxmlformats.org/presentationml/2006/main">
-  <p:cSld>
-    <p:bg>
-      <p:bgPr>
-        <a:solidFill>
-          <a:srgbClr val="FFFFFF"/>
-        </a:solidFill>
-        <a:effectLst/>
-      </p:bgPr>
-    </p:bg>
-    <p:spTree>
-      <p:nvGrpSpPr>
-        <p:cNvPr id="1" name=""/>
-        <p:cNvGrpSpPr/>
-        <p:nvPr/>
-      </p:nvGrpSpPr>
-      <p:grpSpPr/>
-      <p:sp>
-        <p:nvSpPr>
-          <p:cNvPr id="2" name="TextBox 1"/>
-          <p:cNvSpPr txBox="1"/>
-          <p:nvPr/>
-        </p:nvSpPr>
-        <p:spPr>
-          <a:xfrm>
-            <a:off x="640080" y="457200"/>
-            <a:ext cx="10972800" cy="583565"/>
-          </a:xfrm>
-          <a:prstGeom prst="rect">
-            <a:avLst/>
-          </a:prstGeom>
-          <a:noFill/>
-        </p:spPr>
-        <p:txBody>
-          <a:bodyPr wrap="square">
-            <a:spAutoFit/>
-          </a:bodyPr>
-          <a:lstStyle/>
-          <a:p>
-            <a:pPr algn="l"/>
-            <a:r>
-              <a:rPr lang="en-US" sz="3200" b="1">
-                <a:solidFill>
-                  <a:srgbClr val="1F2329"/>
-                </a:solidFill>
-              </a:rPr>
-              <a:t>Summary</a:t>
-            </a:r>
-            <a:endParaRPr lang="en-US" sz="3200" b="1">
-              <a:solidFill>
-                <a:srgbClr val="1F2329"/>
-              </a:solidFill>
-            </a:endParaRPr>
-          </a:p>
-        </p:txBody>
-      </p:sp>
-      <p:sp>
-        <p:nvSpPr>
-          <p:cNvPr id="3" name="TextBox 2"/>
-          <p:cNvSpPr txBox="1"/>
-          <p:nvPr/>
-        </p:nvSpPr>
-        <p:spPr>
-          <a:xfrm>
-            <a:off x="822960" y="1371600"/>
-            <a:ext cx="10515600" cy="1783715"/>
-          </a:xfrm>
-          <a:prstGeom prst="rect">
-            <a:avLst/>
-          </a:prstGeom>
-          <a:noFill/>
-        </p:spPr>
-        <p:txBody>
-          <a:bodyPr wrap="square">
-            <a:spAutoFit/>
-          </a:bodyPr>
-          <a:lstStyle/>
-          <a:p>
-            <a:pPr>
-              <a:spcAft>
-                <a:spcPts val="1200"/>
-              </a:spcAft>
-            </a:pPr>
-            <a:r>
-              <a:rPr sz="2000" b="1">
-                <a:solidFill>
-                  <a:srgbClr val="1F2329"/>
-                </a:solidFill>
-              </a:rPr>
-              <a:t>• </a:t>
-            </a:r>
-            <a:r>
-              <a:rPr lang="en-US" altLang="zh-CN" sz="2000" b="1">
-                <a:solidFill>
-                  <a:srgbClr val="1F2329"/>
-                </a:solidFill>
-              </a:rPr>
-              <a:t>This project is more than pages and APIs. It brings payment logic into a working system.</a:t>
-            </a:r>
-            <a:endParaRPr lang="en-US" altLang="zh-CN" sz="2000" b="1">
-              <a:solidFill>
-                <a:srgbClr val="1F2329"/>
-              </a:solidFill>
-            </a:endParaRPr>
-          </a:p>
-          <a:p>
-            <a:pPr>
-              <a:spcAft>
-                <a:spcPts val="1200"/>
-              </a:spcAft>
-            </a:pPr>
-            <a:r>
-              <a:rPr sz="2000" b="1">
-                <a:solidFill>
-                  <a:srgbClr val="1F2329"/>
-                </a:solidFill>
-              </a:rPr>
-              <a:t>• </a:t>
-            </a:r>
-            <a:r>
-              <a:rPr lang="en-US" altLang="zh-CN" sz="2000" b="1">
-                <a:solidFill>
-                  <a:srgbClr val="1F2329"/>
-                </a:solidFill>
-              </a:rPr>
-              <a:t>We expanded basic CRUD into a fuller prototype.</a:t>
-            </a:r>
-            <a:endParaRPr lang="en-US" altLang="zh-CN" sz="2000" b="1">
-              <a:solidFill>
-                <a:srgbClr val="1F2329"/>
-              </a:solidFill>
-            </a:endParaRPr>
-          </a:p>
-          <a:p>
-            <a:pPr>
-              <a:spcAft>
-                <a:spcPts val="1200"/>
-              </a:spcAft>
-            </a:pPr>
-            <a:r>
-              <a:rPr sz="2000" b="1">
-                <a:solidFill>
-                  <a:srgbClr val="1F2329"/>
-                </a:solidFill>
-              </a:rPr>
-              <a:t>• </a:t>
-            </a:r>
-            <a:r>
-              <a:rPr lang="en-US" altLang="zh-CN" sz="2000" b="1">
-                <a:solidFill>
-                  <a:srgbClr val="1F2329"/>
-                </a:solidFill>
-              </a:rPr>
-              <a:t>The system covers status, errors, recovery, scheduling, and testing.</a:t>
-            </a:r>
-            <a:endParaRPr lang="en-US" altLang="zh-CN" sz="2000" b="1">
-              <a:solidFill>
-                <a:srgbClr val="1F2329"/>
-              </a:solidFill>
-            </a:endParaRPr>
-          </a:p>
-          <a:p>
-            <a:pPr>
-              <a:spcAft>
-                <a:spcPts val="1200"/>
-              </a:spcAft>
-            </a:pPr>
-            <a:r>
-              <a:rPr sz="2000" b="1">
-                <a:solidFill>
-                  <a:srgbClr val="1F2329"/>
-                </a:solidFill>
-              </a:rPr>
-              <a:t>• </a:t>
-            </a:r>
-            <a:r>
-              <a:rPr lang="en-US" altLang="zh-CN" sz="2000" b="1">
-                <a:solidFill>
-                  <a:srgbClr val="1F2329"/>
-                </a:solidFill>
-              </a:rPr>
-              <a:t>It shows our understanding of business workflows, and also improved our engineering skills.</a:t>
-            </a:r>
-            <a:endParaRPr sz="2000" b="1">
-              <a:solidFill>
-                <a:srgbClr val="1F2329"/>
-              </a:solidFill>
-            </a:endParaRPr>
-          </a:p>
-        </p:txBody>
-      </p:sp>
-    </p:spTree>
-  </p:cSld>
-  <p:clrMapOvr>
-    <a:masterClrMapping/>
-  </p:clrMapOvr>
-</p:sld>
-</file>
-
-<file path=ppt/slides/slide16.xml><?xml version="1.0" encoding="utf-8"?>
 <p:sld xmlns:a="http://schemas.openxmlformats.org/drawingml/2006/main" xmlns:r="http://schemas.openxmlformats.org/officeDocument/2006/relationships" xmlns:p="http://schemas.openxmlformats.org/presentationml/2006/main">
   <p:cSld>
     <p:bg>
@@ -7113,6 +6896,8 @@
                 <a:solidFill>
                   <a:srgbClr val="FFFFFF"/>
                 </a:solidFill>
+                <a:latin typeface="Times New Roman" panose="02020603050405020304" charset="0"/>
+                <a:cs typeface="Times New Roman" panose="02020603050405020304" charset="0"/>
               </a:rPr>
               <a:t>Thanks for listening</a:t>
             </a:r>
@@ -7120,6 +6905,8 @@
               <a:solidFill>
                 <a:srgbClr val="FFFFFF"/>
               </a:solidFill>
+              <a:latin typeface="Times New Roman" panose="02020603050405020304" charset="0"/>
+              <a:cs typeface="Times New Roman" panose="02020603050405020304" charset="0"/>
             </a:endParaRPr>
           </a:p>
         </p:txBody>
@@ -7132,8 +6919,8 @@
         </p:nvSpPr>
         <p:spPr>
           <a:xfrm>
-            <a:off x="640080" y="3657600"/>
-            <a:ext cx="10972800" cy="731520"/>
+            <a:off x="662940" y="3657600"/>
+            <a:ext cx="10972800" cy="460375"/>
           </a:xfrm>
           <a:prstGeom prst="rect">
             <a:avLst/>
@@ -7151,6 +6938,8 @@
                 <a:solidFill>
                   <a:srgbClr val="DBEAFE"/>
                 </a:solidFill>
+                <a:latin typeface="Times New Roman" panose="02020603050405020304" charset="0"/>
+                <a:cs typeface="Times New Roman" panose="02020603050405020304" charset="0"/>
               </a:rPr>
               <a:t>Q &amp; A</a:t>
             </a:r>
@@ -7158,6 +6947,8 @@
               <a:solidFill>
                 <a:srgbClr val="DBEAFE"/>
               </a:solidFill>
+              <a:latin typeface="Times New Roman" panose="02020603050405020304" charset="0"/>
+              <a:cs typeface="Times New Roman" panose="02020603050405020304" charset="0"/>
             </a:endParaRPr>
           </a:p>
         </p:txBody>
@@ -7216,6 +7007,8 @@
                 <a:solidFill>
                   <a:srgbClr val="1F2329"/>
                 </a:solidFill>
+                <a:latin typeface="Times New Roman" panose="02020603050405020304" charset="0"/>
+                <a:cs typeface="Times New Roman" panose="02020603050405020304" charset="0"/>
               </a:rPr>
               <a:t> Agenda</a:t>
             </a:r>
@@ -7223,6 +7016,8 @@
               <a:solidFill>
                 <a:srgbClr val="1F2329"/>
               </a:solidFill>
+              <a:latin typeface="Times New Roman" panose="02020603050405020304" charset="0"/>
+              <a:cs typeface="Times New Roman" panose="02020603050405020304" charset="0"/>
             </a:endParaRPr>
           </a:p>
         </p:txBody>
@@ -7236,7 +7031,7 @@
         <p:spPr>
           <a:xfrm>
             <a:off x="822960" y="1664970"/>
-            <a:ext cx="10515600" cy="3446145"/>
+            <a:ext cx="10515600" cy="4219575"/>
           </a:xfrm>
           <a:prstGeom prst="rect">
             <a:avLst/>
@@ -7250,6 +7045,9 @@
           <a:lstStyle/>
           <a:p>
             <a:pPr>
+              <a:lnSpc>
+                <a:spcPct val="130000"/>
+              </a:lnSpc>
               <a:spcAft>
                 <a:spcPts val="1200"/>
               </a:spcAft>
@@ -7259,6 +7057,8 @@
                 <a:solidFill>
                   <a:srgbClr val="1F2329"/>
                 </a:solidFill>
+                <a:latin typeface="Times New Roman" panose="02020603050405020304" charset="0"/>
+                <a:cs typeface="Times New Roman" panose="02020603050405020304" charset="0"/>
               </a:rPr>
               <a:t>• </a:t>
             </a:r>
@@ -7267,6 +7067,8 @@
                 <a:solidFill>
                   <a:srgbClr val="1F2329"/>
                 </a:solidFill>
+                <a:latin typeface="Times New Roman" panose="02020603050405020304" charset="0"/>
+                <a:cs typeface="Times New Roman" panose="02020603050405020304" charset="0"/>
               </a:rPr>
               <a:t>P</a:t>
             </a:r>
@@ -7275,6 +7077,8 @@
                 <a:solidFill>
                   <a:srgbClr val="1F2329"/>
                 </a:solidFill>
+                <a:latin typeface="Times New Roman" panose="02020603050405020304" charset="0"/>
+                <a:cs typeface="Times New Roman" panose="02020603050405020304" charset="0"/>
               </a:rPr>
               <a:t>roject Background and Goals</a:t>
             </a:r>
@@ -7282,10 +7086,15 @@
               <a:solidFill>
                 <a:srgbClr val="1F2329"/>
               </a:solidFill>
+              <a:latin typeface="Times New Roman" panose="02020603050405020304" charset="0"/>
+              <a:cs typeface="Times New Roman" panose="02020603050405020304" charset="0"/>
             </a:endParaRPr>
           </a:p>
           <a:p>
             <a:pPr>
+              <a:lnSpc>
+                <a:spcPct val="130000"/>
+              </a:lnSpc>
               <a:spcAft>
                 <a:spcPts val="1200"/>
               </a:spcAft>
@@ -7295,6 +7104,8 @@
                 <a:solidFill>
                   <a:srgbClr val="1F2329"/>
                 </a:solidFill>
+                <a:latin typeface="Times New Roman" panose="02020603050405020304" charset="0"/>
+                <a:cs typeface="Times New Roman" panose="02020603050405020304" charset="0"/>
               </a:rPr>
               <a:t>• </a:t>
             </a:r>
@@ -7303,6 +7114,8 @@
                 <a:solidFill>
                   <a:srgbClr val="1F2329"/>
                 </a:solidFill>
+                <a:latin typeface="Times New Roman" panose="02020603050405020304" charset="0"/>
+                <a:cs typeface="Times New Roman" panose="02020603050405020304" charset="0"/>
               </a:rPr>
               <a:t>S</a:t>
             </a:r>
@@ -7311,17 +7124,24 @@
                 <a:solidFill>
                   <a:srgbClr val="1F2329"/>
                 </a:solidFill>
+                <a:latin typeface="Times New Roman" panose="02020603050405020304" charset="0"/>
+                <a:cs typeface="Times New Roman" panose="02020603050405020304" charset="0"/>
               </a:rPr>
-              <a:t>ystem Design and Tech Stack</a:t>
+              <a:t>ystem Architechure</a:t>
             </a:r>
             <a:endParaRPr lang="en-US" altLang="zh-CN" sz="2800" b="1">
               <a:solidFill>
                 <a:srgbClr val="1F2329"/>
               </a:solidFill>
+              <a:latin typeface="Times New Roman" panose="02020603050405020304" charset="0"/>
+              <a:cs typeface="Times New Roman" panose="02020603050405020304" charset="0"/>
             </a:endParaRPr>
           </a:p>
           <a:p>
             <a:pPr>
+              <a:lnSpc>
+                <a:spcPct val="130000"/>
+              </a:lnSpc>
               <a:spcAft>
                 <a:spcPts val="1200"/>
               </a:spcAft>
@@ -7331,6 +7151,47 @@
                 <a:solidFill>
                   <a:srgbClr val="1F2329"/>
                 </a:solidFill>
+                <a:latin typeface="Times New Roman" panose="02020603050405020304" charset="0"/>
+                <a:cs typeface="Times New Roman" panose="02020603050405020304" charset="0"/>
+                <a:sym typeface="+mn-ea"/>
+              </a:rPr>
+              <a:t>•</a:t>
+            </a:r>
+            <a:r>
+              <a:rPr lang="en-US" altLang="zh-CN" sz="2800" b="1">
+                <a:solidFill>
+                  <a:srgbClr val="1F2329"/>
+                </a:solidFill>
+                <a:latin typeface="Times New Roman" panose="02020603050405020304" charset="0"/>
+                <a:cs typeface="Times New Roman" panose="02020603050405020304" charset="0"/>
+                <a:sym typeface="+mn-ea"/>
+              </a:rPr>
+              <a:t> Core Feature Modules Overview</a:t>
+            </a:r>
+            <a:endParaRPr lang="en-US" altLang="zh-CN" sz="2800" b="1">
+              <a:solidFill>
+                <a:srgbClr val="1F2329"/>
+              </a:solidFill>
+              <a:latin typeface="Times New Roman" panose="02020603050405020304" charset="0"/>
+              <a:cs typeface="Times New Roman" panose="02020603050405020304" charset="0"/>
+            </a:endParaRPr>
+          </a:p>
+          <a:p>
+            <a:pPr>
+              <a:lnSpc>
+                <a:spcPct val="130000"/>
+              </a:lnSpc>
+              <a:spcAft>
+                <a:spcPts val="1200"/>
+              </a:spcAft>
+            </a:pPr>
+            <a:r>
+              <a:rPr sz="2800" b="1">
+                <a:solidFill>
+                  <a:srgbClr val="1F2329"/>
+                </a:solidFill>
+                <a:latin typeface="Times New Roman" panose="02020603050405020304" charset="0"/>
+                <a:cs typeface="Times New Roman" panose="02020603050405020304" charset="0"/>
               </a:rPr>
               <a:t>• </a:t>
             </a:r>
@@ -7339,6 +7200,8 @@
                 <a:solidFill>
                   <a:srgbClr val="1F2329"/>
                 </a:solidFill>
+                <a:latin typeface="Times New Roman" panose="02020603050405020304" charset="0"/>
+                <a:cs typeface="Times New Roman" panose="02020603050405020304" charset="0"/>
               </a:rPr>
               <a:t>Our Contribution</a:t>
             </a:r>
@@ -7346,10 +7209,15 @@
               <a:solidFill>
                 <a:srgbClr val="1F2329"/>
               </a:solidFill>
+              <a:latin typeface="Times New Roman" panose="02020603050405020304" charset="0"/>
+              <a:cs typeface="Times New Roman" panose="02020603050405020304" charset="0"/>
             </a:endParaRPr>
           </a:p>
           <a:p>
             <a:pPr>
+              <a:lnSpc>
+                <a:spcPct val="130000"/>
+              </a:lnSpc>
               <a:spcAft>
                 <a:spcPts val="1200"/>
               </a:spcAft>
@@ -7359,6 +7227,8 @@
                 <a:solidFill>
                   <a:srgbClr val="1F2329"/>
                 </a:solidFill>
+                <a:latin typeface="Times New Roman" panose="02020603050405020304" charset="0"/>
+                <a:cs typeface="Times New Roman" panose="02020603050405020304" charset="0"/>
                 <a:sym typeface="+mn-ea"/>
               </a:rPr>
               <a:t>• Live Demo</a:t>
@@ -7367,10 +7237,15 @@
               <a:solidFill>
                 <a:srgbClr val="1F2329"/>
               </a:solidFill>
+              <a:latin typeface="Times New Roman" panose="02020603050405020304" charset="0"/>
+              <a:cs typeface="Times New Roman" panose="02020603050405020304" charset="0"/>
             </a:endParaRPr>
           </a:p>
           <a:p>
             <a:pPr>
+              <a:lnSpc>
+                <a:spcPct val="130000"/>
+              </a:lnSpc>
               <a:spcAft>
                 <a:spcPts val="1200"/>
               </a:spcAft>
@@ -7380,42 +7255,18 @@
                 <a:solidFill>
                   <a:srgbClr val="1F2329"/>
                 </a:solidFill>
+                <a:latin typeface="Times New Roman" panose="02020603050405020304" charset="0"/>
+                <a:cs typeface="Times New Roman" panose="02020603050405020304" charset="0"/>
               </a:rPr>
-              <a:t>• </a:t>
+              <a:t>•</a:t>
             </a:r>
             <a:r>
               <a:rPr lang="en-US" sz="2800" b="1">
                 <a:solidFill>
                   <a:srgbClr val="1F2329"/>
                 </a:solidFill>
-              </a:rPr>
-              <a:t>Testing</a:t>
-            </a:r>
-            <a:endParaRPr sz="2800" b="1">
-              <a:solidFill>
-                <a:srgbClr val="1F2329"/>
-              </a:solidFill>
-            </a:endParaRPr>
-          </a:p>
-          <a:p>
-            <a:pPr>
-              <a:spcAft>
-                <a:spcPts val="1200"/>
-              </a:spcAft>
-            </a:pPr>
-            <a:r>
-              <a:rPr sz="2800" b="1">
-                <a:solidFill>
-                  <a:srgbClr val="1F2329"/>
-                </a:solidFill>
-              </a:rPr>
-              <a:t>•</a:t>
-            </a:r>
-            <a:r>
-              <a:rPr lang="en-US" sz="2800" b="1">
-                <a:solidFill>
-                  <a:srgbClr val="1F2329"/>
-                </a:solidFill>
+                <a:latin typeface="Times New Roman" panose="02020603050405020304" charset="0"/>
+                <a:cs typeface="Times New Roman" panose="02020603050405020304" charset="0"/>
               </a:rPr>
               <a:t> Summary</a:t>
             </a:r>
@@ -7423,6 +7274,8 @@
               <a:solidFill>
                 <a:srgbClr val="1F2329"/>
               </a:solidFill>
+              <a:latin typeface="Times New Roman" panose="02020603050405020304" charset="0"/>
+              <a:cs typeface="Times New Roman" panose="02020603050405020304" charset="0"/>
             </a:endParaRPr>
           </a:p>
         </p:txBody>
@@ -7481,6 +7334,8 @@
                 <a:solidFill>
                   <a:srgbClr val="1F2329"/>
                 </a:solidFill>
+                <a:latin typeface="Times New Roman" panose="02020603050405020304" charset="0"/>
+                <a:cs typeface="Times New Roman" panose="02020603050405020304" charset="0"/>
               </a:rPr>
               <a:t>Project Background and Goals</a:t>
             </a:r>
@@ -7488,6 +7343,8 @@
               <a:solidFill>
                 <a:srgbClr val="1F2329"/>
               </a:solidFill>
+              <a:latin typeface="Times New Roman" panose="02020603050405020304" charset="0"/>
+              <a:cs typeface="Times New Roman" panose="02020603050405020304" charset="0"/>
             </a:endParaRPr>
           </a:p>
         </p:txBody>
@@ -7500,8 +7357,8 @@
         </p:nvSpPr>
         <p:spPr>
           <a:xfrm>
-            <a:off x="822960" y="1684655"/>
-            <a:ext cx="10515600" cy="3895090"/>
+            <a:off x="619125" y="1626235"/>
+            <a:ext cx="11466830" cy="4072255"/>
           </a:xfrm>
           <a:prstGeom prst="rect">
             <a:avLst/>
@@ -7516,24 +7373,124 @@
           <a:p>
             <a:pPr>
               <a:lnSpc>
-                <a:spcPct val="120000"/>
+                <a:spcPct val="110000"/>
               </a:lnSpc>
               <a:spcAft>
                 <a:spcPts val="1200"/>
               </a:spcAft>
             </a:pPr>
             <a:r>
-              <a:rPr lang="en-US" sz="2800" b="1">
+              <a:rPr lang="en-US" sz="3200" b="1">
                 <a:solidFill>
                   <a:srgbClr val="1F2329"/>
                 </a:solidFill>
+                <a:latin typeface="Times New Roman" panose="02020603050405020304" charset="0"/>
+                <a:cs typeface="Times New Roman" panose="02020603050405020304" charset="0"/>
               </a:rPr>
               <a:t>Project background</a:t>
+            </a:r>
+            <a:endParaRPr sz="3200" b="1">
+              <a:solidFill>
+                <a:srgbClr val="1F2329"/>
+              </a:solidFill>
+              <a:latin typeface="Times New Roman" panose="02020603050405020304" charset="0"/>
+              <a:cs typeface="Times New Roman" panose="02020603050405020304" charset="0"/>
+            </a:endParaRPr>
+          </a:p>
+          <a:p>
+            <a:pPr indent="457200">
+              <a:lnSpc>
+                <a:spcPct val="110000"/>
+              </a:lnSpc>
+              <a:spcAft>
+                <a:spcPts val="1200"/>
+              </a:spcAft>
+            </a:pPr>
+            <a:r>
+              <a:rPr lang="en-US" altLang="zh-CN" sz="2800">
+                <a:latin typeface="Times New Roman" panose="02020603050405020304" charset="0"/>
+                <a:cs typeface="Times New Roman" panose="02020603050405020304" charset="0"/>
+                <a:sym typeface="+mn-ea"/>
+              </a:rPr>
+              <a:t>Full-stack development hands-on training that simulates a real-world payment system lifecycle.</a:t>
             </a:r>
             <a:endParaRPr sz="2800" b="1">
               <a:solidFill>
                 <a:srgbClr val="1F2329"/>
               </a:solidFill>
+              <a:latin typeface="Times New Roman" panose="02020603050405020304" charset="0"/>
+              <a:cs typeface="Times New Roman" panose="02020603050405020304" charset="0"/>
+            </a:endParaRPr>
+          </a:p>
+          <a:p>
+            <a:pPr>
+              <a:lnSpc>
+                <a:spcPct val="110000"/>
+              </a:lnSpc>
+              <a:spcAft>
+                <a:spcPts val="1200"/>
+              </a:spcAft>
+            </a:pPr>
+            <a:r>
+              <a:rPr lang="en-US" sz="3200" b="1">
+                <a:solidFill>
+                  <a:srgbClr val="1F2329"/>
+                </a:solidFill>
+                <a:latin typeface="Times New Roman" panose="02020603050405020304" charset="0"/>
+                <a:cs typeface="Times New Roman" panose="02020603050405020304" charset="0"/>
+              </a:rPr>
+              <a:t>Goals</a:t>
+            </a:r>
+            <a:endParaRPr lang="en-US" sz="3200" b="1">
+              <a:solidFill>
+                <a:srgbClr val="1F2329"/>
+              </a:solidFill>
+              <a:latin typeface="Times New Roman" panose="02020603050405020304" charset="0"/>
+              <a:cs typeface="Times New Roman" panose="02020603050405020304" charset="0"/>
+            </a:endParaRPr>
+          </a:p>
+          <a:p>
+            <a:pPr indent="457200">
+              <a:lnSpc>
+                <a:spcPct val="110000"/>
+              </a:lnSpc>
+              <a:spcAft>
+                <a:spcPts val="1200"/>
+              </a:spcAft>
+            </a:pPr>
+            <a:r>
+              <a:rPr lang="en-US" altLang="zh-CN" sz="2800">
+                <a:solidFill>
+                  <a:srgbClr val="1F2329"/>
+                </a:solidFill>
+                <a:latin typeface="Times New Roman" panose="02020603050405020304" charset="0"/>
+                <a:cs typeface="Times New Roman" panose="02020603050405020304" charset="0"/>
+              </a:rPr>
+              <a:t>Build a payment full-lifecycle management system:</a:t>
+            </a:r>
+            <a:endParaRPr lang="en-US" altLang="zh-CN" sz="2800">
+              <a:solidFill>
+                <a:srgbClr val="1F2329"/>
+              </a:solidFill>
+              <a:latin typeface="Times New Roman" panose="02020603050405020304" charset="0"/>
+              <a:cs typeface="Times New Roman" panose="02020603050405020304" charset="0"/>
+            </a:endParaRPr>
+          </a:p>
+          <a:p>
+            <a:pPr indent="457200">
+              <a:lnSpc>
+                <a:spcPct val="110000"/>
+              </a:lnSpc>
+              <a:spcAft>
+                <a:spcPts val="1200"/>
+              </a:spcAft>
+            </a:pPr>
+            <a:endParaRPr lang="en-US" altLang="zh-CN" sz="2000">
+              <a:solidFill>
+                <a:srgbClr val="1F2329"/>
+              </a:solidFill>
+              <a:latin typeface="Times New Roman" panose="02020603050405020304" charset="0"/>
+              <a:cs typeface="Times New Roman" panose="02020603050405020304" charset="0"/>
             </a:endParaRPr>
           </a:p>
           <a:p>
@@ -7545,135 +7502,41 @@
                 <a:spcPts val="1200"/>
               </a:spcAft>
             </a:pPr>
-            <a:r>
-              <a:rPr lang="en-US" altLang="zh-CN" sz="2000">
-                <a:sym typeface="+mn-ea"/>
-              </a:rPr>
-              <a:t>Full-stack development hands-on training that simulates a real-world payment system lifecycle.</a:t>
-            </a:r>
-            <a:endParaRPr sz="2000" b="1">
-              <a:solidFill>
-                <a:srgbClr val="1F2329"/>
-              </a:solidFill>
-            </a:endParaRPr>
-          </a:p>
-          <a:p>
-            <a:pPr>
-              <a:lnSpc>
-                <a:spcPct val="120000"/>
-              </a:lnSpc>
-              <a:spcAft>
-                <a:spcPts val="1200"/>
-              </a:spcAft>
-            </a:pPr>
-            <a:r>
-              <a:rPr lang="en-US" sz="2800" b="1">
-                <a:solidFill>
-                  <a:srgbClr val="1F2329"/>
-                </a:solidFill>
-              </a:rPr>
-              <a:t>Goals</a:t>
-            </a:r>
-            <a:endParaRPr lang="en-US" sz="2800" b="1">
-              <a:solidFill>
-                <a:srgbClr val="1F2329"/>
-              </a:solidFill>
-            </a:endParaRPr>
-          </a:p>
-          <a:p>
-            <a:pPr indent="457200">
-              <a:lnSpc>
-                <a:spcPct val="120000"/>
-              </a:lnSpc>
-              <a:spcAft>
-                <a:spcPts val="1200"/>
-              </a:spcAft>
-            </a:pPr>
-            <a:r>
-              <a:rPr lang="en-US" altLang="zh-CN" sz="2000">
-                <a:solidFill>
-                  <a:srgbClr val="1F2329"/>
-                </a:solidFill>
-              </a:rPr>
-              <a:t>Build a payment full-lifecycle management system that enables:</a:t>
-            </a:r>
             <a:endParaRPr lang="en-US" altLang="zh-CN" sz="2000">
               <a:solidFill>
                 <a:srgbClr val="1F2329"/>
               </a:solidFill>
+              <a:latin typeface="Times New Roman" panose="02020603050405020304" charset="0"/>
+              <a:cs typeface="Times New Roman" panose="02020603050405020304" charset="0"/>
             </a:endParaRPr>
           </a:p>
-          <a:p>
-            <a:pPr indent="457200">
-              <a:lnSpc>
-                <a:spcPct val="120000"/>
-              </a:lnSpc>
-              <a:spcAft>
-                <a:spcPts val="1200"/>
-              </a:spcAft>
-            </a:pPr>
-            <a:r>
-              <a:rPr lang="en-US" altLang="zh-CN" sz="2000">
-                <a:solidFill>
-                  <a:srgbClr val="1F2329"/>
-                </a:solidFill>
-              </a:rPr>
-              <a:t>Payment creation → validation → sending → completion (or failure)</a:t>
-            </a:r>
-            <a:endParaRPr lang="en-US" altLang="zh-CN" sz="2000">
-              <a:solidFill>
-                <a:srgbClr val="1F2329"/>
-              </a:solidFill>
-            </a:endParaRPr>
-          </a:p>
-          <a:p>
-            <a:pPr indent="457200">
-              <a:lnSpc>
-                <a:spcPct val="120000"/>
-              </a:lnSpc>
-              <a:spcAft>
-                <a:spcPts val="1200"/>
-              </a:spcAft>
-            </a:pPr>
-            <a:r>
-              <a:rPr lang="en-US" altLang="zh-CN" sz="2000">
-                <a:solidFill>
-                  <a:srgbClr val="1F2329"/>
-                </a:solidFill>
-              </a:rPr>
-              <a:t>Strict state machine transitions (5 statuses: CREATED, VALIDATED, SENT, COMPLETED, FAILED)</a:t>
-            </a:r>
-            <a:endParaRPr lang="en-US" altLang="zh-CN" sz="2000">
-              <a:solidFill>
-                <a:srgbClr val="1F2329"/>
-              </a:solidFill>
-            </a:endParaRPr>
-          </a:p>
-          <a:p>
-            <a:pPr indent="457200">
-              <a:lnSpc>
-                <a:spcPct val="120000"/>
-              </a:lnSpc>
-              <a:spcAft>
-                <a:spcPts val="1200"/>
-              </a:spcAft>
-            </a:pPr>
-            <a:r>
-              <a:rPr lang="en-US" altLang="zh-CN" sz="2000">
-                <a:solidFill>
-                  <a:srgbClr val="1F2329"/>
-                </a:solidFill>
-              </a:rPr>
-              <a:t>Complete audit trail (timestamp recorded for every status change)</a:t>
-            </a:r>
-            <a:endParaRPr lang="en-US" altLang="zh-CN" sz="2000">
-              <a:solidFill>
-                <a:srgbClr val="1F2329"/>
-              </a:solidFill>
-            </a:endParaRPr>
-          </a:p>
         </p:txBody>
       </p:sp>
+      <p:pic>
+        <p:nvPicPr>
+          <p:cNvPr id="4" name="图片 3"/>
+          <p:cNvPicPr>
+            <a:picLocks noChangeAspect="1"/>
+          </p:cNvPicPr>
+          <p:nvPr/>
+        </p:nvPicPr>
+        <p:blipFill>
+          <a:blip r:embed="rId1"/>
+          <a:srcRect r="-93" b="17202"/>
+          <a:stretch>
+            <a:fillRect/>
+          </a:stretch>
+        </p:blipFill>
+        <p:spPr>
+          <a:xfrm>
+            <a:off x="1654810" y="4671060"/>
+            <a:ext cx="8860155" cy="1717675"/>
+          </a:xfrm>
+          <a:prstGeom prst="rect">
+            <a:avLst/>
+          </a:prstGeom>
+        </p:spPr>
+      </p:pic>
     </p:spTree>
   </p:cSld>
   <p:clrMapOvr>
@@ -7728,27 +7591,31 @@
                 <a:solidFill>
                   <a:srgbClr val="1F2329"/>
                 </a:solidFill>
+                <a:latin typeface="Times New Roman" panose="02020603050405020304" charset="0"/>
+                <a:cs typeface="Times New Roman" panose="02020603050405020304" charset="0"/>
               </a:rPr>
-              <a:t>Payment Lifecycle &amp; State Machine Design</a:t>
+              <a:t>System Architecture</a:t>
             </a:r>
             <a:endParaRPr lang="en-US" altLang="zh-CN" sz="4400" b="1">
               <a:solidFill>
                 <a:srgbClr val="1F2329"/>
               </a:solidFill>
+              <a:latin typeface="Times New Roman" panose="02020603050405020304" charset="0"/>
+              <a:cs typeface="Times New Roman" panose="02020603050405020304" charset="0"/>
             </a:endParaRPr>
           </a:p>
         </p:txBody>
       </p:sp>
       <p:sp>
         <p:nvSpPr>
-          <p:cNvPr id="3" name="TextBox 2"/>
+          <p:cNvPr id="5" name="文本框 4"/>
           <p:cNvSpPr txBox="1"/>
           <p:nvPr/>
         </p:nvSpPr>
         <p:spPr>
           <a:xfrm>
-            <a:off x="822960" y="1584960"/>
-            <a:ext cx="11237595" cy="4492625"/>
+            <a:off x="3104515" y="5006340"/>
+            <a:ext cx="5982970" cy="521970"/>
           </a:xfrm>
           <a:prstGeom prst="rect">
             <a:avLst/>
@@ -7756,197 +7623,850 @@
           <a:noFill/>
         </p:spPr>
         <p:txBody>
-          <a:bodyPr wrap="square">
+          <a:bodyPr wrap="square" rtlCol="0">
             <a:spAutoFit/>
           </a:bodyPr>
-          <a:lstStyle/>
-          <a:p>
-            <a:pPr marL="342900" indent="-342900">
-              <a:lnSpc>
-                <a:spcPct val="150000"/>
-              </a:lnSpc>
-              <a:spcAft>
-                <a:spcPts val="1200"/>
-              </a:spcAft>
-              <a:buFont typeface="Wingdings" panose="05000000000000000000" charset="0"/>
-              <a:buChar char="l"/>
-            </a:pPr>
-            <a:r>
-              <a:rPr lang="en-US" sz="2000">
-                <a:solidFill>
-                  <a:srgbClr val="1F2329"/>
-                </a:solidFill>
+          <a:p>
+            <a:r>
+              <a:rPr lang="en-US" altLang="zh-CN" sz="2800" b="1">
+                <a:latin typeface="Times New Roman" panose="02020603050405020304" charset="0"/>
+                <a:cs typeface="Times New Roman" panose="02020603050405020304" charset="0"/>
               </a:rPr>
-              <a:t>FIve states</a:t>
-            </a:r>
-            <a:r>
-              <a:rPr sz="2000">
-                <a:solidFill>
-                  <a:srgbClr val="1F2329"/>
-                </a:solidFill>
-              </a:rPr>
-              <a:t>：CREATED → VALIDATED → SENT → COMPLETED</a:t>
-            </a:r>
-            <a:endParaRPr sz="2000">
+              <a:t>Fig.1 Application Layer Architecture</a:t>
+            </a:r>
+            <a:endParaRPr lang="en-US" altLang="zh-CN" sz="2800" b="1">
+              <a:latin typeface="Times New Roman" panose="02020603050405020304" charset="0"/>
+              <a:cs typeface="Times New Roman" panose="02020603050405020304" charset="0"/>
+            </a:endParaRPr>
+          </a:p>
+        </p:txBody>
+      </p:sp>
+      <p:grpSp>
+        <p:nvGrpSpPr>
+          <p:cNvPr id="23" name="组合 22"/>
+          <p:cNvGrpSpPr/>
+          <p:nvPr/>
+        </p:nvGrpSpPr>
+        <p:grpSpPr>
+          <a:xfrm>
+            <a:off x="138748" y="2016125"/>
+            <a:ext cx="11913870" cy="2693670"/>
+            <a:chOff x="15" y="3175"/>
+            <a:chExt cx="18762" cy="4242"/>
+          </a:xfrm>
+        </p:grpSpPr>
+        <p:sp>
+          <p:nvSpPr>
+            <p:cNvPr id="3" name="Rectangle 1"/>
+            <p:cNvSpPr/>
+            <p:nvPr/>
+          </p:nvSpPr>
+          <p:spPr>
+            <a:xfrm>
+              <a:off x="15" y="3223"/>
+              <a:ext cx="5760" cy="4193"/>
+            </a:xfrm>
+            <a:prstGeom prst="rect">
+              <a:avLst/>
+            </a:prstGeom>
+            <a:solidFill>
+              <a:srgbClr val="FFFACD"/>
+            </a:solidFill>
+            <a:ln w="25400">
               <a:solidFill>
-                <a:srgbClr val="1F2329"/>
+                <a:srgbClr val="DAA520"/>
               </a:solidFill>
-            </a:endParaRPr>
-          </a:p>
-          <a:p>
-            <a:pPr marL="342900" indent="-342900">
-              <a:lnSpc>
-                <a:spcPct val="150000"/>
-              </a:lnSpc>
-              <a:spcAft>
-                <a:spcPts val="1200"/>
-              </a:spcAft>
-              <a:buFont typeface="Wingdings" panose="05000000000000000000" charset="0"/>
-              <a:buChar char="l"/>
-            </a:pPr>
-            <a:r>
-              <a:rPr lang="en-US" altLang="zh-CN" sz="2000">
-                <a:solidFill>
-                  <a:srgbClr val="1F2329"/>
-                </a:solidFill>
-              </a:rPr>
-              <a:t>Any state can transition to FAILED (terminal state)</a:t>
-            </a:r>
-            <a:endParaRPr lang="en-US" altLang="zh-CN" sz="2000">
+            </a:ln>
+          </p:spPr>
+          <p:style>
+            <a:lnRef idx="1">
+              <a:schemeClr val="accent1"/>
+            </a:lnRef>
+            <a:fillRef idx="3">
+              <a:schemeClr val="accent1"/>
+            </a:fillRef>
+            <a:effectRef idx="2">
+              <a:schemeClr val="accent1"/>
+            </a:effectRef>
+            <a:fontRef idx="minor">
+              <a:schemeClr val="lt1"/>
+            </a:fontRef>
+          </p:style>
+          <p:txBody>
+            <a:bodyPr rtlCol="0" anchor="ctr"/>
+            <a:lstStyle/>
+            <a:p>
+              <a:pPr algn="ctr"/>
+              <a:endParaRPr>
+                <a:latin typeface="Times New Roman" panose="02020603050405020304" charset="0"/>
+                <a:cs typeface="Times New Roman" panose="02020603050405020304" charset="0"/>
+              </a:endParaRPr>
+            </a:p>
+          </p:txBody>
+        </p:sp>
+        <p:sp>
+          <p:nvSpPr>
+            <p:cNvPr id="4" name="Rectangle 2"/>
+            <p:cNvSpPr/>
+            <p:nvPr/>
+          </p:nvSpPr>
+          <p:spPr>
+            <a:xfrm>
+              <a:off x="7056" y="3175"/>
+              <a:ext cx="6480" cy="4241"/>
+            </a:xfrm>
+            <a:prstGeom prst="rect">
+              <a:avLst/>
+            </a:prstGeom>
+            <a:solidFill>
+              <a:srgbClr val="FFFACD"/>
+            </a:solidFill>
+            <a:ln w="25400">
               <a:solidFill>
-                <a:srgbClr val="1F2329"/>
+                <a:srgbClr val="DAA520"/>
               </a:solidFill>
-            </a:endParaRPr>
-          </a:p>
-          <a:p>
-            <a:pPr marL="342900" indent="-342900">
-              <a:lnSpc>
-                <a:spcPct val="150000"/>
-              </a:lnSpc>
-              <a:spcAft>
-                <a:spcPts val="1200"/>
-              </a:spcAft>
-              <a:buFont typeface="Wingdings" panose="05000000000000000000" charset="0"/>
-              <a:buChar char="l"/>
-            </a:pPr>
-            <a:r>
-              <a:rPr lang="en-US" altLang="zh-CN" sz="2000">
-                <a:solidFill>
-                  <a:srgbClr val="1F2329"/>
-                </a:solidFill>
-              </a:rPr>
-              <a:t>Valid transitions are centrally managed by PaymentStateMachine – no skipping or reversing allowed</a:t>
-            </a:r>
-            <a:endParaRPr lang="en-US" altLang="zh-CN" sz="2000">
+            </a:ln>
+          </p:spPr>
+          <p:style>
+            <a:lnRef idx="1">
+              <a:schemeClr val="accent1"/>
+            </a:lnRef>
+            <a:fillRef idx="3">
+              <a:schemeClr val="accent1"/>
+            </a:fillRef>
+            <a:effectRef idx="2">
+              <a:schemeClr val="accent1"/>
+            </a:effectRef>
+            <a:fontRef idx="minor">
+              <a:schemeClr val="lt1"/>
+            </a:fontRef>
+          </p:style>
+          <p:txBody>
+            <a:bodyPr rtlCol="0" anchor="ctr"/>
+            <a:lstStyle/>
+            <a:p>
+              <a:pPr algn="ctr"/>
+              <a:endParaRPr>
+                <a:latin typeface="Times New Roman" panose="02020603050405020304" charset="0"/>
+                <a:cs typeface="Times New Roman" panose="02020603050405020304" charset="0"/>
+              </a:endParaRPr>
+            </a:p>
+          </p:txBody>
+        </p:sp>
+        <p:sp>
+          <p:nvSpPr>
+            <p:cNvPr id="8" name="Rectangle 3"/>
+            <p:cNvSpPr/>
+            <p:nvPr/>
+          </p:nvSpPr>
+          <p:spPr>
+            <a:xfrm>
+              <a:off x="14457" y="3175"/>
+              <a:ext cx="4320" cy="4242"/>
+            </a:xfrm>
+            <a:prstGeom prst="rect">
+              <a:avLst/>
+            </a:prstGeom>
+            <a:solidFill>
+              <a:srgbClr val="FFFACD"/>
+            </a:solidFill>
+            <a:ln w="25400">
               <a:solidFill>
-                <a:srgbClr val="1F2329"/>
+                <a:srgbClr val="DAA520"/>
               </a:solidFill>
-            </a:endParaRPr>
-          </a:p>
-          <a:p>
-            <a:pPr marL="742950" lvl="1" indent="-285750">
-              <a:lnSpc>
-                <a:spcPct val="150000"/>
-              </a:lnSpc>
-              <a:spcAft>
-                <a:spcPts val="1200"/>
-              </a:spcAft>
-              <a:buFont typeface="Arial" panose="020B0604020202020204" pitchFamily="34" charset="0"/>
-              <a:buChar char="•"/>
-            </a:pPr>
-            <a:r>
-              <a:rPr lang="en-US" altLang="zh-CN" sz="1800" b="0">
-                <a:solidFill>
-                  <a:srgbClr val="1F2329"/>
-                </a:solidFill>
-              </a:rPr>
-              <a:t>CREATED → VALIDATED: three-layer validation (amount / currency / account) + sufficient balance check</a:t>
-            </a:r>
-            <a:endParaRPr lang="en-US" altLang="zh-CN" sz="1800" b="0">
+            </a:ln>
+          </p:spPr>
+          <p:style>
+            <a:lnRef idx="1">
+              <a:schemeClr val="accent1"/>
+            </a:lnRef>
+            <a:fillRef idx="3">
+              <a:schemeClr val="accent1"/>
+            </a:fillRef>
+            <a:effectRef idx="2">
+              <a:schemeClr val="accent1"/>
+            </a:effectRef>
+            <a:fontRef idx="minor">
+              <a:schemeClr val="lt1"/>
+            </a:fontRef>
+          </p:style>
+          <p:txBody>
+            <a:bodyPr rtlCol="0" anchor="ctr"/>
+            <a:lstStyle/>
+            <a:p>
+              <a:pPr algn="ctr"/>
+              <a:endParaRPr>
+                <a:latin typeface="Times New Roman" panose="02020603050405020304" charset="0"/>
+                <a:cs typeface="Times New Roman" panose="02020603050405020304" charset="0"/>
+              </a:endParaRPr>
+            </a:p>
+          </p:txBody>
+        </p:sp>
+        <p:sp>
+          <p:nvSpPr>
+            <p:cNvPr id="9" name="TextBox 4"/>
+            <p:cNvSpPr txBox="1"/>
+            <p:nvPr/>
+          </p:nvSpPr>
+          <p:spPr>
+            <a:xfrm>
+              <a:off x="15" y="3345"/>
+              <a:ext cx="5760" cy="864"/>
+            </a:xfrm>
+            <a:prstGeom prst="rect">
+              <a:avLst/>
+            </a:prstGeom>
+            <a:noFill/>
+          </p:spPr>
+          <p:txBody>
+            <a:bodyPr wrap="square">
+              <a:spAutoFit/>
+            </a:bodyPr>
+            <a:lstStyle/>
+            <a:p>
+              <a:pPr algn="ctr">
+                <a:defRPr sz="2200" b="1">
+                  <a:solidFill>
+                    <a:srgbClr val="333333"/>
+                  </a:solidFill>
+                  <a:latin typeface="Calibri" panose="020F0502020204030204"/>
+                </a:defRPr>
+              </a:pPr>
+              <a:r>
+                <a:rPr>
+                  <a:latin typeface="Times New Roman" panose="02020603050405020304" charset="0"/>
+                  <a:cs typeface="Times New Roman" panose="02020603050405020304" charset="0"/>
+                </a:rPr>
+                <a:t>Frontend</a:t>
+              </a:r>
+              <a:endParaRPr>
+                <a:latin typeface="Times New Roman" panose="02020603050405020304" charset="0"/>
+                <a:cs typeface="Times New Roman" panose="02020603050405020304" charset="0"/>
+              </a:endParaRPr>
+            </a:p>
+          </p:txBody>
+        </p:sp>
+        <p:sp>
+          <p:nvSpPr>
+            <p:cNvPr id="10" name="TextBox 5"/>
+            <p:cNvSpPr txBox="1"/>
+            <p:nvPr/>
+          </p:nvSpPr>
+          <p:spPr>
+            <a:xfrm>
+              <a:off x="7056" y="3300"/>
+              <a:ext cx="6480" cy="864"/>
+            </a:xfrm>
+            <a:prstGeom prst="rect">
+              <a:avLst/>
+            </a:prstGeom>
+            <a:noFill/>
+          </p:spPr>
+          <p:txBody>
+            <a:bodyPr wrap="square">
+              <a:spAutoFit/>
+            </a:bodyPr>
+            <a:lstStyle/>
+            <a:p>
+              <a:pPr algn="ctr">
+                <a:defRPr sz="2200" b="1">
+                  <a:solidFill>
+                    <a:srgbClr val="333333"/>
+                  </a:solidFill>
+                  <a:latin typeface="Calibri" panose="020F0502020204030204"/>
+                </a:defRPr>
+              </a:pPr>
+              <a:r>
+                <a:rPr>
+                  <a:latin typeface="Times New Roman" panose="02020603050405020304" charset="0"/>
+                  <a:cs typeface="Times New Roman" panose="02020603050405020304" charset="0"/>
+                </a:rPr>
+                <a:t>Backend: Spring Boot 3</a:t>
+              </a:r>
+              <a:endParaRPr>
+                <a:latin typeface="Times New Roman" panose="02020603050405020304" charset="0"/>
+                <a:cs typeface="Times New Roman" panose="02020603050405020304" charset="0"/>
+              </a:endParaRPr>
+            </a:p>
+          </p:txBody>
+        </p:sp>
+        <p:sp>
+          <p:nvSpPr>
+            <p:cNvPr id="11" name="TextBox 6"/>
+            <p:cNvSpPr txBox="1"/>
+            <p:nvPr/>
+          </p:nvSpPr>
+          <p:spPr>
+            <a:xfrm>
+              <a:off x="14457" y="3300"/>
+              <a:ext cx="4320" cy="864"/>
+            </a:xfrm>
+            <a:prstGeom prst="rect">
+              <a:avLst/>
+            </a:prstGeom>
+            <a:noFill/>
+          </p:spPr>
+          <p:txBody>
+            <a:bodyPr wrap="square">
+              <a:spAutoFit/>
+            </a:bodyPr>
+            <a:lstStyle/>
+            <a:p>
+              <a:pPr algn="ctr">
+                <a:defRPr sz="2200" b="1">
+                  <a:solidFill>
+                    <a:srgbClr val="333333"/>
+                  </a:solidFill>
+                  <a:latin typeface="Calibri" panose="020F0502020204030204"/>
+                </a:defRPr>
+              </a:pPr>
+              <a:r>
+                <a:rPr>
+                  <a:latin typeface="Times New Roman" panose="02020603050405020304" charset="0"/>
+                  <a:cs typeface="Times New Roman" panose="02020603050405020304" charset="0"/>
+                </a:rPr>
+                <a:t>Database</a:t>
+              </a:r>
+              <a:endParaRPr>
+                <a:latin typeface="Times New Roman" panose="02020603050405020304" charset="0"/>
+                <a:cs typeface="Times New Roman" panose="02020603050405020304" charset="0"/>
+              </a:endParaRPr>
+            </a:p>
+          </p:txBody>
+        </p:sp>
+        <p:sp>
+          <p:nvSpPr>
+            <p:cNvPr id="12" name="Rectangle 7"/>
+            <p:cNvSpPr/>
+            <p:nvPr/>
+          </p:nvSpPr>
+          <p:spPr>
+            <a:xfrm>
+              <a:off x="447" y="4244"/>
+              <a:ext cx="4896" cy="1856"/>
+            </a:xfrm>
+            <a:prstGeom prst="rect">
+              <a:avLst/>
+            </a:prstGeom>
+            <a:solidFill>
+              <a:srgbClr val="FFFFFF"/>
+            </a:solidFill>
+            <a:ln w="31750">
               <a:solidFill>
-                <a:srgbClr val="1F2329"/>
+                <a:srgbClr val="1B4F72"/>
               </a:solidFill>
-            </a:endParaRPr>
-          </a:p>
-          <a:p>
-            <a:pPr marL="742950" lvl="1" indent="-285750">
-              <a:lnSpc>
-                <a:spcPct val="150000"/>
-              </a:lnSpc>
-              <a:spcAft>
-                <a:spcPts val="1200"/>
-              </a:spcAft>
-              <a:buFont typeface="Arial" panose="020B0604020202020204" pitchFamily="34" charset="0"/>
-              <a:buChar char="•"/>
-            </a:pPr>
-            <a:r>
-              <a:rPr lang="en-US" altLang="zh-CN" sz="1800" b="0">
-                <a:solidFill>
-                  <a:srgbClr val="1F2329"/>
-                </a:solidFill>
-              </a:rPr>
-              <a:t>VALIDATED → SENT, SENT → COMPLETED: normal progression</a:t>
-            </a:r>
-            <a:endParaRPr lang="en-US" altLang="zh-CN" sz="1800" b="0">
+            </a:ln>
+          </p:spPr>
+          <p:style>
+            <a:lnRef idx="1">
+              <a:schemeClr val="accent1"/>
+            </a:lnRef>
+            <a:fillRef idx="3">
+              <a:schemeClr val="accent1"/>
+            </a:fillRef>
+            <a:effectRef idx="2">
+              <a:schemeClr val="accent1"/>
+            </a:effectRef>
+            <a:fontRef idx="minor">
+              <a:schemeClr val="lt1"/>
+            </a:fontRef>
+          </p:style>
+          <p:txBody>
+            <a:bodyPr rtlCol="0" anchor="ctr"/>
+            <a:lstStyle/>
+            <a:p>
+              <a:pPr algn="ctr"/>
+              <a:endParaRPr b="1">
+                <a:latin typeface="Times New Roman" panose="02020603050405020304" charset="0"/>
+                <a:cs typeface="Times New Roman" panose="02020603050405020304" charset="0"/>
+              </a:endParaRPr>
+            </a:p>
+          </p:txBody>
+        </p:sp>
+        <p:sp>
+          <p:nvSpPr>
+            <p:cNvPr id="13" name="Rectangle 8"/>
+            <p:cNvSpPr/>
+            <p:nvPr/>
+          </p:nvSpPr>
+          <p:spPr>
+            <a:xfrm>
+              <a:off x="7488" y="4244"/>
+              <a:ext cx="5616" cy="1856"/>
+            </a:xfrm>
+            <a:prstGeom prst="rect">
+              <a:avLst/>
+            </a:prstGeom>
+            <a:solidFill>
+              <a:srgbClr val="FFFFFF"/>
+            </a:solidFill>
+            <a:ln w="31750">
               <a:solidFill>
-                <a:srgbClr val="1F2329"/>
+                <a:srgbClr val="666666"/>
               </a:solidFill>
-            </a:endParaRPr>
-          </a:p>
-          <a:p>
-            <a:pPr marL="742950" lvl="1" indent="-285750">
-              <a:lnSpc>
-                <a:spcPct val="150000"/>
-              </a:lnSpc>
-              <a:spcAft>
-                <a:spcPts val="1200"/>
-              </a:spcAft>
-              <a:buFont typeface="Arial" panose="020B0604020202020204" pitchFamily="34" charset="0"/>
-              <a:buChar char="•"/>
-            </a:pPr>
-            <a:r>
-              <a:rPr lang="en-US" altLang="zh-CN" sz="1800" b="0">
-                <a:solidFill>
-                  <a:srgbClr val="1F2329"/>
-                </a:solidFill>
-              </a:rPr>
-              <a:t>Any state → FAILED: carries errorCode + errorMessage</a:t>
-            </a:r>
-            <a:endParaRPr lang="en-US" altLang="zh-CN" sz="1800" b="0">
+            </a:ln>
+          </p:spPr>
+          <p:style>
+            <a:lnRef idx="1">
+              <a:schemeClr val="accent1"/>
+            </a:lnRef>
+            <a:fillRef idx="3">
+              <a:schemeClr val="accent1"/>
+            </a:fillRef>
+            <a:effectRef idx="2">
+              <a:schemeClr val="accent1"/>
+            </a:effectRef>
+            <a:fontRef idx="minor">
+              <a:schemeClr val="lt1"/>
+            </a:fontRef>
+          </p:style>
+          <p:txBody>
+            <a:bodyPr rtlCol="0" anchor="ctr"/>
+            <a:lstStyle/>
+            <a:p>
+              <a:pPr algn="ctr"/>
+              <a:endParaRPr b="1">
+                <a:latin typeface="Times New Roman" panose="02020603050405020304" charset="0"/>
+                <a:cs typeface="Times New Roman" panose="02020603050405020304" charset="0"/>
+              </a:endParaRPr>
+            </a:p>
+          </p:txBody>
+        </p:sp>
+        <p:sp>
+          <p:nvSpPr>
+            <p:cNvPr id="14" name="TextBox 9"/>
+            <p:cNvSpPr txBox="1"/>
+            <p:nvPr/>
+          </p:nvSpPr>
+          <p:spPr>
+            <a:xfrm>
+              <a:off x="447" y="4608"/>
+              <a:ext cx="4896" cy="628"/>
+            </a:xfrm>
+            <a:prstGeom prst="rect">
+              <a:avLst/>
+            </a:prstGeom>
+            <a:noFill/>
+          </p:spPr>
+          <p:txBody>
+            <a:bodyPr wrap="square">
+              <a:spAutoFit/>
+            </a:bodyPr>
+            <a:lstStyle/>
+            <a:p>
+              <a:pPr algn="ctr">
+                <a:defRPr sz="1600" b="0">
+                  <a:solidFill>
+                    <a:srgbClr val="333333"/>
+                  </a:solidFill>
+                  <a:latin typeface="Calibri" panose="020F0502020204030204"/>
+                </a:defRPr>
+              </a:pPr>
+              <a:r>
+                <a:rPr sz="2000" b="1">
+                  <a:latin typeface="Times New Roman" panose="02020603050405020304" charset="0"/>
+                  <a:cs typeface="Times New Roman" panose="02020603050405020304" charset="0"/>
+                </a:rPr>
+                <a:t>Vue 3 + Element Plus</a:t>
+              </a:r>
+              <a:endParaRPr sz="2000" b="1">
+                <a:latin typeface="Times New Roman" panose="02020603050405020304" charset="0"/>
+                <a:cs typeface="Times New Roman" panose="02020603050405020304" charset="0"/>
+              </a:endParaRPr>
+            </a:p>
+          </p:txBody>
+        </p:sp>
+        <p:sp>
+          <p:nvSpPr>
+            <p:cNvPr id="15" name="TextBox 10"/>
+            <p:cNvSpPr txBox="1"/>
+            <p:nvPr/>
+          </p:nvSpPr>
+          <p:spPr>
+            <a:xfrm>
+              <a:off x="447" y="5400"/>
+              <a:ext cx="4896" cy="628"/>
+            </a:xfrm>
+            <a:prstGeom prst="rect">
+              <a:avLst/>
+            </a:prstGeom>
+            <a:noFill/>
+          </p:spPr>
+          <p:txBody>
+            <a:bodyPr wrap="square">
+              <a:spAutoFit/>
+            </a:bodyPr>
+            <a:lstStyle/>
+            <a:p>
+              <a:pPr algn="ctr">
+                <a:defRPr sz="1600" b="0">
+                  <a:solidFill>
+                    <a:srgbClr val="333333"/>
+                  </a:solidFill>
+                  <a:latin typeface="Calibri" panose="020F0502020204030204"/>
+                </a:defRPr>
+              </a:pPr>
+              <a:r>
+                <a:rPr sz="2000" b="1">
+                  <a:latin typeface="Times New Roman" panose="02020603050405020304" charset="0"/>
+                  <a:cs typeface="Times New Roman" panose="02020603050405020304" charset="0"/>
+                </a:rPr>
+                <a:t>vue-router + vue-i18n</a:t>
+              </a:r>
+              <a:endParaRPr sz="2000" b="1">
+                <a:latin typeface="Times New Roman" panose="02020603050405020304" charset="0"/>
+                <a:cs typeface="Times New Roman" panose="02020603050405020304" charset="0"/>
+              </a:endParaRPr>
+            </a:p>
+          </p:txBody>
+        </p:sp>
+        <p:sp>
+          <p:nvSpPr>
+            <p:cNvPr id="16" name="TextBox 11"/>
+            <p:cNvSpPr txBox="1"/>
+            <p:nvPr/>
+          </p:nvSpPr>
+          <p:spPr>
+            <a:xfrm>
+              <a:off x="7488" y="4608"/>
+              <a:ext cx="5616" cy="628"/>
+            </a:xfrm>
+            <a:prstGeom prst="rect">
+              <a:avLst/>
+            </a:prstGeom>
+            <a:noFill/>
+          </p:spPr>
+          <p:txBody>
+            <a:bodyPr wrap="square">
+              <a:spAutoFit/>
+            </a:bodyPr>
+            <a:lstStyle/>
+            <a:p>
+              <a:pPr algn="ctr">
+                <a:defRPr sz="1600" b="0">
+                  <a:solidFill>
+                    <a:srgbClr val="333333"/>
+                  </a:solidFill>
+                  <a:latin typeface="Calibri" panose="020F0502020204030204"/>
+                </a:defRPr>
+              </a:pPr>
+              <a:r>
+                <a:rPr sz="2000" b="1">
+                  <a:latin typeface="Times New Roman" panose="02020603050405020304" charset="0"/>
+                  <a:cs typeface="Times New Roman" panose="02020603050405020304" charset="0"/>
+                </a:rPr>
+                <a:t>Controller / Service / Validator</a:t>
+              </a:r>
+              <a:endParaRPr sz="2000" b="1">
+                <a:latin typeface="Times New Roman" panose="02020603050405020304" charset="0"/>
+                <a:cs typeface="Times New Roman" panose="02020603050405020304" charset="0"/>
+              </a:endParaRPr>
+            </a:p>
+          </p:txBody>
+        </p:sp>
+        <p:sp>
+          <p:nvSpPr>
+            <p:cNvPr id="17" name="TextBox 12"/>
+            <p:cNvSpPr txBox="1"/>
+            <p:nvPr/>
+          </p:nvSpPr>
+          <p:spPr>
+            <a:xfrm>
+              <a:off x="7488" y="5400"/>
+              <a:ext cx="5616" cy="628"/>
+            </a:xfrm>
+            <a:prstGeom prst="rect">
+              <a:avLst/>
+            </a:prstGeom>
+            <a:noFill/>
+          </p:spPr>
+          <p:txBody>
+            <a:bodyPr wrap="square">
+              <a:spAutoFit/>
+            </a:bodyPr>
+            <a:lstStyle/>
+            <a:p>
+              <a:pPr algn="ctr">
+                <a:defRPr sz="1600" b="0">
+                  <a:solidFill>
+                    <a:srgbClr val="333333"/>
+                  </a:solidFill>
+                  <a:latin typeface="Calibri" panose="020F0502020204030204"/>
+                </a:defRPr>
+              </a:pPr>
+              <a:r>
+                <a:rPr sz="2000" b="1">
+                  <a:latin typeface="Times New Roman" panose="02020603050405020304" charset="0"/>
+                  <a:cs typeface="Times New Roman" panose="02020603050405020304" charset="0"/>
+                </a:rPr>
+                <a:t>StateMachine / MyBatis-Plus</a:t>
+              </a:r>
+              <a:endParaRPr sz="2000" b="1">
+                <a:latin typeface="Times New Roman" panose="02020603050405020304" charset="0"/>
+                <a:cs typeface="Times New Roman" panose="02020603050405020304" charset="0"/>
+              </a:endParaRPr>
+            </a:p>
+          </p:txBody>
+        </p:sp>
+        <p:sp>
+          <p:nvSpPr>
+            <p:cNvPr id="18" name="Can 13"/>
+            <p:cNvSpPr/>
+            <p:nvPr/>
+          </p:nvSpPr>
+          <p:spPr>
+            <a:xfrm>
+              <a:off x="15465" y="4248"/>
+              <a:ext cx="2304" cy="2200"/>
+            </a:xfrm>
+            <a:prstGeom prst="can">
+              <a:avLst/>
+            </a:prstGeom>
+            <a:solidFill>
+              <a:srgbClr val="FFFFFF"/>
+            </a:solidFill>
+            <a:ln w="31750">
               <a:solidFill>
-                <a:srgbClr val="1F2329"/>
+                <a:srgbClr val="1B4F72"/>
               </a:solidFill>
-            </a:endParaRPr>
-          </a:p>
-          <a:p>
-            <a:pPr>
-              <a:lnSpc>
-                <a:spcPct val="150000"/>
-              </a:lnSpc>
-              <a:spcAft>
-                <a:spcPts val="1200"/>
-              </a:spcAft>
-            </a:pPr>
-            <a:endParaRPr lang="en-US" altLang="zh-CN" sz="1800" b="0">
-              <a:solidFill>
-                <a:srgbClr val="1F2329"/>
-              </a:solidFill>
-            </a:endParaRPr>
-          </a:p>
-          <a:p>
-            <a:pPr>
-              <a:spcAft>
-                <a:spcPts val="1200"/>
-              </a:spcAft>
-            </a:pPr>
-            <a:endParaRPr lang="en-US" altLang="zh-CN" sz="1800" b="0">
-              <a:solidFill>
-                <a:srgbClr val="1F2329"/>
-              </a:solidFill>
-            </a:endParaRPr>
-          </a:p>
-        </p:txBody>
-      </p:sp>
+            </a:ln>
+          </p:spPr>
+          <p:style>
+            <a:lnRef idx="1">
+              <a:schemeClr val="accent1"/>
+            </a:lnRef>
+            <a:fillRef idx="3">
+              <a:schemeClr val="accent1"/>
+            </a:fillRef>
+            <a:effectRef idx="2">
+              <a:schemeClr val="accent1"/>
+            </a:effectRef>
+            <a:fontRef idx="minor">
+              <a:schemeClr val="lt1"/>
+            </a:fontRef>
+          </p:style>
+          <p:txBody>
+            <a:bodyPr rtlCol="0" anchor="ctr"/>
+            <a:lstStyle/>
+            <a:p>
+              <a:pPr algn="ctr"/>
+              <a:endParaRPr sz="2000" b="1">
+                <a:latin typeface="Times New Roman" panose="02020603050405020304" charset="0"/>
+                <a:cs typeface="Times New Roman" panose="02020603050405020304" charset="0"/>
+              </a:endParaRPr>
+            </a:p>
+          </p:txBody>
+        </p:sp>
+        <p:sp>
+          <p:nvSpPr>
+            <p:cNvPr id="19" name="TextBox 14"/>
+            <p:cNvSpPr txBox="1"/>
+            <p:nvPr/>
+          </p:nvSpPr>
+          <p:spPr>
+            <a:xfrm>
+              <a:off x="15465" y="5089"/>
+              <a:ext cx="2304" cy="628"/>
+            </a:xfrm>
+            <a:prstGeom prst="rect">
+              <a:avLst/>
+            </a:prstGeom>
+            <a:noFill/>
+          </p:spPr>
+          <p:txBody>
+            <a:bodyPr wrap="square">
+              <a:spAutoFit/>
+            </a:bodyPr>
+            <a:lstStyle/>
+            <a:p>
+              <a:pPr algn="ctr">
+                <a:defRPr sz="1700" b="1">
+                  <a:solidFill>
+                    <a:srgbClr val="333333"/>
+                  </a:solidFill>
+                  <a:latin typeface="Calibri" panose="020F0502020204030204"/>
+                </a:defRPr>
+              </a:pPr>
+              <a:r>
+                <a:rPr sz="2000">
+                  <a:latin typeface="Times New Roman" panose="02020603050405020304" charset="0"/>
+                  <a:cs typeface="Times New Roman" panose="02020603050405020304" charset="0"/>
+                </a:rPr>
+                <a:t>MySQL</a:t>
+              </a:r>
+              <a:endParaRPr sz="2000">
+                <a:latin typeface="Times New Roman" panose="02020603050405020304" charset="0"/>
+                <a:cs typeface="Times New Roman" panose="02020603050405020304" charset="0"/>
+              </a:endParaRPr>
+            </a:p>
+          </p:txBody>
+        </p:sp>
+        <p:sp>
+          <p:nvSpPr>
+            <p:cNvPr id="20" name="Right Arrow 16"/>
+            <p:cNvSpPr/>
+            <p:nvPr/>
+          </p:nvSpPr>
+          <p:spPr>
+            <a:xfrm>
+              <a:off x="5807" y="5236"/>
+              <a:ext cx="1188" cy="192"/>
+            </a:xfrm>
+            <a:prstGeom prst="rightArrow">
+              <a:avLst/>
+            </a:prstGeom>
+            <a:solidFill>
+              <a:srgbClr val="666666"/>
+            </a:solidFill>
+            <a:ln>
+              <a:noFill/>
+            </a:ln>
+          </p:spPr>
+          <p:style>
+            <a:lnRef idx="1">
+              <a:schemeClr val="accent1"/>
+            </a:lnRef>
+            <a:fillRef idx="3">
+              <a:schemeClr val="accent1"/>
+            </a:fillRef>
+            <a:effectRef idx="2">
+              <a:schemeClr val="accent1"/>
+            </a:effectRef>
+            <a:fontRef idx="minor">
+              <a:schemeClr val="lt1"/>
+            </a:fontRef>
+          </p:style>
+          <p:txBody>
+            <a:bodyPr rtlCol="0" anchor="ctr"/>
+            <a:lstStyle/>
+            <a:p>
+              <a:pPr algn="ctr"/>
+              <a:endParaRPr sz="2000" b="1">
+                <a:latin typeface="Times New Roman" panose="02020603050405020304" charset="0"/>
+                <a:cs typeface="Times New Roman" panose="02020603050405020304" charset="0"/>
+              </a:endParaRPr>
+            </a:p>
+          </p:txBody>
+        </p:sp>
+        <p:sp>
+          <p:nvSpPr>
+            <p:cNvPr id="21" name="TextBox 20"/>
+            <p:cNvSpPr txBox="1"/>
+            <p:nvPr/>
+          </p:nvSpPr>
+          <p:spPr>
+            <a:xfrm>
+              <a:off x="5537" y="4724"/>
+              <a:ext cx="1728" cy="1151"/>
+            </a:xfrm>
+            <a:prstGeom prst="rect">
+              <a:avLst/>
+            </a:prstGeom>
+            <a:noFill/>
+          </p:spPr>
+          <p:txBody>
+            <a:bodyPr wrap="square">
+              <a:spAutoFit/>
+            </a:bodyPr>
+            <a:lstStyle/>
+            <a:p>
+              <a:pPr algn="ctr">
+                <a:lnSpc>
+                  <a:spcPct val="130000"/>
+                </a:lnSpc>
+                <a:defRPr sz="1400" b="0">
+                  <a:solidFill>
+                    <a:srgbClr val="333333"/>
+                  </a:solidFill>
+                  <a:latin typeface="Calibri" panose="020F0502020204030204"/>
+                </a:defRPr>
+              </a:pPr>
+              <a:r>
+                <a:rPr sz="1600" b="1">
+                  <a:latin typeface="Times New Roman" panose="02020603050405020304" charset="0"/>
+                  <a:cs typeface="Times New Roman" panose="02020603050405020304" charset="0"/>
+                </a:rPr>
+                <a:t>HTTP</a:t>
+              </a:r>
+              <a:endParaRPr sz="1600" b="1">
+                <a:latin typeface="Times New Roman" panose="02020603050405020304" charset="0"/>
+                <a:cs typeface="Times New Roman" panose="02020603050405020304" charset="0"/>
+              </a:endParaRPr>
+            </a:p>
+            <a:p>
+              <a:pPr algn="ctr">
+                <a:lnSpc>
+                  <a:spcPct val="130000"/>
+                </a:lnSpc>
+                <a:defRPr sz="1400" b="0">
+                  <a:solidFill>
+                    <a:srgbClr val="333333"/>
+                  </a:solidFill>
+                  <a:latin typeface="Calibri" panose="020F0502020204030204"/>
+                </a:defRPr>
+              </a:pPr>
+              <a:r>
+                <a:rPr sz="1600" b="1">
+                  <a:latin typeface="Times New Roman" panose="02020603050405020304" charset="0"/>
+                  <a:cs typeface="Times New Roman" panose="02020603050405020304" charset="0"/>
+                </a:rPr>
+                <a:t>API</a:t>
+              </a:r>
+              <a:endParaRPr sz="1600" b="1">
+                <a:latin typeface="Times New Roman" panose="02020603050405020304" charset="0"/>
+                <a:cs typeface="Times New Roman" panose="02020603050405020304" charset="0"/>
+              </a:endParaRPr>
+            </a:p>
+          </p:txBody>
+        </p:sp>
+        <p:sp>
+          <p:nvSpPr>
+            <p:cNvPr id="22" name="Right Arrow 16"/>
+            <p:cNvSpPr/>
+            <p:nvPr/>
+          </p:nvSpPr>
+          <p:spPr>
+            <a:xfrm>
+              <a:off x="13597" y="5208"/>
+              <a:ext cx="860" cy="189"/>
+            </a:xfrm>
+            <a:prstGeom prst="rightArrow">
+              <a:avLst/>
+            </a:prstGeom>
+            <a:solidFill>
+              <a:srgbClr val="666666"/>
+            </a:solidFill>
+            <a:ln>
+              <a:noFill/>
+            </a:ln>
+          </p:spPr>
+          <p:style>
+            <a:lnRef idx="1">
+              <a:schemeClr val="accent1"/>
+            </a:lnRef>
+            <a:fillRef idx="3">
+              <a:schemeClr val="accent1"/>
+            </a:fillRef>
+            <a:effectRef idx="2">
+              <a:schemeClr val="accent1"/>
+            </a:effectRef>
+            <a:fontRef idx="minor">
+              <a:schemeClr val="lt1"/>
+            </a:fontRef>
+          </p:style>
+          <p:txBody>
+            <a:bodyPr rtlCol="0" anchor="ctr"/>
+            <a:lstStyle/>
+            <a:p>
+              <a:pPr algn="ctr"/>
+              <a:endParaRPr sz="2000" b="1">
+                <a:latin typeface="Times New Roman" panose="02020603050405020304" charset="0"/>
+                <a:cs typeface="Times New Roman" panose="02020603050405020304" charset="0"/>
+              </a:endParaRPr>
+            </a:p>
+          </p:txBody>
+        </p:sp>
+      </p:grpSp>
     </p:spTree>
   </p:cSld>
   <p:clrMapOvr>
@@ -8001,13 +8521,17 @@
                 <a:solidFill>
                   <a:srgbClr val="1F2329"/>
                 </a:solidFill>
+                <a:latin typeface="Times New Roman" panose="02020603050405020304" charset="0"/>
+                <a:cs typeface="Times New Roman" panose="02020603050405020304" charset="0"/>
               </a:rPr>
-              <a:t>System Architecture &amp; Tech Stack</a:t>
+              <a:t>Core Feature Modules Overview</a:t>
             </a:r>
             <a:endParaRPr lang="en-US" altLang="zh-CN" sz="4400" b="1">
               <a:solidFill>
                 <a:srgbClr val="1F2329"/>
               </a:solidFill>
+              <a:latin typeface="Times New Roman" panose="02020603050405020304" charset="0"/>
+              <a:cs typeface="Times New Roman" panose="02020603050405020304" charset="0"/>
             </a:endParaRPr>
           </a:p>
         </p:txBody>
@@ -8020,8 +8544,8 @@
         </p:nvSpPr>
         <p:spPr>
           <a:xfrm>
-            <a:off x="822960" y="1371600"/>
-            <a:ext cx="10515600" cy="4461510"/>
+            <a:off x="822960" y="1558290"/>
+            <a:ext cx="10515600" cy="4477385"/>
           </a:xfrm>
           <a:prstGeom prst="rect">
             <a:avLst/>
@@ -8045,17 +8569,21 @@
               <a:buChar char="•"/>
             </a:pPr>
             <a:r>
-              <a:rPr lang="en-US" altLang="zh-CN" sz="2000">
+              <a:rPr lang="en-US" altLang="zh-CN" sz="2800">
                 <a:solidFill>
                   <a:srgbClr val="1F2329"/>
                 </a:solidFill>
+                <a:latin typeface="Times New Roman" panose="02020603050405020304" charset="0"/>
+                <a:cs typeface="Times New Roman" panose="02020603050405020304" charset="0"/>
               </a:rPr>
-              <a:t>Frontend: Vue 3 + Element Plus + vue-router + vue-i18n</a:t>
-            </a:r>
-            <a:endParaRPr lang="en-US" altLang="zh-CN" sz="2000">
+              <a:t>Payment creation</a:t>
+            </a:r>
+            <a:endParaRPr lang="en-US" altLang="zh-CN" sz="2800">
               <a:solidFill>
                 <a:srgbClr val="1F2329"/>
               </a:solidFill>
+              <a:latin typeface="Times New Roman" panose="02020603050405020304" charset="0"/>
+              <a:cs typeface="Times New Roman" panose="02020603050405020304" charset="0"/>
             </a:endParaRPr>
           </a:p>
           <a:p>
@@ -8070,17 +8598,21 @@
               <a:buChar char="•"/>
             </a:pPr>
             <a:r>
-              <a:rPr lang="en-US" altLang="zh-CN" sz="2000">
+              <a:rPr lang="en-US" altLang="zh-CN" sz="2800">
                 <a:solidFill>
                   <a:srgbClr val="1F2329"/>
                 </a:solidFill>
+                <a:latin typeface="Times New Roman" panose="02020603050405020304" charset="0"/>
+                <a:cs typeface="Times New Roman" panose="02020603050405020304" charset="0"/>
               </a:rPr>
-              <a:t>Backend: Spring Boot 3 + MyBatis-Plus + MySQL, with a layered architecture:</a:t>
-            </a:r>
-            <a:endParaRPr lang="en-US" altLang="zh-CN" sz="2000">
+              <a:t>Payment details view + failure error details display</a:t>
+            </a:r>
+            <a:endParaRPr lang="en-US" altLang="zh-CN" sz="2800">
               <a:solidFill>
                 <a:srgbClr val="1F2329"/>
               </a:solidFill>
+              <a:latin typeface="Times New Roman" panose="02020603050405020304" charset="0"/>
+              <a:cs typeface="Times New Roman" panose="02020603050405020304" charset="0"/>
             </a:endParaRPr>
           </a:p>
           <a:p>
@@ -8095,17 +8627,21 @@
               <a:buChar char="•"/>
             </a:pPr>
             <a:r>
-              <a:rPr lang="en-US" altLang="zh-CN" sz="2000">
+              <a:rPr lang="en-US" altLang="zh-CN" sz="2800">
                 <a:solidFill>
                   <a:srgbClr val="1F2329"/>
                 </a:solidFill>
+                <a:latin typeface="Times New Roman" panose="02020603050405020304" charset="0"/>
+                <a:cs typeface="Times New Roman" panose="02020603050405020304" charset="0"/>
               </a:rPr>
-              <a:t>Controller / Service / Validator / StateMachine</a:t>
-            </a:r>
-            <a:endParaRPr lang="en-US" altLang="zh-CN" sz="2000">
+              <a:t>Payment status history timeline</a:t>
+            </a:r>
+            <a:endParaRPr lang="en-US" altLang="zh-CN" sz="2800">
               <a:solidFill>
                 <a:srgbClr val="1F2329"/>
               </a:solidFill>
+              <a:latin typeface="Times New Roman" panose="02020603050405020304" charset="0"/>
+              <a:cs typeface="Times New Roman" panose="02020603050405020304" charset="0"/>
             </a:endParaRPr>
           </a:p>
           <a:p>
@@ -8120,17 +8656,21 @@
               <a:buChar char="•"/>
             </a:pPr>
             <a:r>
-              <a:rPr lang="en-US" altLang="zh-CN" sz="2000">
+              <a:rPr lang="en-US" altLang="zh-CN" sz="2800">
                 <a:solidFill>
                   <a:srgbClr val="1F2329"/>
                 </a:solidFill>
+                <a:latin typeface="Times New Roman" panose="02020603050405020304" charset="0"/>
+                <a:cs typeface="Times New Roman" panose="02020603050405020304" charset="0"/>
               </a:rPr>
-              <a:t>Unified Response Body: { success, data, errorCode, message }</a:t>
-            </a:r>
-            <a:endParaRPr lang="en-US" altLang="zh-CN" sz="2000">
+              <a:t>Payment list retrieval</a:t>
+            </a:r>
+            <a:endParaRPr lang="en-US" altLang="zh-CN" sz="2800">
               <a:solidFill>
                 <a:srgbClr val="1F2329"/>
               </a:solidFill>
+              <a:latin typeface="Times New Roman" panose="02020603050405020304" charset="0"/>
+              <a:cs typeface="Times New Roman" panose="02020603050405020304" charset="0"/>
             </a:endParaRPr>
           </a:p>
           <a:p>
@@ -8145,17 +8685,21 @@
               <a:buChar char="•"/>
             </a:pPr>
             <a:r>
-              <a:rPr lang="en-US" altLang="zh-CN" sz="2000">
+              <a:rPr lang="en-US" altLang="zh-CN" sz="2800">
                 <a:solidFill>
                   <a:srgbClr val="1F2329"/>
                 </a:solidFill>
+                <a:latin typeface="Times New Roman" panose="02020603050405020304" charset="0"/>
+                <a:cs typeface="Times New Roman" panose="02020603050405020304" charset="0"/>
               </a:rPr>
-              <a:t>Global Exception Handling: @RestControllerAdvice to uniformly transform error responses</a:t>
-            </a:r>
-            <a:endParaRPr lang="en-US" altLang="zh-CN" sz="2000">
+              <a:t>Recycle bin</a:t>
+            </a:r>
+            <a:endParaRPr lang="en-US" altLang="zh-CN" sz="2800">
               <a:solidFill>
                 <a:srgbClr val="1F2329"/>
               </a:solidFill>
+              <a:latin typeface="Times New Roman" panose="02020603050405020304" charset="0"/>
+              <a:cs typeface="Times New Roman" panose="02020603050405020304" charset="0"/>
             </a:endParaRPr>
           </a:p>
           <a:p>
@@ -8170,42 +8714,21 @@
               <a:buChar char="•"/>
             </a:pPr>
             <a:r>
-              <a:rPr lang="en-US" altLang="zh-CN" sz="2000">
+              <a:rPr lang="en-US" altLang="zh-CN" sz="2800">
                 <a:solidFill>
                   <a:srgbClr val="1F2329"/>
                 </a:solidFill>
+                <a:latin typeface="Times New Roman" panose="02020603050405020304" charset="0"/>
+                <a:cs typeface="Times New Roman" panose="02020603050405020304" charset="0"/>
               </a:rPr>
-              <a:t>API Documentation: Swagger / OpenAPI</a:t>
-            </a:r>
-            <a:endParaRPr lang="en-US" altLang="zh-CN" sz="2000">
+              <a:t>Manual status transition interface</a:t>
+            </a:r>
+            <a:endParaRPr lang="en-US" altLang="zh-CN" sz="2800">
               <a:solidFill>
                 <a:srgbClr val="1F2329"/>
               </a:solidFill>
-            </a:endParaRPr>
-          </a:p>
-          <a:p>
-            <a:pPr marL="342900" indent="-342900">
-              <a:lnSpc>
-                <a:spcPct val="140000"/>
-              </a:lnSpc>
-              <a:spcAft>
-                <a:spcPts val="1200"/>
-              </a:spcAft>
-              <a:buFont typeface="Arial" panose="020B0604020202020204" pitchFamily="34" charset="0"/>
-              <a:buChar char="•"/>
-            </a:pPr>
-            <a:r>
-              <a:rPr lang="en-US" altLang="zh-CN" sz="2000">
-                <a:solidFill>
-                  <a:srgbClr val="1F2329"/>
-                </a:solidFill>
-              </a:rPr>
-              <a:t>Scheduled Task: PaymentAutoTransitionScheduler to simulate asynchronous processing delays experienced in real-world network calls</a:t>
-            </a:r>
-            <a:endParaRPr lang="en-US" altLang="zh-CN" sz="2000">
-              <a:solidFill>
-                <a:srgbClr val="1F2329"/>
-              </a:solidFill>
+              <a:latin typeface="Times New Roman" panose="02020603050405020304" charset="0"/>
+              <a:cs typeface="Times New Roman" panose="02020603050405020304" charset="0"/>
             </a:endParaRPr>
           </a:p>
         </p:txBody>
@@ -8219,244 +8742,6 @@
 </file>
 
 <file path=ppt/slides/slide6.xml><?xml version="1.0" encoding="utf-8"?>
-<p:sld xmlns:a="http://schemas.openxmlformats.org/drawingml/2006/main" xmlns:r="http://schemas.openxmlformats.org/officeDocument/2006/relationships" xmlns:p="http://schemas.openxmlformats.org/presentationml/2006/main">
-  <p:cSld>
-    <p:bg>
-      <p:bgPr>
-        <a:solidFill>
-          <a:srgbClr val="FFFFFF"/>
-        </a:solidFill>
-        <a:effectLst/>
-      </p:bgPr>
-    </p:bg>
-    <p:spTree>
-      <p:nvGrpSpPr>
-        <p:cNvPr id="1" name=""/>
-        <p:cNvGrpSpPr/>
-        <p:nvPr/>
-      </p:nvGrpSpPr>
-      <p:grpSpPr/>
-      <p:sp>
-        <p:nvSpPr>
-          <p:cNvPr id="2" name="TextBox 1"/>
-          <p:cNvSpPr txBox="1"/>
-          <p:nvPr/>
-        </p:nvSpPr>
-        <p:spPr>
-          <a:xfrm>
-            <a:off x="640080" y="457200"/>
-            <a:ext cx="10972800" cy="768350"/>
-          </a:xfrm>
-          <a:prstGeom prst="rect">
-            <a:avLst/>
-          </a:prstGeom>
-          <a:noFill/>
-        </p:spPr>
-        <p:txBody>
-          <a:bodyPr wrap="square">
-            <a:spAutoFit/>
-          </a:bodyPr>
-          <a:lstStyle/>
-          <a:p>
-            <a:pPr algn="l"/>
-            <a:r>
-              <a:rPr lang="en-US" altLang="zh-CN" sz="4400" b="1">
-                <a:solidFill>
-                  <a:srgbClr val="1F2329"/>
-                </a:solidFill>
-              </a:rPr>
-              <a:t>Core Feature Modules Overview</a:t>
-            </a:r>
-            <a:endParaRPr lang="en-US" altLang="zh-CN" sz="3200" b="1">
-              <a:solidFill>
-                <a:srgbClr val="1F2329"/>
-              </a:solidFill>
-            </a:endParaRPr>
-          </a:p>
-        </p:txBody>
-      </p:sp>
-      <p:sp>
-        <p:nvSpPr>
-          <p:cNvPr id="3" name="TextBox 2"/>
-          <p:cNvSpPr txBox="1"/>
-          <p:nvPr/>
-        </p:nvSpPr>
-        <p:spPr>
-          <a:xfrm>
-            <a:off x="822960" y="1558290"/>
-            <a:ext cx="10515600" cy="3446145"/>
-          </a:xfrm>
-          <a:prstGeom prst="rect">
-            <a:avLst/>
-          </a:prstGeom>
-          <a:noFill/>
-        </p:spPr>
-        <p:txBody>
-          <a:bodyPr wrap="square">
-            <a:spAutoFit/>
-          </a:bodyPr>
-          <a:lstStyle/>
-          <a:p>
-            <a:pPr marL="342900" indent="-342900">
-              <a:lnSpc>
-                <a:spcPct val="140000"/>
-              </a:lnSpc>
-              <a:spcAft>
-                <a:spcPts val="1200"/>
-              </a:spcAft>
-              <a:buFont typeface="Arial" panose="020B0604020202020204" pitchFamily="34" charset="0"/>
-              <a:buChar char="•"/>
-            </a:pPr>
-            <a:r>
-              <a:rPr lang="en-US" altLang="zh-CN" sz="2000">
-                <a:solidFill>
-                  <a:srgbClr val="1F2329"/>
-                </a:solidFill>
-              </a:rPr>
-              <a:t>Payment creation (idempotency key to prevent duplicate submissions)</a:t>
-            </a:r>
-            <a:endParaRPr lang="en-US" altLang="zh-CN" sz="2000">
-              <a:solidFill>
-                <a:srgbClr val="1F2329"/>
-              </a:solidFill>
-            </a:endParaRPr>
-          </a:p>
-          <a:p>
-            <a:pPr marL="342900" indent="-342900">
-              <a:lnSpc>
-                <a:spcPct val="140000"/>
-              </a:lnSpc>
-              <a:spcAft>
-                <a:spcPts val="1200"/>
-              </a:spcAft>
-              <a:buFont typeface="Arial" panose="020B0604020202020204" pitchFamily="34" charset="0"/>
-              <a:buChar char="•"/>
-            </a:pPr>
-            <a:r>
-              <a:rPr lang="en-US" altLang="zh-CN" sz="2000">
-                <a:solidFill>
-                  <a:srgbClr val="1F2329"/>
-                </a:solidFill>
-              </a:rPr>
-              <a:t>Payment details view + failure error details display</a:t>
-            </a:r>
-            <a:endParaRPr lang="en-US" altLang="zh-CN" sz="2000">
-              <a:solidFill>
-                <a:srgbClr val="1F2329"/>
-              </a:solidFill>
-            </a:endParaRPr>
-          </a:p>
-          <a:p>
-            <a:pPr marL="342900" indent="-342900">
-              <a:lnSpc>
-                <a:spcPct val="140000"/>
-              </a:lnSpc>
-              <a:spcAft>
-                <a:spcPts val="1200"/>
-              </a:spcAft>
-              <a:buFont typeface="Arial" panose="020B0604020202020204" pitchFamily="34" charset="0"/>
-              <a:buChar char="•"/>
-            </a:pPr>
-            <a:r>
-              <a:rPr lang="en-US" altLang="zh-CN" sz="2000">
-                <a:solidFill>
-                  <a:srgbClr val="1F2329"/>
-                </a:solidFill>
-              </a:rPr>
-              <a:t>Payment status history timeline (Audit Trail)</a:t>
-            </a:r>
-            <a:endParaRPr lang="en-US" altLang="zh-CN" sz="2000">
-              <a:solidFill>
-                <a:srgbClr val="1F2329"/>
-              </a:solidFill>
-            </a:endParaRPr>
-          </a:p>
-          <a:p>
-            <a:pPr marL="342900" indent="-342900">
-              <a:lnSpc>
-                <a:spcPct val="140000"/>
-              </a:lnSpc>
-              <a:spcAft>
-                <a:spcPts val="1200"/>
-              </a:spcAft>
-              <a:buFont typeface="Arial" panose="020B0604020202020204" pitchFamily="34" charset="0"/>
-              <a:buChar char="•"/>
-            </a:pPr>
-            <a:r>
-              <a:rPr lang="en-US" altLang="zh-CN" sz="2000">
-                <a:solidFill>
-                  <a:srgbClr val="1F2329"/>
-                </a:solidFill>
-              </a:rPr>
-              <a:t>Payment list retrieval, filtering by status, pagination</a:t>
-            </a:r>
-            <a:endParaRPr lang="en-US" altLang="zh-CN" sz="2000">
-              <a:solidFill>
-                <a:srgbClr val="1F2329"/>
-              </a:solidFill>
-            </a:endParaRPr>
-          </a:p>
-          <a:p>
-            <a:pPr marL="342900" indent="-342900">
-              <a:lnSpc>
-                <a:spcPct val="140000"/>
-              </a:lnSpc>
-              <a:spcAft>
-                <a:spcPts val="1200"/>
-              </a:spcAft>
-              <a:buFont typeface="Arial" panose="020B0604020202020204" pitchFamily="34" charset="0"/>
-              <a:buChar char="•"/>
-            </a:pPr>
-            <a:r>
-              <a:rPr lang="en-US" altLang="zh-CN" sz="2000">
-                <a:solidFill>
-                  <a:srgbClr val="1F2329"/>
-                </a:solidFill>
-              </a:rPr>
-              <a:t>Recycle bin (soft delete / restore / permanent delete, 30-day retention)</a:t>
-            </a:r>
-            <a:endParaRPr lang="en-US" altLang="zh-CN" sz="2000">
-              <a:solidFill>
-                <a:srgbClr val="1F2329"/>
-              </a:solidFill>
-            </a:endParaRPr>
-          </a:p>
-          <a:p>
-            <a:pPr marL="342900" indent="-342900">
-              <a:lnSpc>
-                <a:spcPct val="140000"/>
-              </a:lnSpc>
-              <a:spcAft>
-                <a:spcPts val="1200"/>
-              </a:spcAft>
-              <a:buFont typeface="Arial" panose="020B0604020202020204" pitchFamily="34" charset="0"/>
-              <a:buChar char="•"/>
-            </a:pPr>
-            <a:r>
-              <a:rPr lang="en-US" altLang="zh-CN" sz="2000">
-                <a:solidFill>
-                  <a:srgbClr val="1F2329"/>
-                </a:solidFill>
-              </a:rPr>
-              <a:t>Manual status transition interface</a:t>
-            </a:r>
-            <a:endParaRPr lang="en-US" altLang="zh-CN" sz="2000">
-              <a:solidFill>
-                <a:srgbClr val="1F2329"/>
-              </a:solidFill>
-            </a:endParaRPr>
-          </a:p>
-        </p:txBody>
-      </p:sp>
-    </p:spTree>
-  </p:cSld>
-  <p:clrMapOvr>
-    <a:masterClrMapping/>
-  </p:clrMapOvr>
-</p:sld>
-</file>
-
-<file path=ppt/slides/slide7.xml><?xml version="1.0" encoding="utf-8"?>
 <p:sld xmlns:a="http://schemas.openxmlformats.org/drawingml/2006/main" xmlns:r="http://schemas.openxmlformats.org/officeDocument/2006/relationships" xmlns:p="http://schemas.openxmlformats.org/presentationml/2006/main">
   <p:cSld>
     <p:spTree>
@@ -8476,14 +8761,15 @@
         </p:nvPicPr>
         <p:blipFill>
           <a:blip r:embed="rId1"/>
+          <a:srcRect b="37530"/>
           <a:stretch>
             <a:fillRect/>
           </a:stretch>
         </p:blipFill>
         <p:spPr>
           <a:xfrm>
-            <a:off x="2965188" y="200528"/>
-            <a:ext cx="6515312" cy="6456944"/>
+            <a:off x="1039178" y="298450"/>
+            <a:ext cx="10113010" cy="6261100"/>
           </a:xfrm>
           <a:prstGeom prst="rect">
             <a:avLst/>
@@ -8498,7 +8784,7 @@
 </p:sld>
 </file>
 
-<file path=ppt/slides/slide8.xml><?xml version="1.0" encoding="utf-8"?>
+<file path=ppt/slides/slide7.xml><?xml version="1.0" encoding="utf-8"?>
 <p:sld xmlns:a="http://schemas.openxmlformats.org/drawingml/2006/main" xmlns:r="http://schemas.openxmlformats.org/officeDocument/2006/relationships" xmlns:p="http://schemas.openxmlformats.org/presentationml/2006/main">
   <p:cSld>
     <p:bg>
@@ -8551,6 +8837,807 @@
               <a:solidFill>
                 <a:srgbClr val="FFFFFF"/>
               </a:solidFill>
+            </a:endParaRPr>
+          </a:p>
+        </p:txBody>
+      </p:sp>
+    </p:spTree>
+  </p:cSld>
+  <p:clrMapOvr>
+    <a:masterClrMapping/>
+  </p:clrMapOvr>
+</p:sld>
+</file>
+
+<file path=ppt/slides/slide8.xml><?xml version="1.0" encoding="utf-8"?>
+<p:sld xmlns:a="http://schemas.openxmlformats.org/drawingml/2006/main" xmlns:r="http://schemas.openxmlformats.org/officeDocument/2006/relationships" xmlns:p="http://schemas.openxmlformats.org/presentationml/2006/main">
+  <p:cSld>
+    <p:spTree>
+      <p:nvGrpSpPr>
+        <p:cNvPr id="1" name=""/>
+        <p:cNvGrpSpPr/>
+        <p:nvPr/>
+      </p:nvGrpSpPr>
+      <p:grpSpPr/>
+      <p:grpSp>
+        <p:nvGrpSpPr>
+          <p:cNvPr id="24" name="组合 23"/>
+          <p:cNvGrpSpPr/>
+          <p:nvPr/>
+        </p:nvGrpSpPr>
+        <p:grpSpPr>
+          <a:xfrm>
+            <a:off x="454978" y="1341120"/>
+            <a:ext cx="11430000" cy="5303520"/>
+            <a:chOff x="1224" y="2592"/>
+            <a:chExt cx="18000" cy="8352"/>
+          </a:xfrm>
+        </p:grpSpPr>
+        <p:sp>
+          <p:nvSpPr>
+            <p:cNvPr id="4" name="Rounded Rectangle 2"/>
+            <p:cNvSpPr/>
+            <p:nvPr/>
+          </p:nvSpPr>
+          <p:spPr>
+            <a:xfrm>
+              <a:off x="1224" y="2592"/>
+              <a:ext cx="8352" cy="3744"/>
+            </a:xfrm>
+            <a:prstGeom prst="roundRect">
+              <a:avLst/>
+            </a:prstGeom>
+            <a:solidFill>
+              <a:srgbClr val="FFFFFF"/>
+            </a:solidFill>
+            <a:ln w="12700">
+              <a:solidFill>
+                <a:srgbClr val="E8E8E8"/>
+              </a:solidFill>
+            </a:ln>
+          </p:spPr>
+          <p:style>
+            <a:lnRef idx="1">
+              <a:schemeClr val="accent1"/>
+            </a:lnRef>
+            <a:fillRef idx="3">
+              <a:schemeClr val="accent1"/>
+            </a:fillRef>
+            <a:effectRef idx="2">
+              <a:schemeClr val="accent1"/>
+            </a:effectRef>
+            <a:fontRef idx="minor">
+              <a:schemeClr val="lt1"/>
+            </a:fontRef>
+          </p:style>
+          <p:txBody>
+            <a:bodyPr rtlCol="0" anchor="ctr"/>
+            <a:lstStyle/>
+            <a:p>
+              <a:pPr algn="ctr"/>
+              <a:endParaRPr>
+                <a:latin typeface="Times New Roman" panose="02020603050405020304" charset="0"/>
+                <a:cs typeface="Times New Roman" panose="02020603050405020304" charset="0"/>
+              </a:endParaRPr>
+            </a:p>
+          </p:txBody>
+        </p:sp>
+        <p:sp>
+          <p:nvSpPr>
+            <p:cNvPr id="5" name="Rectangle 3"/>
+            <p:cNvSpPr/>
+            <p:nvPr/>
+          </p:nvSpPr>
+          <p:spPr>
+            <a:xfrm>
+              <a:off x="1224" y="2592"/>
+              <a:ext cx="8352" cy="115"/>
+            </a:xfrm>
+            <a:prstGeom prst="rect">
+              <a:avLst/>
+            </a:prstGeom>
+            <a:solidFill>
+              <a:srgbClr val="4A90D9"/>
+            </a:solidFill>
+            <a:ln>
+              <a:noFill/>
+            </a:ln>
+          </p:spPr>
+          <p:style>
+            <a:lnRef idx="1">
+              <a:schemeClr val="accent1"/>
+            </a:lnRef>
+            <a:fillRef idx="3">
+              <a:schemeClr val="accent1"/>
+            </a:fillRef>
+            <a:effectRef idx="2">
+              <a:schemeClr val="accent1"/>
+            </a:effectRef>
+            <a:fontRef idx="minor">
+              <a:schemeClr val="lt1"/>
+            </a:fontRef>
+          </p:style>
+          <p:txBody>
+            <a:bodyPr rtlCol="0" anchor="ctr"/>
+            <a:lstStyle/>
+            <a:p>
+              <a:pPr algn="ctr"/>
+              <a:endParaRPr>
+                <a:latin typeface="Times New Roman" panose="02020603050405020304" charset="0"/>
+                <a:cs typeface="Times New Roman" panose="02020603050405020304" charset="0"/>
+              </a:endParaRPr>
+            </a:p>
+          </p:txBody>
+        </p:sp>
+        <p:sp>
+          <p:nvSpPr>
+            <p:cNvPr id="9" name="Rounded Rectangle 7"/>
+            <p:cNvSpPr/>
+            <p:nvPr/>
+          </p:nvSpPr>
+          <p:spPr>
+            <a:xfrm>
+              <a:off x="10872" y="2592"/>
+              <a:ext cx="8352" cy="3744"/>
+            </a:xfrm>
+            <a:prstGeom prst="roundRect">
+              <a:avLst/>
+            </a:prstGeom>
+            <a:solidFill>
+              <a:srgbClr val="FFFFFF"/>
+            </a:solidFill>
+            <a:ln w="12700">
+              <a:solidFill>
+                <a:srgbClr val="E8E8E8"/>
+              </a:solidFill>
+            </a:ln>
+          </p:spPr>
+          <p:style>
+            <a:lnRef idx="1">
+              <a:schemeClr val="accent1"/>
+            </a:lnRef>
+            <a:fillRef idx="3">
+              <a:schemeClr val="accent1"/>
+            </a:fillRef>
+            <a:effectRef idx="2">
+              <a:schemeClr val="accent1"/>
+            </a:effectRef>
+            <a:fontRef idx="minor">
+              <a:schemeClr val="lt1"/>
+            </a:fontRef>
+          </p:style>
+          <p:txBody>
+            <a:bodyPr rtlCol="0" anchor="ctr"/>
+            <a:lstStyle/>
+            <a:p>
+              <a:pPr algn="ctr"/>
+              <a:endParaRPr>
+                <a:latin typeface="Times New Roman" panose="02020603050405020304" charset="0"/>
+                <a:cs typeface="Times New Roman" panose="02020603050405020304" charset="0"/>
+              </a:endParaRPr>
+            </a:p>
+          </p:txBody>
+        </p:sp>
+        <p:sp>
+          <p:nvSpPr>
+            <p:cNvPr id="10" name="Rectangle 8"/>
+            <p:cNvSpPr/>
+            <p:nvPr/>
+          </p:nvSpPr>
+          <p:spPr>
+            <a:xfrm>
+              <a:off x="10872" y="2592"/>
+              <a:ext cx="8352" cy="115"/>
+            </a:xfrm>
+            <a:prstGeom prst="rect">
+              <a:avLst/>
+            </a:prstGeom>
+            <a:solidFill>
+              <a:srgbClr val="7B68EE"/>
+            </a:solidFill>
+            <a:ln>
+              <a:noFill/>
+            </a:ln>
+          </p:spPr>
+          <p:style>
+            <a:lnRef idx="1">
+              <a:schemeClr val="accent1"/>
+            </a:lnRef>
+            <a:fillRef idx="3">
+              <a:schemeClr val="accent1"/>
+            </a:fillRef>
+            <a:effectRef idx="2">
+              <a:schemeClr val="accent1"/>
+            </a:effectRef>
+            <a:fontRef idx="minor">
+              <a:schemeClr val="lt1"/>
+            </a:fontRef>
+          </p:style>
+          <p:txBody>
+            <a:bodyPr rtlCol="0" anchor="ctr"/>
+            <a:lstStyle/>
+            <a:p>
+              <a:pPr algn="ctr"/>
+              <a:endParaRPr>
+                <a:latin typeface="Times New Roman" panose="02020603050405020304" charset="0"/>
+                <a:cs typeface="Times New Roman" panose="02020603050405020304" charset="0"/>
+              </a:endParaRPr>
+            </a:p>
+          </p:txBody>
+        </p:sp>
+        <p:sp>
+          <p:nvSpPr>
+            <p:cNvPr id="11" name="TextBox 9"/>
+            <p:cNvSpPr txBox="1"/>
+            <p:nvPr/>
+          </p:nvSpPr>
+          <p:spPr>
+            <a:xfrm>
+              <a:off x="11274" y="3096"/>
+              <a:ext cx="1068" cy="824"/>
+            </a:xfrm>
+            <a:prstGeom prst="rect">
+              <a:avLst/>
+            </a:prstGeom>
+            <a:noFill/>
+          </p:spPr>
+          <p:txBody>
+            <a:bodyPr wrap="none">
+              <a:spAutoFit/>
+            </a:bodyPr>
+            <a:lstStyle/>
+            <a:p>
+              <a:pPr algn="ctr">
+                <a:defRPr sz="2800"/>
+              </a:pPr>
+              <a:r>
+                <a:rPr lang="zh-CN" altLang="zh-CN" sz="2800" dirty="0">
+                  <a:latin typeface="Times New Roman" panose="02020603050405020304" charset="0"/>
+                  <a:cs typeface="Times New Roman" panose="02020603050405020304" charset="0"/>
+                </a:rPr>
+                <a:t>🗄️</a:t>
+              </a:r>
+              <a:endParaRPr lang="zh-CN" altLang="zh-CN" sz="2800" dirty="0">
+                <a:latin typeface="Times New Roman" panose="02020603050405020304" charset="0"/>
+                <a:cs typeface="Times New Roman" panose="02020603050405020304" charset="0"/>
+              </a:endParaRPr>
+            </a:p>
+          </p:txBody>
+        </p:sp>
+        <p:sp>
+          <p:nvSpPr>
+            <p:cNvPr id="14" name="Rounded Rectangle 12"/>
+            <p:cNvSpPr/>
+            <p:nvPr/>
+          </p:nvSpPr>
+          <p:spPr>
+            <a:xfrm>
+              <a:off x="1224" y="7200"/>
+              <a:ext cx="8352" cy="3744"/>
+            </a:xfrm>
+            <a:prstGeom prst="roundRect">
+              <a:avLst/>
+            </a:prstGeom>
+            <a:solidFill>
+              <a:srgbClr val="FFFFFF"/>
+            </a:solidFill>
+            <a:ln w="12700">
+              <a:solidFill>
+                <a:srgbClr val="E8E8E8"/>
+              </a:solidFill>
+            </a:ln>
+          </p:spPr>
+          <p:style>
+            <a:lnRef idx="1">
+              <a:schemeClr val="accent1"/>
+            </a:lnRef>
+            <a:fillRef idx="3">
+              <a:schemeClr val="accent1"/>
+            </a:fillRef>
+            <a:effectRef idx="2">
+              <a:schemeClr val="accent1"/>
+            </a:effectRef>
+            <a:fontRef idx="minor">
+              <a:schemeClr val="lt1"/>
+            </a:fontRef>
+          </p:style>
+          <p:txBody>
+            <a:bodyPr rtlCol="0" anchor="ctr"/>
+            <a:lstStyle/>
+            <a:p>
+              <a:pPr algn="ctr"/>
+              <a:endParaRPr>
+                <a:latin typeface="Times New Roman" panose="02020603050405020304" charset="0"/>
+                <a:cs typeface="Times New Roman" panose="02020603050405020304" charset="0"/>
+              </a:endParaRPr>
+            </a:p>
+          </p:txBody>
+        </p:sp>
+        <p:sp>
+          <p:nvSpPr>
+            <p:cNvPr id="15" name="Rectangle 13"/>
+            <p:cNvSpPr/>
+            <p:nvPr/>
+          </p:nvSpPr>
+          <p:spPr>
+            <a:xfrm>
+              <a:off x="1224" y="7200"/>
+              <a:ext cx="8352" cy="115"/>
+            </a:xfrm>
+            <a:prstGeom prst="rect">
+              <a:avLst/>
+            </a:prstGeom>
+            <a:solidFill>
+              <a:srgbClr val="F5A623"/>
+            </a:solidFill>
+            <a:ln>
+              <a:noFill/>
+            </a:ln>
+          </p:spPr>
+          <p:style>
+            <a:lnRef idx="1">
+              <a:schemeClr val="accent1"/>
+            </a:lnRef>
+            <a:fillRef idx="3">
+              <a:schemeClr val="accent1"/>
+            </a:fillRef>
+            <a:effectRef idx="2">
+              <a:schemeClr val="accent1"/>
+            </a:effectRef>
+            <a:fontRef idx="minor">
+              <a:schemeClr val="lt1"/>
+            </a:fontRef>
+          </p:style>
+          <p:txBody>
+            <a:bodyPr rtlCol="0" anchor="ctr"/>
+            <a:lstStyle/>
+            <a:p>
+              <a:pPr algn="ctr"/>
+              <a:endParaRPr>
+                <a:latin typeface="Times New Roman" panose="02020603050405020304" charset="0"/>
+                <a:cs typeface="Times New Roman" panose="02020603050405020304" charset="0"/>
+              </a:endParaRPr>
+            </a:p>
+          </p:txBody>
+        </p:sp>
+        <p:sp>
+          <p:nvSpPr>
+            <p:cNvPr id="16" name="TextBox 14"/>
+            <p:cNvSpPr txBox="1"/>
+            <p:nvPr/>
+          </p:nvSpPr>
+          <p:spPr>
+            <a:xfrm>
+              <a:off x="1626" y="7704"/>
+              <a:ext cx="1068" cy="824"/>
+            </a:xfrm>
+            <a:prstGeom prst="rect">
+              <a:avLst/>
+            </a:prstGeom>
+            <a:noFill/>
+          </p:spPr>
+          <p:txBody>
+            <a:bodyPr wrap="none">
+              <a:spAutoFit/>
+            </a:bodyPr>
+            <a:lstStyle/>
+            <a:p>
+              <a:pPr algn="ctr">
+                <a:defRPr sz="2800"/>
+              </a:pPr>
+              <a:r>
+                <a:rPr lang="zh-CN" altLang="zh-CN" sz="2800" dirty="0">
+                  <a:latin typeface="Times New Roman" panose="02020603050405020304" charset="0"/>
+                  <a:cs typeface="Times New Roman" panose="02020603050405020304" charset="0"/>
+                </a:rPr>
+                <a:t>🔌</a:t>
+              </a:r>
+              <a:endParaRPr lang="zh-CN" altLang="zh-CN" sz="2800" dirty="0">
+                <a:latin typeface="Times New Roman" panose="02020603050405020304" charset="0"/>
+                <a:cs typeface="Times New Roman" panose="02020603050405020304" charset="0"/>
+              </a:endParaRPr>
+            </a:p>
+          </p:txBody>
+        </p:sp>
+        <p:sp>
+          <p:nvSpPr>
+            <p:cNvPr id="19" name="Rounded Rectangle 17"/>
+            <p:cNvSpPr/>
+            <p:nvPr/>
+          </p:nvSpPr>
+          <p:spPr>
+            <a:xfrm>
+              <a:off x="10872" y="7200"/>
+              <a:ext cx="8352" cy="3744"/>
+            </a:xfrm>
+            <a:prstGeom prst="roundRect">
+              <a:avLst/>
+            </a:prstGeom>
+            <a:solidFill>
+              <a:srgbClr val="FFFFFF"/>
+            </a:solidFill>
+            <a:ln w="12700">
+              <a:solidFill>
+                <a:srgbClr val="E8E8E8"/>
+              </a:solidFill>
+            </a:ln>
+          </p:spPr>
+          <p:style>
+            <a:lnRef idx="1">
+              <a:schemeClr val="accent1"/>
+            </a:lnRef>
+            <a:fillRef idx="3">
+              <a:schemeClr val="accent1"/>
+            </a:fillRef>
+            <a:effectRef idx="2">
+              <a:schemeClr val="accent1"/>
+            </a:effectRef>
+            <a:fontRef idx="minor">
+              <a:schemeClr val="lt1"/>
+            </a:fontRef>
+          </p:style>
+          <p:txBody>
+            <a:bodyPr rtlCol="0" anchor="ctr"/>
+            <a:lstStyle/>
+            <a:p>
+              <a:pPr algn="ctr"/>
+              <a:endParaRPr>
+                <a:latin typeface="Times New Roman" panose="02020603050405020304" charset="0"/>
+                <a:cs typeface="Times New Roman" panose="02020603050405020304" charset="0"/>
+              </a:endParaRPr>
+            </a:p>
+          </p:txBody>
+        </p:sp>
+        <p:sp>
+          <p:nvSpPr>
+            <p:cNvPr id="20" name="Rectangle 18"/>
+            <p:cNvSpPr/>
+            <p:nvPr/>
+          </p:nvSpPr>
+          <p:spPr>
+            <a:xfrm>
+              <a:off x="10872" y="7200"/>
+              <a:ext cx="8352" cy="115"/>
+            </a:xfrm>
+            <a:prstGeom prst="rect">
+              <a:avLst/>
+            </a:prstGeom>
+            <a:solidFill>
+              <a:srgbClr val="50C878"/>
+            </a:solidFill>
+            <a:ln>
+              <a:noFill/>
+            </a:ln>
+          </p:spPr>
+          <p:style>
+            <a:lnRef idx="1">
+              <a:schemeClr val="accent1"/>
+            </a:lnRef>
+            <a:fillRef idx="3">
+              <a:schemeClr val="accent1"/>
+            </a:fillRef>
+            <a:effectRef idx="2">
+              <a:schemeClr val="accent1"/>
+            </a:effectRef>
+            <a:fontRef idx="minor">
+              <a:schemeClr val="lt1"/>
+            </a:fontRef>
+          </p:style>
+          <p:txBody>
+            <a:bodyPr rtlCol="0" anchor="ctr"/>
+            <a:lstStyle/>
+            <a:p>
+              <a:pPr algn="ctr"/>
+              <a:endParaRPr>
+                <a:latin typeface="Times New Roman" panose="02020603050405020304" charset="0"/>
+                <a:cs typeface="Times New Roman" panose="02020603050405020304" charset="0"/>
+              </a:endParaRPr>
+            </a:p>
+          </p:txBody>
+        </p:sp>
+        <p:sp>
+          <p:nvSpPr>
+            <p:cNvPr id="21" name="TextBox 19"/>
+            <p:cNvSpPr txBox="1"/>
+            <p:nvPr/>
+          </p:nvSpPr>
+          <p:spPr>
+            <a:xfrm>
+              <a:off x="11274" y="7704"/>
+              <a:ext cx="1068" cy="824"/>
+            </a:xfrm>
+            <a:prstGeom prst="rect">
+              <a:avLst/>
+            </a:prstGeom>
+            <a:noFill/>
+          </p:spPr>
+          <p:txBody>
+            <a:bodyPr wrap="none">
+              <a:spAutoFit/>
+            </a:bodyPr>
+            <a:lstStyle/>
+            <a:p>
+              <a:pPr algn="ctr">
+                <a:defRPr sz="2800"/>
+              </a:pPr>
+              <a:r>
+                <a:rPr lang="zh-CN" altLang="zh-CN" sz="2800" dirty="0">
+                  <a:latin typeface="Times New Roman" panose="02020603050405020304" charset="0"/>
+                  <a:cs typeface="Times New Roman" panose="02020603050405020304" charset="0"/>
+                </a:rPr>
+                <a:t>⚙️</a:t>
+              </a:r>
+              <a:endParaRPr lang="zh-CN" altLang="zh-CN" sz="2800" dirty="0">
+                <a:latin typeface="Times New Roman" panose="02020603050405020304" charset="0"/>
+                <a:cs typeface="Times New Roman" panose="02020603050405020304" charset="0"/>
+              </a:endParaRPr>
+            </a:p>
+          </p:txBody>
+        </p:sp>
+      </p:grpSp>
+      <p:sp>
+        <p:nvSpPr>
+          <p:cNvPr id="2" name="文本框 1"/>
+          <p:cNvSpPr txBox="1"/>
+          <p:nvPr/>
+        </p:nvSpPr>
+        <p:spPr>
+          <a:xfrm>
+            <a:off x="598805" y="354330"/>
+            <a:ext cx="6096000" cy="583565"/>
+          </a:xfrm>
+          <a:prstGeom prst="rect">
+            <a:avLst/>
+          </a:prstGeom>
+          <a:noFill/>
+        </p:spPr>
+        <p:txBody>
+          <a:bodyPr wrap="square" rtlCol="0" anchor="t">
+            <a:spAutoFit/>
+          </a:bodyPr>
+          <a:lstStyle/>
+          <a:p>
+            <a:pPr defTabSz="457200">
+              <a:lnSpc>
+                <a:spcPct val="100000"/>
+              </a:lnSpc>
+            </a:pPr>
+            <a:r>
+              <a:rPr lang="en-US" sz="3200" b="1" dirty="0">
+                <a:solidFill>
+                  <a:srgbClr val="1F2329"/>
+                </a:solidFill>
+                <a:effectLst/>
+                <a:uFillTx/>
+                <a:latin typeface="Times New Roman" panose="02020603050405020304" charset="0"/>
+                <a:cs typeface="Times New Roman" panose="02020603050405020304" charset="0"/>
+                <a:sym typeface="+mn-ea"/>
+              </a:rPr>
+              <a:t>Elan Hui’s Contribution</a:t>
+            </a:r>
+            <a:endParaRPr lang="en-US" altLang="en-US" sz="3200" b="1" dirty="0">
+              <a:solidFill>
+                <a:srgbClr val="1F2329"/>
+              </a:solidFill>
+              <a:effectLst/>
+              <a:uFillTx/>
+              <a:latin typeface="Times New Roman" panose="02020603050405020304" charset="0"/>
+              <a:cs typeface="Times New Roman" panose="02020603050405020304" charset="0"/>
+              <a:sym typeface="+mn-ea"/>
+            </a:endParaRPr>
+          </a:p>
+        </p:txBody>
+      </p:sp>
+      <p:sp>
+        <p:nvSpPr>
+          <p:cNvPr id="27" name="TextBox 5"/>
+          <p:cNvSpPr txBox="1"/>
+          <p:nvPr/>
+        </p:nvSpPr>
+        <p:spPr>
+          <a:xfrm>
+            <a:off x="775018" y="2255520"/>
+            <a:ext cx="4663440" cy="398780"/>
+          </a:xfrm>
+          <a:prstGeom prst="rect">
+            <a:avLst/>
+          </a:prstGeom>
+          <a:noFill/>
+        </p:spPr>
+        <p:txBody>
+          <a:bodyPr wrap="square">
+            <a:spAutoFit/>
+          </a:bodyPr>
+          <a:lstStyle/>
+          <a:p>
+            <a:pPr>
+              <a:defRPr sz="2000" b="1">
+                <a:solidFill>
+                  <a:srgbClr val="2D2D2D"/>
+                </a:solidFill>
+                <a:latin typeface="Arial" panose="020B0604020202020204"/>
+              </a:defRPr>
+            </a:pPr>
+            <a:r>
+              <a:rPr lang="en-US" altLang="zh-CN" dirty="0">
+                <a:latin typeface="Times New Roman" panose="02020603050405020304" charset="0"/>
+                <a:cs typeface="Times New Roman" panose="02020603050405020304" charset="0"/>
+              </a:rPr>
+              <a:t>Overall Architecture Design</a:t>
+            </a:r>
+            <a:endParaRPr lang="en-US" altLang="zh-CN" dirty="0">
+              <a:latin typeface="Times New Roman" panose="02020603050405020304" charset="0"/>
+              <a:cs typeface="Times New Roman" panose="02020603050405020304" charset="0"/>
+            </a:endParaRPr>
+          </a:p>
+        </p:txBody>
+      </p:sp>
+      <p:sp>
+        <p:nvSpPr>
+          <p:cNvPr id="29" name="TextBox 10"/>
+          <p:cNvSpPr txBox="1"/>
+          <p:nvPr/>
+        </p:nvSpPr>
+        <p:spPr>
+          <a:xfrm>
+            <a:off x="6901498" y="2255520"/>
+            <a:ext cx="4663440" cy="398780"/>
+          </a:xfrm>
+          <a:prstGeom prst="rect">
+            <a:avLst/>
+          </a:prstGeom>
+          <a:noFill/>
+        </p:spPr>
+        <p:txBody>
+          <a:bodyPr wrap="square">
+            <a:spAutoFit/>
+          </a:bodyPr>
+          <a:lstStyle/>
+          <a:p>
+            <a:pPr>
+              <a:defRPr sz="2000" b="1">
+                <a:solidFill>
+                  <a:srgbClr val="2D2D2D"/>
+                </a:solidFill>
+                <a:latin typeface="Arial" panose="020B0604020202020204"/>
+              </a:defRPr>
+            </a:pPr>
+            <a:r>
+              <a:rPr lang="en-US" altLang="zh-CN" dirty="0">
+                <a:latin typeface="Times New Roman" panose="02020603050405020304" charset="0"/>
+                <a:cs typeface="Times New Roman" panose="02020603050405020304" charset="0"/>
+              </a:rPr>
+              <a:t>Database Design</a:t>
+            </a:r>
+            <a:endParaRPr lang="en-US" altLang="zh-CN" dirty="0">
+              <a:latin typeface="Times New Roman" panose="02020603050405020304" charset="0"/>
+              <a:cs typeface="Times New Roman" panose="02020603050405020304" charset="0"/>
+            </a:endParaRPr>
+          </a:p>
+        </p:txBody>
+      </p:sp>
+      <p:sp>
+        <p:nvSpPr>
+          <p:cNvPr id="31" name="TextBox 15"/>
+          <p:cNvSpPr txBox="1"/>
+          <p:nvPr/>
+        </p:nvSpPr>
+        <p:spPr>
+          <a:xfrm>
+            <a:off x="775018" y="5181600"/>
+            <a:ext cx="4663440" cy="398780"/>
+          </a:xfrm>
+          <a:prstGeom prst="rect">
+            <a:avLst/>
+          </a:prstGeom>
+          <a:noFill/>
+        </p:spPr>
+        <p:txBody>
+          <a:bodyPr wrap="square">
+            <a:spAutoFit/>
+          </a:bodyPr>
+          <a:lstStyle/>
+          <a:p>
+            <a:pPr>
+              <a:defRPr sz="2000" b="1">
+                <a:solidFill>
+                  <a:srgbClr val="2D2D2D"/>
+                </a:solidFill>
+                <a:latin typeface="Arial" panose="020B0604020202020204"/>
+              </a:defRPr>
+            </a:pPr>
+            <a:r>
+              <a:rPr lang="en-US" altLang="zh-CN" dirty="0">
+                <a:latin typeface="Times New Roman" panose="02020603050405020304" charset="0"/>
+                <a:cs typeface="Times New Roman" panose="02020603050405020304" charset="0"/>
+              </a:rPr>
+              <a:t>API Interface Design</a:t>
+            </a:r>
+            <a:endParaRPr lang="en-US" altLang="zh-CN" dirty="0">
+              <a:latin typeface="Times New Roman" panose="02020603050405020304" charset="0"/>
+              <a:cs typeface="Times New Roman" panose="02020603050405020304" charset="0"/>
+            </a:endParaRPr>
+          </a:p>
+        </p:txBody>
+      </p:sp>
+      <p:sp>
+        <p:nvSpPr>
+          <p:cNvPr id="33" name="TextBox 20"/>
+          <p:cNvSpPr txBox="1"/>
+          <p:nvPr/>
+        </p:nvSpPr>
+        <p:spPr>
+          <a:xfrm>
+            <a:off x="6901498" y="5181600"/>
+            <a:ext cx="4663440" cy="706755"/>
+          </a:xfrm>
+          <a:prstGeom prst="rect">
+            <a:avLst/>
+          </a:prstGeom>
+          <a:noFill/>
+        </p:spPr>
+        <p:txBody>
+          <a:bodyPr wrap="square">
+            <a:spAutoFit/>
+          </a:bodyPr>
+          <a:lstStyle/>
+          <a:p>
+            <a:pPr>
+              <a:defRPr sz="2000" b="1">
+                <a:solidFill>
+                  <a:srgbClr val="2D2D2D"/>
+                </a:solidFill>
+                <a:latin typeface="Arial" panose="020B0604020202020204"/>
+              </a:defRPr>
+            </a:pPr>
+            <a:r>
+              <a:rPr lang="en-US" altLang="zh-CN" dirty="0">
+                <a:latin typeface="Times New Roman" panose="02020603050405020304" charset="0"/>
+                <a:cs typeface="Times New Roman" panose="02020603050405020304" charset="0"/>
+              </a:rPr>
+              <a:t>Implementation of some Backend Functions</a:t>
+            </a:r>
+            <a:endParaRPr lang="en-US" altLang="zh-CN" dirty="0">
+              <a:latin typeface="Times New Roman" panose="02020603050405020304" charset="0"/>
+              <a:cs typeface="Times New Roman" panose="02020603050405020304" charset="0"/>
+            </a:endParaRPr>
+          </a:p>
+        </p:txBody>
+      </p:sp>
+      <p:sp>
+        <p:nvSpPr>
+          <p:cNvPr id="35" name="文本框 34"/>
+          <p:cNvSpPr txBox="1"/>
+          <p:nvPr/>
+        </p:nvSpPr>
+        <p:spPr>
+          <a:xfrm>
+            <a:off x="698169" y="1669311"/>
+            <a:ext cx="3444247" cy="523220"/>
+          </a:xfrm>
+          <a:prstGeom prst="rect">
+            <a:avLst/>
+          </a:prstGeom>
+          <a:noFill/>
+        </p:spPr>
+        <p:txBody>
+          <a:bodyPr wrap="square">
+            <a:spAutoFit/>
+          </a:bodyPr>
+          <a:lstStyle/>
+          <a:p>
+            <a:r>
+              <a:rPr lang="zh-CN" altLang="zh-CN" sz="2800" b="0" i="0" dirty="0">
+                <a:effectLst/>
+                <a:latin typeface="Times New Roman" panose="02020603050405020304" charset="0"/>
+                <a:cs typeface="Times New Roman" panose="02020603050405020304" charset="0"/>
+              </a:rPr>
+              <a:t>🏗️</a:t>
+            </a:r>
+            <a:endParaRPr lang="zh-CN" altLang="zh-CN" sz="2800" b="0" i="0" dirty="0">
+              <a:effectLst/>
+              <a:latin typeface="Times New Roman" panose="02020603050405020304" charset="0"/>
+              <a:cs typeface="Times New Roman" panose="02020603050405020304" charset="0"/>
             </a:endParaRPr>
           </a:p>
         </p:txBody>
@@ -8573,64 +9660,16 @@
         <p:nvPr/>
       </p:nvGrpSpPr>
       <p:grpSpPr/>
-      <p:pic>
-        <p:nvPicPr>
-          <p:cNvPr id="7" name="图片 6"/>
-          <p:cNvPicPr>
-            <a:picLocks noChangeAspect="1"/>
-          </p:cNvPicPr>
+      <p:sp>
+        <p:nvSpPr>
+          <p:cNvPr id="25" name="TextBox 1"/>
+          <p:cNvSpPr txBox="1"/>
           <p:nvPr/>
-        </p:nvPicPr>
-        <p:blipFill>
-          <a:blip r:embed="rId1"/>
-          <a:stretch>
-            <a:fillRect/>
-          </a:stretch>
-        </p:blipFill>
+        </p:nvSpPr>
         <p:spPr>
           <a:xfrm>
-            <a:off x="1115695" y="1118870"/>
-            <a:ext cx="4058285" cy="5427345"/>
-          </a:xfrm>
-          <a:prstGeom prst="rect">
-            <a:avLst/>
-          </a:prstGeom>
-        </p:spPr>
-      </p:pic>
-      <p:pic>
-        <p:nvPicPr>
-          <p:cNvPr id="13" name="图片 12"/>
-          <p:cNvPicPr>
-            <a:picLocks noChangeAspect="1"/>
-          </p:cNvPicPr>
-          <p:nvPr/>
-        </p:nvPicPr>
-        <p:blipFill>
-          <a:blip r:embed="rId2"/>
-          <a:stretch>
-            <a:fillRect/>
-          </a:stretch>
-        </p:blipFill>
-        <p:spPr>
-          <a:xfrm>
-            <a:off x="6763309" y="1813937"/>
-            <a:ext cx="3929536" cy="3985873"/>
-          </a:xfrm>
-          <a:prstGeom prst="rect">
-            <a:avLst/>
-          </a:prstGeom>
-        </p:spPr>
-      </p:pic>
-      <p:sp>
-        <p:nvSpPr>
-          <p:cNvPr id="3" name="文本框 2"/>
-          <p:cNvSpPr txBox="1"/>
-          <p:nvPr/>
-        </p:nvSpPr>
-        <p:spPr>
-          <a:xfrm>
-            <a:off x="598805" y="354330"/>
-            <a:ext cx="6096000" cy="583565"/>
+            <a:off x="548640" y="457200"/>
+            <a:ext cx="5452110" cy="583565"/>
           </a:xfrm>
           <a:prstGeom prst="rect">
             <a:avLst/>
@@ -8638,39 +9677,669 @@
           <a:noFill/>
         </p:spPr>
         <p:txBody>
-          <a:bodyPr wrap="square" rtlCol="0" anchor="t">
+          <a:bodyPr wrap="none">
             <a:spAutoFit/>
           </a:bodyPr>
-          <a:p>
-            <a:pPr defTabSz="457200">
-              <a:lnSpc>
-                <a:spcPct val="100000"/>
-              </a:lnSpc>
+          <a:lstStyle/>
+          <a:p>
+            <a:pPr algn="l">
+              <a:defRPr sz="4000" b="1">
+                <a:solidFill>
+                  <a:srgbClr val="202020"/>
+                </a:solidFill>
+                <a:latin typeface="Times New Roman" panose="02020603050405020304"/>
+              </a:defRPr>
             </a:pPr>
             <a:r>
-              <a:rPr lang="en-US" sz="3200" b="1">
+              <a:rPr sz="3200">
+                <a:latin typeface="Times New Roman" panose="02020603050405020304" charset="0"/>
+                <a:cs typeface="Times New Roman" panose="02020603050405020304" charset="0"/>
+              </a:rPr>
+              <a:t>Felix W H Gou's Contribution</a:t>
+            </a:r>
+            <a:endParaRPr sz="3200">
+              <a:latin typeface="Times New Roman" panose="02020603050405020304" charset="0"/>
+              <a:cs typeface="Times New Roman" panose="02020603050405020304" charset="0"/>
+            </a:endParaRPr>
+          </a:p>
+        </p:txBody>
+      </p:sp>
+      <p:grpSp>
+        <p:nvGrpSpPr>
+          <p:cNvPr id="47" name="组合 46"/>
+          <p:cNvGrpSpPr/>
+          <p:nvPr/>
+        </p:nvGrpSpPr>
+        <p:grpSpPr>
+          <a:xfrm>
+            <a:off x="158115" y="2537460"/>
+            <a:ext cx="11875135" cy="2221865"/>
+            <a:chOff x="497" y="3996"/>
+            <a:chExt cx="18701" cy="3499"/>
+          </a:xfrm>
+        </p:grpSpPr>
+        <p:grpSp>
+          <p:nvGrpSpPr>
+            <p:cNvPr id="45" name="组合 44"/>
+            <p:cNvGrpSpPr/>
+            <p:nvPr/>
+          </p:nvGrpSpPr>
+          <p:grpSpPr>
+            <a:xfrm>
+              <a:off x="497" y="4018"/>
+              <a:ext cx="7416" cy="3456"/>
+              <a:chOff x="1152" y="2304"/>
+              <a:chExt cx="7416" cy="3456"/>
+            </a:xfrm>
+          </p:grpSpPr>
+          <p:sp>
+            <p:nvSpPr>
+              <p:cNvPr id="26" name="Rounded Rectangle 2"/>
+              <p:cNvSpPr/>
+              <p:nvPr/>
+            </p:nvSpPr>
+            <p:spPr>
+              <a:xfrm>
+                <a:off x="1152" y="2304"/>
+                <a:ext cx="5973" cy="3456"/>
+              </a:xfrm>
+              <a:prstGeom prst="roundRect">
+                <a:avLst>
+                  <a:gd name="adj" fmla="val 4000"/>
+                </a:avLst>
+              </a:prstGeom>
+              <a:solidFill>
+                <a:srgbClr val="FFFFFF"/>
+              </a:solidFill>
+              <a:ln w="12700">
                 <a:solidFill>
-                  <a:srgbClr val="1F2329"/>
+                  <a:srgbClr val="D0D0D0"/>
                 </a:solidFill>
-                <a:effectLst/>
-                <a:uFillTx/>
-                <a:latin typeface="Calibri" panose="020F0502020204030204"/>
-                <a:sym typeface="+mn-ea"/>
-              </a:rPr>
-              <a:t>Elan Y Z Hui’s Contribution</a:t>
-            </a:r>
-            <a:endParaRPr lang="en-US" altLang="en-US" sz="3200" b="1">
+              </a:ln>
+            </p:spPr>
+            <p:style>
+              <a:lnRef idx="1">
+                <a:schemeClr val="accent1"/>
+              </a:lnRef>
+              <a:fillRef idx="3">
+                <a:schemeClr val="accent1"/>
+              </a:fillRef>
+              <a:effectRef idx="2">
+                <a:schemeClr val="accent1"/>
+              </a:effectRef>
+              <a:fontRef idx="minor">
+                <a:schemeClr val="lt1"/>
+              </a:fontRef>
+            </p:style>
+            <p:txBody>
+              <a:bodyPr rtlCol="0" anchor="ctr"/>
+              <a:lstStyle/>
+              <a:p>
+                <a:pPr algn="ctr"/>
+                <a:endParaRPr>
+                  <a:latin typeface="Times New Roman" panose="02020603050405020304" charset="0"/>
+                  <a:cs typeface="Times New Roman" panose="02020603050405020304" charset="0"/>
+                </a:endParaRPr>
+              </a:p>
+            </p:txBody>
+          </p:sp>
+          <p:sp>
+            <p:nvSpPr>
+              <p:cNvPr id="27" name="Rounded Rectangle 3"/>
+              <p:cNvSpPr/>
+              <p:nvPr/>
+            </p:nvSpPr>
+            <p:spPr>
+              <a:xfrm>
+                <a:off x="1152" y="2304"/>
+                <a:ext cx="5914" cy="120"/>
+              </a:xfrm>
+              <a:prstGeom prst="roundRect">
+                <a:avLst>
+                  <a:gd name="adj" fmla="val 30000"/>
+                </a:avLst>
+              </a:prstGeom>
               <a:solidFill>
-                <a:srgbClr val="1F2329"/>
+                <a:srgbClr val="4285F4"/>
               </a:solidFill>
-              <a:effectLst/>
-              <a:uFillTx/>
-              <a:latin typeface="Calibri" panose="020F0502020204030204"/>
-              <a:sym typeface="+mn-ea"/>
-            </a:endParaRPr>
-          </a:p>
-        </p:txBody>
-      </p:sp>
+              <a:ln>
+                <a:noFill/>
+              </a:ln>
+            </p:spPr>
+            <p:style>
+              <a:lnRef idx="1">
+                <a:schemeClr val="accent1"/>
+              </a:lnRef>
+              <a:fillRef idx="3">
+                <a:schemeClr val="accent1"/>
+              </a:fillRef>
+              <a:effectRef idx="2">
+                <a:schemeClr val="accent1"/>
+              </a:effectRef>
+              <a:fontRef idx="minor">
+                <a:schemeClr val="lt1"/>
+              </a:fontRef>
+            </p:style>
+            <p:txBody>
+              <a:bodyPr rtlCol="0" anchor="ctr"/>
+              <a:lstStyle/>
+              <a:p>
+                <a:pPr algn="ctr"/>
+                <a:endParaRPr>
+                  <a:latin typeface="Times New Roman" panose="02020603050405020304" charset="0"/>
+                  <a:cs typeface="Times New Roman" panose="02020603050405020304" charset="0"/>
+                </a:endParaRPr>
+              </a:p>
+            </p:txBody>
+          </p:sp>
+          <p:sp>
+            <p:nvSpPr>
+              <p:cNvPr id="28" name="TextBox 4"/>
+              <p:cNvSpPr txBox="1"/>
+              <p:nvPr/>
+            </p:nvSpPr>
+            <p:spPr>
+              <a:xfrm>
+                <a:off x="1656" y="2808"/>
+                <a:ext cx="864" cy="864"/>
+              </a:xfrm>
+              <a:prstGeom prst="rect">
+                <a:avLst/>
+              </a:prstGeom>
+              <a:noFill/>
+            </p:spPr>
+            <p:txBody>
+              <a:bodyPr wrap="none">
+                <a:spAutoFit/>
+              </a:bodyPr>
+              <a:lstStyle/>
+              <a:p>
+                <a:pPr>
+                  <a:defRPr sz="3200">
+                    <a:solidFill>
+                      <a:srgbClr val="202020"/>
+                    </a:solidFill>
+                  </a:defRPr>
+                </a:pPr>
+                <a:r>
+                  <a:rPr>
+                    <a:latin typeface="Times New Roman" panose="02020603050405020304" charset="0"/>
+                    <a:cs typeface="Times New Roman" panose="02020603050405020304" charset="0"/>
+                  </a:rPr>
+                  <a:t>🗑</a:t>
+                </a:r>
+                <a:endParaRPr>
+                  <a:latin typeface="Times New Roman" panose="02020603050405020304" charset="0"/>
+                  <a:cs typeface="Times New Roman" panose="02020603050405020304" charset="0"/>
+                </a:endParaRPr>
+              </a:p>
+            </p:txBody>
+          </p:sp>
+          <p:sp>
+            <p:nvSpPr>
+              <p:cNvPr id="29" name="TextBox 5"/>
+              <p:cNvSpPr txBox="1"/>
+              <p:nvPr/>
+            </p:nvSpPr>
+            <p:spPr>
+              <a:xfrm>
+                <a:off x="1656" y="3744"/>
+                <a:ext cx="6912" cy="648"/>
+              </a:xfrm>
+              <a:prstGeom prst="rect">
+                <a:avLst/>
+              </a:prstGeom>
+              <a:noFill/>
+            </p:spPr>
+            <p:txBody>
+              <a:bodyPr wrap="none">
+                <a:spAutoFit/>
+              </a:bodyPr>
+              <a:lstStyle/>
+              <a:p>
+                <a:pPr algn="l">
+                  <a:defRPr sz="2200" b="1">
+                    <a:solidFill>
+                      <a:srgbClr val="202020"/>
+                    </a:solidFill>
+                    <a:latin typeface="Times New Roman" panose="02020603050405020304"/>
+                  </a:defRPr>
+                </a:pPr>
+                <a:r>
+                  <a:rPr>
+                    <a:latin typeface="Times New Roman" panose="02020603050405020304" charset="0"/>
+                    <a:cs typeface="Times New Roman" panose="02020603050405020304" charset="0"/>
+                  </a:rPr>
+                  <a:t>Recycle Bin</a:t>
+                </a:r>
+                <a:endParaRPr>
+                  <a:latin typeface="Times New Roman" panose="02020603050405020304" charset="0"/>
+                  <a:cs typeface="Times New Roman" panose="02020603050405020304" charset="0"/>
+                </a:endParaRPr>
+              </a:p>
+            </p:txBody>
+          </p:sp>
+        </p:grpSp>
+        <p:grpSp>
+          <p:nvGrpSpPr>
+            <p:cNvPr id="46" name="组合 45"/>
+            <p:cNvGrpSpPr/>
+            <p:nvPr/>
+          </p:nvGrpSpPr>
+          <p:grpSpPr>
+            <a:xfrm>
+              <a:off x="13226" y="4018"/>
+              <a:ext cx="5972" cy="3456"/>
+              <a:chOff x="9936" y="2304"/>
+              <a:chExt cx="5972" cy="3456"/>
+            </a:xfrm>
+          </p:grpSpPr>
+          <p:grpSp>
+            <p:nvGrpSpPr>
+              <p:cNvPr id="44" name="组合 43"/>
+              <p:cNvGrpSpPr/>
+              <p:nvPr/>
+            </p:nvGrpSpPr>
+            <p:grpSpPr>
+              <a:xfrm>
+                <a:off x="9936" y="2304"/>
+                <a:ext cx="5972" cy="3456"/>
+                <a:chOff x="9936" y="2304"/>
+                <a:chExt cx="5972" cy="3456"/>
+              </a:xfrm>
+            </p:grpSpPr>
+            <p:sp>
+              <p:nvSpPr>
+                <p:cNvPr id="31" name="Rounded Rectangle 7"/>
+                <p:cNvSpPr/>
+                <p:nvPr/>
+              </p:nvSpPr>
+              <p:spPr>
+                <a:xfrm>
+                  <a:off x="9936" y="2304"/>
+                  <a:ext cx="5973" cy="3456"/>
+                </a:xfrm>
+                <a:prstGeom prst="roundRect">
+                  <a:avLst>
+                    <a:gd name="adj" fmla="val 4000"/>
+                  </a:avLst>
+                </a:prstGeom>
+                <a:solidFill>
+                  <a:srgbClr val="FFFFFF"/>
+                </a:solidFill>
+                <a:ln w="12700">
+                  <a:solidFill>
+                    <a:srgbClr val="D0D0D0"/>
+                  </a:solidFill>
+                </a:ln>
+              </p:spPr>
+              <p:style>
+                <a:lnRef idx="1">
+                  <a:schemeClr val="accent1"/>
+                </a:lnRef>
+                <a:fillRef idx="3">
+                  <a:schemeClr val="accent1"/>
+                </a:fillRef>
+                <a:effectRef idx="2">
+                  <a:schemeClr val="accent1"/>
+                </a:effectRef>
+                <a:fontRef idx="minor">
+                  <a:schemeClr val="lt1"/>
+                </a:fontRef>
+              </p:style>
+              <p:txBody>
+                <a:bodyPr rtlCol="0" anchor="ctr"/>
+                <a:lstStyle/>
+                <a:p>
+                  <a:pPr algn="ctr"/>
+                  <a:endParaRPr>
+                    <a:latin typeface="Times New Roman" panose="02020603050405020304" charset="0"/>
+                    <a:cs typeface="Times New Roman" panose="02020603050405020304" charset="0"/>
+                  </a:endParaRPr>
+                </a:p>
+              </p:txBody>
+            </p:sp>
+            <p:sp>
+              <p:nvSpPr>
+                <p:cNvPr id="32" name="Rounded Rectangle 8"/>
+                <p:cNvSpPr/>
+                <p:nvPr/>
+              </p:nvSpPr>
+              <p:spPr>
+                <a:xfrm>
+                  <a:off x="9936" y="2304"/>
+                  <a:ext cx="5973" cy="143"/>
+                </a:xfrm>
+                <a:prstGeom prst="roundRect">
+                  <a:avLst>
+                    <a:gd name="adj" fmla="val 30000"/>
+                  </a:avLst>
+                </a:prstGeom>
+                <a:solidFill>
+                  <a:srgbClr val="7B1FA2"/>
+                </a:solidFill>
+                <a:ln>
+                  <a:noFill/>
+                </a:ln>
+              </p:spPr>
+              <p:style>
+                <a:lnRef idx="1">
+                  <a:schemeClr val="accent1"/>
+                </a:lnRef>
+                <a:fillRef idx="3">
+                  <a:schemeClr val="accent1"/>
+                </a:fillRef>
+                <a:effectRef idx="2">
+                  <a:schemeClr val="accent1"/>
+                </a:effectRef>
+                <a:fontRef idx="minor">
+                  <a:schemeClr val="lt1"/>
+                </a:fontRef>
+              </p:style>
+              <p:txBody>
+                <a:bodyPr rtlCol="0" anchor="ctr"/>
+                <a:lstStyle/>
+                <a:p>
+                  <a:pPr algn="ctr"/>
+                  <a:endParaRPr>
+                    <a:latin typeface="Times New Roman" panose="02020603050405020304" charset="0"/>
+                    <a:cs typeface="Times New Roman" panose="02020603050405020304" charset="0"/>
+                  </a:endParaRPr>
+                </a:p>
+              </p:txBody>
+            </p:sp>
+            <p:sp>
+              <p:nvSpPr>
+                <p:cNvPr id="33" name="TextBox 9"/>
+                <p:cNvSpPr txBox="1"/>
+                <p:nvPr/>
+              </p:nvSpPr>
+              <p:spPr>
+                <a:xfrm>
+                  <a:off x="10440" y="2808"/>
+                  <a:ext cx="864" cy="864"/>
+                </a:xfrm>
+                <a:prstGeom prst="rect">
+                  <a:avLst/>
+                </a:prstGeom>
+                <a:noFill/>
+              </p:spPr>
+              <p:txBody>
+                <a:bodyPr wrap="none">
+                  <a:spAutoFit/>
+                </a:bodyPr>
+                <a:lstStyle/>
+                <a:p>
+                  <a:pPr>
+                    <a:defRPr sz="3200">
+                      <a:solidFill>
+                        <a:srgbClr val="202020"/>
+                      </a:solidFill>
+                    </a:defRPr>
+                  </a:pPr>
+                  <a:r>
+                    <a:rPr>
+                      <a:latin typeface="Times New Roman" panose="02020603050405020304" charset="0"/>
+                      <a:cs typeface="Times New Roman" panose="02020603050405020304" charset="0"/>
+                    </a:rPr>
+                    <a:t>🖥</a:t>
+                  </a:r>
+                  <a:endParaRPr>
+                    <a:latin typeface="Times New Roman" panose="02020603050405020304" charset="0"/>
+                    <a:cs typeface="Times New Roman" panose="02020603050405020304" charset="0"/>
+                  </a:endParaRPr>
+                </a:p>
+              </p:txBody>
+            </p:sp>
+          </p:grpSp>
+          <p:sp>
+            <p:nvSpPr>
+              <p:cNvPr id="34" name="TextBox 10"/>
+              <p:cNvSpPr txBox="1"/>
+              <p:nvPr/>
+            </p:nvSpPr>
+            <p:spPr>
+              <a:xfrm>
+                <a:off x="10440" y="3744"/>
+                <a:ext cx="5433" cy="677"/>
+              </a:xfrm>
+              <a:prstGeom prst="rect">
+                <a:avLst/>
+              </a:prstGeom>
+              <a:noFill/>
+            </p:spPr>
+            <p:txBody>
+              <a:bodyPr wrap="square">
+                <a:spAutoFit/>
+              </a:bodyPr>
+              <a:lstStyle/>
+              <a:p>
+                <a:pPr algn="l">
+                  <a:defRPr sz="2200" b="1">
+                    <a:solidFill>
+                      <a:srgbClr val="202020"/>
+                    </a:solidFill>
+                    <a:latin typeface="Times New Roman" panose="02020603050405020304"/>
+                  </a:defRPr>
+                </a:pPr>
+                <a:r>
+                  <a:rPr>
+                    <a:latin typeface="Times New Roman" panose="02020603050405020304" charset="0"/>
+                    <a:cs typeface="Times New Roman" panose="02020603050405020304" charset="0"/>
+                  </a:rPr>
+                  <a:t>Time Style Sync</a:t>
+                </a:r>
+                <a:endParaRPr>
+                  <a:latin typeface="Times New Roman" panose="02020603050405020304" charset="0"/>
+                  <a:cs typeface="Times New Roman" panose="02020603050405020304" charset="0"/>
+                </a:endParaRPr>
+              </a:p>
+            </p:txBody>
+          </p:sp>
+        </p:grpSp>
+        <p:grpSp>
+          <p:nvGrpSpPr>
+            <p:cNvPr id="43" name="组合 42"/>
+            <p:cNvGrpSpPr/>
+            <p:nvPr/>
+          </p:nvGrpSpPr>
+          <p:grpSpPr>
+            <a:xfrm>
+              <a:off x="6941" y="3996"/>
+              <a:ext cx="7416" cy="3499"/>
+              <a:chOff x="1152" y="6293"/>
+              <a:chExt cx="7416" cy="3499"/>
+            </a:xfrm>
+          </p:grpSpPr>
+          <p:sp>
+            <p:nvSpPr>
+              <p:cNvPr id="36" name="Rounded Rectangle 12"/>
+              <p:cNvSpPr/>
+              <p:nvPr/>
+            </p:nvSpPr>
+            <p:spPr>
+              <a:xfrm>
+                <a:off x="1152" y="6336"/>
+                <a:ext cx="5973" cy="3456"/>
+              </a:xfrm>
+              <a:prstGeom prst="roundRect">
+                <a:avLst>
+                  <a:gd name="adj" fmla="val 4000"/>
+                </a:avLst>
+              </a:prstGeom>
+              <a:solidFill>
+                <a:srgbClr val="FFFFFF"/>
+              </a:solidFill>
+              <a:ln w="12700">
+                <a:solidFill>
+                  <a:srgbClr val="D0D0D0"/>
+                </a:solidFill>
+              </a:ln>
+            </p:spPr>
+            <p:style>
+              <a:lnRef idx="1">
+                <a:schemeClr val="accent1"/>
+              </a:lnRef>
+              <a:fillRef idx="3">
+                <a:schemeClr val="accent1"/>
+              </a:fillRef>
+              <a:effectRef idx="2">
+                <a:schemeClr val="accent1"/>
+              </a:effectRef>
+              <a:fontRef idx="minor">
+                <a:schemeClr val="lt1"/>
+              </a:fontRef>
+            </p:style>
+            <p:txBody>
+              <a:bodyPr rtlCol="0" anchor="ctr"/>
+              <a:lstStyle/>
+              <a:p>
+                <a:pPr algn="ctr"/>
+                <a:endParaRPr>
+                  <a:latin typeface="Times New Roman" panose="02020603050405020304" charset="0"/>
+                  <a:cs typeface="Times New Roman" panose="02020603050405020304" charset="0"/>
+                </a:endParaRPr>
+              </a:p>
+            </p:txBody>
+          </p:sp>
+          <p:sp>
+            <p:nvSpPr>
+              <p:cNvPr id="37" name="Rounded Rectangle 13"/>
+              <p:cNvSpPr/>
+              <p:nvPr/>
+            </p:nvSpPr>
+            <p:spPr>
+              <a:xfrm flipV="1">
+                <a:off x="1152" y="6293"/>
+                <a:ext cx="5973" cy="120"/>
+              </a:xfrm>
+              <a:prstGeom prst="roundRect">
+                <a:avLst>
+                  <a:gd name="adj" fmla="val 30000"/>
+                </a:avLst>
+              </a:prstGeom>
+              <a:solidFill>
+                <a:srgbClr val="4CAF50"/>
+              </a:solidFill>
+              <a:ln>
+                <a:noFill/>
+              </a:ln>
+            </p:spPr>
+            <p:style>
+              <a:lnRef idx="1">
+                <a:schemeClr val="accent1"/>
+              </a:lnRef>
+              <a:fillRef idx="3">
+                <a:schemeClr val="accent1"/>
+              </a:fillRef>
+              <a:effectRef idx="2">
+                <a:schemeClr val="accent1"/>
+              </a:effectRef>
+              <a:fontRef idx="minor">
+                <a:schemeClr val="lt1"/>
+              </a:fontRef>
+            </p:style>
+            <p:txBody>
+              <a:bodyPr rtlCol="0" anchor="ctr"/>
+              <a:lstStyle/>
+              <a:p>
+                <a:pPr algn="ctr"/>
+                <a:endParaRPr>
+                  <a:latin typeface="Times New Roman" panose="02020603050405020304" charset="0"/>
+                  <a:cs typeface="Times New Roman" panose="02020603050405020304" charset="0"/>
+                </a:endParaRPr>
+              </a:p>
+            </p:txBody>
+          </p:sp>
+          <p:sp>
+            <p:nvSpPr>
+              <p:cNvPr id="38" name="TextBox 14"/>
+              <p:cNvSpPr txBox="1"/>
+              <p:nvPr/>
+            </p:nvSpPr>
+            <p:spPr>
+              <a:xfrm>
+                <a:off x="1656" y="6840"/>
+                <a:ext cx="864" cy="864"/>
+              </a:xfrm>
+              <a:prstGeom prst="rect">
+                <a:avLst/>
+              </a:prstGeom>
+              <a:noFill/>
+            </p:spPr>
+            <p:txBody>
+              <a:bodyPr wrap="none">
+                <a:spAutoFit/>
+              </a:bodyPr>
+              <a:lstStyle/>
+              <a:p>
+                <a:pPr>
+                  <a:defRPr sz="3200">
+                    <a:solidFill>
+                      <a:srgbClr val="202020"/>
+                    </a:solidFill>
+                  </a:defRPr>
+                </a:pPr>
+                <a:r>
+                  <a:rPr>
+                    <a:latin typeface="Times New Roman" panose="02020603050405020304" charset="0"/>
+                    <a:cs typeface="Times New Roman" panose="02020603050405020304" charset="0"/>
+                  </a:rPr>
+                  <a:t>⏱</a:t>
+                </a:r>
+                <a:endParaRPr>
+                  <a:latin typeface="Times New Roman" panose="02020603050405020304" charset="0"/>
+                  <a:cs typeface="Times New Roman" panose="02020603050405020304" charset="0"/>
+                </a:endParaRPr>
+              </a:p>
+            </p:txBody>
+          </p:sp>
+          <p:sp>
+            <p:nvSpPr>
+              <p:cNvPr id="39" name="TextBox 15"/>
+              <p:cNvSpPr txBox="1"/>
+              <p:nvPr/>
+            </p:nvSpPr>
+            <p:spPr>
+              <a:xfrm>
+                <a:off x="1656" y="7776"/>
+                <a:ext cx="6912" cy="648"/>
+              </a:xfrm>
+              <a:prstGeom prst="rect">
+                <a:avLst/>
+              </a:prstGeom>
+              <a:noFill/>
+            </p:spPr>
+            <p:txBody>
+              <a:bodyPr wrap="none">
+                <a:spAutoFit/>
+              </a:bodyPr>
+              <a:lstStyle/>
+              <a:p>
+                <a:pPr algn="l">
+                  <a:defRPr sz="2200" b="1">
+                    <a:solidFill>
+                      <a:srgbClr val="202020"/>
+                    </a:solidFill>
+                    <a:latin typeface="Times New Roman" panose="02020603050405020304"/>
+                  </a:defRPr>
+                </a:pPr>
+                <a:r>
+                  <a:rPr>
+                    <a:latin typeface="Times New Roman" panose="02020603050405020304" charset="0"/>
+                    <a:cs typeface="Times New Roman" panose="02020603050405020304" charset="0"/>
+                  </a:rPr>
+                  <a:t>Auto Status Flow</a:t>
+                </a:r>
+                <a:endParaRPr>
+                  <a:latin typeface="Times New Roman" panose="02020603050405020304" charset="0"/>
+                  <a:cs typeface="Times New Roman" panose="02020603050405020304" charset="0"/>
+                </a:endParaRPr>
+              </a:p>
+            </p:txBody>
+          </p:sp>
+        </p:grpSp>
+      </p:grpSp>
     </p:spTree>
   </p:cSld>
   <p:clrMapOvr>
